--- a/decks/Molecular_05_Validation-QC-Bioinformatics.pptx
+++ b/decks/Molecular_05_Validation-QC-Bioinformatics.pptx
@@ -26,9 +26,13 @@
     <p:sldId id="274" r:id="rId20"/>
     <p:sldId id="275" r:id="rId21"/>
     <p:sldId id="276" r:id="rId22"/>
+    <p:sldId id="277" r:id="rId23"/>
+    <p:sldId id="278" r:id="rId24"/>
+    <p:sldId id="279" r:id="rId25"/>
+    <p:sldId id="280" r:id="rId26"/>
   </p:sldIdLst>
   <p:notesMasterIdLst>
-    <p:notesMasterId r:id="rId23"/>
+    <p:notesMasterId r:id="rId27"/>
   </p:notesMasterIdLst>
   <p:sldSz cx="12191695" cy="6858000"/>
   <p:notesSz cx="6858000" cy="12191695"/>
@@ -1690,6 +1694,358 @@
             <a:fld id="{F7021451-1387-4CA6-816F-3879F97B5CBC}" type="slidenum">
               <a:rPr lang="en-US"/>
               <a:t>21</a:t>
+            </a:fld>
+            <a:endParaRPr lang="en-US"/>
+          </a:p>
+        </p:txBody>
+      </p:sp>
+    </p:spTree>
+    <p:extLst>
+      <p:ext uri="{BB962C8B-B14F-4D97-AF65-F5344CB8AC3E}">
+        <p14:creationId xmlns:p14="http://schemas.microsoft.com/office/powerpoint/2010/main" val="1024086991"/>
+      </p:ext>
+    </p:extLst>
+  </p:cSld>
+  <p:clrMapOvr>
+    <a:masterClrMapping/>
+  </p:clrMapOvr>
+</p:notes>
+</file>
+
+<file path=ppt/notesSlides/notesSlide22.xml><?xml version="1.0" encoding="utf-8"?>
+<p:notes xmlns:a="http://schemas.openxmlformats.org/drawingml/2006/main" xmlns:r="http://schemas.openxmlformats.org/officeDocument/2006/relationships" xmlns:p="http://schemas.openxmlformats.org/presentationml/2006/main">
+  <p:cSld>
+    <p:spTree>
+      <p:nvGrpSpPr>
+        <p:cNvPr id="1" name=""/>
+        <p:cNvGrpSpPr/>
+        <p:nvPr/>
+      </p:nvGrpSpPr>
+      <p:grpSpPr>
+        <a:xfrm>
+          <a:off x="0" y="0"/>
+          <a:ext cx="0" cy="0"/>
+          <a:chOff x="0" y="0"/>
+          <a:chExt cx="0" cy="0"/>
+        </a:xfrm>
+      </p:grpSpPr>
+      <p:sp>
+        <p:nvSpPr>
+          <p:cNvPr id="2" name="Slide Image Placeholder 1"/>
+          <p:cNvSpPr>
+            <a:spLocks noGrp="1" noRot="1" noChangeAspect="1"/>
+          </p:cNvSpPr>
+          <p:nvPr>
+            <p:ph type="sldImg"/>
+          </p:nvPr>
+        </p:nvSpPr>
+        <p:spPr/>
+      </p:sp>
+      <p:sp>
+        <p:nvSpPr>
+          <p:cNvPr id="3" name="Notes Placeholder 2"/>
+          <p:cNvSpPr>
+            <a:spLocks noGrp="1"/>
+          </p:cNvSpPr>
+          <p:nvPr>
+            <p:ph type="body" idx="1"/>
+          </p:nvPr>
+        </p:nvSpPr>
+        <p:spPr/>
+        <p:txBody>
+          <a:bodyPr/>
+          <a:lstStyle/>
+          <a:p>
+            <a:r>
+              <a:rPr lang="en-US" dirty="0"/>
+              <a:t/>
+            </a:r>
+            <a:endParaRPr lang="en-US" dirty="0"/>
+          </a:p>
+        </p:txBody>
+      </p:sp>
+      <p:sp>
+        <p:nvSpPr>
+          <p:cNvPr id="4" name="Slide Number Placeholder 3"/>
+          <p:cNvSpPr>
+            <a:spLocks noGrp="1"/>
+          </p:cNvSpPr>
+          <p:nvPr>
+            <p:ph type="sldNum" sz="quarter" idx="10"/>
+          </p:nvPr>
+        </p:nvSpPr>
+        <p:spPr/>
+        <p:txBody>
+          <a:bodyPr/>
+          <a:lstStyle/>
+          <a:p>
+            <a:fld id="{F7021451-1387-4CA6-816F-3879F97B5CBC}" type="slidenum">
+              <a:rPr lang="en-US"/>
+              <a:t>22</a:t>
+            </a:fld>
+            <a:endParaRPr lang="en-US"/>
+          </a:p>
+        </p:txBody>
+      </p:sp>
+    </p:spTree>
+    <p:extLst>
+      <p:ext uri="{BB962C8B-B14F-4D97-AF65-F5344CB8AC3E}">
+        <p14:creationId xmlns:p14="http://schemas.microsoft.com/office/powerpoint/2010/main" val="1024086991"/>
+      </p:ext>
+    </p:extLst>
+  </p:cSld>
+  <p:clrMapOvr>
+    <a:masterClrMapping/>
+  </p:clrMapOvr>
+</p:notes>
+</file>
+
+<file path=ppt/notesSlides/notesSlide23.xml><?xml version="1.0" encoding="utf-8"?>
+<p:notes xmlns:a="http://schemas.openxmlformats.org/drawingml/2006/main" xmlns:r="http://schemas.openxmlformats.org/officeDocument/2006/relationships" xmlns:p="http://schemas.openxmlformats.org/presentationml/2006/main">
+  <p:cSld>
+    <p:spTree>
+      <p:nvGrpSpPr>
+        <p:cNvPr id="1" name=""/>
+        <p:cNvGrpSpPr/>
+        <p:nvPr/>
+      </p:nvGrpSpPr>
+      <p:grpSpPr>
+        <a:xfrm>
+          <a:off x="0" y="0"/>
+          <a:ext cx="0" cy="0"/>
+          <a:chOff x="0" y="0"/>
+          <a:chExt cx="0" cy="0"/>
+        </a:xfrm>
+      </p:grpSpPr>
+      <p:sp>
+        <p:nvSpPr>
+          <p:cNvPr id="2" name="Slide Image Placeholder 1"/>
+          <p:cNvSpPr>
+            <a:spLocks noGrp="1" noRot="1" noChangeAspect="1"/>
+          </p:cNvSpPr>
+          <p:nvPr>
+            <p:ph type="sldImg"/>
+          </p:nvPr>
+        </p:nvSpPr>
+        <p:spPr/>
+      </p:sp>
+      <p:sp>
+        <p:nvSpPr>
+          <p:cNvPr id="3" name="Notes Placeholder 2"/>
+          <p:cNvSpPr>
+            <a:spLocks noGrp="1"/>
+          </p:cNvSpPr>
+          <p:nvPr>
+            <p:ph type="body" idx="1"/>
+          </p:nvPr>
+        </p:nvSpPr>
+        <p:spPr/>
+        <p:txBody>
+          <a:bodyPr/>
+          <a:lstStyle/>
+          <a:p>
+            <a:r>
+              <a:rPr lang="en-US" dirty="0"/>
+              <a:t/>
+            </a:r>
+            <a:endParaRPr lang="en-US" dirty="0"/>
+          </a:p>
+        </p:txBody>
+      </p:sp>
+      <p:sp>
+        <p:nvSpPr>
+          <p:cNvPr id="4" name="Slide Number Placeholder 3"/>
+          <p:cNvSpPr>
+            <a:spLocks noGrp="1"/>
+          </p:cNvSpPr>
+          <p:nvPr>
+            <p:ph type="sldNum" sz="quarter" idx="10"/>
+          </p:nvPr>
+        </p:nvSpPr>
+        <p:spPr/>
+        <p:txBody>
+          <a:bodyPr/>
+          <a:lstStyle/>
+          <a:p>
+            <a:fld id="{F7021451-1387-4CA6-816F-3879F97B5CBC}" type="slidenum">
+              <a:rPr lang="en-US"/>
+              <a:t>23</a:t>
+            </a:fld>
+            <a:endParaRPr lang="en-US"/>
+          </a:p>
+        </p:txBody>
+      </p:sp>
+    </p:spTree>
+    <p:extLst>
+      <p:ext uri="{BB962C8B-B14F-4D97-AF65-F5344CB8AC3E}">
+        <p14:creationId xmlns:p14="http://schemas.microsoft.com/office/powerpoint/2010/main" val="1024086991"/>
+      </p:ext>
+    </p:extLst>
+  </p:cSld>
+  <p:clrMapOvr>
+    <a:masterClrMapping/>
+  </p:clrMapOvr>
+</p:notes>
+</file>
+
+<file path=ppt/notesSlides/notesSlide24.xml><?xml version="1.0" encoding="utf-8"?>
+<p:notes xmlns:a="http://schemas.openxmlformats.org/drawingml/2006/main" xmlns:r="http://schemas.openxmlformats.org/officeDocument/2006/relationships" xmlns:p="http://schemas.openxmlformats.org/presentationml/2006/main">
+  <p:cSld>
+    <p:spTree>
+      <p:nvGrpSpPr>
+        <p:cNvPr id="1" name=""/>
+        <p:cNvGrpSpPr/>
+        <p:nvPr/>
+      </p:nvGrpSpPr>
+      <p:grpSpPr>
+        <a:xfrm>
+          <a:off x="0" y="0"/>
+          <a:ext cx="0" cy="0"/>
+          <a:chOff x="0" y="0"/>
+          <a:chExt cx="0" cy="0"/>
+        </a:xfrm>
+      </p:grpSpPr>
+      <p:sp>
+        <p:nvSpPr>
+          <p:cNvPr id="2" name="Slide Image Placeholder 1"/>
+          <p:cNvSpPr>
+            <a:spLocks noGrp="1" noRot="1" noChangeAspect="1"/>
+          </p:cNvSpPr>
+          <p:nvPr>
+            <p:ph type="sldImg"/>
+          </p:nvPr>
+        </p:nvSpPr>
+        <p:spPr/>
+      </p:sp>
+      <p:sp>
+        <p:nvSpPr>
+          <p:cNvPr id="3" name="Notes Placeholder 2"/>
+          <p:cNvSpPr>
+            <a:spLocks noGrp="1"/>
+          </p:cNvSpPr>
+          <p:nvPr>
+            <p:ph type="body" idx="1"/>
+          </p:nvPr>
+        </p:nvSpPr>
+        <p:spPr/>
+        <p:txBody>
+          <a:bodyPr/>
+          <a:lstStyle/>
+          <a:p>
+            <a:r>
+              <a:rPr lang="en-US" dirty="0"/>
+              <a:t/>
+            </a:r>
+            <a:endParaRPr lang="en-US" dirty="0"/>
+          </a:p>
+        </p:txBody>
+      </p:sp>
+      <p:sp>
+        <p:nvSpPr>
+          <p:cNvPr id="4" name="Slide Number Placeholder 3"/>
+          <p:cNvSpPr>
+            <a:spLocks noGrp="1"/>
+          </p:cNvSpPr>
+          <p:nvPr>
+            <p:ph type="sldNum" sz="quarter" idx="10"/>
+          </p:nvPr>
+        </p:nvSpPr>
+        <p:spPr/>
+        <p:txBody>
+          <a:bodyPr/>
+          <a:lstStyle/>
+          <a:p>
+            <a:fld id="{F7021451-1387-4CA6-816F-3879F97B5CBC}" type="slidenum">
+              <a:rPr lang="en-US"/>
+              <a:t>24</a:t>
+            </a:fld>
+            <a:endParaRPr lang="en-US"/>
+          </a:p>
+        </p:txBody>
+      </p:sp>
+    </p:spTree>
+    <p:extLst>
+      <p:ext uri="{BB962C8B-B14F-4D97-AF65-F5344CB8AC3E}">
+        <p14:creationId xmlns:p14="http://schemas.microsoft.com/office/powerpoint/2010/main" val="1024086991"/>
+      </p:ext>
+    </p:extLst>
+  </p:cSld>
+  <p:clrMapOvr>
+    <a:masterClrMapping/>
+  </p:clrMapOvr>
+</p:notes>
+</file>
+
+<file path=ppt/notesSlides/notesSlide25.xml><?xml version="1.0" encoding="utf-8"?>
+<p:notes xmlns:a="http://schemas.openxmlformats.org/drawingml/2006/main" xmlns:r="http://schemas.openxmlformats.org/officeDocument/2006/relationships" xmlns:p="http://schemas.openxmlformats.org/presentationml/2006/main">
+  <p:cSld>
+    <p:spTree>
+      <p:nvGrpSpPr>
+        <p:cNvPr id="1" name=""/>
+        <p:cNvGrpSpPr/>
+        <p:nvPr/>
+      </p:nvGrpSpPr>
+      <p:grpSpPr>
+        <a:xfrm>
+          <a:off x="0" y="0"/>
+          <a:ext cx="0" cy="0"/>
+          <a:chOff x="0" y="0"/>
+          <a:chExt cx="0" cy="0"/>
+        </a:xfrm>
+      </p:grpSpPr>
+      <p:sp>
+        <p:nvSpPr>
+          <p:cNvPr id="2" name="Slide Image Placeholder 1"/>
+          <p:cNvSpPr>
+            <a:spLocks noGrp="1" noRot="1" noChangeAspect="1"/>
+          </p:cNvSpPr>
+          <p:nvPr>
+            <p:ph type="sldImg"/>
+          </p:nvPr>
+        </p:nvSpPr>
+        <p:spPr/>
+      </p:sp>
+      <p:sp>
+        <p:nvSpPr>
+          <p:cNvPr id="3" name="Notes Placeholder 2"/>
+          <p:cNvSpPr>
+            <a:spLocks noGrp="1"/>
+          </p:cNvSpPr>
+          <p:nvPr>
+            <p:ph type="body" idx="1"/>
+          </p:nvPr>
+        </p:nvSpPr>
+        <p:spPr/>
+        <p:txBody>
+          <a:bodyPr/>
+          <a:lstStyle/>
+          <a:p>
+            <a:r>
+              <a:rPr lang="en-US" dirty="0"/>
+              <a:t/>
+            </a:r>
+            <a:endParaRPr lang="en-US" dirty="0"/>
+          </a:p>
+        </p:txBody>
+      </p:sp>
+      <p:sp>
+        <p:nvSpPr>
+          <p:cNvPr id="4" name="Slide Number Placeholder 3"/>
+          <p:cNvSpPr>
+            <a:spLocks noGrp="1"/>
+          </p:cNvSpPr>
+          <p:nvPr>
+            <p:ph type="sldNum" sz="quarter" idx="10"/>
+          </p:nvPr>
+        </p:nvSpPr>
+        <p:spPr/>
+        <p:txBody>
+          <a:bodyPr/>
+          <a:lstStyle/>
+          <a:p>
+            <a:fld id="{F7021451-1387-4CA6-816F-3879F97B5CBC}" type="slidenum">
+              <a:rPr lang="en-US"/>
+              <a:t>25</a:t>
             </a:fld>
             <a:endParaRPr lang="en-US"/>
           </a:p>
@@ -2854,7 +3210,7 @@
                 <a:ea typeface="Calibri" pitchFamily="34" charset="-122"/>
                 <a:cs typeface="Calibri" pitchFamily="34" charset="-120"/>
               </a:rPr>
-              <a:t>Validation, Quality Control &amp; Bioinformatics Essentials</a:t>
+              <a:t>Validation, QC &amp; Bioinformatics</a:t>
             </a:r>
             <a:endParaRPr lang="en-US" sz="4600" dirty="0"/>
           </a:p>
@@ -2893,7 +3249,7 @@
                 <a:ea typeface="Calibri" pitchFamily="34" charset="-122"/>
                 <a:cs typeface="Calibri" pitchFamily="34" charset="-120"/>
               </a:rPr>
-              <a:t>Performance Characteristics, Contamination Control, and the Pipeline</a:t>
+              <a:t>Bringing a Molecular Assay Online — and Keeping It Reliable</a:t>
             </a:r>
             <a:endParaRPr lang="en-US" sz="1900" dirty="0"/>
           </a:p>
@@ -3085,7 +3441,7 @@
                 <a:ea typeface="Calibri" pitchFamily="34" charset="-122"/>
                 <a:cs typeface="Calibri" pitchFamily="34" charset="-120"/>
               </a:rPr>
-              <a:t>MOLECULAR &amp; CYTOGENETICS   ·   QUALITY METRICS</a:t>
+              <a:t>MOLECULAR &amp; CYTOGENETICS   ·   NGS VALIDATION</a:t>
             </a:r>
             <a:endParaRPr lang="en-US" sz="1100" dirty="0"/>
           </a:p>
@@ -3124,7 +3480,7 @@
                 <a:ea typeface="Calibri" pitchFamily="34" charset="-122"/>
                 <a:cs typeface="Calibri" pitchFamily="34" charset="-120"/>
               </a:rPr>
-              <a:t>Coverage, Depth, and Read Quality</a:t>
+              <a:t>What NGS Validation Must Cover</a:t>
             </a:r>
             <a:endParaRPr lang="en-US" sz="3000" dirty="0"/>
           </a:p>
@@ -3192,7 +3548,7 @@
                 <a:ea typeface="Calibri" pitchFamily="34" charset="-122"/>
                 <a:cs typeface="Calibri" pitchFamily="34" charset="-120"/>
               </a:rPr>
-              <a:t>WHAT GATES A CALL</a:t>
+              <a:t>ANALYTIC SCOPE</a:t>
             </a:r>
             <a:endParaRPr lang="en-US" sz="1200" dirty="0"/>
           </a:p>
@@ -3235,7 +3591,7 @@
                 <a:ea typeface="Calibri" pitchFamily="34" charset="-122"/>
                 <a:cs typeface="Calibri" pitchFamily="34" charset="-120"/>
               </a:rPr>
-              <a:t>Depth of coverage: enough reads at each position to detect a variant at the target VAF.</a:t>
+              <a:t>Define variant types detected (SNVs, indels, CNVs, fusions) and the limits for each.</a:t>
             </a:r>
             <a:endParaRPr lang="en-US" sz="1250" dirty="0"/>
           </a:p>
@@ -3256,7 +3612,7 @@
                 <a:ea typeface="Calibri" pitchFamily="34" charset="-122"/>
                 <a:cs typeface="Calibri" pitchFamily="34" charset="-120"/>
               </a:rPr>
-              <a:t>Uniformity: regions below minimum depth are 'not assessed' and must be reported as gaps.</a:t>
+              <a:t>Establish minimum depth and coverage uniformity.</a:t>
             </a:r>
             <a:endParaRPr lang="en-US" sz="1250" dirty="0"/>
           </a:p>
@@ -3277,7 +3633,7 @@
                 <a:ea typeface="Calibri" pitchFamily="34" charset="-122"/>
                 <a:cs typeface="Calibri" pitchFamily="34" charset="-120"/>
               </a:rPr>
-              <a:t>Base/mapping quality (Q scores) and strand bias affect confidence.</a:t>
+              <a:t>Characterize difficult regions (homopolymers, GC-rich).</a:t>
             </a:r>
             <a:endParaRPr lang="en-US" sz="1250" dirty="0"/>
           </a:p>
@@ -3298,7 +3654,7 @@
                 <a:ea typeface="Calibri" pitchFamily="34" charset="-122"/>
                 <a:cs typeface="Calibri" pitchFamily="34" charset="-120"/>
               </a:rPr>
-              <a:t>Variant allele fraction interpreted with depth and context.</a:t>
+              <a:t>Set the limit of detection per variant type.</a:t>
             </a:r>
             <a:endParaRPr lang="en-US" sz="1250" dirty="0"/>
           </a:p>
@@ -3321,7 +3677,7 @@
             </a:avLst>
           </a:prstGeom>
           <a:solidFill>
-            <a:srgbClr val="E0F2F4"/>
+            <a:srgbClr val="DDF0EF"/>
           </a:solidFill>
           <a:ln/>
           <a:effectLst>
@@ -3366,7 +3722,7 @@
                 <a:ea typeface="Calibri" pitchFamily="34" charset="-122"/>
                 <a:cs typeface="Calibri" pitchFamily="34" charset="-120"/>
               </a:rPr>
-              <a:t>PIPELINE GOVERNANCE</a:t>
+              <a:t>REFERENCE MATERIALS</a:t>
             </a:r>
             <a:endParaRPr lang="en-US" sz="1200" dirty="0"/>
           </a:p>
@@ -3409,7 +3765,7 @@
                 <a:ea typeface="Calibri" pitchFamily="34" charset="-122"/>
                 <a:cs typeface="Calibri" pitchFamily="34" charset="-120"/>
               </a:rPr>
-              <a:t>Validate and VERSION-CONTROL the pipeline; revalidate after meaningful changes.</a:t>
+              <a:t>Use well-characterized reference samples and orthogonal confirmation.</a:t>
             </a:r>
             <a:endParaRPr lang="en-US" sz="1250" dirty="0"/>
           </a:p>
@@ -3430,7 +3786,7 @@
                 <a:ea typeface="Calibri" pitchFamily="34" charset="-122"/>
                 <a:cs typeface="Calibri" pitchFamily="34" charset="-120"/>
               </a:rPr>
-              <a:t>Lock reference genome build and annotation sources.</a:t>
+              <a:t>Include known positives across the reportable range.</a:t>
             </a:r>
             <a:endParaRPr lang="en-US" sz="1250" dirty="0"/>
           </a:p>
@@ -3451,7 +3807,7 @@
                 <a:ea typeface="Calibri" pitchFamily="34" charset="-122"/>
                 <a:cs typeface="Calibri" pitchFamily="34" charset="-120"/>
               </a:rPr>
-              <a:t>Document filtering thresholds and their rationale.</a:t>
+              <a:t>Assess reproducibility across runs/operators.</a:t>
             </a:r>
             <a:endParaRPr lang="en-US" sz="1250" dirty="0"/>
           </a:p>
@@ -3472,7 +3828,7 @@
                 <a:ea typeface="Calibri" pitchFamily="34" charset="-122"/>
                 <a:cs typeface="Calibri" pitchFamily="34" charset="-120"/>
               </a:rPr>
-              <a:t>Reproducibility: the same input must give the same output.</a:t>
+              <a:t>Document representative regions and gaps.</a:t>
             </a:r>
             <a:endParaRPr lang="en-US" sz="1250" dirty="0"/>
           </a:p>
@@ -3649,7 +4005,7 @@
                 <a:ea typeface="Calibri" pitchFamily="34" charset="-122"/>
                 <a:cs typeface="Calibri" pitchFamily="34" charset="-120"/>
               </a:rPr>
-              <a:t>MOLECULAR &amp; CYTOGENETICS   ·   SIGN-OUT</a:t>
+              <a:t>MOLECULAR &amp; CYTOGENETICS   ·   BIOINFORMATICS</a:t>
             </a:r>
             <a:endParaRPr lang="en-US" sz="1100" dirty="0"/>
           </a:p>
@@ -3688,7 +4044,7 @@
                 <a:ea typeface="Calibri" pitchFamily="34" charset="-122"/>
                 <a:cs typeface="Calibri" pitchFamily="34" charset="-120"/>
               </a:rPr>
-              <a:t>Artifacts vs True Variants</a:t>
+              <a:t>Validating the Dry Bench</a:t>
             </a:r>
             <a:endParaRPr lang="en-US" sz="3000" dirty="0"/>
           </a:p>
@@ -3756,7 +4112,7 @@
                 <a:ea typeface="Calibri" pitchFamily="34" charset="-122"/>
                 <a:cs typeface="Calibri" pitchFamily="34" charset="-120"/>
               </a:rPr>
-              <a:t>COMMON ARTIFACTS</a:t>
+              <a:t>PIPELINE AS PART OF THE TEST</a:t>
             </a:r>
             <a:endParaRPr lang="en-US" sz="1200" dirty="0"/>
           </a:p>
@@ -3799,7 +4155,7 @@
                 <a:ea typeface="Calibri" pitchFamily="34" charset="-122"/>
                 <a:cs typeface="Calibri" pitchFamily="34" charset="-120"/>
               </a:rPr>
-              <a:t>FFPE deamination (C&gt;T/G&gt;A) at low allele fractions.</a:t>
+              <a:t>Alignment, variant calling, annotation, and filtering all affect results — validate them together.</a:t>
             </a:r>
             <a:endParaRPr lang="en-US" sz="1250" dirty="0"/>
           </a:p>
@@ -3820,7 +4176,7 @@
                 <a:ea typeface="Calibri" pitchFamily="34" charset="-122"/>
                 <a:cs typeface="Calibri" pitchFamily="34" charset="-120"/>
               </a:rPr>
-              <a:t>Homopolymer/indel errors; strand-biased calls.</a:t>
+              <a:t>Version-control software and databases.</a:t>
             </a:r>
             <a:endParaRPr lang="en-US" sz="1250" dirty="0"/>
           </a:p>
@@ -3841,7 +4197,7 @@
                 <a:ea typeface="Calibri" pitchFamily="34" charset="-122"/>
                 <a:cs typeface="Calibri" pitchFamily="34" charset="-120"/>
               </a:rPr>
-              <a:t>Pseudogene/paralog misalignment.</a:t>
+              <a:t>Revalidate after significant pipeline changes.</a:t>
             </a:r>
             <a:endParaRPr lang="en-US" sz="1250" dirty="0"/>
           </a:p>
@@ -3862,7 +4218,7 @@
                 <a:ea typeface="Calibri" pitchFamily="34" charset="-122"/>
                 <a:cs typeface="Calibri" pitchFamily="34" charset="-120"/>
               </a:rPr>
-              <a:t>Index hopping producing low-level cross-sample calls.</a:t>
+              <a:t>Lock and document the production pipeline.</a:t>
             </a:r>
             <a:endParaRPr lang="en-US" sz="1250" dirty="0"/>
           </a:p>
@@ -3885,7 +4241,7 @@
             </a:avLst>
           </a:prstGeom>
           <a:solidFill>
-            <a:srgbClr val="E0F2F4"/>
+            <a:srgbClr val="DDF0EF"/>
           </a:solidFill>
           <a:ln/>
           <a:effectLst>
@@ -3930,7 +4286,7 @@
                 <a:ea typeface="Calibri" pitchFamily="34" charset="-122"/>
                 <a:cs typeface="Calibri" pitchFamily="34" charset="-120"/>
               </a:rPr>
-              <a:t>CONFIRM AND REPORT</a:t>
+              <a:t>INTERPRETATION DATABASES</a:t>
             </a:r>
             <a:endParaRPr lang="en-US" sz="1200" dirty="0"/>
           </a:p>
@@ -3973,7 +4329,7 @@
                 <a:ea typeface="Calibri" pitchFamily="34" charset="-122"/>
                 <a:cs typeface="Calibri" pitchFamily="34" charset="-120"/>
               </a:rPr>
-              <a:t>Confirm critical or low-confidence variants (orthogonal method or visual review).</a:t>
+              <a:t>Annotation/classification depend on curated, versioned databases.</a:t>
             </a:r>
             <a:endParaRPr lang="en-US" sz="1250" dirty="0"/>
           </a:p>
@@ -3994,7 +4350,7 @@
                 <a:ea typeface="Calibri" pitchFamily="34" charset="-122"/>
                 <a:cs typeface="Calibri" pitchFamily="34" charset="-120"/>
               </a:rPr>
-              <a:t>Use IGV-style review for important calls.</a:t>
+              <a:t>Track database versions used for each report.</a:t>
             </a:r>
             <a:endParaRPr lang="en-US" sz="1250" dirty="0"/>
           </a:p>
@@ -4015,7 +4371,7 @@
                 <a:ea typeface="Calibri" pitchFamily="34" charset="-122"/>
                 <a:cs typeface="Calibri" pitchFamily="34" charset="-120"/>
               </a:rPr>
-              <a:t>Report regions not adequately covered.</a:t>
+              <a:t>Reanalysis policies for reclassified variants.</a:t>
             </a:r>
             <a:endParaRPr lang="en-US" sz="1250" dirty="0"/>
           </a:p>
@@ -4036,7 +4392,7 @@
                 <a:ea typeface="Calibri" pitchFamily="34" charset="-122"/>
                 <a:cs typeface="Calibri" pitchFamily="34" charset="-120"/>
               </a:rPr>
-              <a:t>Proficiency testing benchmarks the whole process (wet lab + pipeline).</a:t>
+              <a:t>Guard against silent reference changes.</a:t>
             </a:r>
             <a:endParaRPr lang="en-US" sz="1250" dirty="0"/>
           </a:p>
@@ -4159,6 +4515,570 @@
 <file path=ppt/slides/slide12.xml><?xml version="1.0" encoding="utf-8"?>
 <p:sld xmlns:a="http://schemas.openxmlformats.org/drawingml/2006/main" xmlns:r="http://schemas.openxmlformats.org/officeDocument/2006/relationships" xmlns:p="http://schemas.openxmlformats.org/presentationml/2006/main">
   <p:cSld name="Slide 12">
+    <p:bg>
+      <p:bgPr>
+        <a:solidFill>
+          <a:srgbClr val="FFFFFF"/>
+        </a:solidFill>
+      </p:bgPr>
+    </p:bg>
+    <p:spTree>
+      <p:nvGrpSpPr>
+        <p:cNvPr id="1" name=""/>
+        <p:cNvGrpSpPr/>
+        <p:nvPr/>
+      </p:nvGrpSpPr>
+      <p:grpSpPr>
+        <a:xfrm>
+          <a:off x="0" y="0"/>
+          <a:ext cx="0" cy="0"/>
+          <a:chOff x="0" y="0"/>
+          <a:chExt cx="0" cy="0"/>
+        </a:xfrm>
+      </p:grpSpPr>
+      <p:sp>
+        <p:nvSpPr>
+          <p:cNvPr id="2" name="Text 0"/>
+          <p:cNvSpPr/>
+          <p:nvPr/>
+        </p:nvSpPr>
+        <p:spPr>
+          <a:xfrm>
+            <a:off x="566928" y="329184"/>
+            <a:ext cx="10515600" cy="310896"/>
+          </a:xfrm>
+          <a:prstGeom prst="rect">
+            <a:avLst/>
+          </a:prstGeom>
+          <a:noFill/>
+          <a:ln/>
+        </p:spPr>
+        <p:txBody>
+          <a:bodyPr wrap="square" lIns="0" tIns="0" rIns="0" bIns="0" rtlCol="0" anchor="ctr"/>
+          <a:lstStyle/>
+          <a:p>
+            <a:pPr algn="l" indent="0" marL="0">
+              <a:buNone/>
+            </a:pPr>
+            <a:r>
+              <a:rPr lang="en-US" sz="1100" b="1" spc="150" kern="0" dirty="0">
+                <a:solidFill>
+                  <a:srgbClr val="00838F"/>
+                </a:solidFill>
+                <a:latin typeface="Calibri" pitchFamily="34" charset="0"/>
+                <a:ea typeface="Calibri" pitchFamily="34" charset="-122"/>
+                <a:cs typeface="Calibri" pitchFamily="34" charset="-120"/>
+              </a:rPr>
+              <a:t>MOLECULAR &amp; CYTOGENETICS   ·   ONGOING QC</a:t>
+            </a:r>
+            <a:endParaRPr lang="en-US" sz="1100" dirty="0"/>
+          </a:p>
+        </p:txBody>
+      </p:sp>
+      <p:sp>
+        <p:nvSpPr>
+          <p:cNvPr id="3" name="Text 1"/>
+          <p:cNvSpPr/>
+          <p:nvPr/>
+        </p:nvSpPr>
+        <p:spPr>
+          <a:xfrm>
+            <a:off x="566928" y="713232"/>
+            <a:ext cx="11064240" cy="749808"/>
+          </a:xfrm>
+          <a:prstGeom prst="rect">
+            <a:avLst/>
+          </a:prstGeom>
+          <a:noFill/>
+          <a:ln/>
+        </p:spPr>
+        <p:txBody>
+          <a:bodyPr wrap="square" lIns="0" tIns="0" rIns="0" bIns="0" rtlCol="0" anchor="ctr"/>
+          <a:lstStyle/>
+          <a:p>
+            <a:pPr algn="l" indent="0" marL="0">
+              <a:buNone/>
+            </a:pPr>
+            <a:r>
+              <a:rPr lang="en-US" sz="3000" b="1" dirty="0">
+                <a:solidFill>
+                  <a:srgbClr val="0E3A5F"/>
+                </a:solidFill>
+                <a:latin typeface="Calibri" pitchFamily="34" charset="0"/>
+                <a:ea typeface="Calibri" pitchFamily="34" charset="-122"/>
+                <a:cs typeface="Calibri" pitchFamily="34" charset="-120"/>
+              </a:rPr>
+              <a:t>Sustaining Quality</a:t>
+            </a:r>
+            <a:endParaRPr lang="en-US" sz="3000" dirty="0"/>
+          </a:p>
+        </p:txBody>
+      </p:sp>
+      <p:sp>
+        <p:nvSpPr>
+          <p:cNvPr id="4" name="Shape 2"/>
+          <p:cNvSpPr/>
+          <p:nvPr/>
+        </p:nvSpPr>
+        <p:spPr>
+          <a:xfrm>
+            <a:off x="566928" y="1517904"/>
+            <a:ext cx="5346040" cy="4114800"/>
+          </a:xfrm>
+          <a:prstGeom prst="roundRect">
+            <a:avLst>
+              <a:gd name="adj" fmla="val 2000"/>
+            </a:avLst>
+          </a:prstGeom>
+          <a:solidFill>
+            <a:srgbClr val="E0F2F4"/>
+          </a:solidFill>
+          <a:ln/>
+          <a:effectLst>
+            <a:outerShdw sx="100000" sy="100000" kx="0" ky="0" algn="bl" rotWithShape="0" blurRad="88900" dist="25400" dir="5400000">
+              <a:srgbClr val="22303C">
+                <a:alpha val="12000"/>
+              </a:srgbClr>
+            </a:outerShdw>
+          </a:effectLst>
+        </p:spPr>
+      </p:sp>
+      <p:sp>
+        <p:nvSpPr>
+          <p:cNvPr id="5" name="Text 3"/>
+          <p:cNvSpPr/>
+          <p:nvPr/>
+        </p:nvSpPr>
+        <p:spPr>
+          <a:xfrm>
+            <a:off x="804672" y="1682496"/>
+            <a:ext cx="4888840" cy="274320"/>
+          </a:xfrm>
+          <a:prstGeom prst="rect">
+            <a:avLst/>
+          </a:prstGeom>
+          <a:noFill/>
+          <a:ln/>
+        </p:spPr>
+        <p:txBody>
+          <a:bodyPr wrap="square" lIns="0" tIns="0" rIns="0" bIns="0" rtlCol="0" anchor="ctr"/>
+          <a:lstStyle/>
+          <a:p>
+            <a:pPr indent="0" marL="0">
+              <a:buNone/>
+            </a:pPr>
+            <a:r>
+              <a:rPr lang="en-US" sz="1200" b="1" spc="100" kern="0" dirty="0">
+                <a:solidFill>
+                  <a:srgbClr val="005A63"/>
+                </a:solidFill>
+                <a:latin typeface="Calibri" pitchFamily="34" charset="0"/>
+                <a:ea typeface="Calibri" pitchFamily="34" charset="-122"/>
+                <a:cs typeface="Calibri" pitchFamily="34" charset="-120"/>
+              </a:rPr>
+              <a:t>RUN AND BATCH QC</a:t>
+            </a:r>
+            <a:endParaRPr lang="en-US" sz="1200" dirty="0"/>
+          </a:p>
+        </p:txBody>
+      </p:sp>
+      <p:sp>
+        <p:nvSpPr>
+          <p:cNvPr id="6" name="Text 4"/>
+          <p:cNvSpPr/>
+          <p:nvPr/>
+        </p:nvSpPr>
+        <p:spPr>
+          <a:xfrm>
+            <a:off x="804672" y="2029968"/>
+            <a:ext cx="4870552" cy="3474720"/>
+          </a:xfrm>
+          <a:prstGeom prst="rect">
+            <a:avLst/>
+          </a:prstGeom>
+          <a:noFill/>
+          <a:ln/>
+        </p:spPr>
+        <p:txBody>
+          <a:bodyPr wrap="square" lIns="0" tIns="0" rIns="0" bIns="0" rtlCol="0" anchor="t"/>
+          <a:lstStyle/>
+          <a:p>
+            <a:pPr algn="l" marL="177800" indent="-177800">
+              <a:spcAft>
+                <a:spcPts val="900"/>
+              </a:spcAft>
+              <a:buSzPct val="100000"/>
+              <a:buChar char="•"/>
+            </a:pPr>
+            <a:r>
+              <a:rPr lang="en-US" sz="1250" b="1" dirty="0">
+                <a:solidFill>
+                  <a:srgbClr val="1B2A38"/>
+                </a:solidFill>
+                <a:latin typeface="Calibri" pitchFamily="34" charset="0"/>
+                <a:ea typeface="Calibri" pitchFamily="34" charset="-122"/>
+                <a:cs typeface="Calibri" pitchFamily="34" charset="-120"/>
+              </a:rPr>
+              <a:t>Monitor run metrics (coverage, quality scores, contamination indicators).</a:t>
+            </a:r>
+            <a:endParaRPr lang="en-US" sz="1250" dirty="0"/>
+          </a:p>
+          <a:p>
+            <a:pPr algn="l" marL="177800" indent="-177800">
+              <a:spcAft>
+                <a:spcPts val="900"/>
+              </a:spcAft>
+              <a:buSzPct val="100000"/>
+              <a:buChar char="•"/>
+            </a:pPr>
+            <a:r>
+              <a:rPr lang="en-US" sz="1250" dirty="0">
+                <a:solidFill>
+                  <a:srgbClr val="33444F"/>
+                </a:solidFill>
+                <a:latin typeface="Calibri" pitchFamily="34" charset="0"/>
+                <a:ea typeface="Calibri" pitchFamily="34" charset="-122"/>
+                <a:cs typeface="Calibri" pitchFamily="34" charset="-120"/>
+              </a:rPr>
+              <a:t>Controls in each run; defined acceptance criteria.</a:t>
+            </a:r>
+            <a:endParaRPr lang="en-US" sz="1250" dirty="0"/>
+          </a:p>
+          <a:p>
+            <a:pPr algn="l" marL="177800" indent="-177800">
+              <a:spcAft>
+                <a:spcPts val="900"/>
+              </a:spcAft>
+              <a:buSzPct val="100000"/>
+              <a:buChar char="•"/>
+            </a:pPr>
+            <a:r>
+              <a:rPr lang="en-US" sz="1250" dirty="0">
+                <a:solidFill>
+                  <a:srgbClr val="33444F"/>
+                </a:solidFill>
+                <a:latin typeface="Calibri" pitchFamily="34" charset="0"/>
+                <a:ea typeface="Calibri" pitchFamily="34" charset="-122"/>
+                <a:cs typeface="Calibri" pitchFamily="34" charset="-120"/>
+              </a:rPr>
+              <a:t>Track trends to catch drift.</a:t>
+            </a:r>
+            <a:endParaRPr lang="en-US" sz="1250" dirty="0"/>
+          </a:p>
+          <a:p>
+            <a:pPr algn="l" marL="177800" indent="-177800">
+              <a:spcAft>
+                <a:spcPts val="900"/>
+              </a:spcAft>
+              <a:buSzPct val="100000"/>
+              <a:buChar char="•"/>
+            </a:pPr>
+            <a:r>
+              <a:rPr lang="en-US" sz="1250" dirty="0">
+                <a:solidFill>
+                  <a:srgbClr val="33444F"/>
+                </a:solidFill>
+                <a:latin typeface="Calibri" pitchFamily="34" charset="0"/>
+                <a:ea typeface="Calibri" pitchFamily="34" charset="-122"/>
+                <a:cs typeface="Calibri" pitchFamily="34" charset="-120"/>
+              </a:rPr>
+              <a:t>Investigate and document failures.</a:t>
+            </a:r>
+            <a:endParaRPr lang="en-US" sz="1250" dirty="0"/>
+          </a:p>
+        </p:txBody>
+      </p:sp>
+      <p:sp>
+        <p:nvSpPr>
+          <p:cNvPr id="7" name="Shape 5"/>
+          <p:cNvSpPr/>
+          <p:nvPr/>
+        </p:nvSpPr>
+        <p:spPr>
+          <a:xfrm>
+            <a:off x="6278728" y="1517904"/>
+            <a:ext cx="5346040" cy="4114800"/>
+          </a:xfrm>
+          <a:prstGeom prst="roundRect">
+            <a:avLst>
+              <a:gd name="adj" fmla="val 2000"/>
+            </a:avLst>
+          </a:prstGeom>
+          <a:solidFill>
+            <a:srgbClr val="DDF0EF"/>
+          </a:solidFill>
+          <a:ln/>
+          <a:effectLst>
+            <a:outerShdw sx="100000" sy="100000" kx="0" ky="0" algn="bl" rotWithShape="0" blurRad="88900" dist="25400" dir="5400000">
+              <a:srgbClr val="22303C">
+                <a:alpha val="12000"/>
+              </a:srgbClr>
+            </a:outerShdw>
+          </a:effectLst>
+        </p:spPr>
+      </p:sp>
+      <p:sp>
+        <p:nvSpPr>
+          <p:cNvPr id="8" name="Text 6"/>
+          <p:cNvSpPr/>
+          <p:nvPr/>
+        </p:nvSpPr>
+        <p:spPr>
+          <a:xfrm>
+            <a:off x="6516472" y="1682496"/>
+            <a:ext cx="4888840" cy="274320"/>
+          </a:xfrm>
+          <a:prstGeom prst="rect">
+            <a:avLst/>
+          </a:prstGeom>
+          <a:noFill/>
+          <a:ln/>
+        </p:spPr>
+        <p:txBody>
+          <a:bodyPr wrap="square" lIns="0" tIns="0" rIns="0" bIns="0" rtlCol="0" anchor="ctr"/>
+          <a:lstStyle/>
+          <a:p>
+            <a:pPr indent="0" marL="0">
+              <a:buNone/>
+            </a:pPr>
+            <a:r>
+              <a:rPr lang="en-US" sz="1200" b="1" spc="100" kern="0" dirty="0">
+                <a:solidFill>
+                  <a:srgbClr val="005A63"/>
+                </a:solidFill>
+                <a:latin typeface="Calibri" pitchFamily="34" charset="0"/>
+                <a:ea typeface="Calibri" pitchFamily="34" charset="-122"/>
+                <a:cs typeface="Calibri" pitchFamily="34" charset="-120"/>
+              </a:rPr>
+              <a:t>PROFICIENCY TESTING</a:t>
+            </a:r>
+            <a:endParaRPr lang="en-US" sz="1200" dirty="0"/>
+          </a:p>
+        </p:txBody>
+      </p:sp>
+      <p:sp>
+        <p:nvSpPr>
+          <p:cNvPr id="9" name="Text 7"/>
+          <p:cNvSpPr/>
+          <p:nvPr/>
+        </p:nvSpPr>
+        <p:spPr>
+          <a:xfrm>
+            <a:off x="6516472" y="2029968"/>
+            <a:ext cx="4870552" cy="3474720"/>
+          </a:xfrm>
+          <a:prstGeom prst="rect">
+            <a:avLst/>
+          </a:prstGeom>
+          <a:noFill/>
+          <a:ln/>
+        </p:spPr>
+        <p:txBody>
+          <a:bodyPr wrap="square" lIns="0" tIns="0" rIns="0" bIns="0" rtlCol="0" anchor="t"/>
+          <a:lstStyle/>
+          <a:p>
+            <a:pPr algn="l" marL="177800" indent="-177800">
+              <a:spcAft>
+                <a:spcPts val="900"/>
+              </a:spcAft>
+              <a:buSzPct val="100000"/>
+              <a:buChar char="•"/>
+            </a:pPr>
+            <a:r>
+              <a:rPr lang="en-US" sz="1250" b="1" dirty="0">
+                <a:solidFill>
+                  <a:srgbClr val="1B2A38"/>
+                </a:solidFill>
+                <a:latin typeface="Calibri" pitchFamily="34" charset="0"/>
+                <a:ea typeface="Calibri" pitchFamily="34" charset="-122"/>
+                <a:cs typeface="Calibri" pitchFamily="34" charset="-120"/>
+              </a:rPr>
+              <a:t>Enroll in PT or use alternative assessment where PT is unavailable.</a:t>
+            </a:r>
+            <a:endParaRPr lang="en-US" sz="1250" dirty="0"/>
+          </a:p>
+          <a:p>
+            <a:pPr algn="l" marL="177800" indent="-177800">
+              <a:spcAft>
+                <a:spcPts val="900"/>
+              </a:spcAft>
+              <a:buSzPct val="100000"/>
+              <a:buChar char="•"/>
+            </a:pPr>
+            <a:r>
+              <a:rPr lang="en-US" sz="1250" dirty="0">
+                <a:solidFill>
+                  <a:srgbClr val="33444F"/>
+                </a:solidFill>
+                <a:latin typeface="Calibri" pitchFamily="34" charset="0"/>
+                <a:ea typeface="Calibri" pitchFamily="34" charset="-122"/>
+                <a:cs typeface="Calibri" pitchFamily="34" charset="-120"/>
+              </a:rPr>
+              <a:t>Compare performance against peers.</a:t>
+            </a:r>
+            <a:endParaRPr lang="en-US" sz="1250" dirty="0"/>
+          </a:p>
+          <a:p>
+            <a:pPr algn="l" marL="177800" indent="-177800">
+              <a:spcAft>
+                <a:spcPts val="900"/>
+              </a:spcAft>
+              <a:buSzPct val="100000"/>
+              <a:buChar char="•"/>
+            </a:pPr>
+            <a:r>
+              <a:rPr lang="en-US" sz="1250" dirty="0">
+                <a:solidFill>
+                  <a:srgbClr val="33444F"/>
+                </a:solidFill>
+                <a:latin typeface="Calibri" pitchFamily="34" charset="0"/>
+                <a:ea typeface="Calibri" pitchFamily="34" charset="-122"/>
+                <a:cs typeface="Calibri" pitchFamily="34" charset="-120"/>
+              </a:rPr>
+              <a:t>Use failures as improvement triggers.</a:t>
+            </a:r>
+            <a:endParaRPr lang="en-US" sz="1250" dirty="0"/>
+          </a:p>
+          <a:p>
+            <a:pPr algn="l" marL="177800" indent="-177800">
+              <a:spcAft>
+                <a:spcPts val="900"/>
+              </a:spcAft>
+              <a:buSzPct val="100000"/>
+              <a:buChar char="•"/>
+            </a:pPr>
+            <a:r>
+              <a:rPr lang="en-US" sz="1250" dirty="0">
+                <a:solidFill>
+                  <a:srgbClr val="33444F"/>
+                </a:solidFill>
+                <a:latin typeface="Calibri" pitchFamily="34" charset="0"/>
+                <a:ea typeface="Calibri" pitchFamily="34" charset="-122"/>
+                <a:cs typeface="Calibri" pitchFamily="34" charset="-120"/>
+              </a:rPr>
+              <a:t>Maintain competency and documentation.</a:t>
+            </a:r>
+            <a:endParaRPr lang="en-US" sz="1250" dirty="0"/>
+          </a:p>
+        </p:txBody>
+      </p:sp>
+      <p:sp>
+        <p:nvSpPr>
+          <p:cNvPr id="10" name="Text 8"/>
+          <p:cNvSpPr/>
+          <p:nvPr/>
+        </p:nvSpPr>
+        <p:spPr>
+          <a:xfrm>
+            <a:off x="566928" y="6473952"/>
+            <a:ext cx="7772400" cy="274320"/>
+          </a:xfrm>
+          <a:prstGeom prst="rect">
+            <a:avLst/>
+          </a:prstGeom>
+          <a:noFill/>
+          <a:ln/>
+        </p:spPr>
+        <p:txBody>
+          <a:bodyPr wrap="square" lIns="0" tIns="0" rIns="0" bIns="0" rtlCol="0" anchor="ctr"/>
+          <a:lstStyle/>
+          <a:p>
+            <a:pPr algn="l" indent="0" marL="0">
+              <a:buNone/>
+            </a:pPr>
+            <a:r>
+              <a:rPr lang="en-US" sz="850" dirty="0">
+                <a:solidFill>
+                  <a:srgbClr val="9AA8B4"/>
+                </a:solidFill>
+                <a:latin typeface="Calibri" pitchFamily="34" charset="0"/>
+                <a:ea typeface="Calibri" pitchFamily="34" charset="-122"/>
+                <a:cs typeface="Calibri" pitchFamily="34" charset="-120"/>
+              </a:rPr>
+              <a:t>Makassed General Hospital  ·  Department of Laboratory Medicine</a:t>
+            </a:r>
+            <a:endParaRPr lang="en-US" sz="850" dirty="0"/>
+          </a:p>
+        </p:txBody>
+      </p:sp>
+      <p:sp>
+        <p:nvSpPr>
+          <p:cNvPr id="11" name="Text 9"/>
+          <p:cNvSpPr/>
+          <p:nvPr/>
+        </p:nvSpPr>
+        <p:spPr>
+          <a:xfrm>
+            <a:off x="9814255" y="6473952"/>
+            <a:ext cx="1828800" cy="274320"/>
+          </a:xfrm>
+          <a:prstGeom prst="rect">
+            <a:avLst/>
+          </a:prstGeom>
+          <a:noFill/>
+          <a:ln/>
+        </p:spPr>
+        <p:txBody>
+          <a:bodyPr wrap="square" lIns="0" tIns="0" rIns="0" bIns="0" rtlCol="0" anchor="ctr"/>
+          <a:lstStyle/>
+          <a:p>
+            <a:pPr algn="r" indent="0" marL="0">
+              <a:buNone/>
+            </a:pPr>
+            <a:r>
+              <a:rPr lang="en-US" sz="850" dirty="0">
+                <a:solidFill>
+                  <a:srgbClr val="9AA8B4"/>
+                </a:solidFill>
+                <a:latin typeface="Calibri" pitchFamily="34" charset="0"/>
+                <a:ea typeface="Calibri" pitchFamily="34" charset="-122"/>
+                <a:cs typeface="Calibri" pitchFamily="34" charset="-120"/>
+              </a:rPr>
+              <a:t>CP Lecture Series</a:t>
+            </a:r>
+            <a:pPr algn="r" indent="0" marL="0">
+              <a:buNone/>
+            </a:pPr>
+            <a:r>
+              <a:rPr lang="en-US" sz="850" dirty="0">
+                <a:solidFill>
+                  <a:srgbClr val="DCE4EC"/>
+                </a:solidFill>
+                <a:latin typeface="Calibri" pitchFamily="34" charset="0"/>
+                <a:ea typeface="Calibri" pitchFamily="34" charset="-122"/>
+                <a:cs typeface="Calibri" pitchFamily="34" charset="-120"/>
+              </a:rPr>
+              <a:t>   ·   </a:t>
+            </a:r>
+            <a:pPr algn="r" indent="0" marL="0">
+              <a:buNone/>
+            </a:pPr>
+            <a:r>
+              <a:rPr lang="en-US" sz="850" b="1" dirty="0">
+                <a:solidFill>
+                  <a:srgbClr val="00838F"/>
+                </a:solidFill>
+                <a:latin typeface="Calibri" pitchFamily="34" charset="0"/>
+                <a:ea typeface="Calibri" pitchFamily="34" charset="-122"/>
+                <a:cs typeface="Calibri" pitchFamily="34" charset="-120"/>
+              </a:rPr>
+              <a:t>10</a:t>
+            </a:r>
+            <a:endParaRPr lang="en-US" sz="850" dirty="0"/>
+          </a:p>
+        </p:txBody>
+      </p:sp>
+    </p:spTree>
+  </p:cSld>
+  <p:clrMapOvr>
+    <a:masterClrMapping/>
+  </p:clrMapOvr>
+</p:sld>
+</file>
+
+<file path=ppt/slides/slide13.xml><?xml version="1.0" encoding="utf-8"?>
+<p:sld xmlns:a="http://schemas.openxmlformats.org/drawingml/2006/main" xmlns:r="http://schemas.openxmlformats.org/officeDocument/2006/relationships" xmlns:p="http://schemas.openxmlformats.org/presentationml/2006/main">
+  <p:cSld name="Slide 13">
     <p:bg>
       <p:bgPr>
         <a:solidFill>
@@ -4338,439 +5258,6 @@
               <a:t>Cases &amp; Board Review</a:t>
             </a:r>
             <a:endParaRPr lang="en-US" sz="3800" dirty="0"/>
-          </a:p>
-        </p:txBody>
-      </p:sp>
-    </p:spTree>
-  </p:cSld>
-  <p:clrMapOvr>
-    <a:masterClrMapping/>
-  </p:clrMapOvr>
-</p:sld>
-</file>
-
-<file path=ppt/slides/slide13.xml><?xml version="1.0" encoding="utf-8"?>
-<p:sld xmlns:a="http://schemas.openxmlformats.org/drawingml/2006/main" xmlns:r="http://schemas.openxmlformats.org/officeDocument/2006/relationships" xmlns:p="http://schemas.openxmlformats.org/presentationml/2006/main">
-  <p:cSld name="Slide 13">
-    <p:bg>
-      <p:bgPr>
-        <a:solidFill>
-          <a:srgbClr val="FFFFFF"/>
-        </a:solidFill>
-      </p:bgPr>
-    </p:bg>
-    <p:spTree>
-      <p:nvGrpSpPr>
-        <p:cNvPr id="1" name=""/>
-        <p:cNvGrpSpPr/>
-        <p:nvPr/>
-      </p:nvGrpSpPr>
-      <p:grpSpPr>
-        <a:xfrm>
-          <a:off x="0" y="0"/>
-          <a:ext cx="0" cy="0"/>
-          <a:chOff x="0" y="0"/>
-          <a:chExt cx="0" cy="0"/>
-        </a:xfrm>
-      </p:grpSpPr>
-      <p:sp>
-        <p:nvSpPr>
-          <p:cNvPr id="2" name="Text 0"/>
-          <p:cNvSpPr/>
-          <p:nvPr/>
-        </p:nvSpPr>
-        <p:spPr>
-          <a:xfrm>
-            <a:off x="566928" y="329184"/>
-            <a:ext cx="10515600" cy="310896"/>
-          </a:xfrm>
-          <a:prstGeom prst="rect">
-            <a:avLst/>
-          </a:prstGeom>
-          <a:noFill/>
-          <a:ln/>
-        </p:spPr>
-        <p:txBody>
-          <a:bodyPr wrap="square" lIns="0" tIns="0" rIns="0" bIns="0" rtlCol="0" anchor="ctr"/>
-          <a:lstStyle/>
-          <a:p>
-            <a:pPr algn="l" indent="0" marL="0">
-              <a:buNone/>
-            </a:pPr>
-            <a:r>
-              <a:rPr lang="en-US" sz="1100" b="1" spc="150" kern="0" dirty="0">
-                <a:solidFill>
-                  <a:srgbClr val="00838F"/>
-                </a:solidFill>
-                <a:latin typeface="Calibri" pitchFamily="34" charset="0"/>
-                <a:ea typeface="Calibri" pitchFamily="34" charset="-122"/>
-                <a:cs typeface="Calibri" pitchFamily="34" charset="-120"/>
-              </a:rPr>
-              <a:t>MOLECULAR &amp; CYTOGENETICS   ·   CASE 1</a:t>
-            </a:r>
-            <a:endParaRPr lang="en-US" sz="1100" dirty="0"/>
-          </a:p>
-        </p:txBody>
-      </p:sp>
-      <p:sp>
-        <p:nvSpPr>
-          <p:cNvPr id="3" name="Text 1"/>
-          <p:cNvSpPr/>
-          <p:nvPr/>
-        </p:nvSpPr>
-        <p:spPr>
-          <a:xfrm>
-            <a:off x="566928" y="713232"/>
-            <a:ext cx="11064240" cy="749808"/>
-          </a:xfrm>
-          <a:prstGeom prst="rect">
-            <a:avLst/>
-          </a:prstGeom>
-          <a:noFill/>
-          <a:ln/>
-        </p:spPr>
-        <p:txBody>
-          <a:bodyPr wrap="square" lIns="0" tIns="0" rIns="0" bIns="0" rtlCol="0" anchor="ctr"/>
-          <a:lstStyle/>
-          <a:p>
-            <a:pPr algn="l" indent="0" marL="0">
-              <a:buNone/>
-            </a:pPr>
-            <a:r>
-              <a:rPr lang="en-US" sz="3000" b="1" dirty="0">
-                <a:solidFill>
-                  <a:srgbClr val="0E3A5F"/>
-                </a:solidFill>
-                <a:latin typeface="Calibri" pitchFamily="34" charset="0"/>
-                <a:ea typeface="Calibri" pitchFamily="34" charset="-122"/>
-                <a:cs typeface="Calibri" pitchFamily="34" charset="-120"/>
-              </a:rPr>
-              <a:t>Case 1</a:t>
-            </a:r>
-            <a:endParaRPr lang="en-US" sz="3000" dirty="0"/>
-          </a:p>
-        </p:txBody>
-      </p:sp>
-      <p:sp>
-        <p:nvSpPr>
-          <p:cNvPr id="4" name="Shape 2"/>
-          <p:cNvSpPr/>
-          <p:nvPr/>
-        </p:nvSpPr>
-        <p:spPr>
-          <a:xfrm>
-            <a:off x="566928" y="1517904"/>
-            <a:ext cx="11057839" cy="2788920"/>
-          </a:xfrm>
-          <a:prstGeom prst="roundRect">
-            <a:avLst>
-              <a:gd name="adj" fmla="val 2951"/>
-            </a:avLst>
-          </a:prstGeom>
-          <a:solidFill>
-            <a:srgbClr val="E0F2F4"/>
-          </a:solidFill>
-          <a:ln/>
-          <a:effectLst>
-            <a:outerShdw sx="100000" sy="100000" kx="0" ky="0" algn="bl" rotWithShape="0" blurRad="88900" dist="25400" dir="5400000">
-              <a:srgbClr val="22303C">
-                <a:alpha val="12000"/>
-              </a:srgbClr>
-            </a:outerShdw>
-          </a:effectLst>
-        </p:spPr>
-      </p:sp>
-      <p:sp>
-        <p:nvSpPr>
-          <p:cNvPr id="5" name="Text 3"/>
-          <p:cNvSpPr/>
-          <p:nvPr/>
-        </p:nvSpPr>
-        <p:spPr>
-          <a:xfrm>
-            <a:off x="841248" y="1700784"/>
-            <a:ext cx="5486400" cy="292608"/>
-          </a:xfrm>
-          <a:prstGeom prst="rect">
-            <a:avLst/>
-          </a:prstGeom>
-          <a:noFill/>
-          <a:ln/>
-        </p:spPr>
-        <p:txBody>
-          <a:bodyPr wrap="square" lIns="0" tIns="0" rIns="0" bIns="0" rtlCol="0" anchor="ctr"/>
-          <a:lstStyle/>
-          <a:p>
-            <a:pPr indent="0" marL="0">
-              <a:buNone/>
-            </a:pPr>
-            <a:r>
-              <a:rPr lang="en-US" sz="1100" b="1" spc="150" kern="0" dirty="0">
-                <a:solidFill>
-                  <a:srgbClr val="00838F"/>
-                </a:solidFill>
-                <a:latin typeface="Calibri" pitchFamily="34" charset="0"/>
-                <a:ea typeface="Calibri" pitchFamily="34" charset="-122"/>
-                <a:cs typeface="Calibri" pitchFamily="34" charset="-120"/>
-              </a:rPr>
-              <a:t>CLINICAL VIGNETTE</a:t>
-            </a:r>
-            <a:endParaRPr lang="en-US" sz="1100" dirty="0"/>
-          </a:p>
-        </p:txBody>
-      </p:sp>
-      <p:sp>
-        <p:nvSpPr>
-          <p:cNvPr id="6" name="Text 4"/>
-          <p:cNvSpPr/>
-          <p:nvPr/>
-        </p:nvSpPr>
-        <p:spPr>
-          <a:xfrm>
-            <a:off x="841248" y="2029968"/>
-            <a:ext cx="10509199" cy="2148840"/>
-          </a:xfrm>
-          <a:prstGeom prst="rect">
-            <a:avLst/>
-          </a:prstGeom>
-          <a:noFill/>
-          <a:ln/>
-        </p:spPr>
-        <p:txBody>
-          <a:bodyPr wrap="square" lIns="0" tIns="0" rIns="0" bIns="0" rtlCol="0" anchor="t"/>
-          <a:lstStyle/>
-          <a:p>
-            <a:pPr algn="l" indent="0" marL="0">
-              <a:lnSpc>
-                <a:spcPct val="108000"/>
-              </a:lnSpc>
-              <a:buNone/>
-            </a:pPr>
-            <a:r>
-              <a:rPr lang="en-US" sz="1450" dirty="0">
-                <a:solidFill>
-                  <a:srgbClr val="33444F"/>
-                </a:solidFill>
-                <a:latin typeface="Calibri" pitchFamily="34" charset="0"/>
-                <a:ea typeface="Calibri" pitchFamily="34" charset="-122"/>
-                <a:cs typeface="Calibri" pitchFamily="34" charset="-120"/>
-              </a:rPr>
-              <a:t>An NGS run reports a low-level (3% VAF) C&gt;T variant in an FFPE sample at a position with otherwise modest depth. The clinician asks whether it is real.</a:t>
-            </a:r>
-            <a:endParaRPr lang="en-US" sz="1450" dirty="0"/>
-          </a:p>
-        </p:txBody>
-      </p:sp>
-      <p:sp>
-        <p:nvSpPr>
-          <p:cNvPr id="7" name="Shape 5"/>
-          <p:cNvSpPr/>
-          <p:nvPr/>
-        </p:nvSpPr>
-        <p:spPr>
-          <a:xfrm>
-            <a:off x="566928" y="4553712"/>
-            <a:ext cx="11057839" cy="1325880"/>
-          </a:xfrm>
-          <a:prstGeom prst="roundRect">
-            <a:avLst>
-              <a:gd name="adj" fmla="val 6207"/>
-            </a:avLst>
-          </a:prstGeom>
-          <a:solidFill>
-            <a:srgbClr val="0E3A5F"/>
-          </a:solidFill>
-          <a:ln/>
-          <a:effectLst>
-            <a:outerShdw sx="100000" sy="100000" kx="0" ky="0" algn="bl" rotWithShape="0" blurRad="88900" dist="25400" dir="5400000">
-              <a:srgbClr val="22303C">
-                <a:alpha val="12000"/>
-              </a:srgbClr>
-            </a:outerShdw>
-          </a:effectLst>
-        </p:spPr>
-      </p:sp>
-      <p:sp>
-        <p:nvSpPr>
-          <p:cNvPr id="8" name="Text 6"/>
-          <p:cNvSpPr/>
-          <p:nvPr/>
-        </p:nvSpPr>
-        <p:spPr>
-          <a:xfrm>
-            <a:off x="822960" y="4681728"/>
-            <a:ext cx="640080" cy="960120"/>
-          </a:xfrm>
-          <a:prstGeom prst="rect">
-            <a:avLst/>
-          </a:prstGeom>
-          <a:noFill/>
-          <a:ln/>
-        </p:spPr>
-        <p:txBody>
-          <a:bodyPr wrap="square" lIns="0" tIns="0" rIns="0" bIns="0" rtlCol="0" anchor="ctr"/>
-          <a:lstStyle/>
-          <a:p>
-            <a:pPr algn="ctr" indent="0" marL="0">
-              <a:buNone/>
-            </a:pPr>
-            <a:r>
-              <a:rPr lang="en-US" sz="4000" b="1" dirty="0">
-                <a:solidFill>
-                  <a:srgbClr val="00838F"/>
-                </a:solidFill>
-                <a:latin typeface="Calibri" pitchFamily="34" charset="0"/>
-                <a:ea typeface="Calibri" pitchFamily="34" charset="-122"/>
-                <a:cs typeface="Calibri" pitchFamily="34" charset="-120"/>
-              </a:rPr>
-              <a:t>?</a:t>
-            </a:r>
-            <a:endParaRPr lang="en-US" sz="4000" dirty="0"/>
-          </a:p>
-        </p:txBody>
-      </p:sp>
-      <p:sp>
-        <p:nvSpPr>
-          <p:cNvPr id="9" name="Text 7"/>
-          <p:cNvSpPr/>
-          <p:nvPr/>
-        </p:nvSpPr>
-        <p:spPr>
-          <a:xfrm>
-            <a:off x="1618488" y="4553712"/>
-            <a:ext cx="9686239" cy="1325880"/>
-          </a:xfrm>
-          <a:prstGeom prst="rect">
-            <a:avLst/>
-          </a:prstGeom>
-          <a:noFill/>
-          <a:ln/>
-        </p:spPr>
-        <p:txBody>
-          <a:bodyPr wrap="square" lIns="0" tIns="0" rIns="0" bIns="0" rtlCol="0" anchor="ctr"/>
-          <a:lstStyle/>
-          <a:p>
-            <a:pPr algn="l" indent="0" marL="0">
-              <a:buNone/>
-            </a:pPr>
-            <a:r>
-              <a:rPr lang="en-US" sz="1500" b="1" dirty="0">
-                <a:solidFill>
-                  <a:srgbClr val="FFFFFF"/>
-                </a:solidFill>
-                <a:latin typeface="Calibri" pitchFamily="34" charset="0"/>
-                <a:ea typeface="Calibri" pitchFamily="34" charset="-122"/>
-                <a:cs typeface="Calibri" pitchFamily="34" charset="-120"/>
-              </a:rPr>
-              <a:t>What artifact must be excluded, and how?</a:t>
-            </a:r>
-            <a:endParaRPr lang="en-US" sz="1500" dirty="0"/>
-          </a:p>
-        </p:txBody>
-      </p:sp>
-      <p:sp>
-        <p:nvSpPr>
-          <p:cNvPr id="10" name="Text 8"/>
-          <p:cNvSpPr/>
-          <p:nvPr/>
-        </p:nvSpPr>
-        <p:spPr>
-          <a:xfrm>
-            <a:off x="566928" y="6473952"/>
-            <a:ext cx="7772400" cy="274320"/>
-          </a:xfrm>
-          <a:prstGeom prst="rect">
-            <a:avLst/>
-          </a:prstGeom>
-          <a:noFill/>
-          <a:ln/>
-        </p:spPr>
-        <p:txBody>
-          <a:bodyPr wrap="square" lIns="0" tIns="0" rIns="0" bIns="0" rtlCol="0" anchor="ctr"/>
-          <a:lstStyle/>
-          <a:p>
-            <a:pPr algn="l" indent="0" marL="0">
-              <a:buNone/>
-            </a:pPr>
-            <a:r>
-              <a:rPr lang="en-US" sz="850" dirty="0">
-                <a:solidFill>
-                  <a:srgbClr val="9AA8B4"/>
-                </a:solidFill>
-                <a:latin typeface="Calibri" pitchFamily="34" charset="0"/>
-                <a:ea typeface="Calibri" pitchFamily="34" charset="-122"/>
-                <a:cs typeface="Calibri" pitchFamily="34" charset="-120"/>
-              </a:rPr>
-              <a:t>Makassed General Hospital  ·  Department of Laboratory Medicine</a:t>
-            </a:r>
-            <a:endParaRPr lang="en-US" sz="850" dirty="0"/>
-          </a:p>
-        </p:txBody>
-      </p:sp>
-      <p:sp>
-        <p:nvSpPr>
-          <p:cNvPr id="11" name="Text 9"/>
-          <p:cNvSpPr/>
-          <p:nvPr/>
-        </p:nvSpPr>
-        <p:spPr>
-          <a:xfrm>
-            <a:off x="9814255" y="6473952"/>
-            <a:ext cx="1828800" cy="274320"/>
-          </a:xfrm>
-          <a:prstGeom prst="rect">
-            <a:avLst/>
-          </a:prstGeom>
-          <a:noFill/>
-          <a:ln/>
-        </p:spPr>
-        <p:txBody>
-          <a:bodyPr wrap="square" lIns="0" tIns="0" rIns="0" bIns="0" rtlCol="0" anchor="ctr"/>
-          <a:lstStyle/>
-          <a:p>
-            <a:pPr algn="r" indent="0" marL="0">
-              <a:buNone/>
-            </a:pPr>
-            <a:r>
-              <a:rPr lang="en-US" sz="850" dirty="0">
-                <a:solidFill>
-                  <a:srgbClr val="9AA8B4"/>
-                </a:solidFill>
-                <a:latin typeface="Calibri" pitchFamily="34" charset="0"/>
-                <a:ea typeface="Calibri" pitchFamily="34" charset="-122"/>
-                <a:cs typeface="Calibri" pitchFamily="34" charset="-120"/>
-              </a:rPr>
-              <a:t>CP Lecture Series</a:t>
-            </a:r>
-            <a:pPr algn="r" indent="0" marL="0">
-              <a:buNone/>
-            </a:pPr>
-            <a:r>
-              <a:rPr lang="en-US" sz="850" dirty="0">
-                <a:solidFill>
-                  <a:srgbClr val="DCE4EC"/>
-                </a:solidFill>
-                <a:latin typeface="Calibri" pitchFamily="34" charset="0"/>
-                <a:ea typeface="Calibri" pitchFamily="34" charset="-122"/>
-                <a:cs typeface="Calibri" pitchFamily="34" charset="-120"/>
-              </a:rPr>
-              <a:t>   ·   </a:t>
-            </a:r>
-            <a:pPr algn="r" indent="0" marL="0">
-              <a:buNone/>
-            </a:pPr>
-            <a:r>
-              <a:rPr lang="en-US" sz="850" b="1" dirty="0">
-                <a:solidFill>
-                  <a:srgbClr val="00838F"/>
-                </a:solidFill>
-                <a:latin typeface="Calibri" pitchFamily="34" charset="0"/>
-                <a:ea typeface="Calibri" pitchFamily="34" charset="-122"/>
-                <a:cs typeface="Calibri" pitchFamily="34" charset="-120"/>
-              </a:rPr>
-              <a:t>10</a:t>
-            </a:r>
-            <a:endParaRPr lang="en-US" sz="850" dirty="0"/>
           </a:p>
         </p:txBody>
       </p:sp>
@@ -4839,7 +5326,7 @@
                 <a:ea typeface="Calibri" pitchFamily="34" charset="-122"/>
                 <a:cs typeface="Calibri" pitchFamily="34" charset="-120"/>
               </a:rPr>
-              <a:t>MOLECULAR &amp; CYTOGENETICS   ·   CASE 1  ·  RESOLUTION</a:t>
+              <a:t>MOLECULAR &amp; CYTOGENETICS   ·   CASE 1</a:t>
             </a:r>
             <a:endParaRPr lang="en-US" sz="1100" dirty="0"/>
           </a:p>
@@ -4878,7 +5365,7 @@
                 <a:ea typeface="Calibri" pitchFamily="34" charset="-122"/>
                 <a:cs typeface="Calibri" pitchFamily="34" charset="-120"/>
               </a:rPr>
-              <a:t>Case 1: FFPE Deamination Artifact</a:t>
+              <a:t>Case 1</a:t>
             </a:r>
             <a:endParaRPr lang="en-US" sz="3000" dirty="0"/>
           </a:p>
@@ -4886,124 +5373,18 @@
       </p:sp>
       <p:sp>
         <p:nvSpPr>
-          <p:cNvPr id="4" name="Text 2"/>
-          <p:cNvSpPr/>
-          <p:nvPr/>
-        </p:nvSpPr>
-        <p:spPr>
-          <a:xfrm>
-            <a:off x="566928" y="1554480"/>
-            <a:ext cx="6413547" cy="4023360"/>
-          </a:xfrm>
-          <a:prstGeom prst="rect">
-            <a:avLst/>
-          </a:prstGeom>
-          <a:noFill/>
-          <a:ln/>
-        </p:spPr>
-        <p:txBody>
-          <a:bodyPr wrap="square" lIns="0" tIns="0" rIns="0" bIns="0" rtlCol="0" anchor="t"/>
-          <a:lstStyle/>
-          <a:p>
-            <a:pPr algn="l" marL="177800" indent="-177800">
-              <a:spcAft>
-                <a:spcPts val="900"/>
-              </a:spcAft>
-              <a:buSzPct val="100000"/>
-              <a:buChar char="•"/>
-            </a:pPr>
-            <a:r>
-              <a:rPr lang="en-US" sz="1400" b="1" dirty="0">
-                <a:solidFill>
-                  <a:srgbClr val="1B2A38"/>
-                </a:solidFill>
-                <a:latin typeface="Calibri" pitchFamily="34" charset="0"/>
-                <a:ea typeface="Calibri" pitchFamily="34" charset="-122"/>
-                <a:cs typeface="Calibri" pitchFamily="34" charset="-120"/>
-              </a:rPr>
-              <a:t>Low-level C&gt;T (G&gt;A) changes in FFPE are classic deamination artifacts.</a:t>
-            </a:r>
-            <a:endParaRPr lang="en-US" sz="1400" dirty="0"/>
-          </a:p>
-          <a:p>
-            <a:pPr algn="l" marL="177800" indent="-177800">
-              <a:spcAft>
-                <a:spcPts val="900"/>
-              </a:spcAft>
-              <a:buSzPct val="100000"/>
-              <a:buChar char="•"/>
-            </a:pPr>
-            <a:r>
-              <a:rPr lang="en-US" sz="1400" dirty="0">
-                <a:solidFill>
-                  <a:srgbClr val="33444F"/>
-                </a:solidFill>
-                <a:latin typeface="Calibri" pitchFamily="34" charset="0"/>
-                <a:ea typeface="Calibri" pitchFamily="34" charset="-122"/>
-                <a:cs typeface="Calibri" pitchFamily="34" charset="-120"/>
-              </a:rPr>
-              <a:t>Assess depth, strand balance, and the variant’s plausibility.</a:t>
-            </a:r>
-            <a:endParaRPr lang="en-US" sz="1400" dirty="0"/>
-          </a:p>
-          <a:p>
-            <a:pPr algn="l" marL="177800" indent="-177800">
-              <a:spcAft>
-                <a:spcPts val="900"/>
-              </a:spcAft>
-              <a:buSzPct val="100000"/>
-              <a:buChar char="•"/>
-            </a:pPr>
-            <a:r>
-              <a:rPr lang="en-US" sz="1400" dirty="0">
-                <a:solidFill>
-                  <a:srgbClr val="33444F"/>
-                </a:solidFill>
-                <a:latin typeface="Calibri" pitchFamily="34" charset="0"/>
-                <a:ea typeface="Calibri" pitchFamily="34" charset="-122"/>
-                <a:cs typeface="Calibri" pitchFamily="34" charset="-120"/>
-              </a:rPr>
-              <a:t>Confirm with an orthogonal method or a fresh/duplicate sample if clinically important.</a:t>
-            </a:r>
-            <a:endParaRPr lang="en-US" sz="1400" dirty="0"/>
-          </a:p>
-          <a:p>
-            <a:pPr algn="l" marL="177800" indent="-177800">
-              <a:spcAft>
-                <a:spcPts val="900"/>
-              </a:spcAft>
-              <a:buSzPct val="100000"/>
-              <a:buChar char="•"/>
-            </a:pPr>
-            <a:r>
-              <a:rPr lang="en-US" sz="1400" dirty="0">
-                <a:solidFill>
-                  <a:srgbClr val="33444F"/>
-                </a:solidFill>
-                <a:latin typeface="Calibri" pitchFamily="34" charset="0"/>
-                <a:ea typeface="Calibri" pitchFamily="34" charset="-122"/>
-                <a:cs typeface="Calibri" pitchFamily="34" charset="-120"/>
-              </a:rPr>
-              <a:t>Report cautiously; do not over-call a likely artifact.</a:t>
-            </a:r>
-            <a:endParaRPr lang="en-US" sz="1400" dirty="0"/>
-          </a:p>
-        </p:txBody>
-      </p:sp>
-      <p:sp>
-        <p:nvSpPr>
-          <p:cNvPr id="5" name="Shape 3"/>
-          <p:cNvSpPr/>
-          <p:nvPr/>
-        </p:nvSpPr>
-        <p:spPr>
-          <a:xfrm>
-            <a:off x="7422788" y="1554480"/>
-            <a:ext cx="4201979" cy="3977640"/>
+          <p:cNvPr id="4" name="Shape 2"/>
+          <p:cNvSpPr/>
+          <p:nvPr/>
+        </p:nvSpPr>
+        <p:spPr>
+          <a:xfrm>
+            <a:off x="566928" y="1517904"/>
+            <a:ext cx="11057839" cy="2788920"/>
           </a:xfrm>
           <a:prstGeom prst="roundRect">
             <a:avLst>
-              <a:gd name="adj" fmla="val 2069"/>
+              <a:gd name="adj" fmla="val 2951"/>
             </a:avLst>
           </a:prstGeom>
           <a:solidFill>
@@ -5021,53 +5402,53 @@
       </p:sp>
       <p:sp>
         <p:nvSpPr>
+          <p:cNvPr id="5" name="Text 3"/>
+          <p:cNvSpPr/>
+          <p:nvPr/>
+        </p:nvSpPr>
+        <p:spPr>
+          <a:xfrm>
+            <a:off x="841248" y="1700784"/>
+            <a:ext cx="5486400" cy="292608"/>
+          </a:xfrm>
+          <a:prstGeom prst="rect">
+            <a:avLst/>
+          </a:prstGeom>
+          <a:noFill/>
+          <a:ln/>
+        </p:spPr>
+        <p:txBody>
+          <a:bodyPr wrap="square" lIns="0" tIns="0" rIns="0" bIns="0" rtlCol="0" anchor="ctr"/>
+          <a:lstStyle/>
+          <a:p>
+            <a:pPr indent="0" marL="0">
+              <a:buNone/>
+            </a:pPr>
+            <a:r>
+              <a:rPr lang="en-US" sz="1100" b="1" spc="150" kern="0" dirty="0">
+                <a:solidFill>
+                  <a:srgbClr val="00838F"/>
+                </a:solidFill>
+                <a:latin typeface="Calibri" pitchFamily="34" charset="0"/>
+                <a:ea typeface="Calibri" pitchFamily="34" charset="-122"/>
+                <a:cs typeface="Calibri" pitchFamily="34" charset="-120"/>
+              </a:rPr>
+              <a:t>CLINICAL VIGNETTE</a:t>
+            </a:r>
+            <a:endParaRPr lang="en-US" sz="1100" dirty="0"/>
+          </a:p>
+        </p:txBody>
+      </p:sp>
+      <p:sp>
+        <p:nvSpPr>
           <p:cNvPr id="6" name="Text 4"/>
           <p:cNvSpPr/>
           <p:nvPr/>
         </p:nvSpPr>
         <p:spPr>
           <a:xfrm>
-            <a:off x="7660532" y="1755648"/>
-            <a:ext cx="3744779" cy="310896"/>
-          </a:xfrm>
-          <a:prstGeom prst="rect">
-            <a:avLst/>
-          </a:prstGeom>
-          <a:noFill/>
-          <a:ln/>
-        </p:spPr>
-        <p:txBody>
-          <a:bodyPr wrap="square" lIns="0" tIns="0" rIns="0" bIns="0" rtlCol="0" anchor="ctr"/>
-          <a:lstStyle/>
-          <a:p>
-            <a:pPr indent="0" marL="0">
-              <a:buNone/>
-            </a:pPr>
-            <a:r>
-              <a:rPr lang="en-US" sz="1100" b="1" spc="140" kern="0" dirty="0">
-                <a:solidFill>
-                  <a:srgbClr val="00838F"/>
-                </a:solidFill>
-                <a:latin typeface="Calibri" pitchFamily="34" charset="0"/>
-                <a:ea typeface="Calibri" pitchFamily="34" charset="-122"/>
-                <a:cs typeface="Calibri" pitchFamily="34" charset="-120"/>
-              </a:rPr>
-              <a:t>TEACHING POINT</a:t>
-            </a:r>
-            <a:endParaRPr lang="en-US" sz="1100" dirty="0"/>
-          </a:p>
-        </p:txBody>
-      </p:sp>
-      <p:sp>
-        <p:nvSpPr>
-          <p:cNvPr id="7" name="Text 5"/>
-          <p:cNvSpPr/>
-          <p:nvPr/>
-        </p:nvSpPr>
-        <p:spPr>
-          <a:xfrm>
-            <a:off x="7660532" y="2121408"/>
-            <a:ext cx="3726491" cy="3291840"/>
+            <a:off x="841248" y="2029968"/>
+            <a:ext cx="10509199" cy="2148840"/>
           </a:xfrm>
           <a:prstGeom prst="rect">
             <a:avLst/>
@@ -5081,12 +5462,12 @@
           <a:p>
             <a:pPr algn="l" indent="0" marL="0">
               <a:lnSpc>
-                <a:spcPct val="110000"/>
+                <a:spcPct val="108000"/>
               </a:lnSpc>
               <a:buNone/>
             </a:pPr>
             <a:r>
-              <a:rPr lang="en-US" sz="1350" dirty="0">
+              <a:rPr lang="en-US" sz="1450" dirty="0">
                 <a:solidFill>
                   <a:srgbClr val="33444F"/>
                 </a:solidFill>
@@ -5094,15 +5475,122 @@
                 <a:ea typeface="Calibri" pitchFamily="34" charset="-122"/>
                 <a:cs typeface="Calibri" pitchFamily="34" charset="-120"/>
               </a:rPr>
-              <a:t>Treat low-VAF C&gt;T calls in FFPE skeptically — evaluate strand bias and depth, and confirm before reporting a clinically important variant.</a:t>
-            </a:r>
-            <a:endParaRPr lang="en-US" sz="1350" dirty="0"/>
-          </a:p>
-        </p:txBody>
+              <a:t>A laboratory wants to offer a new NGS panel it designed in-house.</a:t>
+            </a:r>
+            <a:endParaRPr lang="en-US" sz="1450" dirty="0"/>
+          </a:p>
+        </p:txBody>
+      </p:sp>
+      <p:sp>
+        <p:nvSpPr>
+          <p:cNvPr id="7" name="Shape 5"/>
+          <p:cNvSpPr/>
+          <p:nvPr/>
+        </p:nvSpPr>
+        <p:spPr>
+          <a:xfrm>
+            <a:off x="566928" y="4553712"/>
+            <a:ext cx="11057839" cy="1325880"/>
+          </a:xfrm>
+          <a:prstGeom prst="roundRect">
+            <a:avLst>
+              <a:gd name="adj" fmla="val 6207"/>
+            </a:avLst>
+          </a:prstGeom>
+          <a:solidFill>
+            <a:srgbClr val="0E3A5F"/>
+          </a:solidFill>
+          <a:ln/>
+          <a:effectLst>
+            <a:outerShdw sx="100000" sy="100000" kx="0" ky="0" algn="bl" rotWithShape="0" blurRad="88900" dist="25400" dir="5400000">
+              <a:srgbClr val="22303C">
+                <a:alpha val="12000"/>
+              </a:srgbClr>
+            </a:outerShdw>
+          </a:effectLst>
+        </p:spPr>
       </p:sp>
       <p:sp>
         <p:nvSpPr>
           <p:cNvPr id="8" name="Text 6"/>
+          <p:cNvSpPr/>
+          <p:nvPr/>
+        </p:nvSpPr>
+        <p:spPr>
+          <a:xfrm>
+            <a:off x="822960" y="4681728"/>
+            <a:ext cx="640080" cy="960120"/>
+          </a:xfrm>
+          <a:prstGeom prst="rect">
+            <a:avLst/>
+          </a:prstGeom>
+          <a:noFill/>
+          <a:ln/>
+        </p:spPr>
+        <p:txBody>
+          <a:bodyPr wrap="square" lIns="0" tIns="0" rIns="0" bIns="0" rtlCol="0" anchor="ctr"/>
+          <a:lstStyle/>
+          <a:p>
+            <a:pPr algn="ctr" indent="0" marL="0">
+              <a:buNone/>
+            </a:pPr>
+            <a:r>
+              <a:rPr lang="en-US" sz="4000" b="1" dirty="0">
+                <a:solidFill>
+                  <a:srgbClr val="00838F"/>
+                </a:solidFill>
+                <a:latin typeface="Calibri" pitchFamily="34" charset="0"/>
+                <a:ea typeface="Calibri" pitchFamily="34" charset="-122"/>
+                <a:cs typeface="Calibri" pitchFamily="34" charset="-120"/>
+              </a:rPr>
+              <a:t>?</a:t>
+            </a:r>
+            <a:endParaRPr lang="en-US" sz="4000" dirty="0"/>
+          </a:p>
+        </p:txBody>
+      </p:sp>
+      <p:sp>
+        <p:nvSpPr>
+          <p:cNvPr id="9" name="Text 7"/>
+          <p:cNvSpPr/>
+          <p:nvPr/>
+        </p:nvSpPr>
+        <p:spPr>
+          <a:xfrm>
+            <a:off x="1618488" y="4553712"/>
+            <a:ext cx="9686239" cy="1325880"/>
+          </a:xfrm>
+          <a:prstGeom prst="rect">
+            <a:avLst/>
+          </a:prstGeom>
+          <a:noFill/>
+          <a:ln/>
+        </p:spPr>
+        <p:txBody>
+          <a:bodyPr wrap="square" lIns="0" tIns="0" rIns="0" bIns="0" rtlCol="0" anchor="ctr"/>
+          <a:lstStyle/>
+          <a:p>
+            <a:pPr algn="l" indent="0" marL="0">
+              <a:buNone/>
+            </a:pPr>
+            <a:r>
+              <a:rPr lang="en-US" sz="1500" b="1" dirty="0">
+                <a:solidFill>
+                  <a:srgbClr val="FFFFFF"/>
+                </a:solidFill>
+                <a:latin typeface="Calibri" pitchFamily="34" charset="0"/>
+                <a:ea typeface="Calibri" pitchFamily="34" charset="-122"/>
+                <a:cs typeface="Calibri" pitchFamily="34" charset="-120"/>
+              </a:rPr>
+              <a:t>What is required before clinical use, and what is special about NGS?</a:t>
+            </a:r>
+            <a:endParaRPr lang="en-US" sz="1500" dirty="0"/>
+          </a:p>
+        </p:txBody>
+      </p:sp>
+      <p:sp>
+        <p:nvSpPr>
+          <p:cNvPr id="10" name="Text 8"/>
           <p:cNvSpPr/>
           <p:nvPr/>
         </p:nvSpPr>
@@ -5141,7 +5629,7 @@
       </p:sp>
       <p:sp>
         <p:nvSpPr>
-          <p:cNvPr id="9" name="Text 7"/>
+          <p:cNvPr id="11" name="Text 9"/>
           <p:cNvSpPr/>
           <p:nvPr/>
         </p:nvSpPr>
@@ -5271,7 +5759,7 @@
                 <a:ea typeface="Calibri" pitchFamily="34" charset="-122"/>
                 <a:cs typeface="Calibri" pitchFamily="34" charset="-120"/>
               </a:rPr>
-              <a:t>MOLECULAR &amp; CYTOGENETICS   ·   CASE 2</a:t>
+              <a:t>MOLECULAR &amp; CYTOGENETICS   ·   CASE 1  ·  RESOLUTION</a:t>
             </a:r>
             <a:endParaRPr lang="en-US" sz="1100" dirty="0"/>
           </a:p>
@@ -5310,7 +5798,7 @@
                 <a:ea typeface="Calibri" pitchFamily="34" charset="-122"/>
                 <a:cs typeface="Calibri" pitchFamily="34" charset="-120"/>
               </a:rPr>
-              <a:t>Case 2</a:t>
+              <a:t>Case 1: Validating an LDT Panel</a:t>
             </a:r>
             <a:endParaRPr lang="en-US" sz="3000" dirty="0"/>
           </a:p>
@@ -5318,18 +5806,124 @@
       </p:sp>
       <p:sp>
         <p:nvSpPr>
-          <p:cNvPr id="4" name="Shape 2"/>
-          <p:cNvSpPr/>
-          <p:nvPr/>
-        </p:nvSpPr>
-        <p:spPr>
-          <a:xfrm>
-            <a:off x="566928" y="1517904"/>
-            <a:ext cx="11057839" cy="2788920"/>
+          <p:cNvPr id="4" name="Text 2"/>
+          <p:cNvSpPr/>
+          <p:nvPr/>
+        </p:nvSpPr>
+        <p:spPr>
+          <a:xfrm>
+            <a:off x="566928" y="1554480"/>
+            <a:ext cx="6413547" cy="4023360"/>
+          </a:xfrm>
+          <a:prstGeom prst="rect">
+            <a:avLst/>
+          </a:prstGeom>
+          <a:noFill/>
+          <a:ln/>
+        </p:spPr>
+        <p:txBody>
+          <a:bodyPr wrap="square" lIns="0" tIns="0" rIns="0" bIns="0" rtlCol="0" anchor="t"/>
+          <a:lstStyle/>
+          <a:p>
+            <a:pPr algn="l" marL="177800" indent="-177800">
+              <a:spcAft>
+                <a:spcPts val="900"/>
+              </a:spcAft>
+              <a:buSzPct val="100000"/>
+              <a:buChar char="•"/>
+            </a:pPr>
+            <a:r>
+              <a:rPr lang="en-US" sz="1400" b="1" dirty="0">
+                <a:solidFill>
+                  <a:srgbClr val="1B2A38"/>
+                </a:solidFill>
+                <a:latin typeface="Calibri" pitchFamily="34" charset="0"/>
+                <a:ea typeface="Calibri" pitchFamily="34" charset="-122"/>
+                <a:cs typeface="Calibri" pitchFamily="34" charset="-120"/>
+              </a:rPr>
+              <a:t>A laboratory-developed test requires full validation of all performance characteristics before clinical use.</a:t>
+            </a:r>
+            <a:endParaRPr lang="en-US" sz="1400" dirty="0"/>
+          </a:p>
+          <a:p>
+            <a:pPr algn="l" marL="177800" indent="-177800">
+              <a:spcAft>
+                <a:spcPts val="900"/>
+              </a:spcAft>
+              <a:buSzPct val="100000"/>
+              <a:buChar char="•"/>
+            </a:pPr>
+            <a:r>
+              <a:rPr lang="en-US" sz="1400" dirty="0">
+                <a:solidFill>
+                  <a:srgbClr val="33444F"/>
+                </a:solidFill>
+                <a:latin typeface="Calibri" pitchFamily="34" charset="0"/>
+                <a:ea typeface="Calibri" pitchFamily="34" charset="-122"/>
+                <a:cs typeface="Calibri" pitchFamily="34" charset="-120"/>
+              </a:rPr>
+              <a:t>For NGS, this includes the bioinformatics pipeline, not just the wet bench.</a:t>
+            </a:r>
+            <a:endParaRPr lang="en-US" sz="1400" dirty="0"/>
+          </a:p>
+          <a:p>
+            <a:pPr algn="l" marL="177800" indent="-177800">
+              <a:spcAft>
+                <a:spcPts val="900"/>
+              </a:spcAft>
+              <a:buSzPct val="100000"/>
+              <a:buChar char="•"/>
+            </a:pPr>
+            <a:r>
+              <a:rPr lang="en-US" sz="1400" dirty="0">
+                <a:solidFill>
+                  <a:srgbClr val="33444F"/>
+                </a:solidFill>
+                <a:latin typeface="Calibri" pitchFamily="34" charset="0"/>
+                <a:ea typeface="Calibri" pitchFamily="34" charset="-122"/>
+                <a:cs typeface="Calibri" pitchFamily="34" charset="-120"/>
+              </a:rPr>
+              <a:t>Define variant types, depth, and limit of detection.</a:t>
+            </a:r>
+            <a:endParaRPr lang="en-US" sz="1400" dirty="0"/>
+          </a:p>
+          <a:p>
+            <a:pPr algn="l" marL="177800" indent="-177800">
+              <a:spcAft>
+                <a:spcPts val="900"/>
+              </a:spcAft>
+              <a:buSzPct val="100000"/>
+              <a:buChar char="•"/>
+            </a:pPr>
+            <a:r>
+              <a:rPr lang="en-US" sz="1400" dirty="0">
+                <a:solidFill>
+                  <a:srgbClr val="33444F"/>
+                </a:solidFill>
+                <a:latin typeface="Calibri" pitchFamily="34" charset="0"/>
+                <a:ea typeface="Calibri" pitchFamily="34" charset="-122"/>
+                <a:cs typeface="Calibri" pitchFamily="34" charset="-120"/>
+              </a:rPr>
+              <a:t>Document thoroughly for accreditation.</a:t>
+            </a:r>
+            <a:endParaRPr lang="en-US" sz="1400" dirty="0"/>
+          </a:p>
+        </p:txBody>
+      </p:sp>
+      <p:sp>
+        <p:nvSpPr>
+          <p:cNvPr id="5" name="Shape 3"/>
+          <p:cNvSpPr/>
+          <p:nvPr/>
+        </p:nvSpPr>
+        <p:spPr>
+          <a:xfrm>
+            <a:off x="7422788" y="1554480"/>
+            <a:ext cx="4201979" cy="3977640"/>
           </a:xfrm>
           <a:prstGeom prst="roundRect">
             <a:avLst>
-              <a:gd name="adj" fmla="val 2951"/>
+              <a:gd name="adj" fmla="val 2069"/>
             </a:avLst>
           </a:prstGeom>
           <a:solidFill>
@@ -5347,14 +5941,14 @@
       </p:sp>
       <p:sp>
         <p:nvSpPr>
-          <p:cNvPr id="5" name="Text 3"/>
-          <p:cNvSpPr/>
-          <p:nvPr/>
-        </p:nvSpPr>
-        <p:spPr>
-          <a:xfrm>
-            <a:off x="841248" y="1700784"/>
-            <a:ext cx="5486400" cy="292608"/>
+          <p:cNvPr id="6" name="Text 4"/>
+          <p:cNvSpPr/>
+          <p:nvPr/>
+        </p:nvSpPr>
+        <p:spPr>
+          <a:xfrm>
+            <a:off x="7660532" y="1755648"/>
+            <a:ext cx="3744779" cy="310896"/>
           </a:xfrm>
           <a:prstGeom prst="rect">
             <a:avLst/>
@@ -5370,7 +5964,7 @@
               <a:buNone/>
             </a:pPr>
             <a:r>
-              <a:rPr lang="en-US" sz="1100" b="1" spc="150" kern="0" dirty="0">
+              <a:rPr lang="en-US" sz="1100" b="1" spc="140" kern="0" dirty="0">
                 <a:solidFill>
                   <a:srgbClr val="00838F"/>
                 </a:solidFill>
@@ -5378,7 +5972,7 @@
                 <a:ea typeface="Calibri" pitchFamily="34" charset="-122"/>
                 <a:cs typeface="Calibri" pitchFamily="34" charset="-120"/>
               </a:rPr>
-              <a:t>CLINICAL VIGNETTE</a:t>
+              <a:t>TEACHING POINT</a:t>
             </a:r>
             <a:endParaRPr lang="en-US" sz="1100" dirty="0"/>
           </a:p>
@@ -5386,14 +5980,14 @@
       </p:sp>
       <p:sp>
         <p:nvSpPr>
-          <p:cNvPr id="6" name="Text 4"/>
-          <p:cNvSpPr/>
-          <p:nvPr/>
-        </p:nvSpPr>
-        <p:spPr>
-          <a:xfrm>
-            <a:off x="841248" y="2029968"/>
-            <a:ext cx="10509199" cy="2148840"/>
+          <p:cNvPr id="7" name="Text 5"/>
+          <p:cNvSpPr/>
+          <p:nvPr/>
+        </p:nvSpPr>
+        <p:spPr>
+          <a:xfrm>
+            <a:off x="7660532" y="2121408"/>
+            <a:ext cx="3726491" cy="3291840"/>
           </a:xfrm>
           <a:prstGeom prst="rect">
             <a:avLst/>
@@ -5407,12 +6001,12 @@
           <a:p>
             <a:pPr algn="l" indent="0" marL="0">
               <a:lnSpc>
-                <a:spcPct val="108000"/>
+                <a:spcPct val="110000"/>
               </a:lnSpc>
               <a:buNone/>
             </a:pPr>
             <a:r>
-              <a:rPr lang="en-US" sz="1450" dirty="0">
+              <a:rPr lang="en-US" sz="1350" dirty="0">
                 <a:solidFill>
                   <a:srgbClr val="33444F"/>
                 </a:solidFill>
@@ -5420,122 +6014,15 @@
                 <a:ea typeface="Calibri" pitchFamily="34" charset="-122"/>
                 <a:cs typeface="Calibri" pitchFamily="34" charset="-120"/>
               </a:rPr>
-              <a:t>A clinically important region of a gene is reported as 'not assessed' because read depth fell below the validated minimum in that exon.</a:t>
-            </a:r>
-            <a:endParaRPr lang="en-US" sz="1450" dirty="0"/>
-          </a:p>
-        </p:txBody>
-      </p:sp>
-      <p:sp>
-        <p:nvSpPr>
-          <p:cNvPr id="7" name="Shape 5"/>
-          <p:cNvSpPr/>
-          <p:nvPr/>
-        </p:nvSpPr>
-        <p:spPr>
-          <a:xfrm>
-            <a:off x="566928" y="4553712"/>
-            <a:ext cx="11057839" cy="1325880"/>
-          </a:xfrm>
-          <a:prstGeom prst="roundRect">
-            <a:avLst>
-              <a:gd name="adj" fmla="val 6207"/>
-            </a:avLst>
-          </a:prstGeom>
-          <a:solidFill>
-            <a:srgbClr val="0E3A5F"/>
-          </a:solidFill>
-          <a:ln/>
-          <a:effectLst>
-            <a:outerShdw sx="100000" sy="100000" kx="0" ky="0" algn="bl" rotWithShape="0" blurRad="88900" dist="25400" dir="5400000">
-              <a:srgbClr val="22303C">
-                <a:alpha val="12000"/>
-              </a:srgbClr>
-            </a:outerShdw>
-          </a:effectLst>
-        </p:spPr>
+              <a:t>For an in-house NGS panel, validate both the wet-bench process and the bioinformatics pipeline — the software is part of the assay.</a:t>
+            </a:r>
+            <a:endParaRPr lang="en-US" sz="1350" dirty="0"/>
+          </a:p>
+        </p:txBody>
       </p:sp>
       <p:sp>
         <p:nvSpPr>
           <p:cNvPr id="8" name="Text 6"/>
-          <p:cNvSpPr/>
-          <p:nvPr/>
-        </p:nvSpPr>
-        <p:spPr>
-          <a:xfrm>
-            <a:off x="822960" y="4681728"/>
-            <a:ext cx="640080" cy="960120"/>
-          </a:xfrm>
-          <a:prstGeom prst="rect">
-            <a:avLst/>
-          </a:prstGeom>
-          <a:noFill/>
-          <a:ln/>
-        </p:spPr>
-        <p:txBody>
-          <a:bodyPr wrap="square" lIns="0" tIns="0" rIns="0" bIns="0" rtlCol="0" anchor="ctr"/>
-          <a:lstStyle/>
-          <a:p>
-            <a:pPr algn="ctr" indent="0" marL="0">
-              <a:buNone/>
-            </a:pPr>
-            <a:r>
-              <a:rPr lang="en-US" sz="4000" b="1" dirty="0">
-                <a:solidFill>
-                  <a:srgbClr val="00838F"/>
-                </a:solidFill>
-                <a:latin typeface="Calibri" pitchFamily="34" charset="0"/>
-                <a:ea typeface="Calibri" pitchFamily="34" charset="-122"/>
-                <a:cs typeface="Calibri" pitchFamily="34" charset="-120"/>
-              </a:rPr>
-              <a:t>?</a:t>
-            </a:r>
-            <a:endParaRPr lang="en-US" sz="4000" dirty="0"/>
-          </a:p>
-        </p:txBody>
-      </p:sp>
-      <p:sp>
-        <p:nvSpPr>
-          <p:cNvPr id="9" name="Text 7"/>
-          <p:cNvSpPr/>
-          <p:nvPr/>
-        </p:nvSpPr>
-        <p:spPr>
-          <a:xfrm>
-            <a:off x="1618488" y="4553712"/>
-            <a:ext cx="9686239" cy="1325880"/>
-          </a:xfrm>
-          <a:prstGeom prst="rect">
-            <a:avLst/>
-          </a:prstGeom>
-          <a:noFill/>
-          <a:ln/>
-        </p:spPr>
-        <p:txBody>
-          <a:bodyPr wrap="square" lIns="0" tIns="0" rIns="0" bIns="0" rtlCol="0" anchor="ctr"/>
-          <a:lstStyle/>
-          <a:p>
-            <a:pPr algn="l" indent="0" marL="0">
-              <a:buNone/>
-            </a:pPr>
-            <a:r>
-              <a:rPr lang="en-US" sz="1500" b="1" dirty="0">
-                <a:solidFill>
-                  <a:srgbClr val="FFFFFF"/>
-                </a:solidFill>
-                <a:latin typeface="Calibri" pitchFamily="34" charset="0"/>
-                <a:ea typeface="Calibri" pitchFamily="34" charset="-122"/>
-                <a:cs typeface="Calibri" pitchFamily="34" charset="-120"/>
-              </a:rPr>
-              <a:t>How should the report handle this, and why does it matter?</a:t>
-            </a:r>
-            <a:endParaRPr lang="en-US" sz="1500" dirty="0"/>
-          </a:p>
-        </p:txBody>
-      </p:sp>
-      <p:sp>
-        <p:nvSpPr>
-          <p:cNvPr id="10" name="Text 8"/>
           <p:cNvSpPr/>
           <p:nvPr/>
         </p:nvSpPr>
@@ -5574,7 +6061,7 @@
       </p:sp>
       <p:sp>
         <p:nvSpPr>
-          <p:cNvPr id="11" name="Text 9"/>
+          <p:cNvPr id="9" name="Text 7"/>
           <p:cNvSpPr/>
           <p:nvPr/>
         </p:nvSpPr>
@@ -5704,7 +6191,7 @@
                 <a:ea typeface="Calibri" pitchFamily="34" charset="-122"/>
                 <a:cs typeface="Calibri" pitchFamily="34" charset="-120"/>
               </a:rPr>
-              <a:t>MOLECULAR &amp; CYTOGENETICS   ·   CASE 2  ·  RESOLUTION</a:t>
+              <a:t>MOLECULAR &amp; CYTOGENETICS   ·   CASE 2</a:t>
             </a:r>
             <a:endParaRPr lang="en-US" sz="1100" dirty="0"/>
           </a:p>
@@ -5743,7 +6230,7 @@
                 <a:ea typeface="Calibri" pitchFamily="34" charset="-122"/>
                 <a:cs typeface="Calibri" pitchFamily="34" charset="-120"/>
               </a:rPr>
-              <a:t>Case 2: Coverage Gap</a:t>
+              <a:t>Case 2</a:t>
             </a:r>
             <a:endParaRPr lang="en-US" sz="3000" dirty="0"/>
           </a:p>
@@ -5751,124 +6238,18 @@
       </p:sp>
       <p:sp>
         <p:nvSpPr>
-          <p:cNvPr id="4" name="Text 2"/>
-          <p:cNvSpPr/>
-          <p:nvPr/>
-        </p:nvSpPr>
-        <p:spPr>
-          <a:xfrm>
-            <a:off x="566928" y="1554480"/>
-            <a:ext cx="6413547" cy="4023360"/>
-          </a:xfrm>
-          <a:prstGeom prst="rect">
-            <a:avLst/>
-          </a:prstGeom>
-          <a:noFill/>
-          <a:ln/>
-        </p:spPr>
-        <p:txBody>
-          <a:bodyPr wrap="square" lIns="0" tIns="0" rIns="0" bIns="0" rtlCol="0" anchor="t"/>
-          <a:lstStyle/>
-          <a:p>
-            <a:pPr algn="l" marL="177800" indent="-177800">
-              <a:spcAft>
-                <a:spcPts val="900"/>
-              </a:spcAft>
-              <a:buSzPct val="100000"/>
-              <a:buChar char="•"/>
-            </a:pPr>
-            <a:r>
-              <a:rPr lang="en-US" sz="1400" b="1" dirty="0">
-                <a:solidFill>
-                  <a:srgbClr val="1B2A38"/>
-                </a:solidFill>
-                <a:latin typeface="Calibri" pitchFamily="34" charset="0"/>
-                <a:ea typeface="Calibri" pitchFamily="34" charset="-122"/>
-                <a:cs typeface="Calibri" pitchFamily="34" charset="-120"/>
-              </a:rPr>
-              <a:t>Regions below the validated minimum depth cannot be reliably called and must be reported as not assessed (a coverage gap).</a:t>
-            </a:r>
-            <a:endParaRPr lang="en-US" sz="1400" dirty="0"/>
-          </a:p>
-          <a:p>
-            <a:pPr algn="l" marL="177800" indent="-177800">
-              <a:spcAft>
-                <a:spcPts val="900"/>
-              </a:spcAft>
-              <a:buSzPct val="100000"/>
-              <a:buChar char="•"/>
-            </a:pPr>
-            <a:r>
-              <a:rPr lang="en-US" sz="1400" dirty="0">
-                <a:solidFill>
-                  <a:srgbClr val="33444F"/>
-                </a:solidFill>
-                <a:latin typeface="Calibri" pitchFamily="34" charset="0"/>
-                <a:ea typeface="Calibri" pitchFamily="34" charset="-122"/>
-                <a:cs typeface="Calibri" pitchFamily="34" charset="-120"/>
-              </a:rPr>
-              <a:t>A 'no variant detected' is not the same as 'wild-type' if the region was not covered.</a:t>
-            </a:r>
-            <a:endParaRPr lang="en-US" sz="1400" dirty="0"/>
-          </a:p>
-          <a:p>
-            <a:pPr algn="l" marL="177800" indent="-177800">
-              <a:spcAft>
-                <a:spcPts val="900"/>
-              </a:spcAft>
-              <a:buSzPct val="100000"/>
-              <a:buChar char="•"/>
-            </a:pPr>
-            <a:r>
-              <a:rPr lang="en-US" sz="1400" dirty="0">
-                <a:solidFill>
-                  <a:srgbClr val="33444F"/>
-                </a:solidFill>
-                <a:latin typeface="Calibri" pitchFamily="34" charset="0"/>
-                <a:ea typeface="Calibri" pitchFamily="34" charset="-122"/>
-                <a:cs typeface="Calibri" pitchFamily="34" charset="-120"/>
-              </a:rPr>
-              <a:t>Offer reflex/orthogonal testing for clinically critical gaps.</a:t>
-            </a:r>
-            <a:endParaRPr lang="en-US" sz="1400" dirty="0"/>
-          </a:p>
-          <a:p>
-            <a:pPr algn="l" marL="177800" indent="-177800">
-              <a:spcAft>
-                <a:spcPts val="900"/>
-              </a:spcAft>
-              <a:buSzPct val="100000"/>
-              <a:buChar char="•"/>
-            </a:pPr>
-            <a:r>
-              <a:rPr lang="en-US" sz="1400" dirty="0">
-                <a:solidFill>
-                  <a:srgbClr val="33444F"/>
-                </a:solidFill>
-                <a:latin typeface="Calibri" pitchFamily="34" charset="0"/>
-                <a:ea typeface="Calibri" pitchFamily="34" charset="-122"/>
-                <a:cs typeface="Calibri" pitchFamily="34" charset="-120"/>
-              </a:rPr>
-              <a:t>Transparent gap reporting prevents false reassurance.</a:t>
-            </a:r>
-            <a:endParaRPr lang="en-US" sz="1400" dirty="0"/>
-          </a:p>
-        </p:txBody>
-      </p:sp>
-      <p:sp>
-        <p:nvSpPr>
-          <p:cNvPr id="5" name="Shape 3"/>
-          <p:cNvSpPr/>
-          <p:nvPr/>
-        </p:nvSpPr>
-        <p:spPr>
-          <a:xfrm>
-            <a:off x="7422788" y="1554480"/>
-            <a:ext cx="4201979" cy="3977640"/>
+          <p:cNvPr id="4" name="Shape 2"/>
+          <p:cNvSpPr/>
+          <p:nvPr/>
+        </p:nvSpPr>
+        <p:spPr>
+          <a:xfrm>
+            <a:off x="566928" y="1517904"/>
+            <a:ext cx="11057839" cy="2788920"/>
           </a:xfrm>
           <a:prstGeom prst="roundRect">
             <a:avLst>
-              <a:gd name="adj" fmla="val 2069"/>
+              <a:gd name="adj" fmla="val 2951"/>
             </a:avLst>
           </a:prstGeom>
           <a:solidFill>
@@ -5886,53 +6267,53 @@
       </p:sp>
       <p:sp>
         <p:nvSpPr>
+          <p:cNvPr id="5" name="Text 3"/>
+          <p:cNvSpPr/>
+          <p:nvPr/>
+        </p:nvSpPr>
+        <p:spPr>
+          <a:xfrm>
+            <a:off x="841248" y="1700784"/>
+            <a:ext cx="5486400" cy="292608"/>
+          </a:xfrm>
+          <a:prstGeom prst="rect">
+            <a:avLst/>
+          </a:prstGeom>
+          <a:noFill/>
+          <a:ln/>
+        </p:spPr>
+        <p:txBody>
+          <a:bodyPr wrap="square" lIns="0" tIns="0" rIns="0" bIns="0" rtlCol="0" anchor="ctr"/>
+          <a:lstStyle/>
+          <a:p>
+            <a:pPr indent="0" marL="0">
+              <a:buNone/>
+            </a:pPr>
+            <a:r>
+              <a:rPr lang="en-US" sz="1100" b="1" spc="150" kern="0" dirty="0">
+                <a:solidFill>
+                  <a:srgbClr val="00838F"/>
+                </a:solidFill>
+                <a:latin typeface="Calibri" pitchFamily="34" charset="0"/>
+                <a:ea typeface="Calibri" pitchFamily="34" charset="-122"/>
+                <a:cs typeface="Calibri" pitchFamily="34" charset="-120"/>
+              </a:rPr>
+              <a:t>CLINICAL VIGNETTE</a:t>
+            </a:r>
+            <a:endParaRPr lang="en-US" sz="1100" dirty="0"/>
+          </a:p>
+        </p:txBody>
+      </p:sp>
+      <p:sp>
+        <p:nvSpPr>
           <p:cNvPr id="6" name="Text 4"/>
           <p:cNvSpPr/>
           <p:nvPr/>
         </p:nvSpPr>
         <p:spPr>
           <a:xfrm>
-            <a:off x="7660532" y="1755648"/>
-            <a:ext cx="3744779" cy="310896"/>
-          </a:xfrm>
-          <a:prstGeom prst="rect">
-            <a:avLst/>
-          </a:prstGeom>
-          <a:noFill/>
-          <a:ln/>
-        </p:spPr>
-        <p:txBody>
-          <a:bodyPr wrap="square" lIns="0" tIns="0" rIns="0" bIns="0" rtlCol="0" anchor="ctr"/>
-          <a:lstStyle/>
-          <a:p>
-            <a:pPr indent="0" marL="0">
-              <a:buNone/>
-            </a:pPr>
-            <a:r>
-              <a:rPr lang="en-US" sz="1100" b="1" spc="140" kern="0" dirty="0">
-                <a:solidFill>
-                  <a:srgbClr val="00838F"/>
-                </a:solidFill>
-                <a:latin typeface="Calibri" pitchFamily="34" charset="0"/>
-                <a:ea typeface="Calibri" pitchFamily="34" charset="-122"/>
-                <a:cs typeface="Calibri" pitchFamily="34" charset="-120"/>
-              </a:rPr>
-              <a:t>TEACHING POINT</a:t>
-            </a:r>
-            <a:endParaRPr lang="en-US" sz="1100" dirty="0"/>
-          </a:p>
-        </p:txBody>
-      </p:sp>
-      <p:sp>
-        <p:nvSpPr>
-          <p:cNvPr id="7" name="Text 5"/>
-          <p:cNvSpPr/>
-          <p:nvPr/>
-        </p:nvSpPr>
-        <p:spPr>
-          <a:xfrm>
-            <a:off x="7660532" y="2121408"/>
-            <a:ext cx="3726491" cy="3291840"/>
+            <a:off x="841248" y="2029968"/>
+            <a:ext cx="10509199" cy="2148840"/>
           </a:xfrm>
           <a:prstGeom prst="rect">
             <a:avLst/>
@@ -5946,12 +6327,12 @@
           <a:p>
             <a:pPr algn="l" indent="0" marL="0">
               <a:lnSpc>
-                <a:spcPct val="110000"/>
+                <a:spcPct val="108000"/>
               </a:lnSpc>
               <a:buNone/>
             </a:pPr>
             <a:r>
-              <a:rPr lang="en-US" sz="1350" dirty="0">
+              <a:rPr lang="en-US" sz="1450" dirty="0">
                 <a:solidFill>
                   <a:srgbClr val="33444F"/>
                 </a:solidFill>
@@ -5959,15 +6340,122 @@
                 <a:ea typeface="Calibri" pitchFamily="34" charset="-122"/>
                 <a:cs typeface="Calibri" pitchFamily="34" charset="-120"/>
               </a:rPr>
-              <a:t>Always distinguish 'negative' from 'not assessed' — unreported coverage gaps create dangerous false reassurance.</a:t>
-            </a:r>
-            <a:endParaRPr lang="en-US" sz="1350" dirty="0"/>
-          </a:p>
-        </p:txBody>
+              <a:t>The team upgrades the variant-calling software to a new version.</a:t>
+            </a:r>
+            <a:endParaRPr lang="en-US" sz="1450" dirty="0"/>
+          </a:p>
+        </p:txBody>
+      </p:sp>
+      <p:sp>
+        <p:nvSpPr>
+          <p:cNvPr id="7" name="Shape 5"/>
+          <p:cNvSpPr/>
+          <p:nvPr/>
+        </p:nvSpPr>
+        <p:spPr>
+          <a:xfrm>
+            <a:off x="566928" y="4553712"/>
+            <a:ext cx="11057839" cy="1325880"/>
+          </a:xfrm>
+          <a:prstGeom prst="roundRect">
+            <a:avLst>
+              <a:gd name="adj" fmla="val 6207"/>
+            </a:avLst>
+          </a:prstGeom>
+          <a:solidFill>
+            <a:srgbClr val="0E3A5F"/>
+          </a:solidFill>
+          <a:ln/>
+          <a:effectLst>
+            <a:outerShdw sx="100000" sy="100000" kx="0" ky="0" algn="bl" rotWithShape="0" blurRad="88900" dist="25400" dir="5400000">
+              <a:srgbClr val="22303C">
+                <a:alpha val="12000"/>
+              </a:srgbClr>
+            </a:outerShdw>
+          </a:effectLst>
+        </p:spPr>
       </p:sp>
       <p:sp>
         <p:nvSpPr>
           <p:cNvPr id="8" name="Text 6"/>
+          <p:cNvSpPr/>
+          <p:nvPr/>
+        </p:nvSpPr>
+        <p:spPr>
+          <a:xfrm>
+            <a:off x="822960" y="4681728"/>
+            <a:ext cx="640080" cy="960120"/>
+          </a:xfrm>
+          <a:prstGeom prst="rect">
+            <a:avLst/>
+          </a:prstGeom>
+          <a:noFill/>
+          <a:ln/>
+        </p:spPr>
+        <p:txBody>
+          <a:bodyPr wrap="square" lIns="0" tIns="0" rIns="0" bIns="0" rtlCol="0" anchor="ctr"/>
+          <a:lstStyle/>
+          <a:p>
+            <a:pPr algn="ctr" indent="0" marL="0">
+              <a:buNone/>
+            </a:pPr>
+            <a:r>
+              <a:rPr lang="en-US" sz="4000" b="1" dirty="0">
+                <a:solidFill>
+                  <a:srgbClr val="00838F"/>
+                </a:solidFill>
+                <a:latin typeface="Calibri" pitchFamily="34" charset="0"/>
+                <a:ea typeface="Calibri" pitchFamily="34" charset="-122"/>
+                <a:cs typeface="Calibri" pitchFamily="34" charset="-120"/>
+              </a:rPr>
+              <a:t>?</a:t>
+            </a:r>
+            <a:endParaRPr lang="en-US" sz="4000" dirty="0"/>
+          </a:p>
+        </p:txBody>
+      </p:sp>
+      <p:sp>
+        <p:nvSpPr>
+          <p:cNvPr id="9" name="Text 7"/>
+          <p:cNvSpPr/>
+          <p:nvPr/>
+        </p:nvSpPr>
+        <p:spPr>
+          <a:xfrm>
+            <a:off x="1618488" y="4553712"/>
+            <a:ext cx="9686239" cy="1325880"/>
+          </a:xfrm>
+          <a:prstGeom prst="rect">
+            <a:avLst/>
+          </a:prstGeom>
+          <a:noFill/>
+          <a:ln/>
+        </p:spPr>
+        <p:txBody>
+          <a:bodyPr wrap="square" lIns="0" tIns="0" rIns="0" bIns="0" rtlCol="0" anchor="ctr"/>
+          <a:lstStyle/>
+          <a:p>
+            <a:pPr algn="l" indent="0" marL="0">
+              <a:buNone/>
+            </a:pPr>
+            <a:r>
+              <a:rPr lang="en-US" sz="1500" b="1" dirty="0">
+                <a:solidFill>
+                  <a:srgbClr val="FFFFFF"/>
+                </a:solidFill>
+                <a:latin typeface="Calibri" pitchFamily="34" charset="0"/>
+                <a:ea typeface="Calibri" pitchFamily="34" charset="-122"/>
+                <a:cs typeface="Calibri" pitchFamily="34" charset="-120"/>
+              </a:rPr>
+              <a:t>What must happen before reporting clinical results with it?</a:t>
+            </a:r>
+            <a:endParaRPr lang="en-US" sz="1500" dirty="0"/>
+          </a:p>
+        </p:txBody>
+      </p:sp>
+      <p:sp>
+        <p:nvSpPr>
+          <p:cNvPr id="10" name="Text 8"/>
           <p:cNvSpPr/>
           <p:nvPr/>
         </p:nvSpPr>
@@ -6006,7 +6494,7 @@
       </p:sp>
       <p:sp>
         <p:nvSpPr>
-          <p:cNvPr id="9" name="Text 7"/>
+          <p:cNvPr id="11" name="Text 9"/>
           <p:cNvSpPr/>
           <p:nvPr/>
         </p:nvSpPr>
@@ -6136,7 +6624,7 @@
                 <a:ea typeface="Calibri" pitchFamily="34" charset="-122"/>
                 <a:cs typeface="Calibri" pitchFamily="34" charset="-120"/>
               </a:rPr>
-              <a:t>MOLECULAR &amp; CYTOGENETICS   ·   BOARD REVIEW  ·  Q1</a:t>
+              <a:t>MOLECULAR &amp; CYTOGENETICS   ·   CASE 2  ·  RESOLUTION</a:t>
             </a:r>
             <a:endParaRPr lang="en-US" sz="1100" dirty="0"/>
           </a:p>
@@ -6167,7 +6655,7 @@
               <a:buNone/>
             </a:pPr>
             <a:r>
-              <a:rPr lang="en-US" sz="2600" b="1" dirty="0">
+              <a:rPr lang="en-US" sz="3000" b="1" dirty="0">
                 <a:solidFill>
                   <a:srgbClr val="0E3A5F"/>
                 </a:solidFill>
@@ -6175,9 +6663,9 @@
                 <a:ea typeface="Calibri" pitchFamily="34" charset="-122"/>
                 <a:cs typeface="Calibri" pitchFamily="34" charset="-120"/>
               </a:rPr>
-              <a:t>Board-Style Review</a:t>
-            </a:r>
-            <a:endParaRPr lang="en-US" sz="2600" dirty="0"/>
+              <a:t>Case 2: Pipeline Change</a:t>
+            </a:r>
+            <a:endParaRPr lang="en-US" sz="3000" dirty="0"/>
           </a:p>
         </p:txBody>
       </p:sp>
@@ -6189,8 +6677,8 @@
         </p:nvSpPr>
         <p:spPr>
           <a:xfrm>
-            <a:off x="566928" y="1417320"/>
-            <a:ext cx="11057839" cy="914400"/>
+            <a:off x="566928" y="1554480"/>
+            <a:ext cx="6413547" cy="4023360"/>
           </a:xfrm>
           <a:prstGeom prst="rect">
             <a:avLst/>
@@ -6202,14 +6690,15 @@
           <a:bodyPr wrap="square" lIns="0" tIns="0" rIns="0" bIns="0" rtlCol="0" anchor="t"/>
           <a:lstStyle/>
           <a:p>
-            <a:pPr algn="l" indent="0" marL="0">
-              <a:lnSpc>
-                <a:spcPct val="105000"/>
-              </a:lnSpc>
-              <a:buNone/>
-            </a:pPr>
-            <a:r>
-              <a:rPr lang="en-US" sz="1450" b="1" dirty="0">
+            <a:pPr algn="l" marL="177800" indent="-177800">
+              <a:spcAft>
+                <a:spcPts val="900"/>
+              </a:spcAft>
+              <a:buSzPct val="100000"/>
+              <a:buChar char="•"/>
+            </a:pPr>
+            <a:r>
+              <a:rPr lang="en-US" sz="1400" b="1" dirty="0">
                 <a:solidFill>
                   <a:srgbClr val="1B2A38"/>
                 </a:solidFill>
@@ -6217,41 +6706,20 @@
                 <a:ea typeface="Calibri" pitchFamily="34" charset="-122"/>
                 <a:cs typeface="Calibri" pitchFamily="34" charset="-120"/>
               </a:rPr>
-              <a:t>For a laboratory-developed NGS assay, which must be validated before clinical use?</a:t>
-            </a:r>
-            <a:endParaRPr lang="en-US" sz="1450" dirty="0"/>
-          </a:p>
-        </p:txBody>
-      </p:sp>
-      <p:sp>
-        <p:nvSpPr>
-          <p:cNvPr id="5" name="Text 3"/>
-          <p:cNvSpPr/>
-          <p:nvPr/>
-        </p:nvSpPr>
-        <p:spPr>
-          <a:xfrm>
-            <a:off x="658368" y="2395728"/>
-            <a:ext cx="6192390" cy="3017520"/>
-          </a:xfrm>
-          <a:prstGeom prst="rect">
-            <a:avLst/>
-          </a:prstGeom>
-          <a:noFill/>
-          <a:ln/>
-        </p:spPr>
-        <p:txBody>
-          <a:bodyPr wrap="square" lIns="0" tIns="0" rIns="0" bIns="0" rtlCol="0" anchor="t"/>
-          <a:lstStyle/>
-          <a:p>
-            <a:pPr algn="l" indent="0" marL="0">
+              <a:t>A significant bioinformatics change requires revalidation to confirm equivalent or better performance.</a:t>
+            </a:r>
+            <a:endParaRPr lang="en-US" sz="1400" dirty="0"/>
+          </a:p>
+          <a:p>
+            <a:pPr algn="l" marL="177800" indent="-177800">
               <a:spcAft>
-                <a:spcPts val="600"/>
+                <a:spcPts val="900"/>
               </a:spcAft>
-              <a:buNone/>
-            </a:pPr>
-            <a:r>
-              <a:rPr lang="en-US" sz="1350" dirty="0">
+              <a:buSzPct val="100000"/>
+              <a:buChar char="•"/>
+            </a:pPr>
+            <a:r>
+              <a:rPr lang="en-US" sz="1400" dirty="0">
                 <a:solidFill>
                   <a:srgbClr val="33444F"/>
                 </a:solidFill>
@@ -6259,19 +6727,20 @@
                 <a:ea typeface="Calibri" pitchFamily="34" charset="-122"/>
                 <a:cs typeface="Calibri" pitchFamily="34" charset="-120"/>
               </a:rPr>
-              <a:t>A. Only the wet-lab steps</a:t>
-            </a:r>
-            <a:endParaRPr lang="en-US" sz="1350" dirty="0"/>
-          </a:p>
-          <a:p>
-            <a:pPr algn="l" indent="0" marL="0">
+              <a:t>Compare against the prior validated pipeline and reference samples.</a:t>
+            </a:r>
+            <a:endParaRPr lang="en-US" sz="1400" dirty="0"/>
+          </a:p>
+          <a:p>
+            <a:pPr algn="l" marL="177800" indent="-177800">
               <a:spcAft>
-                <a:spcPts val="600"/>
+                <a:spcPts val="900"/>
               </a:spcAft>
-              <a:buNone/>
-            </a:pPr>
-            <a:r>
-              <a:rPr lang="en-US" sz="1350" dirty="0">
+              <a:buSzPct val="100000"/>
+              <a:buChar char="•"/>
+            </a:pPr>
+            <a:r>
+              <a:rPr lang="en-US" sz="1400" dirty="0">
                 <a:solidFill>
                   <a:srgbClr val="33444F"/>
                 </a:solidFill>
@@ -6279,39 +6748,20 @@
                 <a:ea typeface="Calibri" pitchFamily="34" charset="-122"/>
                 <a:cs typeface="Calibri" pitchFamily="34" charset="-120"/>
               </a:rPr>
-              <a:t>B. Only the bioinformatics pipeline</a:t>
-            </a:r>
-            <a:endParaRPr lang="en-US" sz="1350" dirty="0"/>
-          </a:p>
-          <a:p>
-            <a:pPr algn="l" indent="0" marL="0">
+              <a:t>Document version control and the change.</a:t>
+            </a:r>
+            <a:endParaRPr lang="en-US" sz="1400" dirty="0"/>
+          </a:p>
+          <a:p>
+            <a:pPr algn="l" marL="177800" indent="-177800">
               <a:spcAft>
-                <a:spcPts val="600"/>
+                <a:spcPts val="900"/>
               </a:spcAft>
-              <a:buNone/>
-            </a:pPr>
-            <a:r>
-              <a:rPr lang="en-US" sz="1350" b="1" dirty="0">
-                <a:solidFill>
-                  <a:srgbClr val="005A63"/>
-                </a:solidFill>
-                <a:latin typeface="Calibri" pitchFamily="34" charset="0"/>
-                <a:ea typeface="Calibri" pitchFamily="34" charset="-122"/>
-                <a:cs typeface="Calibri" pitchFamily="34" charset="-120"/>
-              </a:rPr>
-              <a:t>C. Both wet-lab and bioinformatic components</a:t>
-            </a:r>
-            <a:endParaRPr lang="en-US" sz="1350" dirty="0"/>
-          </a:p>
-          <a:p>
-            <a:pPr algn="l" indent="0" marL="0">
-              <a:spcAft>
-                <a:spcPts val="600"/>
-              </a:spcAft>
-              <a:buNone/>
-            </a:pPr>
-            <a:r>
-              <a:rPr lang="en-US" sz="1350" dirty="0">
+              <a:buSzPct val="100000"/>
+              <a:buChar char="•"/>
+            </a:pPr>
+            <a:r>
+              <a:rPr lang="en-US" sz="1400" dirty="0">
                 <a:solidFill>
                   <a:srgbClr val="33444F"/>
                 </a:solidFill>
@@ -6319,46 +6769,26 @@
                 <a:ea typeface="Calibri" pitchFamily="34" charset="-122"/>
                 <a:cs typeface="Calibri" pitchFamily="34" charset="-120"/>
               </a:rPr>
-              <a:t>D. Neither, if FDA-cleared reagents are used</a:t>
-            </a:r>
-            <a:endParaRPr lang="en-US" sz="1350" dirty="0"/>
-          </a:p>
-          <a:p>
-            <a:pPr algn="l" indent="0" marL="0">
-              <a:spcAft>
-                <a:spcPts val="600"/>
-              </a:spcAft>
-              <a:buNone/>
-            </a:pPr>
-            <a:r>
-              <a:rPr lang="en-US" sz="1350" dirty="0">
-                <a:solidFill>
-                  <a:srgbClr val="33444F"/>
-                </a:solidFill>
-                <a:latin typeface="Calibri" pitchFamily="34" charset="0"/>
-                <a:ea typeface="Calibri" pitchFamily="34" charset="-122"/>
-                <a:cs typeface="Calibri" pitchFamily="34" charset="-120"/>
-              </a:rPr>
-              <a:t>E. Only the reference range</a:t>
-            </a:r>
-            <a:endParaRPr lang="en-US" sz="1350" dirty="0"/>
-          </a:p>
-        </p:txBody>
-      </p:sp>
-      <p:sp>
-        <p:nvSpPr>
-          <p:cNvPr id="6" name="Shape 4"/>
-          <p:cNvSpPr/>
-          <p:nvPr/>
-        </p:nvSpPr>
-        <p:spPr>
-          <a:xfrm>
-            <a:off x="7201632" y="2395728"/>
-            <a:ext cx="4423136" cy="3246120"/>
+              <a:t>Do not silently deploy software changes.</a:t>
+            </a:r>
+            <a:endParaRPr lang="en-US" sz="1400" dirty="0"/>
+          </a:p>
+        </p:txBody>
+      </p:sp>
+      <p:sp>
+        <p:nvSpPr>
+          <p:cNvPr id="5" name="Shape 3"/>
+          <p:cNvSpPr/>
+          <p:nvPr/>
+        </p:nvSpPr>
+        <p:spPr>
+          <a:xfrm>
+            <a:off x="7422788" y="1554480"/>
+            <a:ext cx="4201979" cy="3977640"/>
           </a:xfrm>
           <a:prstGeom prst="roundRect">
             <a:avLst>
-              <a:gd name="adj" fmla="val 2535"/>
+              <a:gd name="adj" fmla="val 2069"/>
             </a:avLst>
           </a:prstGeom>
           <a:solidFill>
@@ -6376,67 +6806,53 @@
       </p:sp>
       <p:sp>
         <p:nvSpPr>
+          <p:cNvPr id="6" name="Text 4"/>
+          <p:cNvSpPr/>
+          <p:nvPr/>
+        </p:nvSpPr>
+        <p:spPr>
+          <a:xfrm>
+            <a:off x="7660532" y="1755648"/>
+            <a:ext cx="3744779" cy="310896"/>
+          </a:xfrm>
+          <a:prstGeom prst="rect">
+            <a:avLst/>
+          </a:prstGeom>
+          <a:noFill/>
+          <a:ln/>
+        </p:spPr>
+        <p:txBody>
+          <a:bodyPr wrap="square" lIns="0" tIns="0" rIns="0" bIns="0" rtlCol="0" anchor="ctr"/>
+          <a:lstStyle/>
+          <a:p>
+            <a:pPr indent="0" marL="0">
+              <a:buNone/>
+            </a:pPr>
+            <a:r>
+              <a:rPr lang="en-US" sz="1100" b="1" spc="140" kern="0" dirty="0">
+                <a:solidFill>
+                  <a:srgbClr val="00838F"/>
+                </a:solidFill>
+                <a:latin typeface="Calibri" pitchFamily="34" charset="0"/>
+                <a:ea typeface="Calibri" pitchFamily="34" charset="-122"/>
+                <a:cs typeface="Calibri" pitchFamily="34" charset="-120"/>
+              </a:rPr>
+              <a:t>TEACHING POINT</a:t>
+            </a:r>
+            <a:endParaRPr lang="en-US" sz="1100" dirty="0"/>
+          </a:p>
+        </p:txBody>
+      </p:sp>
+      <p:sp>
+        <p:nvSpPr>
           <p:cNvPr id="7" name="Text 5"/>
           <p:cNvSpPr/>
           <p:nvPr/>
         </p:nvSpPr>
         <p:spPr>
           <a:xfrm>
-            <a:off x="7439376" y="2578608"/>
-            <a:ext cx="3965936" cy="457200"/>
-          </a:xfrm>
-          <a:prstGeom prst="rect">
-            <a:avLst/>
-          </a:prstGeom>
-          <a:noFill/>
-          <a:ln/>
-        </p:spPr>
-        <p:txBody>
-          <a:bodyPr wrap="square" lIns="0" tIns="0" rIns="0" bIns="0" rtlCol="0" anchor="ctr"/>
-          <a:lstStyle/>
-          <a:p>
-            <a:pPr indent="0" marL="0">
-              <a:buNone/>
-            </a:pPr>
-            <a:r>
-              <a:rPr lang="en-US" sz="1500" b="1" dirty="0">
-                <a:solidFill>
-                  <a:srgbClr val="00838F"/>
-                </a:solidFill>
-                <a:latin typeface="Calibri" pitchFamily="34" charset="0"/>
-                <a:ea typeface="Calibri" pitchFamily="34" charset="-122"/>
-                <a:cs typeface="Calibri" pitchFamily="34" charset="-120"/>
-              </a:rPr>
-              <a:t>ANSWER  </a:t>
-            </a:r>
-            <a:pPr indent="0" marL="0">
-              <a:buNone/>
-            </a:pPr>
-            <a:r>
-              <a:rPr lang="en-US" sz="1500" b="1" dirty="0">
-                <a:solidFill>
-                  <a:srgbClr val="1B2A38"/>
-                </a:solidFill>
-                <a:latin typeface="Calibri" pitchFamily="34" charset="0"/>
-                <a:ea typeface="Calibri" pitchFamily="34" charset="-122"/>
-                <a:cs typeface="Calibri" pitchFamily="34" charset="-120"/>
-              </a:rPr>
-              <a:t>C — Both wet-lab and pipeline</a:t>
-            </a:r>
-            <a:endParaRPr lang="en-US" sz="1500" dirty="0"/>
-          </a:p>
-        </p:txBody>
-      </p:sp>
-      <p:sp>
-        <p:nvSpPr>
-          <p:cNvPr id="8" name="Text 6"/>
-          <p:cNvSpPr/>
-          <p:nvPr/>
-        </p:nvSpPr>
-        <p:spPr>
-          <a:xfrm>
-            <a:off x="7439376" y="3127248"/>
-            <a:ext cx="3947648" cy="2377440"/>
+            <a:off x="7660532" y="2121408"/>
+            <a:ext cx="3726491" cy="3291840"/>
           </a:xfrm>
           <a:prstGeom prst="rect">
             <a:avLst/>
@@ -6450,12 +6866,12 @@
           <a:p>
             <a:pPr algn="l" indent="0" marL="0">
               <a:lnSpc>
-                <a:spcPct val="108000"/>
+                <a:spcPct val="110000"/>
               </a:lnSpc>
               <a:buNone/>
             </a:pPr>
             <a:r>
-              <a:rPr lang="en-US" sz="1250" dirty="0">
+              <a:rPr lang="en-US" sz="1350" dirty="0">
                 <a:solidFill>
                   <a:srgbClr val="33444F"/>
                 </a:solidFill>
@@ -6463,15 +6879,15 @@
                 <a:ea typeface="Calibri" pitchFamily="34" charset="-122"/>
                 <a:cs typeface="Calibri" pitchFamily="34" charset="-120"/>
               </a:rPr>
-              <a:t>The pipeline is part of the assay; full validation covers wet-lab performance characteristics and the bioinformatic analysis, with version control.</a:t>
-            </a:r>
-            <a:endParaRPr lang="en-US" sz="1250" dirty="0"/>
-          </a:p>
-        </p:txBody>
-      </p:sp>
-      <p:sp>
-        <p:nvSpPr>
-          <p:cNvPr id="9" name="Text 7"/>
+              <a:t>Treat pipeline updates like assay changes — revalidate and document before clinical reporting.</a:t>
+            </a:r>
+            <a:endParaRPr lang="en-US" sz="1350" dirty="0"/>
+          </a:p>
+        </p:txBody>
+      </p:sp>
+      <p:sp>
+        <p:nvSpPr>
+          <p:cNvPr id="8" name="Text 6"/>
           <p:cNvSpPr/>
           <p:nvPr/>
         </p:nvSpPr>
@@ -6510,7 +6926,7 @@
       </p:sp>
       <p:sp>
         <p:nvSpPr>
-          <p:cNvPr id="10" name="Text 8"/>
+          <p:cNvPr id="9" name="Text 7"/>
           <p:cNvSpPr/>
           <p:nvPr/>
         </p:nvSpPr>
@@ -6640,7 +7056,7 @@
                 <a:ea typeface="Calibri" pitchFamily="34" charset="-122"/>
                 <a:cs typeface="Calibri" pitchFamily="34" charset="-120"/>
               </a:rPr>
-              <a:t>MOLECULAR &amp; CYTOGENETICS   ·   BOARD REVIEW  ·  Q2</a:t>
+              <a:t>MOLECULAR &amp; CYTOGENETICS   ·   CASE 3</a:t>
             </a:r>
             <a:endParaRPr lang="en-US" sz="1100" dirty="0"/>
           </a:p>
@@ -6671,7 +7087,7 @@
               <a:buNone/>
             </a:pPr>
             <a:r>
-              <a:rPr lang="en-US" sz="2600" b="1" dirty="0">
+              <a:rPr lang="en-US" sz="3000" b="1" dirty="0">
                 <a:solidFill>
                   <a:srgbClr val="0E3A5F"/>
                 </a:solidFill>
@@ -6679,190 +7095,26 @@
                 <a:ea typeface="Calibri" pitchFamily="34" charset="-122"/>
                 <a:cs typeface="Calibri" pitchFamily="34" charset="-120"/>
               </a:rPr>
-              <a:t>Board-Style Review</a:t>
-            </a:r>
-            <a:endParaRPr lang="en-US" sz="2600" dirty="0"/>
-          </a:p>
-        </p:txBody>
-      </p:sp>
-      <p:sp>
-        <p:nvSpPr>
-          <p:cNvPr id="4" name="Text 2"/>
-          <p:cNvSpPr/>
-          <p:nvPr/>
-        </p:nvSpPr>
-        <p:spPr>
-          <a:xfrm>
-            <a:off x="566928" y="1417320"/>
-            <a:ext cx="11057839" cy="914400"/>
-          </a:xfrm>
-          <a:prstGeom prst="rect">
-            <a:avLst/>
-          </a:prstGeom>
-          <a:noFill/>
-          <a:ln/>
-        </p:spPr>
-        <p:txBody>
-          <a:bodyPr wrap="square" lIns="0" tIns="0" rIns="0" bIns="0" rtlCol="0" anchor="t"/>
-          <a:lstStyle/>
-          <a:p>
-            <a:pPr algn="l" indent="0" marL="0">
-              <a:lnSpc>
-                <a:spcPct val="105000"/>
-              </a:lnSpc>
-              <a:buNone/>
-            </a:pPr>
-            <a:r>
-              <a:rPr lang="en-US" sz="1450" b="1" dirty="0">
-                <a:solidFill>
-                  <a:srgbClr val="1B2A38"/>
-                </a:solidFill>
-                <a:latin typeface="Calibri" pitchFamily="34" charset="0"/>
-                <a:ea typeface="Calibri" pitchFamily="34" charset="-122"/>
-                <a:cs typeface="Calibri" pitchFamily="34" charset="-120"/>
-              </a:rPr>
-              <a:t>A clinically relevant exon falls below the minimum validated depth. The correct report states:</a:t>
-            </a:r>
-            <a:endParaRPr lang="en-US" sz="1450" dirty="0"/>
-          </a:p>
-        </p:txBody>
-      </p:sp>
-      <p:sp>
-        <p:nvSpPr>
-          <p:cNvPr id="5" name="Text 3"/>
-          <p:cNvSpPr/>
-          <p:nvPr/>
-        </p:nvSpPr>
-        <p:spPr>
-          <a:xfrm>
-            <a:off x="658368" y="2395728"/>
-            <a:ext cx="6192390" cy="3017520"/>
-          </a:xfrm>
-          <a:prstGeom prst="rect">
-            <a:avLst/>
-          </a:prstGeom>
-          <a:noFill/>
-          <a:ln/>
-        </p:spPr>
-        <p:txBody>
-          <a:bodyPr wrap="square" lIns="0" tIns="0" rIns="0" bIns="0" rtlCol="0" anchor="t"/>
-          <a:lstStyle/>
-          <a:p>
-            <a:pPr algn="l" indent="0" marL="0">
-              <a:spcAft>
-                <a:spcPts val="600"/>
-              </a:spcAft>
-              <a:buNone/>
-            </a:pPr>
-            <a:r>
-              <a:rPr lang="en-US" sz="1350" dirty="0">
-                <a:solidFill>
-                  <a:srgbClr val="33444F"/>
-                </a:solidFill>
-                <a:latin typeface="Calibri" pitchFamily="34" charset="0"/>
-                <a:ea typeface="Calibri" pitchFamily="34" charset="-122"/>
-                <a:cs typeface="Calibri" pitchFamily="34" charset="-120"/>
-              </a:rPr>
-              <a:t>A. No mutation present</a:t>
-            </a:r>
-            <a:endParaRPr lang="en-US" sz="1350" dirty="0"/>
-          </a:p>
-          <a:p>
-            <a:pPr algn="l" indent="0" marL="0">
-              <a:spcAft>
-                <a:spcPts val="600"/>
-              </a:spcAft>
-              <a:buNone/>
-            </a:pPr>
-            <a:r>
-              <a:rPr lang="en-US" sz="1350" dirty="0">
-                <a:solidFill>
-                  <a:srgbClr val="33444F"/>
-                </a:solidFill>
-                <a:latin typeface="Calibri" pitchFamily="34" charset="0"/>
-                <a:ea typeface="Calibri" pitchFamily="34" charset="-122"/>
-                <a:cs typeface="Calibri" pitchFamily="34" charset="-120"/>
-              </a:rPr>
-              <a:t>B. Wild-type</a:t>
-            </a:r>
-            <a:endParaRPr lang="en-US" sz="1350" dirty="0"/>
-          </a:p>
-          <a:p>
-            <a:pPr algn="l" indent="0" marL="0">
-              <a:spcAft>
-                <a:spcPts val="600"/>
-              </a:spcAft>
-              <a:buNone/>
-            </a:pPr>
-            <a:r>
-              <a:rPr lang="en-US" sz="1350" b="1" dirty="0">
-                <a:solidFill>
-                  <a:srgbClr val="005A63"/>
-                </a:solidFill>
-                <a:latin typeface="Calibri" pitchFamily="34" charset="0"/>
-                <a:ea typeface="Calibri" pitchFamily="34" charset="-122"/>
-                <a:cs typeface="Calibri" pitchFamily="34" charset="-120"/>
-              </a:rPr>
-              <a:t>C. Region not assessed due to insufficient coverage</a:t>
-            </a:r>
-            <a:endParaRPr lang="en-US" sz="1350" dirty="0"/>
-          </a:p>
-          <a:p>
-            <a:pPr algn="l" indent="0" marL="0">
-              <a:spcAft>
-                <a:spcPts val="600"/>
-              </a:spcAft>
-              <a:buNone/>
-            </a:pPr>
-            <a:r>
-              <a:rPr lang="en-US" sz="1350" dirty="0">
-                <a:solidFill>
-                  <a:srgbClr val="33444F"/>
-                </a:solidFill>
-                <a:latin typeface="Calibri" pitchFamily="34" charset="0"/>
-                <a:ea typeface="Calibri" pitchFamily="34" charset="-122"/>
-                <a:cs typeface="Calibri" pitchFamily="34" charset="-120"/>
-              </a:rPr>
-              <a:t>D. Likely benign</a:t>
-            </a:r>
-            <a:endParaRPr lang="en-US" sz="1350" dirty="0"/>
-          </a:p>
-          <a:p>
-            <a:pPr algn="l" indent="0" marL="0">
-              <a:spcAft>
-                <a:spcPts val="600"/>
-              </a:spcAft>
-              <a:buNone/>
-            </a:pPr>
-            <a:r>
-              <a:rPr lang="en-US" sz="1350" dirty="0">
-                <a:solidFill>
-                  <a:srgbClr val="33444F"/>
-                </a:solidFill>
-                <a:latin typeface="Calibri" pitchFamily="34" charset="0"/>
-                <a:ea typeface="Calibri" pitchFamily="34" charset="-122"/>
-                <a:cs typeface="Calibri" pitchFamily="34" charset="-120"/>
-              </a:rPr>
-              <a:t>E. Test failed entirely</a:t>
-            </a:r>
-            <a:endParaRPr lang="en-US" sz="1350" dirty="0"/>
-          </a:p>
-        </p:txBody>
-      </p:sp>
-      <p:sp>
-        <p:nvSpPr>
-          <p:cNvPr id="6" name="Shape 4"/>
-          <p:cNvSpPr/>
-          <p:nvPr/>
-        </p:nvSpPr>
-        <p:spPr>
-          <a:xfrm>
-            <a:off x="7201632" y="2395728"/>
-            <a:ext cx="4423136" cy="3246120"/>
+              <a:t>Case 3</a:t>
+            </a:r>
+            <a:endParaRPr lang="en-US" sz="3000" dirty="0"/>
+          </a:p>
+        </p:txBody>
+      </p:sp>
+      <p:sp>
+        <p:nvSpPr>
+          <p:cNvPr id="4" name="Shape 2"/>
+          <p:cNvSpPr/>
+          <p:nvPr/>
+        </p:nvSpPr>
+        <p:spPr>
+          <a:xfrm>
+            <a:off x="566928" y="1517904"/>
+            <a:ext cx="11057839" cy="2788920"/>
           </a:xfrm>
           <a:prstGeom prst="roundRect">
             <a:avLst>
-              <a:gd name="adj" fmla="val 2535"/>
+              <a:gd name="adj" fmla="val 2951"/>
             </a:avLst>
           </a:prstGeom>
           <a:solidFill>
@@ -6880,14 +7132,14 @@
       </p:sp>
       <p:sp>
         <p:nvSpPr>
-          <p:cNvPr id="7" name="Text 5"/>
-          <p:cNvSpPr/>
-          <p:nvPr/>
-        </p:nvSpPr>
-        <p:spPr>
-          <a:xfrm>
-            <a:off x="7439376" y="2578608"/>
-            <a:ext cx="3965936" cy="457200"/>
+          <p:cNvPr id="5" name="Text 3"/>
+          <p:cNvSpPr/>
+          <p:nvPr/>
+        </p:nvSpPr>
+        <p:spPr>
+          <a:xfrm>
+            <a:off x="841248" y="1700784"/>
+            <a:ext cx="5486400" cy="292608"/>
           </a:xfrm>
           <a:prstGeom prst="rect">
             <a:avLst/>
@@ -6903,7 +7155,7 @@
               <a:buNone/>
             </a:pPr>
             <a:r>
-              <a:rPr lang="en-US" sz="1500" b="1" dirty="0">
+              <a:rPr lang="en-US" sz="1100" b="1" spc="150" kern="0" dirty="0">
                 <a:solidFill>
                   <a:srgbClr val="00838F"/>
                 </a:solidFill>
@@ -6911,36 +7163,22 @@
                 <a:ea typeface="Calibri" pitchFamily="34" charset="-122"/>
                 <a:cs typeface="Calibri" pitchFamily="34" charset="-120"/>
               </a:rPr>
-              <a:t>ANSWER  </a:t>
-            </a:r>
-            <a:pPr indent="0" marL="0">
-              <a:buNone/>
-            </a:pPr>
-            <a:r>
-              <a:rPr lang="en-US" sz="1500" b="1" dirty="0">
-                <a:solidFill>
-                  <a:srgbClr val="1B2A38"/>
-                </a:solidFill>
-                <a:latin typeface="Calibri" pitchFamily="34" charset="0"/>
-                <a:ea typeface="Calibri" pitchFamily="34" charset="-122"/>
-                <a:cs typeface="Calibri" pitchFamily="34" charset="-120"/>
-              </a:rPr>
-              <a:t>C — Not assessed (insufficient coverage)</a:t>
-            </a:r>
-            <a:endParaRPr lang="en-US" sz="1500" dirty="0"/>
-          </a:p>
-        </p:txBody>
-      </p:sp>
-      <p:sp>
-        <p:nvSpPr>
-          <p:cNvPr id="8" name="Text 6"/>
-          <p:cNvSpPr/>
-          <p:nvPr/>
-        </p:nvSpPr>
-        <p:spPr>
-          <a:xfrm>
-            <a:off x="7439376" y="3127248"/>
-            <a:ext cx="3947648" cy="2377440"/>
+              <a:t>CLINICAL VIGNETTE</a:t>
+            </a:r>
+            <a:endParaRPr lang="en-US" sz="1100" dirty="0"/>
+          </a:p>
+        </p:txBody>
+      </p:sp>
+      <p:sp>
+        <p:nvSpPr>
+          <p:cNvPr id="6" name="Text 4"/>
+          <p:cNvSpPr/>
+          <p:nvPr/>
+        </p:nvSpPr>
+        <p:spPr>
+          <a:xfrm>
+            <a:off x="841248" y="2029968"/>
+            <a:ext cx="10509199" cy="2148840"/>
           </a:xfrm>
           <a:prstGeom prst="rect">
             <a:avLst/>
@@ -6959,7 +7197,7 @@
               <a:buNone/>
             </a:pPr>
             <a:r>
-              <a:rPr lang="en-US" sz="1250" dirty="0">
+              <a:rPr lang="en-US" sz="1450" dirty="0">
                 <a:solidFill>
                   <a:srgbClr val="33444F"/>
                 </a:solidFill>
@@ -6967,15 +7205,122 @@
                 <a:ea typeface="Calibri" pitchFamily="34" charset="-122"/>
                 <a:cs typeface="Calibri" pitchFamily="34" charset="-120"/>
               </a:rPr>
-              <a:t>Below-threshold regions cannot be called; report them as gaps. 'Not assessed' differs from 'negative' and avoids false reassurance.</a:t>
-            </a:r>
-            <a:endParaRPr lang="en-US" sz="1250" dirty="0"/>
+              <a:t>A clinically important region of a gene falls in a low-coverage area below the validated minimum depth.</a:t>
+            </a:r>
+            <a:endParaRPr lang="en-US" sz="1450" dirty="0"/>
+          </a:p>
+        </p:txBody>
+      </p:sp>
+      <p:sp>
+        <p:nvSpPr>
+          <p:cNvPr id="7" name="Shape 5"/>
+          <p:cNvSpPr/>
+          <p:nvPr/>
+        </p:nvSpPr>
+        <p:spPr>
+          <a:xfrm>
+            <a:off x="566928" y="4553712"/>
+            <a:ext cx="11057839" cy="1325880"/>
+          </a:xfrm>
+          <a:prstGeom prst="roundRect">
+            <a:avLst>
+              <a:gd name="adj" fmla="val 6207"/>
+            </a:avLst>
+          </a:prstGeom>
+          <a:solidFill>
+            <a:srgbClr val="0E3A5F"/>
+          </a:solidFill>
+          <a:ln/>
+          <a:effectLst>
+            <a:outerShdw sx="100000" sy="100000" kx="0" ky="0" algn="bl" rotWithShape="0" blurRad="88900" dist="25400" dir="5400000">
+              <a:srgbClr val="22303C">
+                <a:alpha val="12000"/>
+              </a:srgbClr>
+            </a:outerShdw>
+          </a:effectLst>
+        </p:spPr>
+      </p:sp>
+      <p:sp>
+        <p:nvSpPr>
+          <p:cNvPr id="8" name="Text 6"/>
+          <p:cNvSpPr/>
+          <p:nvPr/>
+        </p:nvSpPr>
+        <p:spPr>
+          <a:xfrm>
+            <a:off x="822960" y="4681728"/>
+            <a:ext cx="640080" cy="960120"/>
+          </a:xfrm>
+          <a:prstGeom prst="rect">
+            <a:avLst/>
+          </a:prstGeom>
+          <a:noFill/>
+          <a:ln/>
+        </p:spPr>
+        <p:txBody>
+          <a:bodyPr wrap="square" lIns="0" tIns="0" rIns="0" bIns="0" rtlCol="0" anchor="ctr"/>
+          <a:lstStyle/>
+          <a:p>
+            <a:pPr algn="ctr" indent="0" marL="0">
+              <a:buNone/>
+            </a:pPr>
+            <a:r>
+              <a:rPr lang="en-US" sz="4000" b="1" dirty="0">
+                <a:solidFill>
+                  <a:srgbClr val="00838F"/>
+                </a:solidFill>
+                <a:latin typeface="Calibri" pitchFamily="34" charset="0"/>
+                <a:ea typeface="Calibri" pitchFamily="34" charset="-122"/>
+                <a:cs typeface="Calibri" pitchFamily="34" charset="-120"/>
+              </a:rPr>
+              <a:t>?</a:t>
+            </a:r>
+            <a:endParaRPr lang="en-US" sz="4000" dirty="0"/>
           </a:p>
         </p:txBody>
       </p:sp>
       <p:sp>
         <p:nvSpPr>
           <p:cNvPr id="9" name="Text 7"/>
+          <p:cNvSpPr/>
+          <p:nvPr/>
+        </p:nvSpPr>
+        <p:spPr>
+          <a:xfrm>
+            <a:off x="1618488" y="4553712"/>
+            <a:ext cx="9686239" cy="1325880"/>
+          </a:xfrm>
+          <a:prstGeom prst="rect">
+            <a:avLst/>
+          </a:prstGeom>
+          <a:noFill/>
+          <a:ln/>
+        </p:spPr>
+        <p:txBody>
+          <a:bodyPr wrap="square" lIns="0" tIns="0" rIns="0" bIns="0" rtlCol="0" anchor="ctr"/>
+          <a:lstStyle/>
+          <a:p>
+            <a:pPr algn="l" indent="0" marL="0">
+              <a:buNone/>
+            </a:pPr>
+            <a:r>
+              <a:rPr lang="en-US" sz="1500" b="1" dirty="0">
+                <a:solidFill>
+                  <a:srgbClr val="FFFFFF"/>
+                </a:solidFill>
+                <a:latin typeface="Calibri" pitchFamily="34" charset="0"/>
+                <a:ea typeface="Calibri" pitchFamily="34" charset="-122"/>
+                <a:cs typeface="Calibri" pitchFamily="34" charset="-120"/>
+              </a:rPr>
+              <a:t>How should this be handled and reported?</a:t>
+            </a:r>
+            <a:endParaRPr lang="en-US" sz="1500" dirty="0"/>
+          </a:p>
+        </p:txBody>
+      </p:sp>
+      <p:sp>
+        <p:nvSpPr>
+          <p:cNvPr id="10" name="Text 8"/>
           <p:cNvSpPr/>
           <p:nvPr/>
         </p:nvSpPr>
@@ -7014,7 +7359,7 @@
       </p:sp>
       <p:sp>
         <p:nvSpPr>
-          <p:cNvPr id="10" name="Text 8"/>
+          <p:cNvPr id="11" name="Text 9"/>
           <p:cNvSpPr/>
           <p:nvPr/>
         </p:nvSpPr>
@@ -7144,7 +7489,7 @@
                 <a:ea typeface="Calibri" pitchFamily="34" charset="-122"/>
                 <a:cs typeface="Calibri" pitchFamily="34" charset="-120"/>
               </a:rPr>
-              <a:t>MOLECULAR &amp; CYTOGENETICS   ·   BOARD REVIEW  ·  Q3</a:t>
+              <a:t>MOLECULAR &amp; CYTOGENETICS   ·   CASE 3  ·  RESOLUTION</a:t>
             </a:r>
             <a:endParaRPr lang="en-US" sz="1100" dirty="0"/>
           </a:p>
@@ -7175,7 +7520,7 @@
               <a:buNone/>
             </a:pPr>
             <a:r>
-              <a:rPr lang="en-US" sz="2600" b="1" dirty="0">
+              <a:rPr lang="en-US" sz="3000" b="1" dirty="0">
                 <a:solidFill>
                   <a:srgbClr val="0E3A5F"/>
                 </a:solidFill>
@@ -7183,9 +7528,9 @@
                 <a:ea typeface="Calibri" pitchFamily="34" charset="-122"/>
                 <a:cs typeface="Calibri" pitchFamily="34" charset="-120"/>
               </a:rPr>
-              <a:t>Board-Style Review</a:t>
-            </a:r>
-            <a:endParaRPr lang="en-US" sz="2600" dirty="0"/>
+              <a:t>Case 3: Coverage Gap</a:t>
+            </a:r>
+            <a:endParaRPr lang="en-US" sz="3000" dirty="0"/>
           </a:p>
         </p:txBody>
       </p:sp>
@@ -7197,8 +7542,8 @@
         </p:nvSpPr>
         <p:spPr>
           <a:xfrm>
-            <a:off x="566928" y="1417320"/>
-            <a:ext cx="11057839" cy="914400"/>
+            <a:off x="566928" y="1554480"/>
+            <a:ext cx="6413547" cy="4023360"/>
           </a:xfrm>
           <a:prstGeom prst="rect">
             <a:avLst/>
@@ -7210,14 +7555,15 @@
           <a:bodyPr wrap="square" lIns="0" tIns="0" rIns="0" bIns="0" rtlCol="0" anchor="t"/>
           <a:lstStyle/>
           <a:p>
-            <a:pPr algn="l" indent="0" marL="0">
-              <a:lnSpc>
-                <a:spcPct val="105000"/>
-              </a:lnSpc>
-              <a:buNone/>
-            </a:pPr>
-            <a:r>
-              <a:rPr lang="en-US" sz="1450" b="1" dirty="0">
+            <a:pPr algn="l" marL="177800" indent="-177800">
+              <a:spcAft>
+                <a:spcPts val="900"/>
+              </a:spcAft>
+              <a:buSzPct val="100000"/>
+              <a:buChar char="•"/>
+            </a:pPr>
+            <a:r>
+              <a:rPr lang="en-US" sz="1400" b="1" dirty="0">
                 <a:solidFill>
                   <a:srgbClr val="1B2A38"/>
                 </a:solidFill>
@@ -7225,41 +7571,20 @@
                 <a:ea typeface="Calibri" pitchFamily="34" charset="-122"/>
                 <a:cs typeface="Calibri" pitchFamily="34" charset="-120"/>
               </a:rPr>
-              <a:t>A low-VAF C&gt;T variant in an FFPE specimen most likely represents:</a:t>
-            </a:r>
-            <a:endParaRPr lang="en-US" sz="1450" dirty="0"/>
-          </a:p>
-        </p:txBody>
-      </p:sp>
-      <p:sp>
-        <p:nvSpPr>
-          <p:cNvPr id="5" name="Text 3"/>
-          <p:cNvSpPr/>
-          <p:nvPr/>
-        </p:nvSpPr>
-        <p:spPr>
-          <a:xfrm>
-            <a:off x="658368" y="2395728"/>
-            <a:ext cx="6192390" cy="3017520"/>
-          </a:xfrm>
-          <a:prstGeom prst="rect">
-            <a:avLst/>
-          </a:prstGeom>
-          <a:noFill/>
-          <a:ln/>
-        </p:spPr>
-        <p:txBody>
-          <a:bodyPr wrap="square" lIns="0" tIns="0" rIns="0" bIns="0" rtlCol="0" anchor="t"/>
-          <a:lstStyle/>
-          <a:p>
-            <a:pPr algn="l" indent="0" marL="0">
+              <a:t>Regions below the validated minimum depth cannot be reliably called and should be flagged.</a:t>
+            </a:r>
+            <a:endParaRPr lang="en-US" sz="1400" dirty="0"/>
+          </a:p>
+          <a:p>
+            <a:pPr algn="l" marL="177800" indent="-177800">
               <a:spcAft>
-                <a:spcPts val="600"/>
+                <a:spcPts val="900"/>
               </a:spcAft>
-              <a:buNone/>
-            </a:pPr>
-            <a:r>
-              <a:rPr lang="en-US" sz="1350" dirty="0">
+              <a:buSzPct val="100000"/>
+              <a:buChar char="•"/>
+            </a:pPr>
+            <a:r>
+              <a:rPr lang="en-US" sz="1400" dirty="0">
                 <a:solidFill>
                   <a:srgbClr val="33444F"/>
                 </a:solidFill>
@@ -7267,39 +7592,41 @@
                 <a:ea typeface="Calibri" pitchFamily="34" charset="-122"/>
                 <a:cs typeface="Calibri" pitchFamily="34" charset="-120"/>
               </a:rPr>
-              <a:t>A. A definite pathogenic mutation</a:t>
-            </a:r>
-            <a:endParaRPr lang="en-US" sz="1350" dirty="0"/>
-          </a:p>
-          <a:p>
-            <a:pPr algn="l" indent="0" marL="0">
+              <a:t>Use orthogonal methods (e.g., Sanger fill-in) for critical regions.</a:t>
+            </a:r>
+            <a:endParaRPr lang="en-US" sz="1400" dirty="0"/>
+          </a:p>
+          <a:p>
+            <a:pPr algn="l" marL="177800" indent="-177800">
               <a:spcAft>
-                <a:spcPts val="600"/>
+                <a:spcPts val="900"/>
               </a:spcAft>
-              <a:buNone/>
-            </a:pPr>
-            <a:r>
-              <a:rPr lang="en-US" sz="1350" b="1" dirty="0">
-                <a:solidFill>
-                  <a:srgbClr val="005A63"/>
-                </a:solidFill>
-                <a:latin typeface="Calibri" pitchFamily="34" charset="0"/>
-                <a:ea typeface="Calibri" pitchFamily="34" charset="-122"/>
-                <a:cs typeface="Calibri" pitchFamily="34" charset="-120"/>
-              </a:rPr>
-              <a:t>B. A deamination (fixation) artifact to be excluded</a:t>
-            </a:r>
-            <a:endParaRPr lang="en-US" sz="1350" dirty="0"/>
-          </a:p>
-          <a:p>
-            <a:pPr algn="l" indent="0" marL="0">
+              <a:buSzPct val="100000"/>
+              <a:buChar char="•"/>
+            </a:pPr>
+            <a:r>
+              <a:rPr lang="en-US" sz="1400" dirty="0">
+                <a:solidFill>
+                  <a:srgbClr val="33444F"/>
+                </a:solidFill>
+                <a:latin typeface="Calibri" pitchFamily="34" charset="0"/>
+                <a:ea typeface="Calibri" pitchFamily="34" charset="-122"/>
+                <a:cs typeface="Calibri" pitchFamily="34" charset="-120"/>
+              </a:rPr>
+              <a:t>Report limitations transparently.</a:t>
+            </a:r>
+            <a:endParaRPr lang="en-US" sz="1400" dirty="0"/>
+          </a:p>
+          <a:p>
+            <a:pPr algn="l" marL="177800" indent="-177800">
               <a:spcAft>
-                <a:spcPts val="600"/>
+                <a:spcPts val="900"/>
               </a:spcAft>
-              <a:buNone/>
-            </a:pPr>
-            <a:r>
-              <a:rPr lang="en-US" sz="1350" dirty="0">
+              <a:buSzPct val="100000"/>
+              <a:buChar char="•"/>
+            </a:pPr>
+            <a:r>
+              <a:rPr lang="en-US" sz="1400" dirty="0">
                 <a:solidFill>
                   <a:srgbClr val="33444F"/>
                 </a:solidFill>
@@ -7307,66 +7634,26 @@
                 <a:ea typeface="Calibri" pitchFamily="34" charset="-122"/>
                 <a:cs typeface="Calibri" pitchFamily="34" charset="-120"/>
               </a:rPr>
-              <a:t>C. Germline variant</a:t>
-            </a:r>
-            <a:endParaRPr lang="en-US" sz="1350" dirty="0"/>
-          </a:p>
-          <a:p>
-            <a:pPr algn="l" indent="0" marL="0">
-              <a:spcAft>
-                <a:spcPts val="600"/>
-              </a:spcAft>
-              <a:buNone/>
-            </a:pPr>
-            <a:r>
-              <a:rPr lang="en-US" sz="1350" dirty="0">
-                <a:solidFill>
-                  <a:srgbClr val="33444F"/>
-                </a:solidFill>
-                <a:latin typeface="Calibri" pitchFamily="34" charset="0"/>
-                <a:ea typeface="Calibri" pitchFamily="34" charset="-122"/>
-                <a:cs typeface="Calibri" pitchFamily="34" charset="-120"/>
-              </a:rPr>
-              <a:t>D. Contamination from another patient</a:t>
-            </a:r>
-            <a:endParaRPr lang="en-US" sz="1350" dirty="0"/>
-          </a:p>
-          <a:p>
-            <a:pPr algn="l" indent="0" marL="0">
-              <a:spcAft>
-                <a:spcPts val="600"/>
-              </a:spcAft>
-              <a:buNone/>
-            </a:pPr>
-            <a:r>
-              <a:rPr lang="en-US" sz="1350" dirty="0">
-                <a:solidFill>
-                  <a:srgbClr val="33444F"/>
-                </a:solidFill>
-                <a:latin typeface="Calibri" pitchFamily="34" charset="0"/>
-                <a:ea typeface="Calibri" pitchFamily="34" charset="-122"/>
-                <a:cs typeface="Calibri" pitchFamily="34" charset="-120"/>
-              </a:rPr>
-              <a:t>E. A large deletion</a:t>
-            </a:r>
-            <a:endParaRPr lang="en-US" sz="1350" dirty="0"/>
-          </a:p>
-        </p:txBody>
-      </p:sp>
-      <p:sp>
-        <p:nvSpPr>
-          <p:cNvPr id="6" name="Shape 4"/>
-          <p:cNvSpPr/>
-          <p:nvPr/>
-        </p:nvSpPr>
-        <p:spPr>
-          <a:xfrm>
-            <a:off x="7201632" y="2395728"/>
-            <a:ext cx="4423136" cy="3246120"/>
+              <a:t>Coverage requirements come from validation.</a:t>
+            </a:r>
+            <a:endParaRPr lang="en-US" sz="1400" dirty="0"/>
+          </a:p>
+        </p:txBody>
+      </p:sp>
+      <p:sp>
+        <p:nvSpPr>
+          <p:cNvPr id="5" name="Shape 3"/>
+          <p:cNvSpPr/>
+          <p:nvPr/>
+        </p:nvSpPr>
+        <p:spPr>
+          <a:xfrm>
+            <a:off x="7422788" y="1554480"/>
+            <a:ext cx="4201979" cy="3977640"/>
           </a:xfrm>
           <a:prstGeom prst="roundRect">
             <a:avLst>
-              <a:gd name="adj" fmla="val 2535"/>
+              <a:gd name="adj" fmla="val 2069"/>
             </a:avLst>
           </a:prstGeom>
           <a:solidFill>
@@ -7384,67 +7671,53 @@
       </p:sp>
       <p:sp>
         <p:nvSpPr>
+          <p:cNvPr id="6" name="Text 4"/>
+          <p:cNvSpPr/>
+          <p:nvPr/>
+        </p:nvSpPr>
+        <p:spPr>
+          <a:xfrm>
+            <a:off x="7660532" y="1755648"/>
+            <a:ext cx="3744779" cy="310896"/>
+          </a:xfrm>
+          <a:prstGeom prst="rect">
+            <a:avLst/>
+          </a:prstGeom>
+          <a:noFill/>
+          <a:ln/>
+        </p:spPr>
+        <p:txBody>
+          <a:bodyPr wrap="square" lIns="0" tIns="0" rIns="0" bIns="0" rtlCol="0" anchor="ctr"/>
+          <a:lstStyle/>
+          <a:p>
+            <a:pPr indent="0" marL="0">
+              <a:buNone/>
+            </a:pPr>
+            <a:r>
+              <a:rPr lang="en-US" sz="1100" b="1" spc="140" kern="0" dirty="0">
+                <a:solidFill>
+                  <a:srgbClr val="00838F"/>
+                </a:solidFill>
+                <a:latin typeface="Calibri" pitchFamily="34" charset="0"/>
+                <a:ea typeface="Calibri" pitchFamily="34" charset="-122"/>
+                <a:cs typeface="Calibri" pitchFamily="34" charset="-120"/>
+              </a:rPr>
+              <a:t>TEACHING POINT</a:t>
+            </a:r>
+            <a:endParaRPr lang="en-US" sz="1100" dirty="0"/>
+          </a:p>
+        </p:txBody>
+      </p:sp>
+      <p:sp>
+        <p:nvSpPr>
           <p:cNvPr id="7" name="Text 5"/>
           <p:cNvSpPr/>
           <p:nvPr/>
         </p:nvSpPr>
         <p:spPr>
           <a:xfrm>
-            <a:off x="7439376" y="2578608"/>
-            <a:ext cx="3965936" cy="457200"/>
-          </a:xfrm>
-          <a:prstGeom prst="rect">
-            <a:avLst/>
-          </a:prstGeom>
-          <a:noFill/>
-          <a:ln/>
-        </p:spPr>
-        <p:txBody>
-          <a:bodyPr wrap="square" lIns="0" tIns="0" rIns="0" bIns="0" rtlCol="0" anchor="ctr"/>
-          <a:lstStyle/>
-          <a:p>
-            <a:pPr indent="0" marL="0">
-              <a:buNone/>
-            </a:pPr>
-            <a:r>
-              <a:rPr lang="en-US" sz="1500" b="1" dirty="0">
-                <a:solidFill>
-                  <a:srgbClr val="00838F"/>
-                </a:solidFill>
-                <a:latin typeface="Calibri" pitchFamily="34" charset="0"/>
-                <a:ea typeface="Calibri" pitchFamily="34" charset="-122"/>
-                <a:cs typeface="Calibri" pitchFamily="34" charset="-120"/>
-              </a:rPr>
-              <a:t>ANSWER  </a:t>
-            </a:r>
-            <a:pPr indent="0" marL="0">
-              <a:buNone/>
-            </a:pPr>
-            <a:r>
-              <a:rPr lang="en-US" sz="1500" b="1" dirty="0">
-                <a:solidFill>
-                  <a:srgbClr val="1B2A38"/>
-                </a:solidFill>
-                <a:latin typeface="Calibri" pitchFamily="34" charset="0"/>
-                <a:ea typeface="Calibri" pitchFamily="34" charset="-122"/>
-                <a:cs typeface="Calibri" pitchFamily="34" charset="-120"/>
-              </a:rPr>
-              <a:t>B — Deamination artifact to exclude</a:t>
-            </a:r>
-            <a:endParaRPr lang="en-US" sz="1500" dirty="0"/>
-          </a:p>
-        </p:txBody>
-      </p:sp>
-      <p:sp>
-        <p:nvSpPr>
-          <p:cNvPr id="8" name="Text 6"/>
-          <p:cNvSpPr/>
-          <p:nvPr/>
-        </p:nvSpPr>
-        <p:spPr>
-          <a:xfrm>
-            <a:off x="7439376" y="3127248"/>
-            <a:ext cx="3947648" cy="2377440"/>
+            <a:off x="7660532" y="2121408"/>
+            <a:ext cx="3726491" cy="3291840"/>
           </a:xfrm>
           <a:prstGeom prst="rect">
             <a:avLst/>
@@ -7458,12 +7731,12 @@
           <a:p>
             <a:pPr algn="l" indent="0" marL="0">
               <a:lnSpc>
-                <a:spcPct val="108000"/>
+                <a:spcPct val="110000"/>
               </a:lnSpc>
               <a:buNone/>
             </a:pPr>
             <a:r>
-              <a:rPr lang="en-US" sz="1250" dirty="0">
+              <a:rPr lang="en-US" sz="1350" dirty="0">
                 <a:solidFill>
                   <a:srgbClr val="33444F"/>
                 </a:solidFill>
@@ -7471,15 +7744,15 @@
                 <a:ea typeface="Calibri" pitchFamily="34" charset="-122"/>
                 <a:cs typeface="Calibri" pitchFamily="34" charset="-120"/>
               </a:rPr>
-              <a:t>FFPE deamination produces low-level C&gt;T/G&gt;A artifacts; assess strand bias and depth and confirm before reporting as a true variant.</a:t>
-            </a:r>
-            <a:endParaRPr lang="en-US" sz="1250" dirty="0"/>
-          </a:p>
-        </p:txBody>
-      </p:sp>
-      <p:sp>
-        <p:nvSpPr>
-          <p:cNvPr id="9" name="Text 7"/>
+              <a:t>Report only what coverage supports — flag low-coverage regions and fill critical gaps with an orthogonal method.</a:t>
+            </a:r>
+            <a:endParaRPr lang="en-US" sz="1350" dirty="0"/>
+          </a:p>
+        </p:txBody>
+      </p:sp>
+      <p:sp>
+        <p:nvSpPr>
+          <p:cNvPr id="8" name="Text 6"/>
           <p:cNvSpPr/>
           <p:nvPr/>
         </p:nvSpPr>
@@ -7518,7 +7791,7 @@
       </p:sp>
       <p:sp>
         <p:nvSpPr>
-          <p:cNvPr id="10" name="Text 8"/>
+          <p:cNvPr id="9" name="Text 7"/>
           <p:cNvSpPr/>
           <p:nvPr/>
         </p:nvSpPr>
@@ -7794,7 +8067,7 @@
                 <a:ea typeface="Calibri" pitchFamily="34" charset="-122"/>
                 <a:cs typeface="Calibri" pitchFamily="34" charset="-120"/>
               </a:rPr>
-              <a:t>NGS assays need full validation before clinical use</a:t>
+              <a:t>Establish performance before clinical use</a:t>
             </a:r>
             <a:endParaRPr lang="en-US" sz="1150" dirty="0"/>
           </a:p>
@@ -7862,7 +8135,7 @@
                 <a:ea typeface="Calibri" pitchFamily="34" charset="-122"/>
                 <a:cs typeface="Calibri" pitchFamily="34" charset="-120"/>
               </a:rPr>
-              <a:t>Depth</a:t>
+              <a:t>Wet + dry</a:t>
             </a:r>
             <a:endParaRPr lang="en-US" sz="3600" dirty="0"/>
           </a:p>
@@ -7901,7 +8174,7 @@
                 <a:ea typeface="Calibri" pitchFamily="34" charset="-122"/>
                 <a:cs typeface="Calibri" pitchFamily="34" charset="-120"/>
               </a:rPr>
-              <a:t>Coverage and depth gate which variants can be trusted</a:t>
+              <a:t>The bioinformatics pipeline is part of the test</a:t>
             </a:r>
             <a:endParaRPr lang="en-US" sz="1150" dirty="0"/>
           </a:p>
@@ -7969,7 +8242,7 @@
                 <a:ea typeface="Calibri" pitchFamily="34" charset="-122"/>
                 <a:cs typeface="Calibri" pitchFamily="34" charset="-120"/>
               </a:rPr>
-              <a:t>Pipeline</a:t>
+              <a:t>QC</a:t>
             </a:r>
             <a:endParaRPr lang="en-US" sz="3600" dirty="0"/>
           </a:p>
@@ -8008,7 +8281,7 @@
                 <a:ea typeface="Calibri" pitchFamily="34" charset="-122"/>
                 <a:cs typeface="Calibri" pitchFamily="34" charset="-120"/>
               </a:rPr>
-              <a:t>The bioinformatics pipeline is part of the assay</a:t>
+              <a:t>Ongoing monitoring sustains quality</a:t>
             </a:r>
             <a:endParaRPr lang="en-US" sz="1150" dirty="0"/>
           </a:p>
@@ -8079,7 +8352,7 @@
                 <a:ea typeface="Calibri" pitchFamily="34" charset="-122"/>
                 <a:cs typeface="Calibri" pitchFamily="34" charset="-120"/>
               </a:rPr>
-              <a:t>A molecular result is the end of a long chain — wet lab plus bioinformatics. Knowing how to validate performance, control contamination, and read quality metrics is what makes the result safe to report.</a:t>
+              <a:t>A molecular result is only as trustworthy as the validation and quality systems behind it. For NGS, that means validating both the wet-bench process and the bioinformatics pipeline, then monitoring both over time.</a:t>
             </a:r>
             <a:endParaRPr lang="en-US" sz="1450" dirty="0"/>
           </a:p>
@@ -8122,7 +8395,7 @@
                 <a:ea typeface="Calibri" pitchFamily="34" charset="-122"/>
                 <a:cs typeface="Calibri" pitchFamily="34" charset="-120"/>
               </a:rPr>
-              <a:t>In NGS, the bioinformatics pipeline is a regulated part of the assay — it must be validated and version-controlled like any reagent.</a:t>
+              <a:t>In NGS the pipeline is part of the assay — validate and version-control the software as rigorously as the wet bench.</a:t>
             </a:r>
             <a:endParaRPr lang="en-US" sz="1300" dirty="0"/>
           </a:p>
@@ -8248,7 +8521,7 @@
     <p:bg>
       <p:bgPr>
         <a:solidFill>
-          <a:srgbClr val="0A2A45"/>
+          <a:srgbClr val="FFFFFF"/>
         </a:solidFill>
       </p:bgPr>
     </p:bg>
@@ -8275,7 +8548,7 @@
         <p:spPr>
           <a:xfrm>
             <a:off x="566928" y="329184"/>
-            <a:ext cx="10058400" cy="310896"/>
+            <a:ext cx="10515600" cy="310896"/>
           </a:xfrm>
           <a:prstGeom prst="rect">
             <a:avLst/>
@@ -8287,7 +8560,7 @@
           <a:bodyPr wrap="square" lIns="0" tIns="0" rIns="0" bIns="0" rtlCol="0" anchor="ctr"/>
           <a:lstStyle/>
           <a:p>
-            <a:pPr indent="0" marL="0">
+            <a:pPr algn="l" indent="0" marL="0">
               <a:buNone/>
             </a:pPr>
             <a:r>
@@ -8299,7 +8572,7 @@
                 <a:ea typeface="Calibri" pitchFamily="34" charset="-122"/>
                 <a:cs typeface="Calibri" pitchFamily="34" charset="-120"/>
               </a:rPr>
-              <a:t>MOLECULAR &amp; CYTOGENETICS</a:t>
+              <a:t>MOLECULAR &amp; CYTOGENETICS   ·   BOARD REVIEW  ·  Q1</a:t>
             </a:r>
             <a:endParaRPr lang="en-US" sz="1100" dirty="0"/>
           </a:p>
@@ -8313,8 +8586,8 @@
         </p:nvSpPr>
         <p:spPr>
           <a:xfrm>
-            <a:off x="566928" y="676656"/>
-            <a:ext cx="10972800" cy="749808"/>
+            <a:off x="566928" y="713232"/>
+            <a:ext cx="11064240" cy="749808"/>
           </a:xfrm>
           <a:prstGeom prst="rect">
             <a:avLst/>
@@ -8326,62 +8599,206 @@
           <a:bodyPr wrap="square" lIns="0" tIns="0" rIns="0" bIns="0" rtlCol="0" anchor="ctr"/>
           <a:lstStyle/>
           <a:p>
-            <a:pPr indent="0" marL="0">
-              <a:buNone/>
-            </a:pPr>
-            <a:r>
-              <a:rPr lang="en-US" sz="3000" b="1" dirty="0">
-                <a:solidFill>
-                  <a:srgbClr val="FFFFFF"/>
-                </a:solidFill>
-                <a:latin typeface="Calibri" pitchFamily="34" charset="0"/>
-                <a:ea typeface="Calibri" pitchFamily="34" charset="-122"/>
-                <a:cs typeface="Calibri" pitchFamily="34" charset="-120"/>
-              </a:rPr>
-              <a:t>Key Take-Home Points</a:t>
-            </a:r>
-            <a:endParaRPr lang="en-US" sz="3000" dirty="0"/>
-          </a:p>
-        </p:txBody>
-      </p:sp>
-      <p:sp>
-        <p:nvSpPr>
-          <p:cNvPr id="4" name="Shape 2"/>
-          <p:cNvSpPr/>
-          <p:nvPr/>
-        </p:nvSpPr>
-        <p:spPr>
-          <a:xfrm>
-            <a:off x="566928" y="1517904"/>
-            <a:ext cx="11057839" cy="841248"/>
+            <a:pPr algn="l" indent="0" marL="0">
+              <a:buNone/>
+            </a:pPr>
+            <a:r>
+              <a:rPr lang="en-US" sz="2600" b="1" dirty="0">
+                <a:solidFill>
+                  <a:srgbClr val="0E3A5F"/>
+                </a:solidFill>
+                <a:latin typeface="Calibri" pitchFamily="34" charset="0"/>
+                <a:ea typeface="Calibri" pitchFamily="34" charset="-122"/>
+                <a:cs typeface="Calibri" pitchFamily="34" charset="-120"/>
+              </a:rPr>
+              <a:t>Board-Style Review</a:t>
+            </a:r>
+            <a:endParaRPr lang="en-US" sz="2600" dirty="0"/>
+          </a:p>
+        </p:txBody>
+      </p:sp>
+      <p:sp>
+        <p:nvSpPr>
+          <p:cNvPr id="4" name="Text 2"/>
+          <p:cNvSpPr/>
+          <p:nvPr/>
+        </p:nvSpPr>
+        <p:spPr>
+          <a:xfrm>
+            <a:off x="566928" y="1417320"/>
+            <a:ext cx="11057839" cy="914400"/>
+          </a:xfrm>
+          <a:prstGeom prst="rect">
+            <a:avLst/>
+          </a:prstGeom>
+          <a:noFill/>
+          <a:ln/>
+        </p:spPr>
+        <p:txBody>
+          <a:bodyPr wrap="square" lIns="0" tIns="0" rIns="0" bIns="0" rtlCol="0" anchor="t"/>
+          <a:lstStyle/>
+          <a:p>
+            <a:pPr algn="l" indent="0" marL="0">
+              <a:lnSpc>
+                <a:spcPct val="105000"/>
+              </a:lnSpc>
+              <a:buNone/>
+            </a:pPr>
+            <a:r>
+              <a:rPr lang="en-US" sz="1450" b="1" dirty="0">
+                <a:solidFill>
+                  <a:srgbClr val="1B2A38"/>
+                </a:solidFill>
+                <a:latin typeface="Calibri" pitchFamily="34" charset="0"/>
+                <a:ea typeface="Calibri" pitchFamily="34" charset="-122"/>
+                <a:cs typeface="Calibri" pitchFamily="34" charset="-120"/>
+              </a:rPr>
+              <a:t>A laboratory-developed molecular test requires which before clinical use?</a:t>
+            </a:r>
+            <a:endParaRPr lang="en-US" sz="1450" dirty="0"/>
+          </a:p>
+        </p:txBody>
+      </p:sp>
+      <p:sp>
+        <p:nvSpPr>
+          <p:cNvPr id="5" name="Text 3"/>
+          <p:cNvSpPr/>
+          <p:nvPr/>
+        </p:nvSpPr>
+        <p:spPr>
+          <a:xfrm>
+            <a:off x="658368" y="2395728"/>
+            <a:ext cx="6192390" cy="3017520"/>
+          </a:xfrm>
+          <a:prstGeom prst="rect">
+            <a:avLst/>
+          </a:prstGeom>
+          <a:noFill/>
+          <a:ln/>
+        </p:spPr>
+        <p:txBody>
+          <a:bodyPr wrap="square" lIns="0" tIns="0" rIns="0" bIns="0" rtlCol="0" anchor="t"/>
+          <a:lstStyle/>
+          <a:p>
+            <a:pPr algn="l" indent="0" marL="0">
+              <a:spcAft>
+                <a:spcPts val="600"/>
+              </a:spcAft>
+              <a:buNone/>
+            </a:pPr>
+            <a:r>
+              <a:rPr lang="en-US" sz="1350" dirty="0">
+                <a:solidFill>
+                  <a:srgbClr val="33444F"/>
+                </a:solidFill>
+                <a:latin typeface="Calibri" pitchFamily="34" charset="0"/>
+                <a:ea typeface="Calibri" pitchFamily="34" charset="-122"/>
+                <a:cs typeface="Calibri" pitchFamily="34" charset="-120"/>
+              </a:rPr>
+              <a:t>A. Verification of manufacturer claims only</a:t>
+            </a:r>
+            <a:endParaRPr lang="en-US" sz="1350" dirty="0"/>
+          </a:p>
+          <a:p>
+            <a:pPr algn="l" indent="0" marL="0">
+              <a:spcAft>
+                <a:spcPts val="600"/>
+              </a:spcAft>
+              <a:buNone/>
+            </a:pPr>
+            <a:r>
+              <a:rPr lang="en-US" sz="1350" b="1" dirty="0">
+                <a:solidFill>
+                  <a:srgbClr val="005A63"/>
+                </a:solidFill>
+                <a:latin typeface="Calibri" pitchFamily="34" charset="0"/>
+                <a:ea typeface="Calibri" pitchFamily="34" charset="-122"/>
+                <a:cs typeface="Calibri" pitchFamily="34" charset="-120"/>
+              </a:rPr>
+              <a:t>B. Full validation of performance characteristics</a:t>
+            </a:r>
+            <a:endParaRPr lang="en-US" sz="1350" dirty="0"/>
+          </a:p>
+          <a:p>
+            <a:pPr algn="l" indent="0" marL="0">
+              <a:spcAft>
+                <a:spcPts val="600"/>
+              </a:spcAft>
+              <a:buNone/>
+            </a:pPr>
+            <a:r>
+              <a:rPr lang="en-US" sz="1350" dirty="0">
+                <a:solidFill>
+                  <a:srgbClr val="33444F"/>
+                </a:solidFill>
+                <a:latin typeface="Calibri" pitchFamily="34" charset="0"/>
+                <a:ea typeface="Calibri" pitchFamily="34" charset="-122"/>
+                <a:cs typeface="Calibri" pitchFamily="34" charset="-120"/>
+              </a:rPr>
+              <a:t>C. No study</a:t>
+            </a:r>
+            <a:endParaRPr lang="en-US" sz="1350" dirty="0"/>
+          </a:p>
+          <a:p>
+            <a:pPr algn="l" indent="0" marL="0">
+              <a:spcAft>
+                <a:spcPts val="600"/>
+              </a:spcAft>
+              <a:buNone/>
+            </a:pPr>
+            <a:r>
+              <a:rPr lang="en-US" sz="1350" dirty="0">
+                <a:solidFill>
+                  <a:srgbClr val="33444F"/>
+                </a:solidFill>
+                <a:latin typeface="Calibri" pitchFamily="34" charset="0"/>
+                <a:ea typeface="Calibri" pitchFamily="34" charset="-122"/>
+                <a:cs typeface="Calibri" pitchFamily="34" charset="-120"/>
+              </a:rPr>
+              <a:t>D. Reference interval only</a:t>
+            </a:r>
+            <a:endParaRPr lang="en-US" sz="1350" dirty="0"/>
+          </a:p>
+          <a:p>
+            <a:pPr algn="l" indent="0" marL="0">
+              <a:spcAft>
+                <a:spcPts val="600"/>
+              </a:spcAft>
+              <a:buNone/>
+            </a:pPr>
+            <a:r>
+              <a:rPr lang="en-US" sz="1350" dirty="0">
+                <a:solidFill>
+                  <a:srgbClr val="33444F"/>
+                </a:solidFill>
+                <a:latin typeface="Calibri" pitchFamily="34" charset="0"/>
+                <a:ea typeface="Calibri" pitchFamily="34" charset="-122"/>
+                <a:cs typeface="Calibri" pitchFamily="34" charset="-120"/>
+              </a:rPr>
+              <a:t>E. PT enrollment only</a:t>
+            </a:r>
+            <a:endParaRPr lang="en-US" sz="1350" dirty="0"/>
+          </a:p>
+        </p:txBody>
+      </p:sp>
+      <p:sp>
+        <p:nvSpPr>
+          <p:cNvPr id="6" name="Shape 4"/>
+          <p:cNvSpPr/>
+          <p:nvPr/>
+        </p:nvSpPr>
+        <p:spPr>
+          <a:xfrm>
+            <a:off x="7201632" y="2395728"/>
+            <a:ext cx="4423136" cy="3246120"/>
           </a:xfrm>
           <a:prstGeom prst="roundRect">
             <a:avLst>
-              <a:gd name="adj" fmla="val 7609"/>
+              <a:gd name="adj" fmla="val 2535"/>
             </a:avLst>
           </a:prstGeom>
           <a:solidFill>
-            <a:srgbClr val="143651"/>
-          </a:solidFill>
-          <a:ln/>
-        </p:spPr>
-      </p:sp>
-      <p:sp>
-        <p:nvSpPr>
-          <p:cNvPr id="5" name="Shape 3"/>
-          <p:cNvSpPr/>
-          <p:nvPr/>
-        </p:nvSpPr>
-        <p:spPr>
-          <a:xfrm>
-            <a:off x="749808" y="1755648"/>
-            <a:ext cx="365760" cy="365760"/>
-          </a:xfrm>
-          <a:prstGeom prst="ellipse">
-            <a:avLst/>
-          </a:prstGeom>
-          <a:solidFill>
-            <a:srgbClr val="00838F"/>
+            <a:srgbClr val="E0F2F4"/>
           </a:solidFill>
           <a:ln/>
           <a:effectLst>
@@ -8395,14 +8812,14 @@
       </p:sp>
       <p:sp>
         <p:nvSpPr>
-          <p:cNvPr id="6" name="Text 4"/>
-          <p:cNvSpPr/>
-          <p:nvPr/>
-        </p:nvSpPr>
-        <p:spPr>
-          <a:xfrm>
-            <a:off x="749808" y="1755648"/>
-            <a:ext cx="365760" cy="365760"/>
+          <p:cNvPr id="7" name="Text 5"/>
+          <p:cNvSpPr/>
+          <p:nvPr/>
+        </p:nvSpPr>
+        <p:spPr>
+          <a:xfrm>
+            <a:off x="7439376" y="2578608"/>
+            <a:ext cx="3965936" cy="457200"/>
           </a:xfrm>
           <a:prstGeom prst="rect">
             <a:avLst/>
@@ -8414,19 +8831,33 @@
           <a:bodyPr wrap="square" lIns="0" tIns="0" rIns="0" bIns="0" rtlCol="0" anchor="ctr"/>
           <a:lstStyle/>
           <a:p>
-            <a:pPr algn="ctr" indent="0" marL="0">
+            <a:pPr indent="0" marL="0">
               <a:buNone/>
             </a:pPr>
             <a:r>
               <a:rPr lang="en-US" sz="1500" b="1" dirty="0">
                 <a:solidFill>
-                  <a:srgbClr val="FFFFFF"/>
-                </a:solidFill>
-                <a:latin typeface="Calibri" pitchFamily="34" charset="0"/>
-                <a:ea typeface="Calibri" pitchFamily="34" charset="-122"/>
-                <a:cs typeface="Calibri" pitchFamily="34" charset="-120"/>
-              </a:rPr>
-              <a:t>1</a:t>
+                  <a:srgbClr val="00838F"/>
+                </a:solidFill>
+                <a:latin typeface="Calibri" pitchFamily="34" charset="0"/>
+                <a:ea typeface="Calibri" pitchFamily="34" charset="-122"/>
+                <a:cs typeface="Calibri" pitchFamily="34" charset="-120"/>
+              </a:rPr>
+              <a:t>ANSWER  </a:t>
+            </a:r>
+            <a:pPr indent="0" marL="0">
+              <a:buNone/>
+            </a:pPr>
+            <a:r>
+              <a:rPr lang="en-US" sz="1500" b="1" dirty="0">
+                <a:solidFill>
+                  <a:srgbClr val="1B2A38"/>
+                </a:solidFill>
+                <a:latin typeface="Calibri" pitchFamily="34" charset="0"/>
+                <a:ea typeface="Calibri" pitchFamily="34" charset="-122"/>
+                <a:cs typeface="Calibri" pitchFamily="34" charset="-120"/>
+              </a:rPr>
+              <a:t>B — Full validation</a:t>
             </a:r>
             <a:endParaRPr lang="en-US" sz="1500" dirty="0"/>
           </a:p>
@@ -8434,14 +8865,56 @@
       </p:sp>
       <p:sp>
         <p:nvSpPr>
-          <p:cNvPr id="7" name="Text 5"/>
-          <p:cNvSpPr/>
-          <p:nvPr/>
-        </p:nvSpPr>
-        <p:spPr>
-          <a:xfrm>
-            <a:off x="1280160" y="1517904"/>
-            <a:ext cx="10143439" cy="841248"/>
+          <p:cNvPr id="8" name="Text 6"/>
+          <p:cNvSpPr/>
+          <p:nvPr/>
+        </p:nvSpPr>
+        <p:spPr>
+          <a:xfrm>
+            <a:off x="7439376" y="3127248"/>
+            <a:ext cx="3947648" cy="2377440"/>
+          </a:xfrm>
+          <a:prstGeom prst="rect">
+            <a:avLst/>
+          </a:prstGeom>
+          <a:noFill/>
+          <a:ln/>
+        </p:spPr>
+        <p:txBody>
+          <a:bodyPr wrap="square" lIns="0" tIns="0" rIns="0" bIns="0" rtlCol="0" anchor="t"/>
+          <a:lstStyle/>
+          <a:p>
+            <a:pPr algn="l" indent="0" marL="0">
+              <a:lnSpc>
+                <a:spcPct val="108000"/>
+              </a:lnSpc>
+              <a:buNone/>
+            </a:pPr>
+            <a:r>
+              <a:rPr lang="en-US" sz="1250" dirty="0">
+                <a:solidFill>
+                  <a:srgbClr val="33444F"/>
+                </a:solidFill>
+                <a:latin typeface="Calibri" pitchFamily="34" charset="0"/>
+                <a:ea typeface="Calibri" pitchFamily="34" charset="-122"/>
+                <a:cs typeface="Calibri" pitchFamily="34" charset="-120"/>
+              </a:rPr>
+              <a:t>LDTs require full validation; FDA-cleared assays require verification of the manufacturer’s claims.</a:t>
+            </a:r>
+            <a:endParaRPr lang="en-US" sz="1250" dirty="0"/>
+          </a:p>
+        </p:txBody>
+      </p:sp>
+      <p:sp>
+        <p:nvSpPr>
+          <p:cNvPr id="9" name="Text 7"/>
+          <p:cNvSpPr/>
+          <p:nvPr/>
+        </p:nvSpPr>
+        <p:spPr>
+          <a:xfrm>
+            <a:off x="566928" y="6473952"/>
+            <a:ext cx="7772400" cy="274320"/>
           </a:xfrm>
           <a:prstGeom prst="rect">
             <a:avLst/>
@@ -8457,68 +8930,19 @@
               <a:buNone/>
             </a:pPr>
             <a:r>
-              <a:rPr lang="en-US" sz="1350" dirty="0">
-                <a:solidFill>
-                  <a:srgbClr val="E7EEF4"/>
-                </a:solidFill>
-                <a:latin typeface="Calibri" pitchFamily="34" charset="0"/>
-                <a:ea typeface="Calibri" pitchFamily="34" charset="-122"/>
-                <a:cs typeface="Calibri" pitchFamily="34" charset="-120"/>
-              </a:rPr>
-              <a:t>Validate molecular assays fully — accuracy, precision, LoD, specificity, reportable range — including the bioinformatics pipeline.</a:t>
-            </a:r>
-            <a:endParaRPr lang="en-US" sz="1350" dirty="0"/>
-          </a:p>
-        </p:txBody>
-      </p:sp>
-      <p:sp>
-        <p:nvSpPr>
-          <p:cNvPr id="8" name="Shape 6"/>
-          <p:cNvSpPr/>
-          <p:nvPr/>
-        </p:nvSpPr>
-        <p:spPr>
-          <a:xfrm>
-            <a:off x="566928" y="2505456"/>
-            <a:ext cx="11057839" cy="841248"/>
-          </a:xfrm>
-          <a:prstGeom prst="roundRect">
-            <a:avLst>
-              <a:gd name="adj" fmla="val 7609"/>
-            </a:avLst>
-          </a:prstGeom>
-          <a:solidFill>
-            <a:srgbClr val="143651"/>
-          </a:solidFill>
-          <a:ln/>
-        </p:spPr>
-      </p:sp>
-      <p:sp>
-        <p:nvSpPr>
-          <p:cNvPr id="9" name="Shape 7"/>
-          <p:cNvSpPr/>
-          <p:nvPr/>
-        </p:nvSpPr>
-        <p:spPr>
-          <a:xfrm>
-            <a:off x="749808" y="2743200"/>
-            <a:ext cx="365760" cy="365760"/>
-          </a:xfrm>
-          <a:prstGeom prst="ellipse">
-            <a:avLst/>
-          </a:prstGeom>
-          <a:solidFill>
-            <a:srgbClr val="00838F"/>
-          </a:solidFill>
-          <a:ln/>
-          <a:effectLst>
-            <a:outerShdw sx="100000" sy="100000" kx="0" ky="0" algn="bl" rotWithShape="0" blurRad="88900" dist="25400" dir="5400000">
-              <a:srgbClr val="22303C">
-                <a:alpha val="12000"/>
-              </a:srgbClr>
-            </a:outerShdw>
-          </a:effectLst>
-        </p:spPr>
+              <a:rPr lang="en-US" sz="850" dirty="0">
+                <a:solidFill>
+                  <a:srgbClr val="9AA8B4"/>
+                </a:solidFill>
+                <a:latin typeface="Calibri" pitchFamily="34" charset="0"/>
+                <a:ea typeface="Calibri" pitchFamily="34" charset="-122"/>
+                <a:cs typeface="Calibri" pitchFamily="34" charset="-120"/>
+              </a:rPr>
+              <a:t>Makassed General Hospital  ·  Department of Laboratory Medicine</a:t>
+            </a:r>
+            <a:endParaRPr lang="en-US" sz="850" dirty="0"/>
+          </a:p>
+        </p:txBody>
       </p:sp>
       <p:sp>
         <p:nvSpPr>
@@ -8528,8 +8952,8 @@
         </p:nvSpPr>
         <p:spPr>
           <a:xfrm>
-            <a:off x="749808" y="2743200"/>
-            <a:ext cx="365760" cy="365760"/>
+            <a:off x="9814255" y="6473952"/>
+            <a:ext cx="1828800" cy="274320"/>
           </a:xfrm>
           <a:prstGeom prst="rect">
             <a:avLst/>
@@ -8541,504 +8965,34 @@
           <a:bodyPr wrap="square" lIns="0" tIns="0" rIns="0" bIns="0" rtlCol="0" anchor="ctr"/>
           <a:lstStyle/>
           <a:p>
-            <a:pPr algn="ctr" indent="0" marL="0">
-              <a:buNone/>
-            </a:pPr>
-            <a:r>
-              <a:rPr lang="en-US" sz="1500" b="1" dirty="0">
-                <a:solidFill>
-                  <a:srgbClr val="FFFFFF"/>
-                </a:solidFill>
-                <a:latin typeface="Calibri" pitchFamily="34" charset="0"/>
-                <a:ea typeface="Calibri" pitchFamily="34" charset="-122"/>
-                <a:cs typeface="Calibri" pitchFamily="34" charset="-120"/>
-              </a:rPr>
-              <a:t>2</a:t>
-            </a:r>
-            <a:endParaRPr lang="en-US" sz="1500" dirty="0"/>
-          </a:p>
-        </p:txBody>
-      </p:sp>
-      <p:sp>
-        <p:nvSpPr>
-          <p:cNvPr id="11" name="Text 9"/>
-          <p:cNvSpPr/>
-          <p:nvPr/>
-        </p:nvSpPr>
-        <p:spPr>
-          <a:xfrm>
-            <a:off x="1280160" y="2505456"/>
-            <a:ext cx="10143439" cy="841248"/>
-          </a:xfrm>
-          <a:prstGeom prst="rect">
-            <a:avLst/>
-          </a:prstGeom>
-          <a:noFill/>
-          <a:ln/>
-        </p:spPr>
-        <p:txBody>
-          <a:bodyPr wrap="square" lIns="0" tIns="0" rIns="0" bIns="0" rtlCol="0" anchor="ctr"/>
-          <a:lstStyle/>
-          <a:p>
-            <a:pPr algn="l" indent="0" marL="0">
-              <a:buNone/>
-            </a:pPr>
-            <a:r>
-              <a:rPr lang="en-US" sz="1350" dirty="0">
-                <a:solidFill>
-                  <a:srgbClr val="E7EEF4"/>
-                </a:solidFill>
-                <a:latin typeface="Calibri" pitchFamily="34" charset="0"/>
-                <a:ea typeface="Calibri" pitchFamily="34" charset="-122"/>
-                <a:cs typeface="Calibri" pitchFamily="34" charset="-120"/>
-              </a:rPr>
-              <a:t>Prevent contamination with unidirectional workflow, negative controls, and unique dual indexes; tiny contamination matters at high sensitivity.</a:t>
-            </a:r>
-            <a:endParaRPr lang="en-US" sz="1350" dirty="0"/>
-          </a:p>
-        </p:txBody>
-      </p:sp>
-      <p:sp>
-        <p:nvSpPr>
-          <p:cNvPr id="12" name="Shape 10"/>
-          <p:cNvSpPr/>
-          <p:nvPr/>
-        </p:nvSpPr>
-        <p:spPr>
-          <a:xfrm>
-            <a:off x="566928" y="3493008"/>
-            <a:ext cx="11057839" cy="841248"/>
-          </a:xfrm>
-          <a:prstGeom prst="roundRect">
-            <a:avLst>
-              <a:gd name="adj" fmla="val 7609"/>
-            </a:avLst>
-          </a:prstGeom>
-          <a:solidFill>
-            <a:srgbClr val="143651"/>
-          </a:solidFill>
-          <a:ln/>
-        </p:spPr>
-      </p:sp>
-      <p:sp>
-        <p:nvSpPr>
-          <p:cNvPr id="13" name="Shape 11"/>
-          <p:cNvSpPr/>
-          <p:nvPr/>
-        </p:nvSpPr>
-        <p:spPr>
-          <a:xfrm>
-            <a:off x="749808" y="3730752"/>
-            <a:ext cx="365760" cy="365760"/>
-          </a:xfrm>
-          <a:prstGeom prst="ellipse">
-            <a:avLst/>
-          </a:prstGeom>
-          <a:solidFill>
-            <a:srgbClr val="00838F"/>
-          </a:solidFill>
-          <a:ln/>
-          <a:effectLst>
-            <a:outerShdw sx="100000" sy="100000" kx="0" ky="0" algn="bl" rotWithShape="0" blurRad="88900" dist="25400" dir="5400000">
-              <a:srgbClr val="22303C">
-                <a:alpha val="12000"/>
-              </a:srgbClr>
-            </a:outerShdw>
-          </a:effectLst>
-        </p:spPr>
-      </p:sp>
-      <p:sp>
-        <p:nvSpPr>
-          <p:cNvPr id="14" name="Text 12"/>
-          <p:cNvSpPr/>
-          <p:nvPr/>
-        </p:nvSpPr>
-        <p:spPr>
-          <a:xfrm>
-            <a:off x="749808" y="3730752"/>
-            <a:ext cx="365760" cy="365760"/>
-          </a:xfrm>
-          <a:prstGeom prst="rect">
-            <a:avLst/>
-          </a:prstGeom>
-          <a:noFill/>
-          <a:ln/>
-        </p:spPr>
-        <p:txBody>
-          <a:bodyPr wrap="square" lIns="0" tIns="0" rIns="0" bIns="0" rtlCol="0" anchor="ctr"/>
-          <a:lstStyle/>
-          <a:p>
-            <a:pPr algn="ctr" indent="0" marL="0">
-              <a:buNone/>
-            </a:pPr>
-            <a:r>
-              <a:rPr lang="en-US" sz="1500" b="1" dirty="0">
-                <a:solidFill>
-                  <a:srgbClr val="FFFFFF"/>
-                </a:solidFill>
-                <a:latin typeface="Calibri" pitchFamily="34" charset="0"/>
-                <a:ea typeface="Calibri" pitchFamily="34" charset="-122"/>
-                <a:cs typeface="Calibri" pitchFamily="34" charset="-120"/>
-              </a:rPr>
-              <a:t>3</a:t>
-            </a:r>
-            <a:endParaRPr lang="en-US" sz="1500" dirty="0"/>
-          </a:p>
-        </p:txBody>
-      </p:sp>
-      <p:sp>
-        <p:nvSpPr>
-          <p:cNvPr id="15" name="Text 13"/>
-          <p:cNvSpPr/>
-          <p:nvPr/>
-        </p:nvSpPr>
-        <p:spPr>
-          <a:xfrm>
-            <a:off x="1280160" y="3493008"/>
-            <a:ext cx="10143439" cy="841248"/>
-          </a:xfrm>
-          <a:prstGeom prst="rect">
-            <a:avLst/>
-          </a:prstGeom>
-          <a:noFill/>
-          <a:ln/>
-        </p:spPr>
-        <p:txBody>
-          <a:bodyPr wrap="square" lIns="0" tIns="0" rIns="0" bIns="0" rtlCol="0" anchor="ctr"/>
-          <a:lstStyle/>
-          <a:p>
-            <a:pPr algn="l" indent="0" marL="0">
-              <a:buNone/>
-            </a:pPr>
-            <a:r>
-              <a:rPr lang="en-US" sz="1350" dirty="0">
-                <a:solidFill>
-                  <a:srgbClr val="E7EEF4"/>
-                </a:solidFill>
-                <a:latin typeface="Calibri" pitchFamily="34" charset="0"/>
-                <a:ea typeface="Calibri" pitchFamily="34" charset="-122"/>
-                <a:cs typeface="Calibri" pitchFamily="34" charset="-120"/>
-              </a:rPr>
-              <a:t>Coverage/depth gate which variants can be trusted; report regions 'not assessed' rather than implying wild-type.</a:t>
-            </a:r>
-            <a:endParaRPr lang="en-US" sz="1350" dirty="0"/>
-          </a:p>
-        </p:txBody>
-      </p:sp>
-      <p:sp>
-        <p:nvSpPr>
-          <p:cNvPr id="16" name="Shape 14"/>
-          <p:cNvSpPr/>
-          <p:nvPr/>
-        </p:nvSpPr>
-        <p:spPr>
-          <a:xfrm>
-            <a:off x="566928" y="4480560"/>
-            <a:ext cx="11057839" cy="841248"/>
-          </a:xfrm>
-          <a:prstGeom prst="roundRect">
-            <a:avLst>
-              <a:gd name="adj" fmla="val 7609"/>
-            </a:avLst>
-          </a:prstGeom>
-          <a:solidFill>
-            <a:srgbClr val="143651"/>
-          </a:solidFill>
-          <a:ln/>
-        </p:spPr>
-      </p:sp>
-      <p:sp>
-        <p:nvSpPr>
-          <p:cNvPr id="17" name="Shape 15"/>
-          <p:cNvSpPr/>
-          <p:nvPr/>
-        </p:nvSpPr>
-        <p:spPr>
-          <a:xfrm>
-            <a:off x="749808" y="4718304"/>
-            <a:ext cx="365760" cy="365760"/>
-          </a:xfrm>
-          <a:prstGeom prst="ellipse">
-            <a:avLst/>
-          </a:prstGeom>
-          <a:solidFill>
-            <a:srgbClr val="00838F"/>
-          </a:solidFill>
-          <a:ln/>
-          <a:effectLst>
-            <a:outerShdw sx="100000" sy="100000" kx="0" ky="0" algn="bl" rotWithShape="0" blurRad="88900" dist="25400" dir="5400000">
-              <a:srgbClr val="22303C">
-                <a:alpha val="12000"/>
-              </a:srgbClr>
-            </a:outerShdw>
-          </a:effectLst>
-        </p:spPr>
-      </p:sp>
-      <p:sp>
-        <p:nvSpPr>
-          <p:cNvPr id="18" name="Text 16"/>
-          <p:cNvSpPr/>
-          <p:nvPr/>
-        </p:nvSpPr>
-        <p:spPr>
-          <a:xfrm>
-            <a:off x="749808" y="4718304"/>
-            <a:ext cx="365760" cy="365760"/>
-          </a:xfrm>
-          <a:prstGeom prst="rect">
-            <a:avLst/>
-          </a:prstGeom>
-          <a:noFill/>
-          <a:ln/>
-        </p:spPr>
-        <p:txBody>
-          <a:bodyPr wrap="square" lIns="0" tIns="0" rIns="0" bIns="0" rtlCol="0" anchor="ctr"/>
-          <a:lstStyle/>
-          <a:p>
-            <a:pPr algn="ctr" indent="0" marL="0">
-              <a:buNone/>
-            </a:pPr>
-            <a:r>
-              <a:rPr lang="en-US" sz="1500" b="1" dirty="0">
-                <a:solidFill>
-                  <a:srgbClr val="FFFFFF"/>
-                </a:solidFill>
-                <a:latin typeface="Calibri" pitchFamily="34" charset="0"/>
-                <a:ea typeface="Calibri" pitchFamily="34" charset="-122"/>
-                <a:cs typeface="Calibri" pitchFamily="34" charset="-120"/>
-              </a:rPr>
-              <a:t>4</a:t>
-            </a:r>
-            <a:endParaRPr lang="en-US" sz="1500" dirty="0"/>
-          </a:p>
-        </p:txBody>
-      </p:sp>
-      <p:sp>
-        <p:nvSpPr>
-          <p:cNvPr id="19" name="Text 17"/>
-          <p:cNvSpPr/>
-          <p:nvPr/>
-        </p:nvSpPr>
-        <p:spPr>
-          <a:xfrm>
-            <a:off x="1280160" y="4480560"/>
-            <a:ext cx="10143439" cy="841248"/>
-          </a:xfrm>
-          <a:prstGeom prst="rect">
-            <a:avLst/>
-          </a:prstGeom>
-          <a:noFill/>
-          <a:ln/>
-        </p:spPr>
-        <p:txBody>
-          <a:bodyPr wrap="square" lIns="0" tIns="0" rIns="0" bIns="0" rtlCol="0" anchor="ctr"/>
-          <a:lstStyle/>
-          <a:p>
-            <a:pPr algn="l" indent="0" marL="0">
-              <a:buNone/>
-            </a:pPr>
-            <a:r>
-              <a:rPr lang="en-US" sz="1350" dirty="0">
-                <a:solidFill>
-                  <a:srgbClr val="E7EEF4"/>
-                </a:solidFill>
-                <a:latin typeface="Calibri" pitchFamily="34" charset="0"/>
-                <a:ea typeface="Calibri" pitchFamily="34" charset="-122"/>
-                <a:cs typeface="Calibri" pitchFamily="34" charset="-120"/>
-              </a:rPr>
-              <a:t>Version-control and revalidate the pipeline; reproducibility is required.</a:t>
-            </a:r>
-            <a:endParaRPr lang="en-US" sz="1350" dirty="0"/>
-          </a:p>
-        </p:txBody>
-      </p:sp>
-      <p:sp>
-        <p:nvSpPr>
-          <p:cNvPr id="20" name="Shape 18"/>
-          <p:cNvSpPr/>
-          <p:nvPr/>
-        </p:nvSpPr>
-        <p:spPr>
-          <a:xfrm>
-            <a:off x="566928" y="5468112"/>
-            <a:ext cx="11057839" cy="841248"/>
-          </a:xfrm>
-          <a:prstGeom prst="roundRect">
-            <a:avLst>
-              <a:gd name="adj" fmla="val 7609"/>
-            </a:avLst>
-          </a:prstGeom>
-          <a:solidFill>
-            <a:srgbClr val="143651"/>
-          </a:solidFill>
-          <a:ln/>
-        </p:spPr>
-      </p:sp>
-      <p:sp>
-        <p:nvSpPr>
-          <p:cNvPr id="21" name="Shape 19"/>
-          <p:cNvSpPr/>
-          <p:nvPr/>
-        </p:nvSpPr>
-        <p:spPr>
-          <a:xfrm>
-            <a:off x="749808" y="5705856"/>
-            <a:ext cx="365760" cy="365760"/>
-          </a:xfrm>
-          <a:prstGeom prst="ellipse">
-            <a:avLst/>
-          </a:prstGeom>
-          <a:solidFill>
-            <a:srgbClr val="00838F"/>
-          </a:solidFill>
-          <a:ln/>
-          <a:effectLst>
-            <a:outerShdw sx="100000" sy="100000" kx="0" ky="0" algn="bl" rotWithShape="0" blurRad="88900" dist="25400" dir="5400000">
-              <a:srgbClr val="22303C">
-                <a:alpha val="12000"/>
-              </a:srgbClr>
-            </a:outerShdw>
-          </a:effectLst>
-        </p:spPr>
-      </p:sp>
-      <p:sp>
-        <p:nvSpPr>
-          <p:cNvPr id="22" name="Text 20"/>
-          <p:cNvSpPr/>
-          <p:nvPr/>
-        </p:nvSpPr>
-        <p:spPr>
-          <a:xfrm>
-            <a:off x="749808" y="5705856"/>
-            <a:ext cx="365760" cy="365760"/>
-          </a:xfrm>
-          <a:prstGeom prst="rect">
-            <a:avLst/>
-          </a:prstGeom>
-          <a:noFill/>
-          <a:ln/>
-        </p:spPr>
-        <p:txBody>
-          <a:bodyPr wrap="square" lIns="0" tIns="0" rIns="0" bIns="0" rtlCol="0" anchor="ctr"/>
-          <a:lstStyle/>
-          <a:p>
-            <a:pPr algn="ctr" indent="0" marL="0">
-              <a:buNone/>
-            </a:pPr>
-            <a:r>
-              <a:rPr lang="en-US" sz="1500" b="1" dirty="0">
-                <a:solidFill>
-                  <a:srgbClr val="FFFFFF"/>
-                </a:solidFill>
-                <a:latin typeface="Calibri" pitchFamily="34" charset="0"/>
-                <a:ea typeface="Calibri" pitchFamily="34" charset="-122"/>
-                <a:cs typeface="Calibri" pitchFamily="34" charset="-120"/>
-              </a:rPr>
-              <a:t>5</a:t>
-            </a:r>
-            <a:endParaRPr lang="en-US" sz="1500" dirty="0"/>
-          </a:p>
-        </p:txBody>
-      </p:sp>
-      <p:sp>
-        <p:nvSpPr>
-          <p:cNvPr id="23" name="Text 21"/>
-          <p:cNvSpPr/>
-          <p:nvPr/>
-        </p:nvSpPr>
-        <p:spPr>
-          <a:xfrm>
-            <a:off x="1280160" y="5468112"/>
-            <a:ext cx="10143439" cy="841248"/>
-          </a:xfrm>
-          <a:prstGeom prst="rect">
-            <a:avLst/>
-          </a:prstGeom>
-          <a:noFill/>
-          <a:ln/>
-        </p:spPr>
-        <p:txBody>
-          <a:bodyPr wrap="square" lIns="0" tIns="0" rIns="0" bIns="0" rtlCol="0" anchor="ctr"/>
-          <a:lstStyle/>
-          <a:p>
-            <a:pPr algn="l" indent="0" marL="0">
-              <a:buNone/>
-            </a:pPr>
-            <a:r>
-              <a:rPr lang="en-US" sz="1350" dirty="0">
-                <a:solidFill>
-                  <a:srgbClr val="E7EEF4"/>
-                </a:solidFill>
-                <a:latin typeface="Calibri" pitchFamily="34" charset="0"/>
-                <a:ea typeface="Calibri" pitchFamily="34" charset="-122"/>
-                <a:cs typeface="Calibri" pitchFamily="34" charset="-120"/>
-              </a:rPr>
-              <a:t>Distinguish artifacts (FFPE C&gt;T, index hopping, homopolymer indels) from true variants; confirm critical calls and use proficiency testing.</a:t>
-            </a:r>
-            <a:endParaRPr lang="en-US" sz="1350" dirty="0"/>
-          </a:p>
-        </p:txBody>
-      </p:sp>
-      <p:sp>
-        <p:nvSpPr>
-          <p:cNvPr id="24" name="Text 22"/>
-          <p:cNvSpPr/>
-          <p:nvPr/>
-        </p:nvSpPr>
-        <p:spPr>
-          <a:xfrm>
-            <a:off x="566928" y="6473952"/>
-            <a:ext cx="8229600" cy="274320"/>
-          </a:xfrm>
-          <a:prstGeom prst="rect">
-            <a:avLst/>
-          </a:prstGeom>
-          <a:noFill/>
-          <a:ln/>
-        </p:spPr>
-        <p:txBody>
-          <a:bodyPr wrap="square" lIns="0" tIns="0" rIns="0" bIns="0" rtlCol="0" anchor="ctr"/>
-          <a:lstStyle/>
-          <a:p>
-            <a:pPr indent="0" marL="0">
+            <a:pPr algn="r" indent="0" marL="0">
               <a:buNone/>
             </a:pPr>
             <a:r>
               <a:rPr lang="en-US" sz="850" dirty="0">
                 <a:solidFill>
-                  <a:srgbClr val="5E7488"/>
-                </a:solidFill>
-                <a:latin typeface="Calibri" pitchFamily="34" charset="0"/>
-                <a:ea typeface="Calibri" pitchFamily="34" charset="-122"/>
-                <a:cs typeface="Calibri" pitchFamily="34" charset="-120"/>
-              </a:rPr>
-              <a:t>Makassed General Hospital  ·  Department of Laboratory Medicine</a:t>
-            </a:r>
-            <a:endParaRPr lang="en-US" sz="850" dirty="0"/>
-          </a:p>
-        </p:txBody>
-      </p:sp>
-      <p:sp>
-        <p:nvSpPr>
-          <p:cNvPr id="25" name="Text 23"/>
-          <p:cNvSpPr/>
-          <p:nvPr/>
-        </p:nvSpPr>
-        <p:spPr>
-          <a:xfrm>
-            <a:off x="11002975" y="6473952"/>
-            <a:ext cx="640080" cy="274320"/>
-          </a:xfrm>
-          <a:prstGeom prst="rect">
-            <a:avLst/>
-          </a:prstGeom>
-          <a:noFill/>
-          <a:ln/>
-        </p:spPr>
-        <p:txBody>
-          <a:bodyPr wrap="square" lIns="0" tIns="0" rIns="0" bIns="0" rtlCol="0" anchor="ctr"/>
-          <a:lstStyle/>
-          <a:p>
+                  <a:srgbClr val="9AA8B4"/>
+                </a:solidFill>
+                <a:latin typeface="Calibri" pitchFamily="34" charset="0"/>
+                <a:ea typeface="Calibri" pitchFamily="34" charset="-122"/>
+                <a:cs typeface="Calibri" pitchFamily="34" charset="-120"/>
+              </a:rPr>
+              <a:t>CP Lecture Series</a:t>
+            </a:r>
+            <a:pPr algn="r" indent="0" marL="0">
+              <a:buNone/>
+            </a:pPr>
+            <a:r>
+              <a:rPr lang="en-US" sz="850" dirty="0">
+                <a:solidFill>
+                  <a:srgbClr val="DCE4EC"/>
+                </a:solidFill>
+                <a:latin typeface="Calibri" pitchFamily="34" charset="0"/>
+                <a:ea typeface="Calibri" pitchFamily="34" charset="-122"/>
+                <a:cs typeface="Calibri" pitchFamily="34" charset="-120"/>
+              </a:rPr>
+              <a:t>   ·   </a:t>
+            </a:r>
             <a:pPr algn="r" indent="0" marL="0">
               <a:buNone/>
             </a:pPr>
@@ -9122,6 +9076,2341 @@
                 <a:ea typeface="Calibri" pitchFamily="34" charset="-122"/>
                 <a:cs typeface="Calibri" pitchFamily="34" charset="-120"/>
               </a:rPr>
+              <a:t>MOLECULAR &amp; CYTOGENETICS   ·   BOARD REVIEW  ·  Q2</a:t>
+            </a:r>
+            <a:endParaRPr lang="en-US" sz="1100" dirty="0"/>
+          </a:p>
+        </p:txBody>
+      </p:sp>
+      <p:sp>
+        <p:nvSpPr>
+          <p:cNvPr id="3" name="Text 1"/>
+          <p:cNvSpPr/>
+          <p:nvPr/>
+        </p:nvSpPr>
+        <p:spPr>
+          <a:xfrm>
+            <a:off x="566928" y="713232"/>
+            <a:ext cx="11064240" cy="749808"/>
+          </a:xfrm>
+          <a:prstGeom prst="rect">
+            <a:avLst/>
+          </a:prstGeom>
+          <a:noFill/>
+          <a:ln/>
+        </p:spPr>
+        <p:txBody>
+          <a:bodyPr wrap="square" lIns="0" tIns="0" rIns="0" bIns="0" rtlCol="0" anchor="ctr"/>
+          <a:lstStyle/>
+          <a:p>
+            <a:pPr algn="l" indent="0" marL="0">
+              <a:buNone/>
+            </a:pPr>
+            <a:r>
+              <a:rPr lang="en-US" sz="2600" b="1" dirty="0">
+                <a:solidFill>
+                  <a:srgbClr val="0E3A5F"/>
+                </a:solidFill>
+                <a:latin typeface="Calibri" pitchFamily="34" charset="0"/>
+                <a:ea typeface="Calibri" pitchFamily="34" charset="-122"/>
+                <a:cs typeface="Calibri" pitchFamily="34" charset="-120"/>
+              </a:rPr>
+              <a:t>Board-Style Review</a:t>
+            </a:r>
+            <a:endParaRPr lang="en-US" sz="2600" dirty="0"/>
+          </a:p>
+        </p:txBody>
+      </p:sp>
+      <p:sp>
+        <p:nvSpPr>
+          <p:cNvPr id="4" name="Text 2"/>
+          <p:cNvSpPr/>
+          <p:nvPr/>
+        </p:nvSpPr>
+        <p:spPr>
+          <a:xfrm>
+            <a:off x="566928" y="1417320"/>
+            <a:ext cx="11057839" cy="914400"/>
+          </a:xfrm>
+          <a:prstGeom prst="rect">
+            <a:avLst/>
+          </a:prstGeom>
+          <a:noFill/>
+          <a:ln/>
+        </p:spPr>
+        <p:txBody>
+          <a:bodyPr wrap="square" lIns="0" tIns="0" rIns="0" bIns="0" rtlCol="0" anchor="t"/>
+          <a:lstStyle/>
+          <a:p>
+            <a:pPr algn="l" indent="0" marL="0">
+              <a:lnSpc>
+                <a:spcPct val="105000"/>
+              </a:lnSpc>
+              <a:buNone/>
+            </a:pPr>
+            <a:r>
+              <a:rPr lang="en-US" sz="1450" b="1" dirty="0">
+                <a:solidFill>
+                  <a:srgbClr val="1B2A38"/>
+                </a:solidFill>
+                <a:latin typeface="Calibri" pitchFamily="34" charset="0"/>
+                <a:ea typeface="Calibri" pitchFamily="34" charset="-122"/>
+                <a:cs typeface="Calibri" pitchFamily="34" charset="-120"/>
+              </a:rPr>
+              <a:t>For an NGS assay, the bioinformatics pipeline should be:</a:t>
+            </a:r>
+            <a:endParaRPr lang="en-US" sz="1450" dirty="0"/>
+          </a:p>
+        </p:txBody>
+      </p:sp>
+      <p:sp>
+        <p:nvSpPr>
+          <p:cNvPr id="5" name="Text 3"/>
+          <p:cNvSpPr/>
+          <p:nvPr/>
+        </p:nvSpPr>
+        <p:spPr>
+          <a:xfrm>
+            <a:off x="658368" y="2395728"/>
+            <a:ext cx="6192390" cy="3017520"/>
+          </a:xfrm>
+          <a:prstGeom prst="rect">
+            <a:avLst/>
+          </a:prstGeom>
+          <a:noFill/>
+          <a:ln/>
+        </p:spPr>
+        <p:txBody>
+          <a:bodyPr wrap="square" lIns="0" tIns="0" rIns="0" bIns="0" rtlCol="0" anchor="t"/>
+          <a:lstStyle/>
+          <a:p>
+            <a:pPr algn="l" indent="0" marL="0">
+              <a:spcAft>
+                <a:spcPts val="600"/>
+              </a:spcAft>
+              <a:buNone/>
+            </a:pPr>
+            <a:r>
+              <a:rPr lang="en-US" sz="1350" dirty="0">
+                <a:solidFill>
+                  <a:srgbClr val="33444F"/>
+                </a:solidFill>
+                <a:latin typeface="Calibri" pitchFamily="34" charset="0"/>
+                <a:ea typeface="Calibri" pitchFamily="34" charset="-122"/>
+                <a:cs typeface="Calibri" pitchFamily="34" charset="-120"/>
+              </a:rPr>
+              <a:t>A. Ignored in validation</a:t>
+            </a:r>
+            <a:endParaRPr lang="en-US" sz="1350" dirty="0"/>
+          </a:p>
+          <a:p>
+            <a:pPr algn="l" indent="0" marL="0">
+              <a:spcAft>
+                <a:spcPts val="600"/>
+              </a:spcAft>
+              <a:buNone/>
+            </a:pPr>
+            <a:r>
+              <a:rPr lang="en-US" sz="1350" b="1" dirty="0">
+                <a:solidFill>
+                  <a:srgbClr val="005A63"/>
+                </a:solidFill>
+                <a:latin typeface="Calibri" pitchFamily="34" charset="0"/>
+                <a:ea typeface="Calibri" pitchFamily="34" charset="-122"/>
+                <a:cs typeface="Calibri" pitchFamily="34" charset="-120"/>
+              </a:rPr>
+              <a:t>B. Validated and version-controlled as part of the test</a:t>
+            </a:r>
+            <a:endParaRPr lang="en-US" sz="1350" dirty="0"/>
+          </a:p>
+          <a:p>
+            <a:pPr algn="l" indent="0" marL="0">
+              <a:spcAft>
+                <a:spcPts val="600"/>
+              </a:spcAft>
+              <a:buNone/>
+            </a:pPr>
+            <a:r>
+              <a:rPr lang="en-US" sz="1350" dirty="0">
+                <a:solidFill>
+                  <a:srgbClr val="33444F"/>
+                </a:solidFill>
+                <a:latin typeface="Calibri" pitchFamily="34" charset="0"/>
+                <a:ea typeface="Calibri" pitchFamily="34" charset="-122"/>
+                <a:cs typeface="Calibri" pitchFamily="34" charset="-120"/>
+              </a:rPr>
+              <a:t>C. Changed freely without documentation</a:t>
+            </a:r>
+            <a:endParaRPr lang="en-US" sz="1350" dirty="0"/>
+          </a:p>
+          <a:p>
+            <a:pPr algn="l" indent="0" marL="0">
+              <a:spcAft>
+                <a:spcPts val="600"/>
+              </a:spcAft>
+              <a:buNone/>
+            </a:pPr>
+            <a:r>
+              <a:rPr lang="en-US" sz="1350" dirty="0">
+                <a:solidFill>
+                  <a:srgbClr val="33444F"/>
+                </a:solidFill>
+                <a:latin typeface="Calibri" pitchFamily="34" charset="0"/>
+                <a:ea typeface="Calibri" pitchFamily="34" charset="-122"/>
+                <a:cs typeface="Calibri" pitchFamily="34" charset="-120"/>
+              </a:rPr>
+              <a:t>D. Validated only once regardless of changes</a:t>
+            </a:r>
+            <a:endParaRPr lang="en-US" sz="1350" dirty="0"/>
+          </a:p>
+          <a:p>
+            <a:pPr algn="l" indent="0" marL="0">
+              <a:spcAft>
+                <a:spcPts val="600"/>
+              </a:spcAft>
+              <a:buNone/>
+            </a:pPr>
+            <a:r>
+              <a:rPr lang="en-US" sz="1350" dirty="0">
+                <a:solidFill>
+                  <a:srgbClr val="33444F"/>
+                </a:solidFill>
+                <a:latin typeface="Calibri" pitchFamily="34" charset="0"/>
+                <a:ea typeface="Calibri" pitchFamily="34" charset="-122"/>
+                <a:cs typeface="Calibri" pitchFamily="34" charset="-120"/>
+              </a:rPr>
+              <a:t>E. Outsourced without oversight</a:t>
+            </a:r>
+            <a:endParaRPr lang="en-US" sz="1350" dirty="0"/>
+          </a:p>
+        </p:txBody>
+      </p:sp>
+      <p:sp>
+        <p:nvSpPr>
+          <p:cNvPr id="6" name="Shape 4"/>
+          <p:cNvSpPr/>
+          <p:nvPr/>
+        </p:nvSpPr>
+        <p:spPr>
+          <a:xfrm>
+            <a:off x="7201632" y="2395728"/>
+            <a:ext cx="4423136" cy="3246120"/>
+          </a:xfrm>
+          <a:prstGeom prst="roundRect">
+            <a:avLst>
+              <a:gd name="adj" fmla="val 2535"/>
+            </a:avLst>
+          </a:prstGeom>
+          <a:solidFill>
+            <a:srgbClr val="E0F2F4"/>
+          </a:solidFill>
+          <a:ln/>
+          <a:effectLst>
+            <a:outerShdw sx="100000" sy="100000" kx="0" ky="0" algn="bl" rotWithShape="0" blurRad="88900" dist="25400" dir="5400000">
+              <a:srgbClr val="22303C">
+                <a:alpha val="12000"/>
+              </a:srgbClr>
+            </a:outerShdw>
+          </a:effectLst>
+        </p:spPr>
+      </p:sp>
+      <p:sp>
+        <p:nvSpPr>
+          <p:cNvPr id="7" name="Text 5"/>
+          <p:cNvSpPr/>
+          <p:nvPr/>
+        </p:nvSpPr>
+        <p:spPr>
+          <a:xfrm>
+            <a:off x="7439376" y="2578608"/>
+            <a:ext cx="3965936" cy="457200"/>
+          </a:xfrm>
+          <a:prstGeom prst="rect">
+            <a:avLst/>
+          </a:prstGeom>
+          <a:noFill/>
+          <a:ln/>
+        </p:spPr>
+        <p:txBody>
+          <a:bodyPr wrap="square" lIns="0" tIns="0" rIns="0" bIns="0" rtlCol="0" anchor="ctr"/>
+          <a:lstStyle/>
+          <a:p>
+            <a:pPr indent="0" marL="0">
+              <a:buNone/>
+            </a:pPr>
+            <a:r>
+              <a:rPr lang="en-US" sz="1500" b="1" dirty="0">
+                <a:solidFill>
+                  <a:srgbClr val="00838F"/>
+                </a:solidFill>
+                <a:latin typeface="Calibri" pitchFamily="34" charset="0"/>
+                <a:ea typeface="Calibri" pitchFamily="34" charset="-122"/>
+                <a:cs typeface="Calibri" pitchFamily="34" charset="-120"/>
+              </a:rPr>
+              <a:t>ANSWER  </a:t>
+            </a:r>
+            <a:pPr indent="0" marL="0">
+              <a:buNone/>
+            </a:pPr>
+            <a:r>
+              <a:rPr lang="en-US" sz="1500" b="1" dirty="0">
+                <a:solidFill>
+                  <a:srgbClr val="1B2A38"/>
+                </a:solidFill>
+                <a:latin typeface="Calibri" pitchFamily="34" charset="0"/>
+                <a:ea typeface="Calibri" pitchFamily="34" charset="-122"/>
+                <a:cs typeface="Calibri" pitchFamily="34" charset="-120"/>
+              </a:rPr>
+              <a:t>B — Validated and version-controlled</a:t>
+            </a:r>
+            <a:endParaRPr lang="en-US" sz="1500" dirty="0"/>
+          </a:p>
+        </p:txBody>
+      </p:sp>
+      <p:sp>
+        <p:nvSpPr>
+          <p:cNvPr id="8" name="Text 6"/>
+          <p:cNvSpPr/>
+          <p:nvPr/>
+        </p:nvSpPr>
+        <p:spPr>
+          <a:xfrm>
+            <a:off x="7439376" y="3127248"/>
+            <a:ext cx="3947648" cy="2377440"/>
+          </a:xfrm>
+          <a:prstGeom prst="rect">
+            <a:avLst/>
+          </a:prstGeom>
+          <a:noFill/>
+          <a:ln/>
+        </p:spPr>
+        <p:txBody>
+          <a:bodyPr wrap="square" lIns="0" tIns="0" rIns="0" bIns="0" rtlCol="0" anchor="t"/>
+          <a:lstStyle/>
+          <a:p>
+            <a:pPr algn="l" indent="0" marL="0">
+              <a:lnSpc>
+                <a:spcPct val="108000"/>
+              </a:lnSpc>
+              <a:buNone/>
+            </a:pPr>
+            <a:r>
+              <a:rPr lang="en-US" sz="1250" dirty="0">
+                <a:solidFill>
+                  <a:srgbClr val="33444F"/>
+                </a:solidFill>
+                <a:latin typeface="Calibri" pitchFamily="34" charset="0"/>
+                <a:ea typeface="Calibri" pitchFamily="34" charset="-122"/>
+                <a:cs typeface="Calibri" pitchFamily="34" charset="-120"/>
+              </a:rPr>
+              <a:t>The pipeline materially affects results and must be validated, locked, and revalidated after significant changes.</a:t>
+            </a:r>
+            <a:endParaRPr lang="en-US" sz="1250" dirty="0"/>
+          </a:p>
+        </p:txBody>
+      </p:sp>
+      <p:sp>
+        <p:nvSpPr>
+          <p:cNvPr id="9" name="Text 7"/>
+          <p:cNvSpPr/>
+          <p:nvPr/>
+        </p:nvSpPr>
+        <p:spPr>
+          <a:xfrm>
+            <a:off x="566928" y="6473952"/>
+            <a:ext cx="7772400" cy="274320"/>
+          </a:xfrm>
+          <a:prstGeom prst="rect">
+            <a:avLst/>
+          </a:prstGeom>
+          <a:noFill/>
+          <a:ln/>
+        </p:spPr>
+        <p:txBody>
+          <a:bodyPr wrap="square" lIns="0" tIns="0" rIns="0" bIns="0" rtlCol="0" anchor="ctr"/>
+          <a:lstStyle/>
+          <a:p>
+            <a:pPr algn="l" indent="0" marL="0">
+              <a:buNone/>
+            </a:pPr>
+            <a:r>
+              <a:rPr lang="en-US" sz="850" dirty="0">
+                <a:solidFill>
+                  <a:srgbClr val="9AA8B4"/>
+                </a:solidFill>
+                <a:latin typeface="Calibri" pitchFamily="34" charset="0"/>
+                <a:ea typeface="Calibri" pitchFamily="34" charset="-122"/>
+                <a:cs typeface="Calibri" pitchFamily="34" charset="-120"/>
+              </a:rPr>
+              <a:t>Makassed General Hospital  ·  Department of Laboratory Medicine</a:t>
+            </a:r>
+            <a:endParaRPr lang="en-US" sz="850" dirty="0"/>
+          </a:p>
+        </p:txBody>
+      </p:sp>
+      <p:sp>
+        <p:nvSpPr>
+          <p:cNvPr id="10" name="Text 8"/>
+          <p:cNvSpPr/>
+          <p:nvPr/>
+        </p:nvSpPr>
+        <p:spPr>
+          <a:xfrm>
+            <a:off x="9814255" y="6473952"/>
+            <a:ext cx="1828800" cy="274320"/>
+          </a:xfrm>
+          <a:prstGeom prst="rect">
+            <a:avLst/>
+          </a:prstGeom>
+          <a:noFill/>
+          <a:ln/>
+        </p:spPr>
+        <p:txBody>
+          <a:bodyPr wrap="square" lIns="0" tIns="0" rIns="0" bIns="0" rtlCol="0" anchor="ctr"/>
+          <a:lstStyle/>
+          <a:p>
+            <a:pPr algn="r" indent="0" marL="0">
+              <a:buNone/>
+            </a:pPr>
+            <a:r>
+              <a:rPr lang="en-US" sz="850" dirty="0">
+                <a:solidFill>
+                  <a:srgbClr val="9AA8B4"/>
+                </a:solidFill>
+                <a:latin typeface="Calibri" pitchFamily="34" charset="0"/>
+                <a:ea typeface="Calibri" pitchFamily="34" charset="-122"/>
+                <a:cs typeface="Calibri" pitchFamily="34" charset="-120"/>
+              </a:rPr>
+              <a:t>CP Lecture Series</a:t>
+            </a:r>
+            <a:pPr algn="r" indent="0" marL="0">
+              <a:buNone/>
+            </a:pPr>
+            <a:r>
+              <a:rPr lang="en-US" sz="850" dirty="0">
+                <a:solidFill>
+                  <a:srgbClr val="DCE4EC"/>
+                </a:solidFill>
+                <a:latin typeface="Calibri" pitchFamily="34" charset="0"/>
+                <a:ea typeface="Calibri" pitchFamily="34" charset="-122"/>
+                <a:cs typeface="Calibri" pitchFamily="34" charset="-120"/>
+              </a:rPr>
+              <a:t>   ·   </a:t>
+            </a:r>
+            <a:pPr algn="r" indent="0" marL="0">
+              <a:buNone/>
+            </a:pPr>
+            <a:r>
+              <a:rPr lang="en-US" sz="850" b="1" dirty="0">
+                <a:solidFill>
+                  <a:srgbClr val="00838F"/>
+                </a:solidFill>
+                <a:latin typeface="Calibri" pitchFamily="34" charset="0"/>
+                <a:ea typeface="Calibri" pitchFamily="34" charset="-122"/>
+                <a:cs typeface="Calibri" pitchFamily="34" charset="-120"/>
+              </a:rPr>
+              <a:t>18</a:t>
+            </a:r>
+            <a:endParaRPr lang="en-US" sz="850" dirty="0"/>
+          </a:p>
+        </p:txBody>
+      </p:sp>
+    </p:spTree>
+  </p:cSld>
+  <p:clrMapOvr>
+    <a:masterClrMapping/>
+  </p:clrMapOvr>
+</p:sld>
+</file>
+
+<file path=ppt/slides/slide22.xml><?xml version="1.0" encoding="utf-8"?>
+<p:sld xmlns:a="http://schemas.openxmlformats.org/drawingml/2006/main" xmlns:r="http://schemas.openxmlformats.org/officeDocument/2006/relationships" xmlns:p="http://schemas.openxmlformats.org/presentationml/2006/main">
+  <p:cSld name="Slide 22">
+    <p:bg>
+      <p:bgPr>
+        <a:solidFill>
+          <a:srgbClr val="FFFFFF"/>
+        </a:solidFill>
+      </p:bgPr>
+    </p:bg>
+    <p:spTree>
+      <p:nvGrpSpPr>
+        <p:cNvPr id="1" name=""/>
+        <p:cNvGrpSpPr/>
+        <p:nvPr/>
+      </p:nvGrpSpPr>
+      <p:grpSpPr>
+        <a:xfrm>
+          <a:off x="0" y="0"/>
+          <a:ext cx="0" cy="0"/>
+          <a:chOff x="0" y="0"/>
+          <a:chExt cx="0" cy="0"/>
+        </a:xfrm>
+      </p:grpSpPr>
+      <p:sp>
+        <p:nvSpPr>
+          <p:cNvPr id="2" name="Text 0"/>
+          <p:cNvSpPr/>
+          <p:nvPr/>
+        </p:nvSpPr>
+        <p:spPr>
+          <a:xfrm>
+            <a:off x="566928" y="329184"/>
+            <a:ext cx="10515600" cy="310896"/>
+          </a:xfrm>
+          <a:prstGeom prst="rect">
+            <a:avLst/>
+          </a:prstGeom>
+          <a:noFill/>
+          <a:ln/>
+        </p:spPr>
+        <p:txBody>
+          <a:bodyPr wrap="square" lIns="0" tIns="0" rIns="0" bIns="0" rtlCol="0" anchor="ctr"/>
+          <a:lstStyle/>
+          <a:p>
+            <a:pPr algn="l" indent="0" marL="0">
+              <a:buNone/>
+            </a:pPr>
+            <a:r>
+              <a:rPr lang="en-US" sz="1100" b="1" spc="150" kern="0" dirty="0">
+                <a:solidFill>
+                  <a:srgbClr val="00838F"/>
+                </a:solidFill>
+                <a:latin typeface="Calibri" pitchFamily="34" charset="0"/>
+                <a:ea typeface="Calibri" pitchFamily="34" charset="-122"/>
+                <a:cs typeface="Calibri" pitchFamily="34" charset="-120"/>
+              </a:rPr>
+              <a:t>MOLECULAR &amp; CYTOGENETICS   ·   BOARD REVIEW  ·  Q3</a:t>
+            </a:r>
+            <a:endParaRPr lang="en-US" sz="1100" dirty="0"/>
+          </a:p>
+        </p:txBody>
+      </p:sp>
+      <p:sp>
+        <p:nvSpPr>
+          <p:cNvPr id="3" name="Text 1"/>
+          <p:cNvSpPr/>
+          <p:nvPr/>
+        </p:nvSpPr>
+        <p:spPr>
+          <a:xfrm>
+            <a:off x="566928" y="713232"/>
+            <a:ext cx="11064240" cy="749808"/>
+          </a:xfrm>
+          <a:prstGeom prst="rect">
+            <a:avLst/>
+          </a:prstGeom>
+          <a:noFill/>
+          <a:ln/>
+        </p:spPr>
+        <p:txBody>
+          <a:bodyPr wrap="square" lIns="0" tIns="0" rIns="0" bIns="0" rtlCol="0" anchor="ctr"/>
+          <a:lstStyle/>
+          <a:p>
+            <a:pPr algn="l" indent="0" marL="0">
+              <a:buNone/>
+            </a:pPr>
+            <a:r>
+              <a:rPr lang="en-US" sz="2600" b="1" dirty="0">
+                <a:solidFill>
+                  <a:srgbClr val="0E3A5F"/>
+                </a:solidFill>
+                <a:latin typeface="Calibri" pitchFamily="34" charset="0"/>
+                <a:ea typeface="Calibri" pitchFamily="34" charset="-122"/>
+                <a:cs typeface="Calibri" pitchFamily="34" charset="-120"/>
+              </a:rPr>
+              <a:t>Board-Style Review</a:t>
+            </a:r>
+            <a:endParaRPr lang="en-US" sz="2600" dirty="0"/>
+          </a:p>
+        </p:txBody>
+      </p:sp>
+      <p:sp>
+        <p:nvSpPr>
+          <p:cNvPr id="4" name="Text 2"/>
+          <p:cNvSpPr/>
+          <p:nvPr/>
+        </p:nvSpPr>
+        <p:spPr>
+          <a:xfrm>
+            <a:off x="566928" y="1417320"/>
+            <a:ext cx="11057839" cy="914400"/>
+          </a:xfrm>
+          <a:prstGeom prst="rect">
+            <a:avLst/>
+          </a:prstGeom>
+          <a:noFill/>
+          <a:ln/>
+        </p:spPr>
+        <p:txBody>
+          <a:bodyPr wrap="square" lIns="0" tIns="0" rIns="0" bIns="0" rtlCol="0" anchor="t"/>
+          <a:lstStyle/>
+          <a:p>
+            <a:pPr algn="l" indent="0" marL="0">
+              <a:lnSpc>
+                <a:spcPct val="105000"/>
+              </a:lnSpc>
+              <a:buNone/>
+            </a:pPr>
+            <a:r>
+              <a:rPr lang="en-US" sz="1450" b="1" dirty="0">
+                <a:solidFill>
+                  <a:srgbClr val="1B2A38"/>
+                </a:solidFill>
+                <a:latin typeface="Calibri" pitchFamily="34" charset="0"/>
+                <a:ea typeface="Calibri" pitchFamily="34" charset="-122"/>
+                <a:cs typeface="Calibri" pitchFamily="34" charset="-120"/>
+              </a:rPr>
+              <a:t>The limit of detection for an NGS variant assay primarily depends on:</a:t>
+            </a:r>
+            <a:endParaRPr lang="en-US" sz="1450" dirty="0"/>
+          </a:p>
+        </p:txBody>
+      </p:sp>
+      <p:sp>
+        <p:nvSpPr>
+          <p:cNvPr id="5" name="Text 3"/>
+          <p:cNvSpPr/>
+          <p:nvPr/>
+        </p:nvSpPr>
+        <p:spPr>
+          <a:xfrm>
+            <a:off x="658368" y="2395728"/>
+            <a:ext cx="6192390" cy="3017520"/>
+          </a:xfrm>
+          <a:prstGeom prst="rect">
+            <a:avLst/>
+          </a:prstGeom>
+          <a:noFill/>
+          <a:ln/>
+        </p:spPr>
+        <p:txBody>
+          <a:bodyPr wrap="square" lIns="0" tIns="0" rIns="0" bIns="0" rtlCol="0" anchor="t"/>
+          <a:lstStyle/>
+          <a:p>
+            <a:pPr algn="l" indent="0" marL="0">
+              <a:spcAft>
+                <a:spcPts val="600"/>
+              </a:spcAft>
+              <a:buNone/>
+            </a:pPr>
+            <a:r>
+              <a:rPr lang="en-US" sz="1350" dirty="0">
+                <a:solidFill>
+                  <a:srgbClr val="33444F"/>
+                </a:solidFill>
+                <a:latin typeface="Calibri" pitchFamily="34" charset="0"/>
+                <a:ea typeface="Calibri" pitchFamily="34" charset="-122"/>
+                <a:cs typeface="Calibri" pitchFamily="34" charset="-120"/>
+              </a:rPr>
+              <a:t>A. Ambient temperature</a:t>
+            </a:r>
+            <a:endParaRPr lang="en-US" sz="1350" dirty="0"/>
+          </a:p>
+          <a:p>
+            <a:pPr algn="l" indent="0" marL="0">
+              <a:spcAft>
+                <a:spcPts val="600"/>
+              </a:spcAft>
+              <a:buNone/>
+            </a:pPr>
+            <a:r>
+              <a:rPr lang="en-US" sz="1350" b="1" dirty="0">
+                <a:solidFill>
+                  <a:srgbClr val="005A63"/>
+                </a:solidFill>
+                <a:latin typeface="Calibri" pitchFamily="34" charset="0"/>
+                <a:ea typeface="Calibri" pitchFamily="34" charset="-122"/>
+                <a:cs typeface="Calibri" pitchFamily="34" charset="-120"/>
+              </a:rPr>
+              <a:t>B. Depth of coverage and assay design</a:t>
+            </a:r>
+            <a:endParaRPr lang="en-US" sz="1350" dirty="0"/>
+          </a:p>
+          <a:p>
+            <a:pPr algn="l" indent="0" marL="0">
+              <a:spcAft>
+                <a:spcPts val="600"/>
+              </a:spcAft>
+              <a:buNone/>
+            </a:pPr>
+            <a:r>
+              <a:rPr lang="en-US" sz="1350" dirty="0">
+                <a:solidFill>
+                  <a:srgbClr val="33444F"/>
+                </a:solidFill>
+                <a:latin typeface="Calibri" pitchFamily="34" charset="0"/>
+                <a:ea typeface="Calibri" pitchFamily="34" charset="-122"/>
+                <a:cs typeface="Calibri" pitchFamily="34" charset="-120"/>
+              </a:rPr>
+              <a:t>C. The patient’s age</a:t>
+            </a:r>
+            <a:endParaRPr lang="en-US" sz="1350" dirty="0"/>
+          </a:p>
+          <a:p>
+            <a:pPr algn="l" indent="0" marL="0">
+              <a:spcAft>
+                <a:spcPts val="600"/>
+              </a:spcAft>
+              <a:buNone/>
+            </a:pPr>
+            <a:r>
+              <a:rPr lang="en-US" sz="1350" dirty="0">
+                <a:solidFill>
+                  <a:srgbClr val="33444F"/>
+                </a:solidFill>
+                <a:latin typeface="Calibri" pitchFamily="34" charset="0"/>
+                <a:ea typeface="Calibri" pitchFamily="34" charset="-122"/>
+                <a:cs typeface="Calibri" pitchFamily="34" charset="-120"/>
+              </a:rPr>
+              <a:t>D. Tube color</a:t>
+            </a:r>
+            <a:endParaRPr lang="en-US" sz="1350" dirty="0"/>
+          </a:p>
+          <a:p>
+            <a:pPr algn="l" indent="0" marL="0">
+              <a:spcAft>
+                <a:spcPts val="600"/>
+              </a:spcAft>
+              <a:buNone/>
+            </a:pPr>
+            <a:r>
+              <a:rPr lang="en-US" sz="1350" dirty="0">
+                <a:solidFill>
+                  <a:srgbClr val="33444F"/>
+                </a:solidFill>
+                <a:latin typeface="Calibri" pitchFamily="34" charset="0"/>
+                <a:ea typeface="Calibri" pitchFamily="34" charset="-122"/>
+                <a:cs typeface="Calibri" pitchFamily="34" charset="-120"/>
+              </a:rPr>
+              <a:t>E. Renal function</a:t>
+            </a:r>
+            <a:endParaRPr lang="en-US" sz="1350" dirty="0"/>
+          </a:p>
+        </p:txBody>
+      </p:sp>
+      <p:sp>
+        <p:nvSpPr>
+          <p:cNvPr id="6" name="Shape 4"/>
+          <p:cNvSpPr/>
+          <p:nvPr/>
+        </p:nvSpPr>
+        <p:spPr>
+          <a:xfrm>
+            <a:off x="7201632" y="2395728"/>
+            <a:ext cx="4423136" cy="3246120"/>
+          </a:xfrm>
+          <a:prstGeom prst="roundRect">
+            <a:avLst>
+              <a:gd name="adj" fmla="val 2535"/>
+            </a:avLst>
+          </a:prstGeom>
+          <a:solidFill>
+            <a:srgbClr val="E0F2F4"/>
+          </a:solidFill>
+          <a:ln/>
+          <a:effectLst>
+            <a:outerShdw sx="100000" sy="100000" kx="0" ky="0" algn="bl" rotWithShape="0" blurRad="88900" dist="25400" dir="5400000">
+              <a:srgbClr val="22303C">
+                <a:alpha val="12000"/>
+              </a:srgbClr>
+            </a:outerShdw>
+          </a:effectLst>
+        </p:spPr>
+      </p:sp>
+      <p:sp>
+        <p:nvSpPr>
+          <p:cNvPr id="7" name="Text 5"/>
+          <p:cNvSpPr/>
+          <p:nvPr/>
+        </p:nvSpPr>
+        <p:spPr>
+          <a:xfrm>
+            <a:off x="7439376" y="2578608"/>
+            <a:ext cx="3965936" cy="457200"/>
+          </a:xfrm>
+          <a:prstGeom prst="rect">
+            <a:avLst/>
+          </a:prstGeom>
+          <a:noFill/>
+          <a:ln/>
+        </p:spPr>
+        <p:txBody>
+          <a:bodyPr wrap="square" lIns="0" tIns="0" rIns="0" bIns="0" rtlCol="0" anchor="ctr"/>
+          <a:lstStyle/>
+          <a:p>
+            <a:pPr indent="0" marL="0">
+              <a:buNone/>
+            </a:pPr>
+            <a:r>
+              <a:rPr lang="en-US" sz="1500" b="1" dirty="0">
+                <a:solidFill>
+                  <a:srgbClr val="00838F"/>
+                </a:solidFill>
+                <a:latin typeface="Calibri" pitchFamily="34" charset="0"/>
+                <a:ea typeface="Calibri" pitchFamily="34" charset="-122"/>
+                <a:cs typeface="Calibri" pitchFamily="34" charset="-120"/>
+              </a:rPr>
+              <a:t>ANSWER  </a:t>
+            </a:r>
+            <a:pPr indent="0" marL="0">
+              <a:buNone/>
+            </a:pPr>
+            <a:r>
+              <a:rPr lang="en-US" sz="1500" b="1" dirty="0">
+                <a:solidFill>
+                  <a:srgbClr val="1B2A38"/>
+                </a:solidFill>
+                <a:latin typeface="Calibri" pitchFamily="34" charset="0"/>
+                <a:ea typeface="Calibri" pitchFamily="34" charset="-122"/>
+                <a:cs typeface="Calibri" pitchFamily="34" charset="-120"/>
+              </a:rPr>
+              <a:t>B — Depth of coverage/design</a:t>
+            </a:r>
+            <a:endParaRPr lang="en-US" sz="1500" dirty="0"/>
+          </a:p>
+        </p:txBody>
+      </p:sp>
+      <p:sp>
+        <p:nvSpPr>
+          <p:cNvPr id="8" name="Text 6"/>
+          <p:cNvSpPr/>
+          <p:nvPr/>
+        </p:nvSpPr>
+        <p:spPr>
+          <a:xfrm>
+            <a:off x="7439376" y="3127248"/>
+            <a:ext cx="3947648" cy="2377440"/>
+          </a:xfrm>
+          <a:prstGeom prst="rect">
+            <a:avLst/>
+          </a:prstGeom>
+          <a:noFill/>
+          <a:ln/>
+        </p:spPr>
+        <p:txBody>
+          <a:bodyPr wrap="square" lIns="0" tIns="0" rIns="0" bIns="0" rtlCol="0" anchor="t"/>
+          <a:lstStyle/>
+          <a:p>
+            <a:pPr algn="l" indent="0" marL="0">
+              <a:lnSpc>
+                <a:spcPct val="108000"/>
+              </a:lnSpc>
+              <a:buNone/>
+            </a:pPr>
+            <a:r>
+              <a:rPr lang="en-US" sz="1250" dirty="0">
+                <a:solidFill>
+                  <a:srgbClr val="33444F"/>
+                </a:solidFill>
+                <a:latin typeface="Calibri" pitchFamily="34" charset="0"/>
+                <a:ea typeface="Calibri" pitchFamily="34" charset="-122"/>
+                <a:cs typeface="Calibri" pitchFamily="34" charset="-120"/>
+              </a:rPr>
+              <a:t>Adequate, uniform coverage enables detection of low-allele-fraction variants; LoD is established in validation.</a:t>
+            </a:r>
+            <a:endParaRPr lang="en-US" sz="1250" dirty="0"/>
+          </a:p>
+        </p:txBody>
+      </p:sp>
+      <p:sp>
+        <p:nvSpPr>
+          <p:cNvPr id="9" name="Text 7"/>
+          <p:cNvSpPr/>
+          <p:nvPr/>
+        </p:nvSpPr>
+        <p:spPr>
+          <a:xfrm>
+            <a:off x="566928" y="6473952"/>
+            <a:ext cx="7772400" cy="274320"/>
+          </a:xfrm>
+          <a:prstGeom prst="rect">
+            <a:avLst/>
+          </a:prstGeom>
+          <a:noFill/>
+          <a:ln/>
+        </p:spPr>
+        <p:txBody>
+          <a:bodyPr wrap="square" lIns="0" tIns="0" rIns="0" bIns="0" rtlCol="0" anchor="ctr"/>
+          <a:lstStyle/>
+          <a:p>
+            <a:pPr algn="l" indent="0" marL="0">
+              <a:buNone/>
+            </a:pPr>
+            <a:r>
+              <a:rPr lang="en-US" sz="850" dirty="0">
+                <a:solidFill>
+                  <a:srgbClr val="9AA8B4"/>
+                </a:solidFill>
+                <a:latin typeface="Calibri" pitchFamily="34" charset="0"/>
+                <a:ea typeface="Calibri" pitchFamily="34" charset="-122"/>
+                <a:cs typeface="Calibri" pitchFamily="34" charset="-120"/>
+              </a:rPr>
+              <a:t>Makassed General Hospital  ·  Department of Laboratory Medicine</a:t>
+            </a:r>
+            <a:endParaRPr lang="en-US" sz="850" dirty="0"/>
+          </a:p>
+        </p:txBody>
+      </p:sp>
+      <p:sp>
+        <p:nvSpPr>
+          <p:cNvPr id="10" name="Text 8"/>
+          <p:cNvSpPr/>
+          <p:nvPr/>
+        </p:nvSpPr>
+        <p:spPr>
+          <a:xfrm>
+            <a:off x="9814255" y="6473952"/>
+            <a:ext cx="1828800" cy="274320"/>
+          </a:xfrm>
+          <a:prstGeom prst="rect">
+            <a:avLst/>
+          </a:prstGeom>
+          <a:noFill/>
+          <a:ln/>
+        </p:spPr>
+        <p:txBody>
+          <a:bodyPr wrap="square" lIns="0" tIns="0" rIns="0" bIns="0" rtlCol="0" anchor="ctr"/>
+          <a:lstStyle/>
+          <a:p>
+            <a:pPr algn="r" indent="0" marL="0">
+              <a:buNone/>
+            </a:pPr>
+            <a:r>
+              <a:rPr lang="en-US" sz="850" dirty="0">
+                <a:solidFill>
+                  <a:srgbClr val="9AA8B4"/>
+                </a:solidFill>
+                <a:latin typeface="Calibri" pitchFamily="34" charset="0"/>
+                <a:ea typeface="Calibri" pitchFamily="34" charset="-122"/>
+                <a:cs typeface="Calibri" pitchFamily="34" charset="-120"/>
+              </a:rPr>
+              <a:t>CP Lecture Series</a:t>
+            </a:r>
+            <a:pPr algn="r" indent="0" marL="0">
+              <a:buNone/>
+            </a:pPr>
+            <a:r>
+              <a:rPr lang="en-US" sz="850" dirty="0">
+                <a:solidFill>
+                  <a:srgbClr val="DCE4EC"/>
+                </a:solidFill>
+                <a:latin typeface="Calibri" pitchFamily="34" charset="0"/>
+                <a:ea typeface="Calibri" pitchFamily="34" charset="-122"/>
+                <a:cs typeface="Calibri" pitchFamily="34" charset="-120"/>
+              </a:rPr>
+              <a:t>   ·   </a:t>
+            </a:r>
+            <a:pPr algn="r" indent="0" marL="0">
+              <a:buNone/>
+            </a:pPr>
+            <a:r>
+              <a:rPr lang="en-US" sz="850" b="1" dirty="0">
+                <a:solidFill>
+                  <a:srgbClr val="00838F"/>
+                </a:solidFill>
+                <a:latin typeface="Calibri" pitchFamily="34" charset="0"/>
+                <a:ea typeface="Calibri" pitchFamily="34" charset="-122"/>
+                <a:cs typeface="Calibri" pitchFamily="34" charset="-120"/>
+              </a:rPr>
+              <a:t>19</a:t>
+            </a:r>
+            <a:endParaRPr lang="en-US" sz="850" dirty="0"/>
+          </a:p>
+        </p:txBody>
+      </p:sp>
+    </p:spTree>
+  </p:cSld>
+  <p:clrMapOvr>
+    <a:masterClrMapping/>
+  </p:clrMapOvr>
+</p:sld>
+</file>
+
+<file path=ppt/slides/slide23.xml><?xml version="1.0" encoding="utf-8"?>
+<p:sld xmlns:a="http://schemas.openxmlformats.org/drawingml/2006/main" xmlns:r="http://schemas.openxmlformats.org/officeDocument/2006/relationships" xmlns:p="http://schemas.openxmlformats.org/presentationml/2006/main">
+  <p:cSld name="Slide 23">
+    <p:bg>
+      <p:bgPr>
+        <a:solidFill>
+          <a:srgbClr val="FFFFFF"/>
+        </a:solidFill>
+      </p:bgPr>
+    </p:bg>
+    <p:spTree>
+      <p:nvGrpSpPr>
+        <p:cNvPr id="1" name=""/>
+        <p:cNvGrpSpPr/>
+        <p:nvPr/>
+      </p:nvGrpSpPr>
+      <p:grpSpPr>
+        <a:xfrm>
+          <a:off x="0" y="0"/>
+          <a:ext cx="0" cy="0"/>
+          <a:chOff x="0" y="0"/>
+          <a:chExt cx="0" cy="0"/>
+        </a:xfrm>
+      </p:grpSpPr>
+      <p:sp>
+        <p:nvSpPr>
+          <p:cNvPr id="2" name="Text 0"/>
+          <p:cNvSpPr/>
+          <p:nvPr/>
+        </p:nvSpPr>
+        <p:spPr>
+          <a:xfrm>
+            <a:off x="566928" y="329184"/>
+            <a:ext cx="10515600" cy="310896"/>
+          </a:xfrm>
+          <a:prstGeom prst="rect">
+            <a:avLst/>
+          </a:prstGeom>
+          <a:noFill/>
+          <a:ln/>
+        </p:spPr>
+        <p:txBody>
+          <a:bodyPr wrap="square" lIns="0" tIns="0" rIns="0" bIns="0" rtlCol="0" anchor="ctr"/>
+          <a:lstStyle/>
+          <a:p>
+            <a:pPr algn="l" indent="0" marL="0">
+              <a:buNone/>
+            </a:pPr>
+            <a:r>
+              <a:rPr lang="en-US" sz="1100" b="1" spc="150" kern="0" dirty="0">
+                <a:solidFill>
+                  <a:srgbClr val="00838F"/>
+                </a:solidFill>
+                <a:latin typeface="Calibri" pitchFamily="34" charset="0"/>
+                <a:ea typeface="Calibri" pitchFamily="34" charset="-122"/>
+                <a:cs typeface="Calibri" pitchFamily="34" charset="-120"/>
+              </a:rPr>
+              <a:t>MOLECULAR &amp; CYTOGENETICS   ·   BOARD REVIEW  ·  Q4</a:t>
+            </a:r>
+            <a:endParaRPr lang="en-US" sz="1100" dirty="0"/>
+          </a:p>
+        </p:txBody>
+      </p:sp>
+      <p:sp>
+        <p:nvSpPr>
+          <p:cNvPr id="3" name="Text 1"/>
+          <p:cNvSpPr/>
+          <p:nvPr/>
+        </p:nvSpPr>
+        <p:spPr>
+          <a:xfrm>
+            <a:off x="566928" y="713232"/>
+            <a:ext cx="11064240" cy="749808"/>
+          </a:xfrm>
+          <a:prstGeom prst="rect">
+            <a:avLst/>
+          </a:prstGeom>
+          <a:noFill/>
+          <a:ln/>
+        </p:spPr>
+        <p:txBody>
+          <a:bodyPr wrap="square" lIns="0" tIns="0" rIns="0" bIns="0" rtlCol="0" anchor="ctr"/>
+          <a:lstStyle/>
+          <a:p>
+            <a:pPr algn="l" indent="0" marL="0">
+              <a:buNone/>
+            </a:pPr>
+            <a:r>
+              <a:rPr lang="en-US" sz="2600" b="1" dirty="0">
+                <a:solidFill>
+                  <a:srgbClr val="0E3A5F"/>
+                </a:solidFill>
+                <a:latin typeface="Calibri" pitchFamily="34" charset="0"/>
+                <a:ea typeface="Calibri" pitchFamily="34" charset="-122"/>
+                <a:cs typeface="Calibri" pitchFamily="34" charset="-120"/>
+              </a:rPr>
+              <a:t>Board-Style Review</a:t>
+            </a:r>
+            <a:endParaRPr lang="en-US" sz="2600" dirty="0"/>
+          </a:p>
+        </p:txBody>
+      </p:sp>
+      <p:sp>
+        <p:nvSpPr>
+          <p:cNvPr id="4" name="Text 2"/>
+          <p:cNvSpPr/>
+          <p:nvPr/>
+        </p:nvSpPr>
+        <p:spPr>
+          <a:xfrm>
+            <a:off x="566928" y="1417320"/>
+            <a:ext cx="11057839" cy="914400"/>
+          </a:xfrm>
+          <a:prstGeom prst="rect">
+            <a:avLst/>
+          </a:prstGeom>
+          <a:noFill/>
+          <a:ln/>
+        </p:spPr>
+        <p:txBody>
+          <a:bodyPr wrap="square" lIns="0" tIns="0" rIns="0" bIns="0" rtlCol="0" anchor="t"/>
+          <a:lstStyle/>
+          <a:p>
+            <a:pPr algn="l" indent="0" marL="0">
+              <a:lnSpc>
+                <a:spcPct val="105000"/>
+              </a:lnSpc>
+              <a:buNone/>
+            </a:pPr>
+            <a:r>
+              <a:rPr lang="en-US" sz="1450" b="1" dirty="0">
+                <a:solidFill>
+                  <a:srgbClr val="1B2A38"/>
+                </a:solidFill>
+                <a:latin typeface="Calibri" pitchFamily="34" charset="0"/>
+                <a:ea typeface="Calibri" pitchFamily="34" charset="-122"/>
+                <a:cs typeface="Calibri" pitchFamily="34" charset="-120"/>
+              </a:rPr>
+              <a:t>After a major variant-caller software upgrade, the laboratory should:</a:t>
+            </a:r>
+            <a:endParaRPr lang="en-US" sz="1450" dirty="0"/>
+          </a:p>
+        </p:txBody>
+      </p:sp>
+      <p:sp>
+        <p:nvSpPr>
+          <p:cNvPr id="5" name="Text 3"/>
+          <p:cNvSpPr/>
+          <p:nvPr/>
+        </p:nvSpPr>
+        <p:spPr>
+          <a:xfrm>
+            <a:off x="658368" y="2395728"/>
+            <a:ext cx="6192390" cy="3017520"/>
+          </a:xfrm>
+          <a:prstGeom prst="rect">
+            <a:avLst/>
+          </a:prstGeom>
+          <a:noFill/>
+          <a:ln/>
+        </p:spPr>
+        <p:txBody>
+          <a:bodyPr wrap="square" lIns="0" tIns="0" rIns="0" bIns="0" rtlCol="0" anchor="t"/>
+          <a:lstStyle/>
+          <a:p>
+            <a:pPr algn="l" indent="0" marL="0">
+              <a:spcAft>
+                <a:spcPts val="600"/>
+              </a:spcAft>
+              <a:buNone/>
+            </a:pPr>
+            <a:r>
+              <a:rPr lang="en-US" sz="1350" dirty="0">
+                <a:solidFill>
+                  <a:srgbClr val="33444F"/>
+                </a:solidFill>
+                <a:latin typeface="Calibri" pitchFamily="34" charset="0"/>
+                <a:ea typeface="Calibri" pitchFamily="34" charset="-122"/>
+                <a:cs typeface="Calibri" pitchFamily="34" charset="-120"/>
+              </a:rPr>
+              <a:t>A. Report immediately</a:t>
+            </a:r>
+            <a:endParaRPr lang="en-US" sz="1350" dirty="0"/>
+          </a:p>
+          <a:p>
+            <a:pPr algn="l" indent="0" marL="0">
+              <a:spcAft>
+                <a:spcPts val="600"/>
+              </a:spcAft>
+              <a:buNone/>
+            </a:pPr>
+            <a:r>
+              <a:rPr lang="en-US" sz="1350" b="1" dirty="0">
+                <a:solidFill>
+                  <a:srgbClr val="005A63"/>
+                </a:solidFill>
+                <a:latin typeface="Calibri" pitchFamily="34" charset="0"/>
+                <a:ea typeface="Calibri" pitchFamily="34" charset="-122"/>
+                <a:cs typeface="Calibri" pitchFamily="34" charset="-120"/>
+              </a:rPr>
+              <a:t>B. Revalidate and document before clinical reporting</a:t>
+            </a:r>
+            <a:endParaRPr lang="en-US" sz="1350" dirty="0"/>
+          </a:p>
+          <a:p>
+            <a:pPr algn="l" indent="0" marL="0">
+              <a:spcAft>
+                <a:spcPts val="600"/>
+              </a:spcAft>
+              <a:buNone/>
+            </a:pPr>
+            <a:r>
+              <a:rPr lang="en-US" sz="1350" dirty="0">
+                <a:solidFill>
+                  <a:srgbClr val="33444F"/>
+                </a:solidFill>
+                <a:latin typeface="Calibri" pitchFamily="34" charset="0"/>
+                <a:ea typeface="Calibri" pitchFamily="34" charset="-122"/>
+                <a:cs typeface="Calibri" pitchFamily="34" charset="-120"/>
+              </a:rPr>
+              <a:t>C. Use it only for research forever</a:t>
+            </a:r>
+            <a:endParaRPr lang="en-US" sz="1350" dirty="0"/>
+          </a:p>
+          <a:p>
+            <a:pPr algn="l" indent="0" marL="0">
+              <a:spcAft>
+                <a:spcPts val="600"/>
+              </a:spcAft>
+              <a:buNone/>
+            </a:pPr>
+            <a:r>
+              <a:rPr lang="en-US" sz="1350" dirty="0">
+                <a:solidFill>
+                  <a:srgbClr val="33444F"/>
+                </a:solidFill>
+                <a:latin typeface="Calibri" pitchFamily="34" charset="0"/>
+                <a:ea typeface="Calibri" pitchFamily="34" charset="-122"/>
+                <a:cs typeface="Calibri" pitchFamily="34" charset="-120"/>
+              </a:rPr>
+              <a:t>D. Avoid documentation</a:t>
+            </a:r>
+            <a:endParaRPr lang="en-US" sz="1350" dirty="0"/>
+          </a:p>
+          <a:p>
+            <a:pPr algn="l" indent="0" marL="0">
+              <a:spcAft>
+                <a:spcPts val="600"/>
+              </a:spcAft>
+              <a:buNone/>
+            </a:pPr>
+            <a:r>
+              <a:rPr lang="en-US" sz="1350" dirty="0">
+                <a:solidFill>
+                  <a:srgbClr val="33444F"/>
+                </a:solidFill>
+                <a:latin typeface="Calibri" pitchFamily="34" charset="0"/>
+                <a:ea typeface="Calibri" pitchFamily="34" charset="-122"/>
+                <a:cs typeface="Calibri" pitchFamily="34" charset="-120"/>
+              </a:rPr>
+              <a:t>E. Lower the coverage threshold</a:t>
+            </a:r>
+            <a:endParaRPr lang="en-US" sz="1350" dirty="0"/>
+          </a:p>
+        </p:txBody>
+      </p:sp>
+      <p:sp>
+        <p:nvSpPr>
+          <p:cNvPr id="6" name="Shape 4"/>
+          <p:cNvSpPr/>
+          <p:nvPr/>
+        </p:nvSpPr>
+        <p:spPr>
+          <a:xfrm>
+            <a:off x="7201632" y="2395728"/>
+            <a:ext cx="4423136" cy="3246120"/>
+          </a:xfrm>
+          <a:prstGeom prst="roundRect">
+            <a:avLst>
+              <a:gd name="adj" fmla="val 2535"/>
+            </a:avLst>
+          </a:prstGeom>
+          <a:solidFill>
+            <a:srgbClr val="E0F2F4"/>
+          </a:solidFill>
+          <a:ln/>
+          <a:effectLst>
+            <a:outerShdw sx="100000" sy="100000" kx="0" ky="0" algn="bl" rotWithShape="0" blurRad="88900" dist="25400" dir="5400000">
+              <a:srgbClr val="22303C">
+                <a:alpha val="12000"/>
+              </a:srgbClr>
+            </a:outerShdw>
+          </a:effectLst>
+        </p:spPr>
+      </p:sp>
+      <p:sp>
+        <p:nvSpPr>
+          <p:cNvPr id="7" name="Text 5"/>
+          <p:cNvSpPr/>
+          <p:nvPr/>
+        </p:nvSpPr>
+        <p:spPr>
+          <a:xfrm>
+            <a:off x="7439376" y="2578608"/>
+            <a:ext cx="3965936" cy="457200"/>
+          </a:xfrm>
+          <a:prstGeom prst="rect">
+            <a:avLst/>
+          </a:prstGeom>
+          <a:noFill/>
+          <a:ln/>
+        </p:spPr>
+        <p:txBody>
+          <a:bodyPr wrap="square" lIns="0" tIns="0" rIns="0" bIns="0" rtlCol="0" anchor="ctr"/>
+          <a:lstStyle/>
+          <a:p>
+            <a:pPr indent="0" marL="0">
+              <a:buNone/>
+            </a:pPr>
+            <a:r>
+              <a:rPr lang="en-US" sz="1500" b="1" dirty="0">
+                <a:solidFill>
+                  <a:srgbClr val="00838F"/>
+                </a:solidFill>
+                <a:latin typeface="Calibri" pitchFamily="34" charset="0"/>
+                <a:ea typeface="Calibri" pitchFamily="34" charset="-122"/>
+                <a:cs typeface="Calibri" pitchFamily="34" charset="-120"/>
+              </a:rPr>
+              <a:t>ANSWER  </a:t>
+            </a:r>
+            <a:pPr indent="0" marL="0">
+              <a:buNone/>
+            </a:pPr>
+            <a:r>
+              <a:rPr lang="en-US" sz="1500" b="1" dirty="0">
+                <a:solidFill>
+                  <a:srgbClr val="1B2A38"/>
+                </a:solidFill>
+                <a:latin typeface="Calibri" pitchFamily="34" charset="0"/>
+                <a:ea typeface="Calibri" pitchFamily="34" charset="-122"/>
+                <a:cs typeface="Calibri" pitchFamily="34" charset="-120"/>
+              </a:rPr>
+              <a:t>B — Revalidate and document</a:t>
+            </a:r>
+            <a:endParaRPr lang="en-US" sz="1500" dirty="0"/>
+          </a:p>
+        </p:txBody>
+      </p:sp>
+      <p:sp>
+        <p:nvSpPr>
+          <p:cNvPr id="8" name="Text 6"/>
+          <p:cNvSpPr/>
+          <p:nvPr/>
+        </p:nvSpPr>
+        <p:spPr>
+          <a:xfrm>
+            <a:off x="7439376" y="3127248"/>
+            <a:ext cx="3947648" cy="2377440"/>
+          </a:xfrm>
+          <a:prstGeom prst="rect">
+            <a:avLst/>
+          </a:prstGeom>
+          <a:noFill/>
+          <a:ln/>
+        </p:spPr>
+        <p:txBody>
+          <a:bodyPr wrap="square" lIns="0" tIns="0" rIns="0" bIns="0" rtlCol="0" anchor="t"/>
+          <a:lstStyle/>
+          <a:p>
+            <a:pPr algn="l" indent="0" marL="0">
+              <a:lnSpc>
+                <a:spcPct val="108000"/>
+              </a:lnSpc>
+              <a:buNone/>
+            </a:pPr>
+            <a:r>
+              <a:rPr lang="en-US" sz="1250" dirty="0">
+                <a:solidFill>
+                  <a:srgbClr val="33444F"/>
+                </a:solidFill>
+                <a:latin typeface="Calibri" pitchFamily="34" charset="0"/>
+                <a:ea typeface="Calibri" pitchFamily="34" charset="-122"/>
+                <a:cs typeface="Calibri" pitchFamily="34" charset="-120"/>
+              </a:rPr>
+              <a:t>Significant pipeline changes require revalidation against reference materials before clinical use.</a:t>
+            </a:r>
+            <a:endParaRPr lang="en-US" sz="1250" dirty="0"/>
+          </a:p>
+        </p:txBody>
+      </p:sp>
+      <p:sp>
+        <p:nvSpPr>
+          <p:cNvPr id="9" name="Text 7"/>
+          <p:cNvSpPr/>
+          <p:nvPr/>
+        </p:nvSpPr>
+        <p:spPr>
+          <a:xfrm>
+            <a:off x="566928" y="6473952"/>
+            <a:ext cx="7772400" cy="274320"/>
+          </a:xfrm>
+          <a:prstGeom prst="rect">
+            <a:avLst/>
+          </a:prstGeom>
+          <a:noFill/>
+          <a:ln/>
+        </p:spPr>
+        <p:txBody>
+          <a:bodyPr wrap="square" lIns="0" tIns="0" rIns="0" bIns="0" rtlCol="0" anchor="ctr"/>
+          <a:lstStyle/>
+          <a:p>
+            <a:pPr algn="l" indent="0" marL="0">
+              <a:buNone/>
+            </a:pPr>
+            <a:r>
+              <a:rPr lang="en-US" sz="850" dirty="0">
+                <a:solidFill>
+                  <a:srgbClr val="9AA8B4"/>
+                </a:solidFill>
+                <a:latin typeface="Calibri" pitchFamily="34" charset="0"/>
+                <a:ea typeface="Calibri" pitchFamily="34" charset="-122"/>
+                <a:cs typeface="Calibri" pitchFamily="34" charset="-120"/>
+              </a:rPr>
+              <a:t>Makassed General Hospital  ·  Department of Laboratory Medicine</a:t>
+            </a:r>
+            <a:endParaRPr lang="en-US" sz="850" dirty="0"/>
+          </a:p>
+        </p:txBody>
+      </p:sp>
+      <p:sp>
+        <p:nvSpPr>
+          <p:cNvPr id="10" name="Text 8"/>
+          <p:cNvSpPr/>
+          <p:nvPr/>
+        </p:nvSpPr>
+        <p:spPr>
+          <a:xfrm>
+            <a:off x="9814255" y="6473952"/>
+            <a:ext cx="1828800" cy="274320"/>
+          </a:xfrm>
+          <a:prstGeom prst="rect">
+            <a:avLst/>
+          </a:prstGeom>
+          <a:noFill/>
+          <a:ln/>
+        </p:spPr>
+        <p:txBody>
+          <a:bodyPr wrap="square" lIns="0" tIns="0" rIns="0" bIns="0" rtlCol="0" anchor="ctr"/>
+          <a:lstStyle/>
+          <a:p>
+            <a:pPr algn="r" indent="0" marL="0">
+              <a:buNone/>
+            </a:pPr>
+            <a:r>
+              <a:rPr lang="en-US" sz="850" dirty="0">
+                <a:solidFill>
+                  <a:srgbClr val="9AA8B4"/>
+                </a:solidFill>
+                <a:latin typeface="Calibri" pitchFamily="34" charset="0"/>
+                <a:ea typeface="Calibri" pitchFamily="34" charset="-122"/>
+                <a:cs typeface="Calibri" pitchFamily="34" charset="-120"/>
+              </a:rPr>
+              <a:t>CP Lecture Series</a:t>
+            </a:r>
+            <a:pPr algn="r" indent="0" marL="0">
+              <a:buNone/>
+            </a:pPr>
+            <a:r>
+              <a:rPr lang="en-US" sz="850" dirty="0">
+                <a:solidFill>
+                  <a:srgbClr val="DCE4EC"/>
+                </a:solidFill>
+                <a:latin typeface="Calibri" pitchFamily="34" charset="0"/>
+                <a:ea typeface="Calibri" pitchFamily="34" charset="-122"/>
+                <a:cs typeface="Calibri" pitchFamily="34" charset="-120"/>
+              </a:rPr>
+              <a:t>   ·   </a:t>
+            </a:r>
+            <a:pPr algn="r" indent="0" marL="0">
+              <a:buNone/>
+            </a:pPr>
+            <a:r>
+              <a:rPr lang="en-US" sz="850" b="1" dirty="0">
+                <a:solidFill>
+                  <a:srgbClr val="00838F"/>
+                </a:solidFill>
+                <a:latin typeface="Calibri" pitchFamily="34" charset="0"/>
+                <a:ea typeface="Calibri" pitchFamily="34" charset="-122"/>
+                <a:cs typeface="Calibri" pitchFamily="34" charset="-120"/>
+              </a:rPr>
+              <a:t>20</a:t>
+            </a:r>
+            <a:endParaRPr lang="en-US" sz="850" dirty="0"/>
+          </a:p>
+        </p:txBody>
+      </p:sp>
+    </p:spTree>
+  </p:cSld>
+  <p:clrMapOvr>
+    <a:masterClrMapping/>
+  </p:clrMapOvr>
+</p:sld>
+</file>
+
+<file path=ppt/slides/slide24.xml><?xml version="1.0" encoding="utf-8"?>
+<p:sld xmlns:a="http://schemas.openxmlformats.org/drawingml/2006/main" xmlns:r="http://schemas.openxmlformats.org/officeDocument/2006/relationships" xmlns:p="http://schemas.openxmlformats.org/presentationml/2006/main">
+  <p:cSld name="Slide 24">
+    <p:bg>
+      <p:bgPr>
+        <a:solidFill>
+          <a:srgbClr val="0A2A45"/>
+        </a:solidFill>
+      </p:bgPr>
+    </p:bg>
+    <p:spTree>
+      <p:nvGrpSpPr>
+        <p:cNvPr id="1" name=""/>
+        <p:cNvGrpSpPr/>
+        <p:nvPr/>
+      </p:nvGrpSpPr>
+      <p:grpSpPr>
+        <a:xfrm>
+          <a:off x="0" y="0"/>
+          <a:ext cx="0" cy="0"/>
+          <a:chOff x="0" y="0"/>
+          <a:chExt cx="0" cy="0"/>
+        </a:xfrm>
+      </p:grpSpPr>
+      <p:sp>
+        <p:nvSpPr>
+          <p:cNvPr id="2" name="Text 0"/>
+          <p:cNvSpPr/>
+          <p:nvPr/>
+        </p:nvSpPr>
+        <p:spPr>
+          <a:xfrm>
+            <a:off x="566928" y="329184"/>
+            <a:ext cx="10058400" cy="310896"/>
+          </a:xfrm>
+          <a:prstGeom prst="rect">
+            <a:avLst/>
+          </a:prstGeom>
+          <a:noFill/>
+          <a:ln/>
+        </p:spPr>
+        <p:txBody>
+          <a:bodyPr wrap="square" lIns="0" tIns="0" rIns="0" bIns="0" rtlCol="0" anchor="ctr"/>
+          <a:lstStyle/>
+          <a:p>
+            <a:pPr indent="0" marL="0">
+              <a:buNone/>
+            </a:pPr>
+            <a:r>
+              <a:rPr lang="en-US" sz="1100" b="1" spc="150" kern="0" dirty="0">
+                <a:solidFill>
+                  <a:srgbClr val="00838F"/>
+                </a:solidFill>
+                <a:latin typeface="Calibri" pitchFamily="34" charset="0"/>
+                <a:ea typeface="Calibri" pitchFamily="34" charset="-122"/>
+                <a:cs typeface="Calibri" pitchFamily="34" charset="-120"/>
+              </a:rPr>
+              <a:t>MOLECULAR &amp; CYTOGENETICS</a:t>
+            </a:r>
+            <a:endParaRPr lang="en-US" sz="1100" dirty="0"/>
+          </a:p>
+        </p:txBody>
+      </p:sp>
+      <p:sp>
+        <p:nvSpPr>
+          <p:cNvPr id="3" name="Text 1"/>
+          <p:cNvSpPr/>
+          <p:nvPr/>
+        </p:nvSpPr>
+        <p:spPr>
+          <a:xfrm>
+            <a:off x="566928" y="676656"/>
+            <a:ext cx="10972800" cy="749808"/>
+          </a:xfrm>
+          <a:prstGeom prst="rect">
+            <a:avLst/>
+          </a:prstGeom>
+          <a:noFill/>
+          <a:ln/>
+        </p:spPr>
+        <p:txBody>
+          <a:bodyPr wrap="square" lIns="0" tIns="0" rIns="0" bIns="0" rtlCol="0" anchor="ctr"/>
+          <a:lstStyle/>
+          <a:p>
+            <a:pPr indent="0" marL="0">
+              <a:buNone/>
+            </a:pPr>
+            <a:r>
+              <a:rPr lang="en-US" sz="3000" b="1" dirty="0">
+                <a:solidFill>
+                  <a:srgbClr val="FFFFFF"/>
+                </a:solidFill>
+                <a:latin typeface="Calibri" pitchFamily="34" charset="0"/>
+                <a:ea typeface="Calibri" pitchFamily="34" charset="-122"/>
+                <a:cs typeface="Calibri" pitchFamily="34" charset="-120"/>
+              </a:rPr>
+              <a:t>Key Take-Home Points</a:t>
+            </a:r>
+            <a:endParaRPr lang="en-US" sz="3000" dirty="0"/>
+          </a:p>
+        </p:txBody>
+      </p:sp>
+      <p:sp>
+        <p:nvSpPr>
+          <p:cNvPr id="4" name="Shape 2"/>
+          <p:cNvSpPr/>
+          <p:nvPr/>
+        </p:nvSpPr>
+        <p:spPr>
+          <a:xfrm>
+            <a:off x="566928" y="1517904"/>
+            <a:ext cx="11057839" cy="841248"/>
+          </a:xfrm>
+          <a:prstGeom prst="roundRect">
+            <a:avLst>
+              <a:gd name="adj" fmla="val 7609"/>
+            </a:avLst>
+          </a:prstGeom>
+          <a:solidFill>
+            <a:srgbClr val="143651"/>
+          </a:solidFill>
+          <a:ln/>
+        </p:spPr>
+      </p:sp>
+      <p:sp>
+        <p:nvSpPr>
+          <p:cNvPr id="5" name="Shape 3"/>
+          <p:cNvSpPr/>
+          <p:nvPr/>
+        </p:nvSpPr>
+        <p:spPr>
+          <a:xfrm>
+            <a:off x="749808" y="1755648"/>
+            <a:ext cx="365760" cy="365760"/>
+          </a:xfrm>
+          <a:prstGeom prst="ellipse">
+            <a:avLst/>
+          </a:prstGeom>
+          <a:solidFill>
+            <a:srgbClr val="00838F"/>
+          </a:solidFill>
+          <a:ln/>
+          <a:effectLst>
+            <a:outerShdw sx="100000" sy="100000" kx="0" ky="0" algn="bl" rotWithShape="0" blurRad="88900" dist="25400" dir="5400000">
+              <a:srgbClr val="22303C">
+                <a:alpha val="12000"/>
+              </a:srgbClr>
+            </a:outerShdw>
+          </a:effectLst>
+        </p:spPr>
+      </p:sp>
+      <p:sp>
+        <p:nvSpPr>
+          <p:cNvPr id="6" name="Text 4"/>
+          <p:cNvSpPr/>
+          <p:nvPr/>
+        </p:nvSpPr>
+        <p:spPr>
+          <a:xfrm>
+            <a:off x="749808" y="1755648"/>
+            <a:ext cx="365760" cy="365760"/>
+          </a:xfrm>
+          <a:prstGeom prst="rect">
+            <a:avLst/>
+          </a:prstGeom>
+          <a:noFill/>
+          <a:ln/>
+        </p:spPr>
+        <p:txBody>
+          <a:bodyPr wrap="square" lIns="0" tIns="0" rIns="0" bIns="0" rtlCol="0" anchor="ctr"/>
+          <a:lstStyle/>
+          <a:p>
+            <a:pPr algn="ctr" indent="0" marL="0">
+              <a:buNone/>
+            </a:pPr>
+            <a:r>
+              <a:rPr lang="en-US" sz="1500" b="1" dirty="0">
+                <a:solidFill>
+                  <a:srgbClr val="FFFFFF"/>
+                </a:solidFill>
+                <a:latin typeface="Calibri" pitchFamily="34" charset="0"/>
+                <a:ea typeface="Calibri" pitchFamily="34" charset="-122"/>
+                <a:cs typeface="Calibri" pitchFamily="34" charset="-120"/>
+              </a:rPr>
+              <a:t>1</a:t>
+            </a:r>
+            <a:endParaRPr lang="en-US" sz="1500" dirty="0"/>
+          </a:p>
+        </p:txBody>
+      </p:sp>
+      <p:sp>
+        <p:nvSpPr>
+          <p:cNvPr id="7" name="Text 5"/>
+          <p:cNvSpPr/>
+          <p:nvPr/>
+        </p:nvSpPr>
+        <p:spPr>
+          <a:xfrm>
+            <a:off x="1280160" y="1517904"/>
+            <a:ext cx="10143439" cy="841248"/>
+          </a:xfrm>
+          <a:prstGeom prst="rect">
+            <a:avLst/>
+          </a:prstGeom>
+          <a:noFill/>
+          <a:ln/>
+        </p:spPr>
+        <p:txBody>
+          <a:bodyPr wrap="square" lIns="0" tIns="0" rIns="0" bIns="0" rtlCol="0" anchor="ctr"/>
+          <a:lstStyle/>
+          <a:p>
+            <a:pPr algn="l" indent="0" marL="0">
+              <a:buNone/>
+            </a:pPr>
+            <a:r>
+              <a:rPr lang="en-US" sz="1350" dirty="0">
+                <a:solidFill>
+                  <a:srgbClr val="E7EEF4"/>
+                </a:solidFill>
+                <a:latin typeface="Calibri" pitchFamily="34" charset="0"/>
+                <a:ea typeface="Calibri" pitchFamily="34" charset="-122"/>
+                <a:cs typeface="Calibri" pitchFamily="34" charset="-120"/>
+              </a:rPr>
+              <a:t>Validate accuracy, precision, analytic sensitivity/specificity, limit of detection, and reportable range before clinical use.</a:t>
+            </a:r>
+            <a:endParaRPr lang="en-US" sz="1350" dirty="0"/>
+          </a:p>
+        </p:txBody>
+      </p:sp>
+      <p:sp>
+        <p:nvSpPr>
+          <p:cNvPr id="8" name="Shape 6"/>
+          <p:cNvSpPr/>
+          <p:nvPr/>
+        </p:nvSpPr>
+        <p:spPr>
+          <a:xfrm>
+            <a:off x="566928" y="2505456"/>
+            <a:ext cx="11057839" cy="841248"/>
+          </a:xfrm>
+          <a:prstGeom prst="roundRect">
+            <a:avLst>
+              <a:gd name="adj" fmla="val 7609"/>
+            </a:avLst>
+          </a:prstGeom>
+          <a:solidFill>
+            <a:srgbClr val="143651"/>
+          </a:solidFill>
+          <a:ln/>
+        </p:spPr>
+      </p:sp>
+      <p:sp>
+        <p:nvSpPr>
+          <p:cNvPr id="9" name="Shape 7"/>
+          <p:cNvSpPr/>
+          <p:nvPr/>
+        </p:nvSpPr>
+        <p:spPr>
+          <a:xfrm>
+            <a:off x="749808" y="2743200"/>
+            <a:ext cx="365760" cy="365760"/>
+          </a:xfrm>
+          <a:prstGeom prst="ellipse">
+            <a:avLst/>
+          </a:prstGeom>
+          <a:solidFill>
+            <a:srgbClr val="00838F"/>
+          </a:solidFill>
+          <a:ln/>
+          <a:effectLst>
+            <a:outerShdw sx="100000" sy="100000" kx="0" ky="0" algn="bl" rotWithShape="0" blurRad="88900" dist="25400" dir="5400000">
+              <a:srgbClr val="22303C">
+                <a:alpha val="12000"/>
+              </a:srgbClr>
+            </a:outerShdw>
+          </a:effectLst>
+        </p:spPr>
+      </p:sp>
+      <p:sp>
+        <p:nvSpPr>
+          <p:cNvPr id="10" name="Text 8"/>
+          <p:cNvSpPr/>
+          <p:nvPr/>
+        </p:nvSpPr>
+        <p:spPr>
+          <a:xfrm>
+            <a:off x="749808" y="2743200"/>
+            <a:ext cx="365760" cy="365760"/>
+          </a:xfrm>
+          <a:prstGeom prst="rect">
+            <a:avLst/>
+          </a:prstGeom>
+          <a:noFill/>
+          <a:ln/>
+        </p:spPr>
+        <p:txBody>
+          <a:bodyPr wrap="square" lIns="0" tIns="0" rIns="0" bIns="0" rtlCol="0" anchor="ctr"/>
+          <a:lstStyle/>
+          <a:p>
+            <a:pPr algn="ctr" indent="0" marL="0">
+              <a:buNone/>
+            </a:pPr>
+            <a:r>
+              <a:rPr lang="en-US" sz="1500" b="1" dirty="0">
+                <a:solidFill>
+                  <a:srgbClr val="FFFFFF"/>
+                </a:solidFill>
+                <a:latin typeface="Calibri" pitchFamily="34" charset="0"/>
+                <a:ea typeface="Calibri" pitchFamily="34" charset="-122"/>
+                <a:cs typeface="Calibri" pitchFamily="34" charset="-120"/>
+              </a:rPr>
+              <a:t>2</a:t>
+            </a:r>
+            <a:endParaRPr lang="en-US" sz="1500" dirty="0"/>
+          </a:p>
+        </p:txBody>
+      </p:sp>
+      <p:sp>
+        <p:nvSpPr>
+          <p:cNvPr id="11" name="Text 9"/>
+          <p:cNvSpPr/>
+          <p:nvPr/>
+        </p:nvSpPr>
+        <p:spPr>
+          <a:xfrm>
+            <a:off x="1280160" y="2505456"/>
+            <a:ext cx="10143439" cy="841248"/>
+          </a:xfrm>
+          <a:prstGeom prst="rect">
+            <a:avLst/>
+          </a:prstGeom>
+          <a:noFill/>
+          <a:ln/>
+        </p:spPr>
+        <p:txBody>
+          <a:bodyPr wrap="square" lIns="0" tIns="0" rIns="0" bIns="0" rtlCol="0" anchor="ctr"/>
+          <a:lstStyle/>
+          <a:p>
+            <a:pPr algn="l" indent="0" marL="0">
+              <a:buNone/>
+            </a:pPr>
+            <a:r>
+              <a:rPr lang="en-US" sz="1350" dirty="0">
+                <a:solidFill>
+                  <a:srgbClr val="E7EEF4"/>
+                </a:solidFill>
+                <a:latin typeface="Calibri" pitchFamily="34" charset="0"/>
+                <a:ea typeface="Calibri" pitchFamily="34" charset="-122"/>
+                <a:cs typeface="Calibri" pitchFamily="34" charset="-120"/>
+              </a:rPr>
+              <a:t>LDTs require full validation; FDA-cleared assays require verification — any modification triggers validation.</a:t>
+            </a:r>
+            <a:endParaRPr lang="en-US" sz="1350" dirty="0"/>
+          </a:p>
+        </p:txBody>
+      </p:sp>
+      <p:sp>
+        <p:nvSpPr>
+          <p:cNvPr id="12" name="Shape 10"/>
+          <p:cNvSpPr/>
+          <p:nvPr/>
+        </p:nvSpPr>
+        <p:spPr>
+          <a:xfrm>
+            <a:off x="566928" y="3493008"/>
+            <a:ext cx="11057839" cy="841248"/>
+          </a:xfrm>
+          <a:prstGeom prst="roundRect">
+            <a:avLst>
+              <a:gd name="adj" fmla="val 7609"/>
+            </a:avLst>
+          </a:prstGeom>
+          <a:solidFill>
+            <a:srgbClr val="143651"/>
+          </a:solidFill>
+          <a:ln/>
+        </p:spPr>
+      </p:sp>
+      <p:sp>
+        <p:nvSpPr>
+          <p:cNvPr id="13" name="Shape 11"/>
+          <p:cNvSpPr/>
+          <p:nvPr/>
+        </p:nvSpPr>
+        <p:spPr>
+          <a:xfrm>
+            <a:off x="749808" y="3730752"/>
+            <a:ext cx="365760" cy="365760"/>
+          </a:xfrm>
+          <a:prstGeom prst="ellipse">
+            <a:avLst/>
+          </a:prstGeom>
+          <a:solidFill>
+            <a:srgbClr val="00838F"/>
+          </a:solidFill>
+          <a:ln/>
+          <a:effectLst>
+            <a:outerShdw sx="100000" sy="100000" kx="0" ky="0" algn="bl" rotWithShape="0" blurRad="88900" dist="25400" dir="5400000">
+              <a:srgbClr val="22303C">
+                <a:alpha val="12000"/>
+              </a:srgbClr>
+            </a:outerShdw>
+          </a:effectLst>
+        </p:spPr>
+      </p:sp>
+      <p:sp>
+        <p:nvSpPr>
+          <p:cNvPr id="14" name="Text 12"/>
+          <p:cNvSpPr/>
+          <p:nvPr/>
+        </p:nvSpPr>
+        <p:spPr>
+          <a:xfrm>
+            <a:off x="749808" y="3730752"/>
+            <a:ext cx="365760" cy="365760"/>
+          </a:xfrm>
+          <a:prstGeom prst="rect">
+            <a:avLst/>
+          </a:prstGeom>
+          <a:noFill/>
+          <a:ln/>
+        </p:spPr>
+        <p:txBody>
+          <a:bodyPr wrap="square" lIns="0" tIns="0" rIns="0" bIns="0" rtlCol="0" anchor="ctr"/>
+          <a:lstStyle/>
+          <a:p>
+            <a:pPr algn="ctr" indent="0" marL="0">
+              <a:buNone/>
+            </a:pPr>
+            <a:r>
+              <a:rPr lang="en-US" sz="1500" b="1" dirty="0">
+                <a:solidFill>
+                  <a:srgbClr val="FFFFFF"/>
+                </a:solidFill>
+                <a:latin typeface="Calibri" pitchFamily="34" charset="0"/>
+                <a:ea typeface="Calibri" pitchFamily="34" charset="-122"/>
+                <a:cs typeface="Calibri" pitchFamily="34" charset="-120"/>
+              </a:rPr>
+              <a:t>3</a:t>
+            </a:r>
+            <a:endParaRPr lang="en-US" sz="1500" dirty="0"/>
+          </a:p>
+        </p:txBody>
+      </p:sp>
+      <p:sp>
+        <p:nvSpPr>
+          <p:cNvPr id="15" name="Text 13"/>
+          <p:cNvSpPr/>
+          <p:nvPr/>
+        </p:nvSpPr>
+        <p:spPr>
+          <a:xfrm>
+            <a:off x="1280160" y="3493008"/>
+            <a:ext cx="10143439" cy="841248"/>
+          </a:xfrm>
+          <a:prstGeom prst="rect">
+            <a:avLst/>
+          </a:prstGeom>
+          <a:noFill/>
+          <a:ln/>
+        </p:spPr>
+        <p:txBody>
+          <a:bodyPr wrap="square" lIns="0" tIns="0" rIns="0" bIns="0" rtlCol="0" anchor="ctr"/>
+          <a:lstStyle/>
+          <a:p>
+            <a:pPr algn="l" indent="0" marL="0">
+              <a:buNone/>
+            </a:pPr>
+            <a:r>
+              <a:rPr lang="en-US" sz="1350" dirty="0">
+                <a:solidFill>
+                  <a:srgbClr val="E7EEF4"/>
+                </a:solidFill>
+                <a:latin typeface="Calibri" pitchFamily="34" charset="0"/>
+                <a:ea typeface="Calibri" pitchFamily="34" charset="-122"/>
+                <a:cs typeface="Calibri" pitchFamily="34" charset="-120"/>
+              </a:rPr>
+              <a:t>For NGS, define variant types, depth, and difficult regions; the bioinformatics pipeline is part of the assay.</a:t>
+            </a:r>
+            <a:endParaRPr lang="en-US" sz="1350" dirty="0"/>
+          </a:p>
+        </p:txBody>
+      </p:sp>
+      <p:sp>
+        <p:nvSpPr>
+          <p:cNvPr id="16" name="Shape 14"/>
+          <p:cNvSpPr/>
+          <p:nvPr/>
+        </p:nvSpPr>
+        <p:spPr>
+          <a:xfrm>
+            <a:off x="566928" y="4480560"/>
+            <a:ext cx="11057839" cy="841248"/>
+          </a:xfrm>
+          <a:prstGeom prst="roundRect">
+            <a:avLst>
+              <a:gd name="adj" fmla="val 7609"/>
+            </a:avLst>
+          </a:prstGeom>
+          <a:solidFill>
+            <a:srgbClr val="143651"/>
+          </a:solidFill>
+          <a:ln/>
+        </p:spPr>
+      </p:sp>
+      <p:sp>
+        <p:nvSpPr>
+          <p:cNvPr id="17" name="Shape 15"/>
+          <p:cNvSpPr/>
+          <p:nvPr/>
+        </p:nvSpPr>
+        <p:spPr>
+          <a:xfrm>
+            <a:off x="749808" y="4718304"/>
+            <a:ext cx="365760" cy="365760"/>
+          </a:xfrm>
+          <a:prstGeom prst="ellipse">
+            <a:avLst/>
+          </a:prstGeom>
+          <a:solidFill>
+            <a:srgbClr val="00838F"/>
+          </a:solidFill>
+          <a:ln/>
+          <a:effectLst>
+            <a:outerShdw sx="100000" sy="100000" kx="0" ky="0" algn="bl" rotWithShape="0" blurRad="88900" dist="25400" dir="5400000">
+              <a:srgbClr val="22303C">
+                <a:alpha val="12000"/>
+              </a:srgbClr>
+            </a:outerShdw>
+          </a:effectLst>
+        </p:spPr>
+      </p:sp>
+      <p:sp>
+        <p:nvSpPr>
+          <p:cNvPr id="18" name="Text 16"/>
+          <p:cNvSpPr/>
+          <p:nvPr/>
+        </p:nvSpPr>
+        <p:spPr>
+          <a:xfrm>
+            <a:off x="749808" y="4718304"/>
+            <a:ext cx="365760" cy="365760"/>
+          </a:xfrm>
+          <a:prstGeom prst="rect">
+            <a:avLst/>
+          </a:prstGeom>
+          <a:noFill/>
+          <a:ln/>
+        </p:spPr>
+        <p:txBody>
+          <a:bodyPr wrap="square" lIns="0" tIns="0" rIns="0" bIns="0" rtlCol="0" anchor="ctr"/>
+          <a:lstStyle/>
+          <a:p>
+            <a:pPr algn="ctr" indent="0" marL="0">
+              <a:buNone/>
+            </a:pPr>
+            <a:r>
+              <a:rPr lang="en-US" sz="1500" b="1" dirty="0">
+                <a:solidFill>
+                  <a:srgbClr val="FFFFFF"/>
+                </a:solidFill>
+                <a:latin typeface="Calibri" pitchFamily="34" charset="0"/>
+                <a:ea typeface="Calibri" pitchFamily="34" charset="-122"/>
+                <a:cs typeface="Calibri" pitchFamily="34" charset="-120"/>
+              </a:rPr>
+              <a:t>4</a:t>
+            </a:r>
+            <a:endParaRPr lang="en-US" sz="1500" dirty="0"/>
+          </a:p>
+        </p:txBody>
+      </p:sp>
+      <p:sp>
+        <p:nvSpPr>
+          <p:cNvPr id="19" name="Text 17"/>
+          <p:cNvSpPr/>
+          <p:nvPr/>
+        </p:nvSpPr>
+        <p:spPr>
+          <a:xfrm>
+            <a:off x="1280160" y="4480560"/>
+            <a:ext cx="10143439" cy="841248"/>
+          </a:xfrm>
+          <a:prstGeom prst="rect">
+            <a:avLst/>
+          </a:prstGeom>
+          <a:noFill/>
+          <a:ln/>
+        </p:spPr>
+        <p:txBody>
+          <a:bodyPr wrap="square" lIns="0" tIns="0" rIns="0" bIns="0" rtlCol="0" anchor="ctr"/>
+          <a:lstStyle/>
+          <a:p>
+            <a:pPr algn="l" indent="0" marL="0">
+              <a:buNone/>
+            </a:pPr>
+            <a:r>
+              <a:rPr lang="en-US" sz="1350" dirty="0">
+                <a:solidFill>
+                  <a:srgbClr val="E7EEF4"/>
+                </a:solidFill>
+                <a:latin typeface="Calibri" pitchFamily="34" charset="0"/>
+                <a:ea typeface="Calibri" pitchFamily="34" charset="-122"/>
+                <a:cs typeface="Calibri" pitchFamily="34" charset="-120"/>
+              </a:rPr>
+              <a:t>Version-control and revalidate the pipeline and interpretation databases after significant changes.</a:t>
+            </a:r>
+            <a:endParaRPr lang="en-US" sz="1350" dirty="0"/>
+          </a:p>
+        </p:txBody>
+      </p:sp>
+      <p:sp>
+        <p:nvSpPr>
+          <p:cNvPr id="20" name="Shape 18"/>
+          <p:cNvSpPr/>
+          <p:nvPr/>
+        </p:nvSpPr>
+        <p:spPr>
+          <a:xfrm>
+            <a:off x="566928" y="5468112"/>
+            <a:ext cx="11057839" cy="841248"/>
+          </a:xfrm>
+          <a:prstGeom prst="roundRect">
+            <a:avLst>
+              <a:gd name="adj" fmla="val 7609"/>
+            </a:avLst>
+          </a:prstGeom>
+          <a:solidFill>
+            <a:srgbClr val="143651"/>
+          </a:solidFill>
+          <a:ln/>
+        </p:spPr>
+      </p:sp>
+      <p:sp>
+        <p:nvSpPr>
+          <p:cNvPr id="21" name="Shape 19"/>
+          <p:cNvSpPr/>
+          <p:nvPr/>
+        </p:nvSpPr>
+        <p:spPr>
+          <a:xfrm>
+            <a:off x="749808" y="5705856"/>
+            <a:ext cx="365760" cy="365760"/>
+          </a:xfrm>
+          <a:prstGeom prst="ellipse">
+            <a:avLst/>
+          </a:prstGeom>
+          <a:solidFill>
+            <a:srgbClr val="00838F"/>
+          </a:solidFill>
+          <a:ln/>
+          <a:effectLst>
+            <a:outerShdw sx="100000" sy="100000" kx="0" ky="0" algn="bl" rotWithShape="0" blurRad="88900" dist="25400" dir="5400000">
+              <a:srgbClr val="22303C">
+                <a:alpha val="12000"/>
+              </a:srgbClr>
+            </a:outerShdw>
+          </a:effectLst>
+        </p:spPr>
+      </p:sp>
+      <p:sp>
+        <p:nvSpPr>
+          <p:cNvPr id="22" name="Text 20"/>
+          <p:cNvSpPr/>
+          <p:nvPr/>
+        </p:nvSpPr>
+        <p:spPr>
+          <a:xfrm>
+            <a:off x="749808" y="5705856"/>
+            <a:ext cx="365760" cy="365760"/>
+          </a:xfrm>
+          <a:prstGeom prst="rect">
+            <a:avLst/>
+          </a:prstGeom>
+          <a:noFill/>
+          <a:ln/>
+        </p:spPr>
+        <p:txBody>
+          <a:bodyPr wrap="square" lIns="0" tIns="0" rIns="0" bIns="0" rtlCol="0" anchor="ctr"/>
+          <a:lstStyle/>
+          <a:p>
+            <a:pPr algn="ctr" indent="0" marL="0">
+              <a:buNone/>
+            </a:pPr>
+            <a:r>
+              <a:rPr lang="en-US" sz="1500" b="1" dirty="0">
+                <a:solidFill>
+                  <a:srgbClr val="FFFFFF"/>
+                </a:solidFill>
+                <a:latin typeface="Calibri" pitchFamily="34" charset="0"/>
+                <a:ea typeface="Calibri" pitchFamily="34" charset="-122"/>
+                <a:cs typeface="Calibri" pitchFamily="34" charset="-120"/>
+              </a:rPr>
+              <a:t>5</a:t>
+            </a:r>
+            <a:endParaRPr lang="en-US" sz="1500" dirty="0"/>
+          </a:p>
+        </p:txBody>
+      </p:sp>
+      <p:sp>
+        <p:nvSpPr>
+          <p:cNvPr id="23" name="Text 21"/>
+          <p:cNvSpPr/>
+          <p:nvPr/>
+        </p:nvSpPr>
+        <p:spPr>
+          <a:xfrm>
+            <a:off x="1280160" y="5468112"/>
+            <a:ext cx="10143439" cy="841248"/>
+          </a:xfrm>
+          <a:prstGeom prst="rect">
+            <a:avLst/>
+          </a:prstGeom>
+          <a:noFill/>
+          <a:ln/>
+        </p:spPr>
+        <p:txBody>
+          <a:bodyPr wrap="square" lIns="0" tIns="0" rIns="0" bIns="0" rtlCol="0" anchor="ctr"/>
+          <a:lstStyle/>
+          <a:p>
+            <a:pPr algn="l" indent="0" marL="0">
+              <a:buNone/>
+            </a:pPr>
+            <a:r>
+              <a:rPr lang="en-US" sz="1350" dirty="0">
+                <a:solidFill>
+                  <a:srgbClr val="E7EEF4"/>
+                </a:solidFill>
+                <a:latin typeface="Calibri" pitchFamily="34" charset="0"/>
+                <a:ea typeface="Calibri" pitchFamily="34" charset="-122"/>
+                <a:cs typeface="Calibri" pitchFamily="34" charset="-120"/>
+              </a:rPr>
+              <a:t>Sustain quality with run QC, controls, trend monitoring, and proficiency testing; flag coverage gaps.</a:t>
+            </a:r>
+            <a:endParaRPr lang="en-US" sz="1350" dirty="0"/>
+          </a:p>
+        </p:txBody>
+      </p:sp>
+      <p:sp>
+        <p:nvSpPr>
+          <p:cNvPr id="24" name="Text 22"/>
+          <p:cNvSpPr/>
+          <p:nvPr/>
+        </p:nvSpPr>
+        <p:spPr>
+          <a:xfrm>
+            <a:off x="566928" y="6473952"/>
+            <a:ext cx="8229600" cy="274320"/>
+          </a:xfrm>
+          <a:prstGeom prst="rect">
+            <a:avLst/>
+          </a:prstGeom>
+          <a:noFill/>
+          <a:ln/>
+        </p:spPr>
+        <p:txBody>
+          <a:bodyPr wrap="square" lIns="0" tIns="0" rIns="0" bIns="0" rtlCol="0" anchor="ctr"/>
+          <a:lstStyle/>
+          <a:p>
+            <a:pPr indent="0" marL="0">
+              <a:buNone/>
+            </a:pPr>
+            <a:r>
+              <a:rPr lang="en-US" sz="850" dirty="0">
+                <a:solidFill>
+                  <a:srgbClr val="5E7488"/>
+                </a:solidFill>
+                <a:latin typeface="Calibri" pitchFamily="34" charset="0"/>
+                <a:ea typeface="Calibri" pitchFamily="34" charset="-122"/>
+                <a:cs typeface="Calibri" pitchFamily="34" charset="-120"/>
+              </a:rPr>
+              <a:t>Makassed General Hospital  ·  Department of Laboratory Medicine</a:t>
+            </a:r>
+            <a:endParaRPr lang="en-US" sz="850" dirty="0"/>
+          </a:p>
+        </p:txBody>
+      </p:sp>
+      <p:sp>
+        <p:nvSpPr>
+          <p:cNvPr id="25" name="Text 23"/>
+          <p:cNvSpPr/>
+          <p:nvPr/>
+        </p:nvSpPr>
+        <p:spPr>
+          <a:xfrm>
+            <a:off x="11002975" y="6473952"/>
+            <a:ext cx="640080" cy="274320"/>
+          </a:xfrm>
+          <a:prstGeom prst="rect">
+            <a:avLst/>
+          </a:prstGeom>
+          <a:noFill/>
+          <a:ln/>
+        </p:spPr>
+        <p:txBody>
+          <a:bodyPr wrap="square" lIns="0" tIns="0" rIns="0" bIns="0" rtlCol="0" anchor="ctr"/>
+          <a:lstStyle/>
+          <a:p>
+            <a:pPr algn="r" indent="0" marL="0">
+              <a:buNone/>
+            </a:pPr>
+            <a:r>
+              <a:rPr lang="en-US" sz="850" b="1" dirty="0">
+                <a:solidFill>
+                  <a:srgbClr val="00838F"/>
+                </a:solidFill>
+                <a:latin typeface="Calibri" pitchFamily="34" charset="0"/>
+                <a:ea typeface="Calibri" pitchFamily="34" charset="-122"/>
+                <a:cs typeface="Calibri" pitchFamily="34" charset="-120"/>
+              </a:rPr>
+              <a:t>21</a:t>
+            </a:r>
+            <a:endParaRPr lang="en-US" sz="850" dirty="0"/>
+          </a:p>
+        </p:txBody>
+      </p:sp>
+    </p:spTree>
+  </p:cSld>
+  <p:clrMapOvr>
+    <a:masterClrMapping/>
+  </p:clrMapOvr>
+</p:sld>
+</file>
+
+<file path=ppt/slides/slide25.xml><?xml version="1.0" encoding="utf-8"?>
+<p:sld xmlns:a="http://schemas.openxmlformats.org/drawingml/2006/main" xmlns:r="http://schemas.openxmlformats.org/officeDocument/2006/relationships" xmlns:p="http://schemas.openxmlformats.org/presentationml/2006/main">
+  <p:cSld name="Slide 25">
+    <p:bg>
+      <p:bgPr>
+        <a:solidFill>
+          <a:srgbClr val="FFFFFF"/>
+        </a:solidFill>
+      </p:bgPr>
+    </p:bg>
+    <p:spTree>
+      <p:nvGrpSpPr>
+        <p:cNvPr id="1" name=""/>
+        <p:cNvGrpSpPr/>
+        <p:nvPr/>
+      </p:nvGrpSpPr>
+      <p:grpSpPr>
+        <a:xfrm>
+          <a:off x="0" y="0"/>
+          <a:ext cx="0" cy="0"/>
+          <a:chOff x="0" y="0"/>
+          <a:chExt cx="0" cy="0"/>
+        </a:xfrm>
+      </p:grpSpPr>
+      <p:sp>
+        <p:nvSpPr>
+          <p:cNvPr id="2" name="Text 0"/>
+          <p:cNvSpPr/>
+          <p:nvPr/>
+        </p:nvSpPr>
+        <p:spPr>
+          <a:xfrm>
+            <a:off x="566928" y="329184"/>
+            <a:ext cx="10515600" cy="310896"/>
+          </a:xfrm>
+          <a:prstGeom prst="rect">
+            <a:avLst/>
+          </a:prstGeom>
+          <a:noFill/>
+          <a:ln/>
+        </p:spPr>
+        <p:txBody>
+          <a:bodyPr wrap="square" lIns="0" tIns="0" rIns="0" bIns="0" rtlCol="0" anchor="ctr"/>
+          <a:lstStyle/>
+          <a:p>
+            <a:pPr algn="l" indent="0" marL="0">
+              <a:buNone/>
+            </a:pPr>
+            <a:r>
+              <a:rPr lang="en-US" sz="1100" b="1" spc="150" kern="0" dirty="0">
+                <a:solidFill>
+                  <a:srgbClr val="00838F"/>
+                </a:solidFill>
+                <a:latin typeface="Calibri" pitchFamily="34" charset="0"/>
+                <a:ea typeface="Calibri" pitchFamily="34" charset="-122"/>
+                <a:cs typeface="Calibri" pitchFamily="34" charset="-120"/>
+              </a:rPr>
               <a:t>MOLECULAR &amp; CYTOGENETICS   ·   REFERENCES &amp; FURTHER READING</a:t>
             </a:r>
             <a:endParaRPr lang="en-US" sz="1100" dirty="0"/>
@@ -9203,7 +11492,7 @@
                 <a:ea typeface="Calibri" pitchFamily="34" charset="-122"/>
                 <a:cs typeface="Calibri" pitchFamily="34" charset="-120"/>
               </a:rPr>
-              <a:t>1.   Jennings LJ, et al. AMP/CAP Guidelines for validation of NGS-based oncology panels. J Mol Diagn. 2017.</a:t>
+              <a:t>1.   Jennings LJ, et al. Guidelines for validation of NGS (AMP/CAP). J Mol Diagn. 2017.</a:t>
             </a:r>
             <a:endParaRPr lang="en-US" sz="1150" dirty="0"/>
           </a:p>
@@ -9223,7 +11512,7 @@
                 <a:ea typeface="Calibri" pitchFamily="34" charset="-122"/>
                 <a:cs typeface="Calibri" pitchFamily="34" charset="-120"/>
               </a:rPr>
-              <a:t>2.   Roy S, et al. AMP/CAP standards for bioinformatics pipeline validation. J Mol Diagn. 2018.</a:t>
+              <a:t>2.   Roy S, et al. Bioinformatics pipeline validation (AMP/CAP). J Mol Diagn. 2018.</a:t>
             </a:r>
             <a:endParaRPr lang="en-US" sz="1150" dirty="0"/>
           </a:p>
@@ -9243,7 +11532,7 @@
                 <a:ea typeface="Calibri" pitchFamily="34" charset="-122"/>
                 <a:cs typeface="Calibri" pitchFamily="34" charset="-120"/>
               </a:rPr>
-              <a:t>3.   Aziz N, et al. CAP laboratory standards for NGS clinical tests. Arch Pathol Lab Med. 2015.</a:t>
+              <a:t>3.   CLSI MM09/MM17 (molecular methods/validation).</a:t>
             </a:r>
             <a:endParaRPr lang="en-US" sz="1150" dirty="0"/>
           </a:p>
@@ -9263,7 +11552,7 @@
                 <a:ea typeface="Calibri" pitchFamily="34" charset="-122"/>
                 <a:cs typeface="Calibri" pitchFamily="34" charset="-120"/>
               </a:rPr>
-              <a:t>4.   CLSI MM09: Nucleic Acid Sequencing Methods.</a:t>
+              <a:t>4.   CAP molecular pathology checklist.</a:t>
             </a:r>
             <a:endParaRPr lang="en-US" sz="1150" dirty="0"/>
           </a:p>
@@ -9369,7 +11658,7 @@
                 <a:ea typeface="Calibri" pitchFamily="34" charset="-122"/>
                 <a:cs typeface="Calibri" pitchFamily="34" charset="-120"/>
               </a:rPr>
-              <a:t>18</a:t>
+              <a:t>22</a:t>
             </a:r>
             <a:endParaRPr lang="en-US" sz="850" dirty="0"/>
           </a:p>
@@ -9613,7 +11902,7 @@
                 <a:ea typeface="Calibri" pitchFamily="34" charset="-122"/>
                 <a:cs typeface="Calibri" pitchFamily="34" charset="-120"/>
               </a:rPr>
-              <a:t>Define assay performance characteristics for molecular tests.</a:t>
+              <a:t>Define analytic validation parameters for molecular assays.</a:t>
             </a:r>
             <a:endParaRPr lang="en-US" sz="1350" dirty="0"/>
           </a:p>
@@ -9747,7 +12036,7 @@
                 <a:ea typeface="Calibri" pitchFamily="34" charset="-122"/>
                 <a:cs typeface="Calibri" pitchFamily="34" charset="-120"/>
               </a:rPr>
-              <a:t>Apply contamination-control practices.</a:t>
+              <a:t>Distinguish validation (LDT) from verification (FDA-cleared).</a:t>
             </a:r>
             <a:endParaRPr lang="en-US" sz="1350" dirty="0"/>
           </a:p>
@@ -9881,7 +12170,7 @@
                 <a:ea typeface="Calibri" pitchFamily="34" charset="-122"/>
                 <a:cs typeface="Calibri" pitchFamily="34" charset="-120"/>
               </a:rPr>
-              <a:t>Build working awareness of the bioinformatics pipeline.</a:t>
+              <a:t>Describe NGS-specific validation (depth, LoD, regions).</a:t>
             </a:r>
             <a:endParaRPr lang="en-US" sz="1350" dirty="0"/>
           </a:p>
@@ -10015,7 +12304,7 @@
                 <a:ea typeface="Calibri" pitchFamily="34" charset="-122"/>
                 <a:cs typeface="Calibri" pitchFamily="34" charset="-120"/>
               </a:rPr>
-              <a:t>Recognize sign-out pitfalls and artifacts.</a:t>
+              <a:t>Explain bioinformatics pipeline validation and version control.</a:t>
             </a:r>
             <a:endParaRPr lang="en-US" sz="1350" dirty="0"/>
           </a:p>
@@ -10149,7 +12438,7 @@
                 <a:ea typeface="Calibri" pitchFamily="34" charset="-122"/>
                 <a:cs typeface="Calibri" pitchFamily="34" charset="-120"/>
               </a:rPr>
-              <a:t>Interpret coverage, depth, and quality metrics.</a:t>
+              <a:t>Apply ongoing QC and proficiency testing.</a:t>
             </a:r>
             <a:endParaRPr lang="en-US" sz="1350" dirty="0"/>
           </a:p>
@@ -10283,7 +12572,7 @@
                 <a:ea typeface="Calibri" pitchFamily="34" charset="-122"/>
                 <a:cs typeface="Calibri" pitchFamily="34" charset="-120"/>
               </a:rPr>
-              <a:t>Outline proficiency testing for molecular assays.</a:t>
+              <a:t>Recognize sources of error across the workflow.</a:t>
             </a:r>
             <a:endParaRPr lang="en-US" sz="1350" dirty="0"/>
           </a:p>
@@ -10633,7 +12922,7 @@
                 <a:ea typeface="Calibri" pitchFamily="34" charset="-122"/>
                 <a:cs typeface="Calibri" pitchFamily="34" charset="-120"/>
               </a:rPr>
-              <a:t>Validation</a:t>
+              <a:t>Validation parameters</a:t>
             </a:r>
             <a:pPr algn="l" indent="0" marL="0">
               <a:buNone/>
@@ -10647,7 +12936,7 @@
                 <a:ea typeface="Calibri" pitchFamily="34" charset="-122"/>
                 <a:cs typeface="Calibri" pitchFamily="34" charset="-120"/>
               </a:rPr>
-              <a:t>   —  accuracy, precision, LoD, specificity</a:t>
+              <a:t>   —  accuracy, precision, LoD</a:t>
             </a:r>
             <a:endParaRPr lang="en-US" sz="1400" dirty="0"/>
           </a:p>
@@ -10774,7 +13063,7 @@
                 <a:ea typeface="Calibri" pitchFamily="34" charset="-122"/>
                 <a:cs typeface="Calibri" pitchFamily="34" charset="-120"/>
               </a:rPr>
-              <a:t>Contamination control</a:t>
+              <a:t>Validation vs verification</a:t>
             </a:r>
             <a:pPr algn="l" indent="0" marL="0">
               <a:buNone/>
@@ -10788,7 +13077,7 @@
                 <a:ea typeface="Calibri" pitchFamily="34" charset="-122"/>
                 <a:cs typeface="Calibri" pitchFamily="34" charset="-120"/>
               </a:rPr>
-              <a:t>   —  workflow and carryover</a:t>
+              <a:t>   —  LDT vs FDA-cleared</a:t>
             </a:r>
             <a:endParaRPr lang="en-US" sz="1400" dirty="0"/>
           </a:p>
@@ -10922,7 +13211,7 @@
                 <a:ea typeface="Calibri" pitchFamily="34" charset="-122"/>
                 <a:cs typeface="Calibri" pitchFamily="34" charset="-120"/>
               </a:rPr>
-              <a:t>Bioinformatics</a:t>
+              <a:t>NGS pipeline</a:t>
             </a:r>
             <a:pPr algn="l" indent="0" marL="0">
               <a:buNone/>
@@ -10936,7 +13225,7 @@
                 <a:ea typeface="Calibri" pitchFamily="34" charset="-122"/>
                 <a:cs typeface="Calibri" pitchFamily="34" charset="-120"/>
               </a:rPr>
-              <a:t>   —  pipeline, coverage, depth</a:t>
+              <a:t>   —  wet and dry bench</a:t>
             </a:r>
             <a:endParaRPr lang="en-US" sz="1400" dirty="0"/>
           </a:p>
@@ -11063,7 +13352,7 @@
                 <a:ea typeface="Calibri" pitchFamily="34" charset="-122"/>
                 <a:cs typeface="Calibri" pitchFamily="34" charset="-120"/>
               </a:rPr>
-              <a:t>Sign-out pitfalls</a:t>
+              <a:t>Ongoing QC &amp; PT</a:t>
             </a:r>
             <a:pPr algn="l" indent="0" marL="0">
               <a:buNone/>
@@ -11077,7 +13366,7 @@
                 <a:ea typeface="Calibri" pitchFamily="34" charset="-122"/>
                 <a:cs typeface="Calibri" pitchFamily="34" charset="-120"/>
               </a:rPr>
-              <a:t>   —  artifacts vs true variants</a:t>
+              <a:t>   —  sustaining quality</a:t>
             </a:r>
             <a:endParaRPr lang="en-US" sz="1400" dirty="0"/>
           </a:p>
@@ -11211,7 +13500,7 @@
                 <a:ea typeface="Calibri" pitchFamily="34" charset="-122"/>
                 <a:cs typeface="Calibri" pitchFamily="34" charset="-120"/>
               </a:rPr>
-              <a:t>Cases &amp; board</a:t>
+              <a:t>Cases &amp; board review</a:t>
             </a:r>
             <a:endParaRPr lang="en-US" sz="1400" dirty="0"/>
           </a:p>
@@ -11510,7 +13799,7 @@
                 <a:ea typeface="Calibri" pitchFamily="34" charset="-122"/>
                 <a:cs typeface="Calibri" pitchFamily="34" charset="-120"/>
               </a:rPr>
-              <a:t>Validation &amp; Contamination Control</a:t>
+              <a:t>Validation Fundamentals</a:t>
             </a:r>
             <a:endParaRPr lang="en-US" sz="3800" dirty="0"/>
           </a:p>
@@ -11581,7 +13870,7 @@
                 <a:ea typeface="Calibri" pitchFamily="34" charset="-122"/>
                 <a:cs typeface="Calibri" pitchFamily="34" charset="-120"/>
               </a:rPr>
-              <a:t>MOLECULAR &amp; CYTOGENETICS   ·   VALIDATION</a:t>
+              <a:t>MOLECULAR &amp; CYTOGENETICS   ·   PIPELINE</a:t>
             </a:r>
             <a:endParaRPr lang="en-US" sz="1100" dirty="0"/>
           </a:p>
@@ -11620,1017 +13909,79 @@
                 <a:ea typeface="Calibri" pitchFamily="34" charset="-122"/>
                 <a:cs typeface="Calibri" pitchFamily="34" charset="-120"/>
               </a:rPr>
-              <a:t>Performance Characteristics to Establish</a:t>
+              <a:t>The NGS Pipeline: Wet Bench to Report</a:t>
             </a:r>
             <a:endParaRPr lang="en-US" sz="3000" dirty="0"/>
           </a:p>
         </p:txBody>
       </p:sp>
-      <p:graphicFrame>
-        <p:nvGraphicFramePr>
-          <p:cNvPr id="7" name="Table 0"/>
-          <p:cNvGraphicFramePr>
-            <a:graphicFrameLocks noGrp="1"/>
-          </p:cNvGraphicFramePr>
-          <p:nvPr>
-            <p:extLst>
-              <p:ext uri="{D42A27DB-BD31-4B8C-83A1-F6EECF244321}">
-                <p14:modId xmlns:p14="http://schemas.microsoft.com/office/powerpoint/2010/main" val="1579011935"/>
-              </p:ext>
-            </p:extLst>
-          </p:nvPr>
-        </p:nvGraphicFramePr>
-        <p:xfrm>
-          <a:off x="566928" y="1463040"/>
-          <a:ext cx="11057839" cy="914400"/>
-        </p:xfrm>
-        <a:graphic>
-          <a:graphicData uri="http://schemas.openxmlformats.org/drawingml/2006/table">
-            <a:tbl>
-              <a:tblPr/>
-              <a:tblGrid>
-                <a:gridCol w="3657600"/>
-                <a:gridCol w="7397496"/>
-              </a:tblGrid>
-              <a:tr h="530352">
-                <a:tc>
-                  <a:txBody>
-                    <a:bodyPr/>
-                    <a:lstStyle/>
-                    <a:p>
-                      <a:pPr algn="ctr" indent="0" marL="0">
-                        <a:buNone/>
-                      </a:pPr>
-                      <a:r>
-                        <a:rPr lang="en-US" sz="1200" b="1" dirty="0">
-                          <a:solidFill>
-                            <a:srgbClr val="FFFFFF"/>
-                          </a:solidFill>
-                          <a:latin typeface="Calibri" pitchFamily="34" charset="0"/>
-                          <a:ea typeface="Calibri" pitchFamily="34" charset="-122"/>
-                          <a:cs typeface="Calibri" pitchFamily="34" charset="-120"/>
-                        </a:rPr>
-                        <a:t>Characteristic</a:t>
-                      </a:r>
-                      <a:endParaRPr lang="en-US" sz="1200" dirty="0">
-                        <a:latin typeface="Calibri" charset="0"/>
-                        <a:ea typeface="Calibri" charset="0"/>
-                        <a:cs typeface="Calibri" charset="0"/>
-                      </a:endParaRPr>
-                    </a:p>
-                  </a:txBody>
-                  <a:tcPr marL="91440" marR="91440" marT="45720" marB="45720" anchor="ctr">
-                    <a:lnL w="9525" cap="flat" cmpd="sng" algn="ctr">
-                      <a:solidFill>
-                        <a:srgbClr val="DCE4EC"/>
-                      </a:solidFill>
-                      <a:prstDash val="solid"/>
-                      <a:round/>
-                      <a:headEnd type="none" w="med" len="med"/>
-                      <a:tailEnd type="none" w="med" len="med"/>
-                    </a:lnL>
-                    <a:lnR w="9525" cap="flat" cmpd="sng" algn="ctr">
-                      <a:solidFill>
-                        <a:srgbClr val="DCE4EC"/>
-                      </a:solidFill>
-                      <a:prstDash val="solid"/>
-                      <a:round/>
-                      <a:headEnd type="none" w="med" len="med"/>
-                      <a:tailEnd type="none" w="med" len="med"/>
-                    </a:lnR>
-                    <a:lnT w="9525" cap="flat" cmpd="sng" algn="ctr">
-                      <a:solidFill>
-                        <a:srgbClr val="DCE4EC"/>
-                      </a:solidFill>
-                      <a:prstDash val="solid"/>
-                      <a:round/>
-                      <a:headEnd type="none" w="med" len="med"/>
-                      <a:tailEnd type="none" w="med" len="med"/>
-                    </a:lnT>
-                    <a:lnB w="9525" cap="flat" cmpd="sng" algn="ctr">
-                      <a:solidFill>
-                        <a:srgbClr val="DCE4EC"/>
-                      </a:solidFill>
-                      <a:prstDash val="solid"/>
-                      <a:round/>
-                      <a:headEnd type="none" w="med" len="med"/>
-                      <a:tailEnd type="none" w="med" len="med"/>
-                    </a:lnB>
-                    <a:solidFill>
-                      <a:srgbClr val="00838F"/>
-                    </a:solidFill>
-                  </a:tcPr>
-                </a:tc>
-                <a:tc>
-                  <a:txBody>
-                    <a:bodyPr/>
-                    <a:lstStyle/>
-                    <a:p>
-                      <a:pPr algn="ctr" indent="0" marL="0">
-                        <a:buNone/>
-                      </a:pPr>
-                      <a:r>
-                        <a:rPr lang="en-US" sz="1200" b="1" dirty="0">
-                          <a:solidFill>
-                            <a:srgbClr val="FFFFFF"/>
-                          </a:solidFill>
-                          <a:latin typeface="Calibri" pitchFamily="34" charset="0"/>
-                          <a:ea typeface="Calibri" pitchFamily="34" charset="-122"/>
-                          <a:cs typeface="Calibri" pitchFamily="34" charset="-120"/>
-                        </a:rPr>
-                        <a:t>What it establishes</a:t>
-                      </a:r>
-                      <a:endParaRPr lang="en-US" sz="1200" dirty="0">
-                        <a:latin typeface="Calibri" charset="0"/>
-                        <a:ea typeface="Calibri" charset="0"/>
-                        <a:cs typeface="Calibri" charset="0"/>
-                      </a:endParaRPr>
-                    </a:p>
-                  </a:txBody>
-                  <a:tcPr marL="91440" marR="91440" marT="45720" marB="45720" anchor="ctr">
-                    <a:lnL w="9525" cap="flat" cmpd="sng" algn="ctr">
-                      <a:solidFill>
-                        <a:srgbClr val="DCE4EC"/>
-                      </a:solidFill>
-                      <a:prstDash val="solid"/>
-                      <a:round/>
-                      <a:headEnd type="none" w="med" len="med"/>
-                      <a:tailEnd type="none" w="med" len="med"/>
-                    </a:lnL>
-                    <a:lnR w="9525" cap="flat" cmpd="sng" algn="ctr">
-                      <a:solidFill>
-                        <a:srgbClr val="DCE4EC"/>
-                      </a:solidFill>
-                      <a:prstDash val="solid"/>
-                      <a:round/>
-                      <a:headEnd type="none" w="med" len="med"/>
-                      <a:tailEnd type="none" w="med" len="med"/>
-                    </a:lnR>
-                    <a:lnT w="9525" cap="flat" cmpd="sng" algn="ctr">
-                      <a:solidFill>
-                        <a:srgbClr val="DCE4EC"/>
-                      </a:solidFill>
-                      <a:prstDash val="solid"/>
-                      <a:round/>
-                      <a:headEnd type="none" w="med" len="med"/>
-                      <a:tailEnd type="none" w="med" len="med"/>
-                    </a:lnT>
-                    <a:lnB w="9525" cap="flat" cmpd="sng" algn="ctr">
-                      <a:solidFill>
-                        <a:srgbClr val="DCE4EC"/>
-                      </a:solidFill>
-                      <a:prstDash val="solid"/>
-                      <a:round/>
-                      <a:headEnd type="none" w="med" len="med"/>
-                      <a:tailEnd type="none" w="med" len="med"/>
-                    </a:lnB>
-                    <a:solidFill>
-                      <a:srgbClr val="00838F"/>
-                    </a:solidFill>
-                  </a:tcPr>
-                </a:tc>
-              </a:tr>
-              <a:tr h="530352">
-                <a:tc>
-                  <a:txBody>
-                    <a:bodyPr/>
-                    <a:lstStyle/>
-                    <a:p>
-                      <a:pPr algn="l" indent="0" marL="0">
-                        <a:buNone/>
-                      </a:pPr>
-                      <a:r>
-                        <a:rPr lang="en-US" sz="1200" b="1" dirty="0">
-                          <a:solidFill>
-                            <a:srgbClr val="1B2A38"/>
-                          </a:solidFill>
-                          <a:latin typeface="Calibri" pitchFamily="34" charset="0"/>
-                          <a:ea typeface="Calibri" pitchFamily="34" charset="-122"/>
-                          <a:cs typeface="Calibri" pitchFamily="34" charset="-120"/>
-                        </a:rPr>
-                        <a:t>Accuracy</a:t>
-                      </a:r>
-                      <a:endParaRPr lang="en-US" sz="1200" dirty="0">
-                        <a:latin typeface="Calibri" charset="0"/>
-                        <a:ea typeface="Calibri" charset="0"/>
-                        <a:cs typeface="Calibri" charset="0"/>
-                      </a:endParaRPr>
-                    </a:p>
-                  </a:txBody>
-                  <a:tcPr marL="91440" marR="91440" marT="45720" marB="45720" anchor="ctr">
-                    <a:lnL w="9525" cap="flat" cmpd="sng" algn="ctr">
-                      <a:solidFill>
-                        <a:srgbClr val="DCE4EC"/>
-                      </a:solidFill>
-                      <a:prstDash val="solid"/>
-                      <a:round/>
-                      <a:headEnd type="none" w="med" len="med"/>
-                      <a:tailEnd type="none" w="med" len="med"/>
-                    </a:lnL>
-                    <a:lnR w="9525" cap="flat" cmpd="sng" algn="ctr">
-                      <a:solidFill>
-                        <a:srgbClr val="DCE4EC"/>
-                      </a:solidFill>
-                      <a:prstDash val="solid"/>
-                      <a:round/>
-                      <a:headEnd type="none" w="med" len="med"/>
-                      <a:tailEnd type="none" w="med" len="med"/>
-                    </a:lnR>
-                    <a:lnT w="9525" cap="flat" cmpd="sng" algn="ctr">
-                      <a:solidFill>
-                        <a:srgbClr val="DCE4EC"/>
-                      </a:solidFill>
-                      <a:prstDash val="solid"/>
-                      <a:round/>
-                      <a:headEnd type="none" w="med" len="med"/>
-                      <a:tailEnd type="none" w="med" len="med"/>
-                    </a:lnT>
-                    <a:lnB w="9525" cap="flat" cmpd="sng" algn="ctr">
-                      <a:solidFill>
-                        <a:srgbClr val="DCE4EC"/>
-                      </a:solidFill>
-                      <a:prstDash val="solid"/>
-                      <a:round/>
-                      <a:headEnd type="none" w="med" len="med"/>
-                      <a:tailEnd type="none" w="med" len="med"/>
-                    </a:lnB>
-                    <a:solidFill>
-                      <a:srgbClr val="F3F7FA"/>
-                    </a:solidFill>
-                  </a:tcPr>
-                </a:tc>
-                <a:tc>
-                  <a:txBody>
-                    <a:bodyPr/>
-                    <a:lstStyle/>
-                    <a:p>
-                      <a:pPr algn="ctr" indent="0" marL="0">
-                        <a:buNone/>
-                      </a:pPr>
-                      <a:r>
-                        <a:rPr lang="en-US" sz="1200" dirty="0">
-                          <a:solidFill>
-                            <a:srgbClr val="33444F"/>
-                          </a:solidFill>
-                          <a:latin typeface="Calibri" pitchFamily="34" charset="0"/>
-                          <a:ea typeface="Calibri" pitchFamily="34" charset="-122"/>
-                          <a:cs typeface="Calibri" pitchFamily="34" charset="-120"/>
-                        </a:rPr>
-                        <a:t>Concordance with a reference/orthogonal method</a:t>
-                      </a:r>
-                      <a:endParaRPr lang="en-US" sz="1200" dirty="0">
-                        <a:latin typeface="Calibri" charset="0"/>
-                        <a:ea typeface="Calibri" charset="0"/>
-                        <a:cs typeface="Calibri" charset="0"/>
-                      </a:endParaRPr>
-                    </a:p>
-                  </a:txBody>
-                  <a:tcPr marL="91440" marR="91440" marT="45720" marB="45720" anchor="ctr">
-                    <a:lnL w="9525" cap="flat" cmpd="sng" algn="ctr">
-                      <a:solidFill>
-                        <a:srgbClr val="DCE4EC"/>
-                      </a:solidFill>
-                      <a:prstDash val="solid"/>
-                      <a:round/>
-                      <a:headEnd type="none" w="med" len="med"/>
-                      <a:tailEnd type="none" w="med" len="med"/>
-                    </a:lnL>
-                    <a:lnR w="9525" cap="flat" cmpd="sng" algn="ctr">
-                      <a:solidFill>
-                        <a:srgbClr val="DCE4EC"/>
-                      </a:solidFill>
-                      <a:prstDash val="solid"/>
-                      <a:round/>
-                      <a:headEnd type="none" w="med" len="med"/>
-                      <a:tailEnd type="none" w="med" len="med"/>
-                    </a:lnR>
-                    <a:lnT w="9525" cap="flat" cmpd="sng" algn="ctr">
-                      <a:solidFill>
-                        <a:srgbClr val="DCE4EC"/>
-                      </a:solidFill>
-                      <a:prstDash val="solid"/>
-                      <a:round/>
-                      <a:headEnd type="none" w="med" len="med"/>
-                      <a:tailEnd type="none" w="med" len="med"/>
-                    </a:lnT>
-                    <a:lnB w="9525" cap="flat" cmpd="sng" algn="ctr">
-                      <a:solidFill>
-                        <a:srgbClr val="DCE4EC"/>
-                      </a:solidFill>
-                      <a:prstDash val="solid"/>
-                      <a:round/>
-                      <a:headEnd type="none" w="med" len="med"/>
-                      <a:tailEnd type="none" w="med" len="med"/>
-                    </a:lnB>
-                    <a:solidFill>
-                      <a:srgbClr val="F3F7FA"/>
-                    </a:solidFill>
-                  </a:tcPr>
-                </a:tc>
-              </a:tr>
-              <a:tr h="530352">
-                <a:tc>
-                  <a:txBody>
-                    <a:bodyPr/>
-                    <a:lstStyle/>
-                    <a:p>
-                      <a:pPr algn="l" indent="0" marL="0">
-                        <a:buNone/>
-                      </a:pPr>
-                      <a:r>
-                        <a:rPr lang="en-US" sz="1200" b="1" dirty="0">
-                          <a:solidFill>
-                            <a:srgbClr val="1B2A38"/>
-                          </a:solidFill>
-                          <a:latin typeface="Calibri" pitchFamily="34" charset="0"/>
-                          <a:ea typeface="Calibri" pitchFamily="34" charset="-122"/>
-                          <a:cs typeface="Calibri" pitchFamily="34" charset="-120"/>
-                        </a:rPr>
-                        <a:t>Precision</a:t>
-                      </a:r>
-                      <a:endParaRPr lang="en-US" sz="1200" dirty="0">
-                        <a:latin typeface="Calibri" charset="0"/>
-                        <a:ea typeface="Calibri" charset="0"/>
-                        <a:cs typeface="Calibri" charset="0"/>
-                      </a:endParaRPr>
-                    </a:p>
-                  </a:txBody>
-                  <a:tcPr marL="91440" marR="91440" marT="45720" marB="45720" anchor="ctr">
-                    <a:lnL w="9525" cap="flat" cmpd="sng" algn="ctr">
-                      <a:solidFill>
-                        <a:srgbClr val="DCE4EC"/>
-                      </a:solidFill>
-                      <a:prstDash val="solid"/>
-                      <a:round/>
-                      <a:headEnd type="none" w="med" len="med"/>
-                      <a:tailEnd type="none" w="med" len="med"/>
-                    </a:lnL>
-                    <a:lnR w="9525" cap="flat" cmpd="sng" algn="ctr">
-                      <a:solidFill>
-                        <a:srgbClr val="DCE4EC"/>
-                      </a:solidFill>
-                      <a:prstDash val="solid"/>
-                      <a:round/>
-                      <a:headEnd type="none" w="med" len="med"/>
-                      <a:tailEnd type="none" w="med" len="med"/>
-                    </a:lnR>
-                    <a:lnT w="9525" cap="flat" cmpd="sng" algn="ctr">
-                      <a:solidFill>
-                        <a:srgbClr val="DCE4EC"/>
-                      </a:solidFill>
-                      <a:prstDash val="solid"/>
-                      <a:round/>
-                      <a:headEnd type="none" w="med" len="med"/>
-                      <a:tailEnd type="none" w="med" len="med"/>
-                    </a:lnT>
-                    <a:lnB w="9525" cap="flat" cmpd="sng" algn="ctr">
-                      <a:solidFill>
-                        <a:srgbClr val="DCE4EC"/>
-                      </a:solidFill>
-                      <a:prstDash val="solid"/>
-                      <a:round/>
-                      <a:headEnd type="none" w="med" len="med"/>
-                      <a:tailEnd type="none" w="med" len="med"/>
-                    </a:lnB>
-                    <a:solidFill>
-                      <a:srgbClr val="FFFFFF"/>
-                    </a:solidFill>
-                  </a:tcPr>
-                </a:tc>
-                <a:tc>
-                  <a:txBody>
-                    <a:bodyPr/>
-                    <a:lstStyle/>
-                    <a:p>
-                      <a:pPr algn="ctr" indent="0" marL="0">
-                        <a:buNone/>
-                      </a:pPr>
-                      <a:r>
-                        <a:rPr lang="en-US" sz="1200" dirty="0">
-                          <a:solidFill>
-                            <a:srgbClr val="33444F"/>
-                          </a:solidFill>
-                          <a:latin typeface="Calibri" pitchFamily="34" charset="0"/>
-                          <a:ea typeface="Calibri" pitchFamily="34" charset="-122"/>
-                          <a:cs typeface="Calibri" pitchFamily="34" charset="-120"/>
-                        </a:rPr>
-                        <a:t>Repeatability and reproducibility (runs, operators, days)</a:t>
-                      </a:r>
-                      <a:endParaRPr lang="en-US" sz="1200" dirty="0">
-                        <a:latin typeface="Calibri" charset="0"/>
-                        <a:ea typeface="Calibri" charset="0"/>
-                        <a:cs typeface="Calibri" charset="0"/>
-                      </a:endParaRPr>
-                    </a:p>
-                  </a:txBody>
-                  <a:tcPr marL="91440" marR="91440" marT="45720" marB="45720" anchor="ctr">
-                    <a:lnL w="9525" cap="flat" cmpd="sng" algn="ctr">
-                      <a:solidFill>
-                        <a:srgbClr val="DCE4EC"/>
-                      </a:solidFill>
-                      <a:prstDash val="solid"/>
-                      <a:round/>
-                      <a:headEnd type="none" w="med" len="med"/>
-                      <a:tailEnd type="none" w="med" len="med"/>
-                    </a:lnL>
-                    <a:lnR w="9525" cap="flat" cmpd="sng" algn="ctr">
-                      <a:solidFill>
-                        <a:srgbClr val="DCE4EC"/>
-                      </a:solidFill>
-                      <a:prstDash val="solid"/>
-                      <a:round/>
-                      <a:headEnd type="none" w="med" len="med"/>
-                      <a:tailEnd type="none" w="med" len="med"/>
-                    </a:lnR>
-                    <a:lnT w="9525" cap="flat" cmpd="sng" algn="ctr">
-                      <a:solidFill>
-                        <a:srgbClr val="DCE4EC"/>
-                      </a:solidFill>
-                      <a:prstDash val="solid"/>
-                      <a:round/>
-                      <a:headEnd type="none" w="med" len="med"/>
-                      <a:tailEnd type="none" w="med" len="med"/>
-                    </a:lnT>
-                    <a:lnB w="9525" cap="flat" cmpd="sng" algn="ctr">
-                      <a:solidFill>
-                        <a:srgbClr val="DCE4EC"/>
-                      </a:solidFill>
-                      <a:prstDash val="solid"/>
-                      <a:round/>
-                      <a:headEnd type="none" w="med" len="med"/>
-                      <a:tailEnd type="none" w="med" len="med"/>
-                    </a:lnB>
-                    <a:solidFill>
-                      <a:srgbClr val="FFFFFF"/>
-                    </a:solidFill>
-                  </a:tcPr>
-                </a:tc>
-              </a:tr>
-              <a:tr h="530352">
-                <a:tc>
-                  <a:txBody>
-                    <a:bodyPr/>
-                    <a:lstStyle/>
-                    <a:p>
-                      <a:pPr algn="l" indent="0" marL="0">
-                        <a:buNone/>
-                      </a:pPr>
-                      <a:r>
-                        <a:rPr lang="en-US" sz="1200" b="1" dirty="0">
-                          <a:solidFill>
-                            <a:srgbClr val="1B2A38"/>
-                          </a:solidFill>
-                          <a:latin typeface="Calibri" pitchFamily="34" charset="0"/>
-                          <a:ea typeface="Calibri" pitchFamily="34" charset="-122"/>
-                          <a:cs typeface="Calibri" pitchFamily="34" charset="-120"/>
-                        </a:rPr>
-                        <a:t>Analytical sensitivity / LoD</a:t>
-                      </a:r>
-                      <a:endParaRPr lang="en-US" sz="1200" dirty="0">
-                        <a:latin typeface="Calibri" charset="0"/>
-                        <a:ea typeface="Calibri" charset="0"/>
-                        <a:cs typeface="Calibri" charset="0"/>
-                      </a:endParaRPr>
-                    </a:p>
-                  </a:txBody>
-                  <a:tcPr marL="91440" marR="91440" marT="45720" marB="45720" anchor="ctr">
-                    <a:lnL w="9525" cap="flat" cmpd="sng" algn="ctr">
-                      <a:solidFill>
-                        <a:srgbClr val="DCE4EC"/>
-                      </a:solidFill>
-                      <a:prstDash val="solid"/>
-                      <a:round/>
-                      <a:headEnd type="none" w="med" len="med"/>
-                      <a:tailEnd type="none" w="med" len="med"/>
-                    </a:lnL>
-                    <a:lnR w="9525" cap="flat" cmpd="sng" algn="ctr">
-                      <a:solidFill>
-                        <a:srgbClr val="DCE4EC"/>
-                      </a:solidFill>
-                      <a:prstDash val="solid"/>
-                      <a:round/>
-                      <a:headEnd type="none" w="med" len="med"/>
-                      <a:tailEnd type="none" w="med" len="med"/>
-                    </a:lnR>
-                    <a:lnT w="9525" cap="flat" cmpd="sng" algn="ctr">
-                      <a:solidFill>
-                        <a:srgbClr val="DCE4EC"/>
-                      </a:solidFill>
-                      <a:prstDash val="solid"/>
-                      <a:round/>
-                      <a:headEnd type="none" w="med" len="med"/>
-                      <a:tailEnd type="none" w="med" len="med"/>
-                    </a:lnT>
-                    <a:lnB w="9525" cap="flat" cmpd="sng" algn="ctr">
-                      <a:solidFill>
-                        <a:srgbClr val="DCE4EC"/>
-                      </a:solidFill>
-                      <a:prstDash val="solid"/>
-                      <a:round/>
-                      <a:headEnd type="none" w="med" len="med"/>
-                      <a:tailEnd type="none" w="med" len="med"/>
-                    </a:lnB>
-                    <a:solidFill>
-                      <a:srgbClr val="F3F7FA"/>
-                    </a:solidFill>
-                  </a:tcPr>
-                </a:tc>
-                <a:tc>
-                  <a:txBody>
-                    <a:bodyPr/>
-                    <a:lstStyle/>
-                    <a:p>
-                      <a:pPr algn="ctr" indent="0" marL="0">
-                        <a:buNone/>
-                      </a:pPr>
-                      <a:r>
-                        <a:rPr lang="en-US" sz="1200" dirty="0">
-                          <a:solidFill>
-                            <a:srgbClr val="33444F"/>
-                          </a:solidFill>
-                          <a:latin typeface="Calibri" pitchFamily="34" charset="0"/>
-                          <a:ea typeface="Calibri" pitchFamily="34" charset="-122"/>
-                          <a:cs typeface="Calibri" pitchFamily="34" charset="-120"/>
-                        </a:rPr>
-                        <a:t>Lowest reliably detected variant allele fraction</a:t>
-                      </a:r>
-                      <a:endParaRPr lang="en-US" sz="1200" dirty="0">
-                        <a:latin typeface="Calibri" charset="0"/>
-                        <a:ea typeface="Calibri" charset="0"/>
-                        <a:cs typeface="Calibri" charset="0"/>
-                      </a:endParaRPr>
-                    </a:p>
-                  </a:txBody>
-                  <a:tcPr marL="91440" marR="91440" marT="45720" marB="45720" anchor="ctr">
-                    <a:lnL w="9525" cap="flat" cmpd="sng" algn="ctr">
-                      <a:solidFill>
-                        <a:srgbClr val="DCE4EC"/>
-                      </a:solidFill>
-                      <a:prstDash val="solid"/>
-                      <a:round/>
-                      <a:headEnd type="none" w="med" len="med"/>
-                      <a:tailEnd type="none" w="med" len="med"/>
-                    </a:lnL>
-                    <a:lnR w="9525" cap="flat" cmpd="sng" algn="ctr">
-                      <a:solidFill>
-                        <a:srgbClr val="DCE4EC"/>
-                      </a:solidFill>
-                      <a:prstDash val="solid"/>
-                      <a:round/>
-                      <a:headEnd type="none" w="med" len="med"/>
-                      <a:tailEnd type="none" w="med" len="med"/>
-                    </a:lnR>
-                    <a:lnT w="9525" cap="flat" cmpd="sng" algn="ctr">
-                      <a:solidFill>
-                        <a:srgbClr val="DCE4EC"/>
-                      </a:solidFill>
-                      <a:prstDash val="solid"/>
-                      <a:round/>
-                      <a:headEnd type="none" w="med" len="med"/>
-                      <a:tailEnd type="none" w="med" len="med"/>
-                    </a:lnT>
-                    <a:lnB w="9525" cap="flat" cmpd="sng" algn="ctr">
-                      <a:solidFill>
-                        <a:srgbClr val="DCE4EC"/>
-                      </a:solidFill>
-                      <a:prstDash val="solid"/>
-                      <a:round/>
-                      <a:headEnd type="none" w="med" len="med"/>
-                      <a:tailEnd type="none" w="med" len="med"/>
-                    </a:lnB>
-                    <a:solidFill>
-                      <a:srgbClr val="F3F7FA"/>
-                    </a:solidFill>
-                  </a:tcPr>
-                </a:tc>
-              </a:tr>
-              <a:tr h="530352">
-                <a:tc>
-                  <a:txBody>
-                    <a:bodyPr/>
-                    <a:lstStyle/>
-                    <a:p>
-                      <a:pPr algn="l" indent="0" marL="0">
-                        <a:buNone/>
-                      </a:pPr>
-                      <a:r>
-                        <a:rPr lang="en-US" sz="1200" b="1" dirty="0">
-                          <a:solidFill>
-                            <a:srgbClr val="1B2A38"/>
-                          </a:solidFill>
-                          <a:latin typeface="Calibri" pitchFamily="34" charset="0"/>
-                          <a:ea typeface="Calibri" pitchFamily="34" charset="-122"/>
-                          <a:cs typeface="Calibri" pitchFamily="34" charset="-120"/>
-                        </a:rPr>
-                        <a:t>Analytical specificity</a:t>
-                      </a:r>
-                      <a:endParaRPr lang="en-US" sz="1200" dirty="0">
-                        <a:latin typeface="Calibri" charset="0"/>
-                        <a:ea typeface="Calibri" charset="0"/>
-                        <a:cs typeface="Calibri" charset="0"/>
-                      </a:endParaRPr>
-                    </a:p>
-                  </a:txBody>
-                  <a:tcPr marL="91440" marR="91440" marT="45720" marB="45720" anchor="ctr">
-                    <a:lnL w="9525" cap="flat" cmpd="sng" algn="ctr">
-                      <a:solidFill>
-                        <a:srgbClr val="DCE4EC"/>
-                      </a:solidFill>
-                      <a:prstDash val="solid"/>
-                      <a:round/>
-                      <a:headEnd type="none" w="med" len="med"/>
-                      <a:tailEnd type="none" w="med" len="med"/>
-                    </a:lnL>
-                    <a:lnR w="9525" cap="flat" cmpd="sng" algn="ctr">
-                      <a:solidFill>
-                        <a:srgbClr val="DCE4EC"/>
-                      </a:solidFill>
-                      <a:prstDash val="solid"/>
-                      <a:round/>
-                      <a:headEnd type="none" w="med" len="med"/>
-                      <a:tailEnd type="none" w="med" len="med"/>
-                    </a:lnR>
-                    <a:lnT w="9525" cap="flat" cmpd="sng" algn="ctr">
-                      <a:solidFill>
-                        <a:srgbClr val="DCE4EC"/>
-                      </a:solidFill>
-                      <a:prstDash val="solid"/>
-                      <a:round/>
-                      <a:headEnd type="none" w="med" len="med"/>
-                      <a:tailEnd type="none" w="med" len="med"/>
-                    </a:lnT>
-                    <a:lnB w="9525" cap="flat" cmpd="sng" algn="ctr">
-                      <a:solidFill>
-                        <a:srgbClr val="DCE4EC"/>
-                      </a:solidFill>
-                      <a:prstDash val="solid"/>
-                      <a:round/>
-                      <a:headEnd type="none" w="med" len="med"/>
-                      <a:tailEnd type="none" w="med" len="med"/>
-                    </a:lnB>
-                    <a:solidFill>
-                      <a:srgbClr val="FFFFFF"/>
-                    </a:solidFill>
-                  </a:tcPr>
-                </a:tc>
-                <a:tc>
-                  <a:txBody>
-                    <a:bodyPr/>
-                    <a:lstStyle/>
-                    <a:p>
-                      <a:pPr algn="ctr" indent="0" marL="0">
-                        <a:buNone/>
-                      </a:pPr>
-                      <a:r>
-                        <a:rPr lang="en-US" sz="1200" dirty="0">
-                          <a:solidFill>
-                            <a:srgbClr val="33444F"/>
-                          </a:solidFill>
-                          <a:latin typeface="Calibri" pitchFamily="34" charset="0"/>
-                          <a:ea typeface="Calibri" pitchFamily="34" charset="-122"/>
-                          <a:cs typeface="Calibri" pitchFamily="34" charset="-120"/>
-                        </a:rPr>
-                        <a:t>Freedom from interference and false-positive calls</a:t>
-                      </a:r>
-                      <a:endParaRPr lang="en-US" sz="1200" dirty="0">
-                        <a:latin typeface="Calibri" charset="0"/>
-                        <a:ea typeface="Calibri" charset="0"/>
-                        <a:cs typeface="Calibri" charset="0"/>
-                      </a:endParaRPr>
-                    </a:p>
-                  </a:txBody>
-                  <a:tcPr marL="91440" marR="91440" marT="45720" marB="45720" anchor="ctr">
-                    <a:lnL w="9525" cap="flat" cmpd="sng" algn="ctr">
-                      <a:solidFill>
-                        <a:srgbClr val="DCE4EC"/>
-                      </a:solidFill>
-                      <a:prstDash val="solid"/>
-                      <a:round/>
-                      <a:headEnd type="none" w="med" len="med"/>
-                      <a:tailEnd type="none" w="med" len="med"/>
-                    </a:lnL>
-                    <a:lnR w="9525" cap="flat" cmpd="sng" algn="ctr">
-                      <a:solidFill>
-                        <a:srgbClr val="DCE4EC"/>
-                      </a:solidFill>
-                      <a:prstDash val="solid"/>
-                      <a:round/>
-                      <a:headEnd type="none" w="med" len="med"/>
-                      <a:tailEnd type="none" w="med" len="med"/>
-                    </a:lnR>
-                    <a:lnT w="9525" cap="flat" cmpd="sng" algn="ctr">
-                      <a:solidFill>
-                        <a:srgbClr val="DCE4EC"/>
-                      </a:solidFill>
-                      <a:prstDash val="solid"/>
-                      <a:round/>
-                      <a:headEnd type="none" w="med" len="med"/>
-                      <a:tailEnd type="none" w="med" len="med"/>
-                    </a:lnT>
-                    <a:lnB w="9525" cap="flat" cmpd="sng" algn="ctr">
-                      <a:solidFill>
-                        <a:srgbClr val="DCE4EC"/>
-                      </a:solidFill>
-                      <a:prstDash val="solid"/>
-                      <a:round/>
-                      <a:headEnd type="none" w="med" len="med"/>
-                      <a:tailEnd type="none" w="med" len="med"/>
-                    </a:lnB>
-                    <a:solidFill>
-                      <a:srgbClr val="FFFFFF"/>
-                    </a:solidFill>
-                  </a:tcPr>
-                </a:tc>
-              </a:tr>
-              <a:tr h="530352">
-                <a:tc>
-                  <a:txBody>
-                    <a:bodyPr/>
-                    <a:lstStyle/>
-                    <a:p>
-                      <a:pPr algn="l" indent="0" marL="0">
-                        <a:buNone/>
-                      </a:pPr>
-                      <a:r>
-                        <a:rPr lang="en-US" sz="1200" b="1" dirty="0">
-                          <a:solidFill>
-                            <a:srgbClr val="1B2A38"/>
-                          </a:solidFill>
-                          <a:latin typeface="Calibri" pitchFamily="34" charset="0"/>
-                          <a:ea typeface="Calibri" pitchFamily="34" charset="-122"/>
-                          <a:cs typeface="Calibri" pitchFamily="34" charset="-120"/>
-                        </a:rPr>
-                        <a:t>Reportable range</a:t>
-                      </a:r>
-                      <a:endParaRPr lang="en-US" sz="1200" dirty="0">
-                        <a:latin typeface="Calibri" charset="0"/>
-                        <a:ea typeface="Calibri" charset="0"/>
-                        <a:cs typeface="Calibri" charset="0"/>
-                      </a:endParaRPr>
-                    </a:p>
-                  </a:txBody>
-                  <a:tcPr marL="91440" marR="91440" marT="45720" marB="45720" anchor="ctr">
-                    <a:lnL w="9525" cap="flat" cmpd="sng" algn="ctr">
-                      <a:solidFill>
-                        <a:srgbClr val="DCE4EC"/>
-                      </a:solidFill>
-                      <a:prstDash val="solid"/>
-                      <a:round/>
-                      <a:headEnd type="none" w="med" len="med"/>
-                      <a:tailEnd type="none" w="med" len="med"/>
-                    </a:lnL>
-                    <a:lnR w="9525" cap="flat" cmpd="sng" algn="ctr">
-                      <a:solidFill>
-                        <a:srgbClr val="DCE4EC"/>
-                      </a:solidFill>
-                      <a:prstDash val="solid"/>
-                      <a:round/>
-                      <a:headEnd type="none" w="med" len="med"/>
-                      <a:tailEnd type="none" w="med" len="med"/>
-                    </a:lnR>
-                    <a:lnT w="9525" cap="flat" cmpd="sng" algn="ctr">
-                      <a:solidFill>
-                        <a:srgbClr val="DCE4EC"/>
-                      </a:solidFill>
-                      <a:prstDash val="solid"/>
-                      <a:round/>
-                      <a:headEnd type="none" w="med" len="med"/>
-                      <a:tailEnd type="none" w="med" len="med"/>
-                    </a:lnT>
-                    <a:lnB w="9525" cap="flat" cmpd="sng" algn="ctr">
-                      <a:solidFill>
-                        <a:srgbClr val="DCE4EC"/>
-                      </a:solidFill>
-                      <a:prstDash val="solid"/>
-                      <a:round/>
-                      <a:headEnd type="none" w="med" len="med"/>
-                      <a:tailEnd type="none" w="med" len="med"/>
-                    </a:lnB>
-                    <a:solidFill>
-                      <a:srgbClr val="F3F7FA"/>
-                    </a:solidFill>
-                  </a:tcPr>
-                </a:tc>
-                <a:tc>
-                  <a:txBody>
-                    <a:bodyPr/>
-                    <a:lstStyle/>
-                    <a:p>
-                      <a:pPr algn="ctr" indent="0" marL="0">
-                        <a:buNone/>
-                      </a:pPr>
-                      <a:r>
-                        <a:rPr lang="en-US" sz="1200" dirty="0">
-                          <a:solidFill>
-                            <a:srgbClr val="33444F"/>
-                          </a:solidFill>
-                          <a:latin typeface="Calibri" pitchFamily="34" charset="0"/>
-                          <a:ea typeface="Calibri" pitchFamily="34" charset="-122"/>
-                          <a:cs typeface="Calibri" pitchFamily="34" charset="-120"/>
-                        </a:rPr>
-                        <a:t>Variant types/regions the assay validly detects</a:t>
-                      </a:r>
-                      <a:endParaRPr lang="en-US" sz="1200" dirty="0">
-                        <a:latin typeface="Calibri" charset="0"/>
-                        <a:ea typeface="Calibri" charset="0"/>
-                        <a:cs typeface="Calibri" charset="0"/>
-                      </a:endParaRPr>
-                    </a:p>
-                  </a:txBody>
-                  <a:tcPr marL="91440" marR="91440" marT="45720" marB="45720" anchor="ctr">
-                    <a:lnL w="9525" cap="flat" cmpd="sng" algn="ctr">
-                      <a:solidFill>
-                        <a:srgbClr val="DCE4EC"/>
-                      </a:solidFill>
-                      <a:prstDash val="solid"/>
-                      <a:round/>
-                      <a:headEnd type="none" w="med" len="med"/>
-                      <a:tailEnd type="none" w="med" len="med"/>
-                    </a:lnL>
-                    <a:lnR w="9525" cap="flat" cmpd="sng" algn="ctr">
-                      <a:solidFill>
-                        <a:srgbClr val="DCE4EC"/>
-                      </a:solidFill>
-                      <a:prstDash val="solid"/>
-                      <a:round/>
-                      <a:headEnd type="none" w="med" len="med"/>
-                      <a:tailEnd type="none" w="med" len="med"/>
-                    </a:lnR>
-                    <a:lnT w="9525" cap="flat" cmpd="sng" algn="ctr">
-                      <a:solidFill>
-                        <a:srgbClr val="DCE4EC"/>
-                      </a:solidFill>
-                      <a:prstDash val="solid"/>
-                      <a:round/>
-                      <a:headEnd type="none" w="med" len="med"/>
-                      <a:tailEnd type="none" w="med" len="med"/>
-                    </a:lnT>
-                    <a:lnB w="9525" cap="flat" cmpd="sng" algn="ctr">
-                      <a:solidFill>
-                        <a:srgbClr val="DCE4EC"/>
-                      </a:solidFill>
-                      <a:prstDash val="solid"/>
-                      <a:round/>
-                      <a:headEnd type="none" w="med" len="med"/>
-                      <a:tailEnd type="none" w="med" len="med"/>
-                    </a:lnB>
-                    <a:solidFill>
-                      <a:srgbClr val="F3F7FA"/>
-                    </a:solidFill>
-                  </a:tcPr>
-                </a:tc>
-              </a:tr>
-              <a:tr h="530352">
-                <a:tc>
-                  <a:txBody>
-                    <a:bodyPr/>
-                    <a:lstStyle/>
-                    <a:p>
-                      <a:pPr algn="l" indent="0" marL="0">
-                        <a:buNone/>
-                      </a:pPr>
-                      <a:r>
-                        <a:rPr lang="en-US" sz="1200" b="1" dirty="0">
-                          <a:solidFill>
-                            <a:srgbClr val="1B2A38"/>
-                          </a:solidFill>
-                          <a:latin typeface="Calibri" pitchFamily="34" charset="0"/>
-                          <a:ea typeface="Calibri" pitchFamily="34" charset="-122"/>
-                          <a:cs typeface="Calibri" pitchFamily="34" charset="-120"/>
-                        </a:rPr>
-                        <a:t>Reference range / clinical validity</a:t>
-                      </a:r>
-                      <a:endParaRPr lang="en-US" sz="1200" dirty="0">
-                        <a:latin typeface="Calibri" charset="0"/>
-                        <a:ea typeface="Calibri" charset="0"/>
-                        <a:cs typeface="Calibri" charset="0"/>
-                      </a:endParaRPr>
-                    </a:p>
-                  </a:txBody>
-                  <a:tcPr marL="91440" marR="91440" marT="45720" marB="45720" anchor="ctr">
-                    <a:lnL w="9525" cap="flat" cmpd="sng" algn="ctr">
-                      <a:solidFill>
-                        <a:srgbClr val="DCE4EC"/>
-                      </a:solidFill>
-                      <a:prstDash val="solid"/>
-                      <a:round/>
-                      <a:headEnd type="none" w="med" len="med"/>
-                      <a:tailEnd type="none" w="med" len="med"/>
-                    </a:lnL>
-                    <a:lnR w="9525" cap="flat" cmpd="sng" algn="ctr">
-                      <a:solidFill>
-                        <a:srgbClr val="DCE4EC"/>
-                      </a:solidFill>
-                      <a:prstDash val="solid"/>
-                      <a:round/>
-                      <a:headEnd type="none" w="med" len="med"/>
-                      <a:tailEnd type="none" w="med" len="med"/>
-                    </a:lnR>
-                    <a:lnT w="9525" cap="flat" cmpd="sng" algn="ctr">
-                      <a:solidFill>
-                        <a:srgbClr val="DCE4EC"/>
-                      </a:solidFill>
-                      <a:prstDash val="solid"/>
-                      <a:round/>
-                      <a:headEnd type="none" w="med" len="med"/>
-                      <a:tailEnd type="none" w="med" len="med"/>
-                    </a:lnT>
-                    <a:lnB w="9525" cap="flat" cmpd="sng" algn="ctr">
-                      <a:solidFill>
-                        <a:srgbClr val="DCE4EC"/>
-                      </a:solidFill>
-                      <a:prstDash val="solid"/>
-                      <a:round/>
-                      <a:headEnd type="none" w="med" len="med"/>
-                      <a:tailEnd type="none" w="med" len="med"/>
-                    </a:lnB>
-                    <a:solidFill>
-                      <a:srgbClr val="FFFFFF"/>
-                    </a:solidFill>
-                  </a:tcPr>
-                </a:tc>
-                <a:tc>
-                  <a:txBody>
-                    <a:bodyPr/>
-                    <a:lstStyle/>
-                    <a:p>
-                      <a:pPr algn="ctr" indent="0" marL="0">
-                        <a:buNone/>
-                      </a:pPr>
-                      <a:r>
-                        <a:rPr lang="en-US" sz="1200" dirty="0">
-                          <a:solidFill>
-                            <a:srgbClr val="33444F"/>
-                          </a:solidFill>
-                          <a:latin typeface="Calibri" pitchFamily="34" charset="0"/>
-                          <a:ea typeface="Calibri" pitchFamily="34" charset="-122"/>
-                          <a:cs typeface="Calibri" pitchFamily="34" charset="-120"/>
-                        </a:rPr>
-                        <a:t>Expected results and clinical performance</a:t>
-                      </a:r>
-                      <a:endParaRPr lang="en-US" sz="1200" dirty="0">
-                        <a:latin typeface="Calibri" charset="0"/>
-                        <a:ea typeface="Calibri" charset="0"/>
-                        <a:cs typeface="Calibri" charset="0"/>
-                      </a:endParaRPr>
-                    </a:p>
-                  </a:txBody>
-                  <a:tcPr marL="91440" marR="91440" marT="45720" marB="45720" anchor="ctr">
-                    <a:lnL w="9525" cap="flat" cmpd="sng" algn="ctr">
-                      <a:solidFill>
-                        <a:srgbClr val="DCE4EC"/>
-                      </a:solidFill>
-                      <a:prstDash val="solid"/>
-                      <a:round/>
-                      <a:headEnd type="none" w="med" len="med"/>
-                      <a:tailEnd type="none" w="med" len="med"/>
-                    </a:lnL>
-                    <a:lnR w="9525" cap="flat" cmpd="sng" algn="ctr">
-                      <a:solidFill>
-                        <a:srgbClr val="DCE4EC"/>
-                      </a:solidFill>
-                      <a:prstDash val="solid"/>
-                      <a:round/>
-                      <a:headEnd type="none" w="med" len="med"/>
-                      <a:tailEnd type="none" w="med" len="med"/>
-                    </a:lnR>
-                    <a:lnT w="9525" cap="flat" cmpd="sng" algn="ctr">
-                      <a:solidFill>
-                        <a:srgbClr val="DCE4EC"/>
-                      </a:solidFill>
-                      <a:prstDash val="solid"/>
-                      <a:round/>
-                      <a:headEnd type="none" w="med" len="med"/>
-                      <a:tailEnd type="none" w="med" len="med"/>
-                    </a:lnT>
-                    <a:lnB w="9525" cap="flat" cmpd="sng" algn="ctr">
-                      <a:solidFill>
-                        <a:srgbClr val="DCE4EC"/>
-                      </a:solidFill>
-                      <a:prstDash val="solid"/>
-                      <a:round/>
-                      <a:headEnd type="none" w="med" len="med"/>
-                      <a:tailEnd type="none" w="med" len="med"/>
-                    </a:lnB>
-                    <a:solidFill>
-                      <a:srgbClr val="FFFFFF"/>
-                    </a:solidFill>
-                  </a:tcPr>
-                </a:tc>
-              </a:tr>
-            </a:tbl>
-          </a:graphicData>
-        </a:graphic>
-      </p:graphicFrame>
-      <p:sp>
-        <p:nvSpPr>
-          <p:cNvPr id="5" name="Text 2"/>
-          <p:cNvSpPr/>
-          <p:nvPr/>
-        </p:nvSpPr>
-        <p:spPr>
-          <a:xfrm>
-            <a:off x="566928" y="6016752"/>
+      <p:sp>
+        <p:nvSpPr>
+          <p:cNvPr id="4" name="Shape 2"/>
+          <p:cNvSpPr/>
+          <p:nvPr/>
+        </p:nvSpPr>
+        <p:spPr>
+          <a:xfrm>
+            <a:off x="792328" y="1481328"/>
+            <a:ext cx="10607040" cy="4178808"/>
+          </a:xfrm>
+          <a:prstGeom prst="roundRect">
+            <a:avLst>
+              <a:gd name="adj" fmla="val 1969"/>
+            </a:avLst>
+          </a:prstGeom>
+          <a:solidFill>
+            <a:srgbClr val="FFFFFF"/>
+          </a:solidFill>
+          <a:ln w="12700">
+            <a:solidFill>
+              <a:srgbClr val="DCE4EC"/>
+            </a:solidFill>
+            <a:prstDash val="solid"/>
+          </a:ln>
+          <a:effectLst>
+            <a:outerShdw sx="100000" sy="100000" kx="0" ky="0" algn="bl" rotWithShape="0" blurRad="88900" dist="25400" dir="5400000">
+              <a:srgbClr val="22303C">
+                <a:alpha val="12000"/>
+              </a:srgbClr>
+            </a:outerShdw>
+          </a:effectLst>
+        </p:spPr>
+      </p:sp>
+      <p:pic>
+        <p:nvPicPr>
+          <p:cNvPr id="5" name="Image 0" descr="/tmp/cp_work2/art/mol_pipeline.png">    </p:cNvPr>
+          <p:cNvPicPr>
+            <a:picLocks noChangeAspect="1"/>
+          </p:cNvPicPr>
+          <p:nvPr/>
+        </p:nvPicPr>
+        <p:blipFill>
+          <a:blip r:embed="rId1"/>
+          <a:stretch>
+            <a:fillRect/>
+          </a:stretch>
+        </p:blipFill>
+        <p:spPr>
+          <a:xfrm>
+            <a:off x="920344" y="1609344"/>
+            <a:ext cx="10351008" cy="3922776"/>
+          </a:xfrm>
+          <a:prstGeom prst="rect">
+            <a:avLst/>
+          </a:prstGeom>
+        </p:spPr>
+      </p:pic>
+      <p:sp>
+        <p:nvSpPr>
+          <p:cNvPr id="6" name="Text 3"/>
+          <p:cNvSpPr/>
+          <p:nvPr/>
+        </p:nvSpPr>
+        <p:spPr>
+          <a:xfrm>
+            <a:off x="566928" y="5733288"/>
             <a:ext cx="11057839" cy="365760"/>
           </a:xfrm>
           <a:prstGeom prst="rect">
@@ -12640,14 +13991,14 @@
           <a:ln/>
         </p:spPr>
         <p:txBody>
-          <a:bodyPr wrap="square" lIns="0" tIns="0" rIns="0" bIns="0" rtlCol="0" anchor="ctr"/>
-          <a:lstStyle/>
-          <a:p>
-            <a:pPr algn="l" indent="0" marL="0">
-              <a:buNone/>
-            </a:pPr>
-            <a:r>
-              <a:rPr lang="en-US" sz="1050" i="1" dirty="0">
+          <a:bodyPr wrap="square" lIns="0" tIns="0" rIns="0" bIns="0" rtlCol="0" anchor="t"/>
+          <a:lstStyle/>
+          <a:p>
+            <a:pPr algn="ctr" indent="0" marL="0">
+              <a:buNone/>
+            </a:pPr>
+            <a:r>
+              <a:rPr lang="en-US" sz="1150" i="1" dirty="0">
                 <a:solidFill>
                   <a:srgbClr val="6B7B8A"/>
                 </a:solidFill>
@@ -12655,15 +14006,15 @@
                 <a:ea typeface="Calibri" pitchFamily="34" charset="-122"/>
                 <a:cs typeface="Calibri" pitchFamily="34" charset="-120"/>
               </a:rPr>
-              <a:t>Laboratory-developed NGS tests require full validation of wet-lab AND bioinformatic components before clinical reporting.</a:t>
-            </a:r>
-            <a:endParaRPr lang="en-US" sz="1050" dirty="0"/>
-          </a:p>
-        </p:txBody>
-      </p:sp>
-      <p:sp>
-        <p:nvSpPr>
-          <p:cNvPr id="6" name="Text 3"/>
+              <a:t>Original schematic. Validation must cover both the wet-bench process and the (version-locked) bioinformatics pipeline.</a:t>
+            </a:r>
+            <a:endParaRPr lang="en-US" sz="1150" dirty="0"/>
+          </a:p>
+        </p:txBody>
+      </p:sp>
+      <p:sp>
+        <p:nvSpPr>
+          <p:cNvPr id="7" name="Text 4"/>
           <p:cNvSpPr/>
           <p:nvPr/>
         </p:nvSpPr>
@@ -12702,7 +14053,7 @@
       </p:sp>
       <p:sp>
         <p:nvSpPr>
-          <p:cNvPr id="7" name="Text 4"/>
+          <p:cNvPr id="8" name="Text 5"/>
           <p:cNvSpPr/>
           <p:nvPr/>
         </p:nvSpPr>
@@ -12832,7 +14183,7 @@
                 <a:ea typeface="Calibri" pitchFamily="34" charset="-122"/>
                 <a:cs typeface="Calibri" pitchFamily="34" charset="-120"/>
               </a:rPr>
-              <a:t>MOLECULAR &amp; CYTOGENETICS   ·   CONTAMINATION</a:t>
+              <a:t>MOLECULAR &amp; CYTOGENETICS   ·   VALIDATION</a:t>
             </a:r>
             <a:endParaRPr lang="en-US" sz="1100" dirty="0"/>
           </a:p>
@@ -12871,7 +14222,7 @@
                 <a:ea typeface="Calibri" pitchFamily="34" charset="-122"/>
                 <a:cs typeface="Calibri" pitchFamily="34" charset="-120"/>
               </a:rPr>
-              <a:t>Keeping Amplicons and Samples Apart</a:t>
+              <a:t>Performance Characteristics</a:t>
             </a:r>
             <a:endParaRPr lang="en-US" sz="3000" dirty="0"/>
           </a:p>
@@ -12939,7 +14290,7 @@
                 <a:ea typeface="Calibri" pitchFamily="34" charset="-122"/>
                 <a:cs typeface="Calibri" pitchFamily="34" charset="-120"/>
               </a:rPr>
-              <a:t>WHY CONTAMINATION IS DANGEROUS</a:t>
+              <a:t>CORE PARAMETERS</a:t>
             </a:r>
             <a:endParaRPr lang="en-US" sz="1200" dirty="0"/>
           </a:p>
@@ -12982,7 +14333,7 @@
                 <a:ea typeface="Calibri" pitchFamily="34" charset="-122"/>
                 <a:cs typeface="Calibri" pitchFamily="34" charset="-120"/>
               </a:rPr>
-              <a:t>Amplified product (amplicon) carryover can cause false positives in later runs.</a:t>
+              <a:t>Accuracy, precision (repeatability/reproducibility), analytic sensitivity and specificity.</a:t>
             </a:r>
             <a:endParaRPr lang="en-US" sz="1250" dirty="0"/>
           </a:p>
@@ -13003,7 +14354,7 @@
                 <a:ea typeface="Calibri" pitchFamily="34" charset="-122"/>
                 <a:cs typeface="Calibri" pitchFamily="34" charset="-120"/>
               </a:rPr>
-              <a:t>Sample-to-sample (index hopping in NGS) can misassign reads.</a:t>
+              <a:t>Limit of detection (e.g., lowest variant allele fraction).</a:t>
             </a:r>
             <a:endParaRPr lang="en-US" sz="1250" dirty="0"/>
           </a:p>
@@ -13024,7 +14375,7 @@
                 <a:ea typeface="Calibri" pitchFamily="34" charset="-122"/>
                 <a:cs typeface="Calibri" pitchFamily="34" charset="-120"/>
               </a:rPr>
-              <a:t>Even tiny contamination matters at high analytic sensitivity.</a:t>
+              <a:t>Reportable range and reference range as applicable.</a:t>
             </a:r>
             <a:endParaRPr lang="en-US" sz="1250" dirty="0"/>
           </a:p>
@@ -13045,7 +14396,7 @@
                 <a:ea typeface="Calibri" pitchFamily="34" charset="-122"/>
                 <a:cs typeface="Calibri" pitchFamily="34" charset="-120"/>
               </a:rPr>
-              <a:t>Reagent and environmental contamination affect low-input assays.</a:t>
+              <a:t>Documented before clinical use.</a:t>
             </a:r>
             <a:endParaRPr lang="en-US" sz="1250" dirty="0"/>
           </a:p>
@@ -13068,7 +14419,7 @@
             </a:avLst>
           </a:prstGeom>
           <a:solidFill>
-            <a:srgbClr val="E0F2F4"/>
+            <a:srgbClr val="DDF0EF"/>
           </a:solidFill>
           <a:ln/>
           <a:effectLst>
@@ -13113,7 +14464,7 @@
                 <a:ea typeface="Calibri" pitchFamily="34" charset="-122"/>
                 <a:cs typeface="Calibri" pitchFamily="34" charset="-120"/>
               </a:rPr>
-              <a:t>CONTROLS AND WORKFLOW</a:t>
+              <a:t>VALIDATION VS VERIFICATION</a:t>
             </a:r>
             <a:endParaRPr lang="en-US" sz="1200" dirty="0"/>
           </a:p>
@@ -13156,7 +14507,7 @@
                 <a:ea typeface="Calibri" pitchFamily="34" charset="-122"/>
                 <a:cs typeface="Calibri" pitchFamily="34" charset="-120"/>
               </a:rPr>
-              <a:t>Unidirectional workflow with physically separated pre- and post-amplification areas.</a:t>
+              <a:t>Laboratory-developed tests require full validation; FDA-cleared assays require verification of claims.</a:t>
             </a:r>
             <a:endParaRPr lang="en-US" sz="1250" dirty="0"/>
           </a:p>
@@ -13177,7 +14528,7 @@
                 <a:ea typeface="Calibri" pitchFamily="34" charset="-122"/>
                 <a:cs typeface="Calibri" pitchFamily="34" charset="-120"/>
               </a:rPr>
-              <a:t>No-template (negative) controls every run; positive controls for sensitivity.</a:t>
+              <a:t>Any modification of an FDA-cleared assay triggers validation.</a:t>
             </a:r>
             <a:endParaRPr lang="en-US" sz="1250" dirty="0"/>
           </a:p>
@@ -13198,7 +14549,7 @@
                 <a:ea typeface="Calibri" pitchFamily="34" charset="-122"/>
                 <a:cs typeface="Calibri" pitchFamily="34" charset="-120"/>
               </a:rPr>
-              <a:t>Unique dual indexes to detect/limit index hopping.</a:t>
+              <a:t>Define intended use and specimen types.</a:t>
             </a:r>
             <a:endParaRPr lang="en-US" sz="1250" dirty="0"/>
           </a:p>
@@ -13219,7 +14570,7 @@
                 <a:ea typeface="Calibri" pitchFamily="34" charset="-122"/>
                 <a:cs typeface="Calibri" pitchFamily="34" charset="-120"/>
               </a:rPr>
-              <a:t>Monitor contamination metrics and investigate trends.</a:t>
+              <a:t>Maintain validation documentation for inspection.</a:t>
             </a:r>
             <a:endParaRPr lang="en-US" sz="1250" dirty="0"/>
           </a:p>
@@ -13342,6 +14693,319 @@
 <file path=ppt/slides/slide8.xml><?xml version="1.0" encoding="utf-8"?>
 <p:sld xmlns:a="http://schemas.openxmlformats.org/drawingml/2006/main" xmlns:r="http://schemas.openxmlformats.org/officeDocument/2006/relationships" xmlns:p="http://schemas.openxmlformats.org/presentationml/2006/main">
   <p:cSld name="Slide 8">
+    <p:bg>
+      <p:bgPr>
+        <a:solidFill>
+          <a:srgbClr val="FFFFFF"/>
+        </a:solidFill>
+      </p:bgPr>
+    </p:bg>
+    <p:spTree>
+      <p:nvGrpSpPr>
+        <p:cNvPr id="1" name=""/>
+        <p:cNvGrpSpPr/>
+        <p:nvPr/>
+      </p:nvGrpSpPr>
+      <p:grpSpPr>
+        <a:xfrm>
+          <a:off x="0" y="0"/>
+          <a:ext cx="0" cy="0"/>
+          <a:chOff x="0" y="0"/>
+          <a:chExt cx="0" cy="0"/>
+        </a:xfrm>
+      </p:grpSpPr>
+      <p:sp>
+        <p:nvSpPr>
+          <p:cNvPr id="2" name="Text 0"/>
+          <p:cNvSpPr/>
+          <p:nvPr/>
+        </p:nvSpPr>
+        <p:spPr>
+          <a:xfrm>
+            <a:off x="566928" y="329184"/>
+            <a:ext cx="10515600" cy="310896"/>
+          </a:xfrm>
+          <a:prstGeom prst="rect">
+            <a:avLst/>
+          </a:prstGeom>
+          <a:noFill/>
+          <a:ln/>
+        </p:spPr>
+        <p:txBody>
+          <a:bodyPr wrap="square" lIns="0" tIns="0" rIns="0" bIns="0" rtlCol="0" anchor="ctr"/>
+          <a:lstStyle/>
+          <a:p>
+            <a:pPr algn="l" indent="0" marL="0">
+              <a:buNone/>
+            </a:pPr>
+            <a:r>
+              <a:rPr lang="en-US" sz="1100" b="1" spc="150" kern="0" dirty="0">
+                <a:solidFill>
+                  <a:srgbClr val="00838F"/>
+                </a:solidFill>
+                <a:latin typeface="Calibri" pitchFamily="34" charset="0"/>
+                <a:ea typeface="Calibri" pitchFamily="34" charset="-122"/>
+                <a:cs typeface="Calibri" pitchFamily="34" charset="-120"/>
+              </a:rPr>
+              <a:t>MOLECULAR &amp; CYTOGENETICS   ·   SEQUENCING</a:t>
+            </a:r>
+            <a:endParaRPr lang="en-US" sz="1100" dirty="0"/>
+          </a:p>
+        </p:txBody>
+      </p:sp>
+      <p:sp>
+        <p:nvSpPr>
+          <p:cNvPr id="3" name="Text 1"/>
+          <p:cNvSpPr/>
+          <p:nvPr/>
+        </p:nvSpPr>
+        <p:spPr>
+          <a:xfrm>
+            <a:off x="566928" y="713232"/>
+            <a:ext cx="11064240" cy="749808"/>
+          </a:xfrm>
+          <a:prstGeom prst="rect">
+            <a:avLst/>
+          </a:prstGeom>
+          <a:noFill/>
+          <a:ln/>
+        </p:spPr>
+        <p:txBody>
+          <a:bodyPr wrap="square" lIns="0" tIns="0" rIns="0" bIns="0" rtlCol="0" anchor="ctr"/>
+          <a:lstStyle/>
+          <a:p>
+            <a:pPr algn="l" indent="0" marL="0">
+              <a:buNone/>
+            </a:pPr>
+            <a:r>
+              <a:rPr lang="en-US" sz="3000" b="1" dirty="0">
+                <a:solidFill>
+                  <a:srgbClr val="0E3A5F"/>
+                </a:solidFill>
+                <a:latin typeface="Calibri" pitchFamily="34" charset="0"/>
+                <a:ea typeface="Calibri" pitchFamily="34" charset="-122"/>
+                <a:cs typeface="Calibri" pitchFamily="34" charset="-120"/>
+              </a:rPr>
+              <a:t>Sequencing Scale and Coverage</a:t>
+            </a:r>
+            <a:endParaRPr lang="en-US" sz="3000" dirty="0"/>
+          </a:p>
+        </p:txBody>
+      </p:sp>
+      <p:sp>
+        <p:nvSpPr>
+          <p:cNvPr id="4" name="Shape 2"/>
+          <p:cNvSpPr/>
+          <p:nvPr/>
+        </p:nvSpPr>
+        <p:spPr>
+          <a:xfrm>
+            <a:off x="1066648" y="1481328"/>
+            <a:ext cx="10058400" cy="4187952"/>
+          </a:xfrm>
+          <a:prstGeom prst="roundRect">
+            <a:avLst>
+              <a:gd name="adj" fmla="val 1965"/>
+            </a:avLst>
+          </a:prstGeom>
+          <a:solidFill>
+            <a:srgbClr val="FFFFFF"/>
+          </a:solidFill>
+          <a:ln w="12700">
+            <a:solidFill>
+              <a:srgbClr val="DCE4EC"/>
+            </a:solidFill>
+            <a:prstDash val="solid"/>
+          </a:ln>
+          <a:effectLst>
+            <a:outerShdw sx="100000" sy="100000" kx="0" ky="0" algn="bl" rotWithShape="0" blurRad="88900" dist="25400" dir="5400000">
+              <a:srgbClr val="22303C">
+                <a:alpha val="12000"/>
+              </a:srgbClr>
+            </a:outerShdw>
+          </a:effectLst>
+        </p:spPr>
+      </p:sp>
+      <p:pic>
+        <p:nvPicPr>
+          <p:cNvPr id="5" name="Image 0" descr="/tmp/cp_work2/art/mol_ngs.png">    </p:cNvPr>
+          <p:cNvPicPr>
+            <a:picLocks noChangeAspect="1"/>
+          </p:cNvPicPr>
+          <p:nvPr/>
+        </p:nvPicPr>
+        <p:blipFill>
+          <a:blip r:embed="rId1"/>
+          <a:stretch>
+            <a:fillRect/>
+          </a:stretch>
+        </p:blipFill>
+        <p:spPr>
+          <a:xfrm>
+            <a:off x="1194664" y="1609344"/>
+            <a:ext cx="9802368" cy="3931920"/>
+          </a:xfrm>
+          <a:prstGeom prst="rect">
+            <a:avLst/>
+          </a:prstGeom>
+        </p:spPr>
+      </p:pic>
+      <p:sp>
+        <p:nvSpPr>
+          <p:cNvPr id="6" name="Text 3"/>
+          <p:cNvSpPr/>
+          <p:nvPr/>
+        </p:nvSpPr>
+        <p:spPr>
+          <a:xfrm>
+            <a:off x="566928" y="5742432"/>
+            <a:ext cx="11057839" cy="365760"/>
+          </a:xfrm>
+          <a:prstGeom prst="rect">
+            <a:avLst/>
+          </a:prstGeom>
+          <a:noFill/>
+          <a:ln/>
+        </p:spPr>
+        <p:txBody>
+          <a:bodyPr wrap="square" lIns="0" tIns="0" rIns="0" bIns="0" rtlCol="0" anchor="t"/>
+          <a:lstStyle/>
+          <a:p>
+            <a:pPr algn="ctr" indent="0" marL="0">
+              <a:buNone/>
+            </a:pPr>
+            <a:r>
+              <a:rPr lang="en-US" sz="1150" i="1" dirty="0">
+                <a:solidFill>
+                  <a:srgbClr val="6B7B8A"/>
+                </a:solidFill>
+                <a:latin typeface="Calibri" pitchFamily="34" charset="0"/>
+                <a:ea typeface="Calibri" pitchFamily="34" charset="-122"/>
+                <a:cs typeface="Calibri" pitchFamily="34" charset="-120"/>
+              </a:rPr>
+              <a:t>Original schematic. Depth of coverage drives variant-detection sensitivity; define minimum coverage in validation.</a:t>
+            </a:r>
+            <a:endParaRPr lang="en-US" sz="1150" dirty="0"/>
+          </a:p>
+        </p:txBody>
+      </p:sp>
+      <p:sp>
+        <p:nvSpPr>
+          <p:cNvPr id="7" name="Text 4"/>
+          <p:cNvSpPr/>
+          <p:nvPr/>
+        </p:nvSpPr>
+        <p:spPr>
+          <a:xfrm>
+            <a:off x="566928" y="6473952"/>
+            <a:ext cx="7772400" cy="274320"/>
+          </a:xfrm>
+          <a:prstGeom prst="rect">
+            <a:avLst/>
+          </a:prstGeom>
+          <a:noFill/>
+          <a:ln/>
+        </p:spPr>
+        <p:txBody>
+          <a:bodyPr wrap="square" lIns="0" tIns="0" rIns="0" bIns="0" rtlCol="0" anchor="ctr"/>
+          <a:lstStyle/>
+          <a:p>
+            <a:pPr algn="l" indent="0" marL="0">
+              <a:buNone/>
+            </a:pPr>
+            <a:r>
+              <a:rPr lang="en-US" sz="850" dirty="0">
+                <a:solidFill>
+                  <a:srgbClr val="9AA8B4"/>
+                </a:solidFill>
+                <a:latin typeface="Calibri" pitchFamily="34" charset="0"/>
+                <a:ea typeface="Calibri" pitchFamily="34" charset="-122"/>
+                <a:cs typeface="Calibri" pitchFamily="34" charset="-120"/>
+              </a:rPr>
+              <a:t>Makassed General Hospital  ·  Department of Laboratory Medicine</a:t>
+            </a:r>
+            <a:endParaRPr lang="en-US" sz="850" dirty="0"/>
+          </a:p>
+        </p:txBody>
+      </p:sp>
+      <p:sp>
+        <p:nvSpPr>
+          <p:cNvPr id="8" name="Text 5"/>
+          <p:cNvSpPr/>
+          <p:nvPr/>
+        </p:nvSpPr>
+        <p:spPr>
+          <a:xfrm>
+            <a:off x="9814255" y="6473952"/>
+            <a:ext cx="1828800" cy="274320"/>
+          </a:xfrm>
+          <a:prstGeom prst="rect">
+            <a:avLst/>
+          </a:prstGeom>
+          <a:noFill/>
+          <a:ln/>
+        </p:spPr>
+        <p:txBody>
+          <a:bodyPr wrap="square" lIns="0" tIns="0" rIns="0" bIns="0" rtlCol="0" anchor="ctr"/>
+          <a:lstStyle/>
+          <a:p>
+            <a:pPr algn="r" indent="0" marL="0">
+              <a:buNone/>
+            </a:pPr>
+            <a:r>
+              <a:rPr lang="en-US" sz="850" dirty="0">
+                <a:solidFill>
+                  <a:srgbClr val="9AA8B4"/>
+                </a:solidFill>
+                <a:latin typeface="Calibri" pitchFamily="34" charset="0"/>
+                <a:ea typeface="Calibri" pitchFamily="34" charset="-122"/>
+                <a:cs typeface="Calibri" pitchFamily="34" charset="-120"/>
+              </a:rPr>
+              <a:t>CP Lecture Series</a:t>
+            </a:r>
+            <a:pPr algn="r" indent="0" marL="0">
+              <a:buNone/>
+            </a:pPr>
+            <a:r>
+              <a:rPr lang="en-US" sz="850" dirty="0">
+                <a:solidFill>
+                  <a:srgbClr val="DCE4EC"/>
+                </a:solidFill>
+                <a:latin typeface="Calibri" pitchFamily="34" charset="0"/>
+                <a:ea typeface="Calibri" pitchFamily="34" charset="-122"/>
+                <a:cs typeface="Calibri" pitchFamily="34" charset="-120"/>
+              </a:rPr>
+              <a:t>   ·   </a:t>
+            </a:r>
+            <a:pPr algn="r" indent="0" marL="0">
+              <a:buNone/>
+            </a:pPr>
+            <a:r>
+              <a:rPr lang="en-US" sz="850" b="1" dirty="0">
+                <a:solidFill>
+                  <a:srgbClr val="00838F"/>
+                </a:solidFill>
+                <a:latin typeface="Calibri" pitchFamily="34" charset="0"/>
+                <a:ea typeface="Calibri" pitchFamily="34" charset="-122"/>
+                <a:cs typeface="Calibri" pitchFamily="34" charset="-120"/>
+              </a:rPr>
+              <a:t>7</a:t>
+            </a:r>
+            <a:endParaRPr lang="en-US" sz="850" dirty="0"/>
+          </a:p>
+        </p:txBody>
+      </p:sp>
+    </p:spTree>
+  </p:cSld>
+  <p:clrMapOvr>
+    <a:masterClrMapping/>
+  </p:clrMapOvr>
+</p:sld>
+</file>
+
+<file path=ppt/slides/slide9.xml><?xml version="1.0" encoding="utf-8"?>
+<p:sld xmlns:a="http://schemas.openxmlformats.org/drawingml/2006/main" xmlns:r="http://schemas.openxmlformats.org/officeDocument/2006/relationships" xmlns:p="http://schemas.openxmlformats.org/presentationml/2006/main">
+  <p:cSld name="Slide 9">
     <p:bg>
       <p:bgPr>
         <a:solidFill>
@@ -13518,322 +15182,9 @@
                 <a:ea typeface="Calibri" pitchFamily="34" charset="-122"/>
                 <a:cs typeface="Calibri" pitchFamily="34" charset="-120"/>
               </a:rPr>
-              <a:t>Bioinformatics &amp; Sign-Out</a:t>
+              <a:t>NGS Validation, Bioinformatics &amp; QC</a:t>
             </a:r>
             <a:endParaRPr lang="en-US" sz="3800" dirty="0"/>
-          </a:p>
-        </p:txBody>
-      </p:sp>
-    </p:spTree>
-  </p:cSld>
-  <p:clrMapOvr>
-    <a:masterClrMapping/>
-  </p:clrMapOvr>
-</p:sld>
-</file>
-
-<file path=ppt/slides/slide9.xml><?xml version="1.0" encoding="utf-8"?>
-<p:sld xmlns:a="http://schemas.openxmlformats.org/drawingml/2006/main" xmlns:r="http://schemas.openxmlformats.org/officeDocument/2006/relationships" xmlns:p="http://schemas.openxmlformats.org/presentationml/2006/main">
-  <p:cSld name="Slide 9">
-    <p:bg>
-      <p:bgPr>
-        <a:solidFill>
-          <a:srgbClr val="FFFFFF"/>
-        </a:solidFill>
-      </p:bgPr>
-    </p:bg>
-    <p:spTree>
-      <p:nvGrpSpPr>
-        <p:cNvPr id="1" name=""/>
-        <p:cNvGrpSpPr/>
-        <p:nvPr/>
-      </p:nvGrpSpPr>
-      <p:grpSpPr>
-        <a:xfrm>
-          <a:off x="0" y="0"/>
-          <a:ext cx="0" cy="0"/>
-          <a:chOff x="0" y="0"/>
-          <a:chExt cx="0" cy="0"/>
-        </a:xfrm>
-      </p:grpSpPr>
-      <p:sp>
-        <p:nvSpPr>
-          <p:cNvPr id="2" name="Text 0"/>
-          <p:cNvSpPr/>
-          <p:nvPr/>
-        </p:nvSpPr>
-        <p:spPr>
-          <a:xfrm>
-            <a:off x="566928" y="329184"/>
-            <a:ext cx="10515600" cy="310896"/>
-          </a:xfrm>
-          <a:prstGeom prst="rect">
-            <a:avLst/>
-          </a:prstGeom>
-          <a:noFill/>
-          <a:ln/>
-        </p:spPr>
-        <p:txBody>
-          <a:bodyPr wrap="square" lIns="0" tIns="0" rIns="0" bIns="0" rtlCol="0" anchor="ctr"/>
-          <a:lstStyle/>
-          <a:p>
-            <a:pPr algn="l" indent="0" marL="0">
-              <a:buNone/>
-            </a:pPr>
-            <a:r>
-              <a:rPr lang="en-US" sz="1100" b="1" spc="150" kern="0" dirty="0">
-                <a:solidFill>
-                  <a:srgbClr val="00838F"/>
-                </a:solidFill>
-                <a:latin typeface="Calibri" pitchFamily="34" charset="0"/>
-                <a:ea typeface="Calibri" pitchFamily="34" charset="-122"/>
-                <a:cs typeface="Calibri" pitchFamily="34" charset="-120"/>
-              </a:rPr>
-              <a:t>MOLECULAR &amp; CYTOGENETICS   ·   BIOINFORMATICS</a:t>
-            </a:r>
-            <a:endParaRPr lang="en-US" sz="1100" dirty="0"/>
-          </a:p>
-        </p:txBody>
-      </p:sp>
-      <p:sp>
-        <p:nvSpPr>
-          <p:cNvPr id="3" name="Text 1"/>
-          <p:cNvSpPr/>
-          <p:nvPr/>
-        </p:nvSpPr>
-        <p:spPr>
-          <a:xfrm>
-            <a:off x="566928" y="713232"/>
-            <a:ext cx="11064240" cy="749808"/>
-          </a:xfrm>
-          <a:prstGeom prst="rect">
-            <a:avLst/>
-          </a:prstGeom>
-          <a:noFill/>
-          <a:ln/>
-        </p:spPr>
-        <p:txBody>
-          <a:bodyPr wrap="square" lIns="0" tIns="0" rIns="0" bIns="0" rtlCol="0" anchor="ctr"/>
-          <a:lstStyle/>
-          <a:p>
-            <a:pPr algn="l" indent="0" marL="0">
-              <a:buNone/>
-            </a:pPr>
-            <a:r>
-              <a:rPr lang="en-US" sz="3000" b="1" dirty="0">
-                <a:solidFill>
-                  <a:srgbClr val="0E3A5F"/>
-                </a:solidFill>
-                <a:latin typeface="Calibri" pitchFamily="34" charset="0"/>
-                <a:ea typeface="Calibri" pitchFamily="34" charset="-122"/>
-                <a:cs typeface="Calibri" pitchFamily="34" charset="-120"/>
-              </a:rPr>
-              <a:t>The Pipeline Is Part of the Assay</a:t>
-            </a:r>
-            <a:endParaRPr lang="en-US" sz="3000" dirty="0"/>
-          </a:p>
-        </p:txBody>
-      </p:sp>
-      <p:sp>
-        <p:nvSpPr>
-          <p:cNvPr id="4" name="Shape 2"/>
-          <p:cNvSpPr/>
-          <p:nvPr/>
-        </p:nvSpPr>
-        <p:spPr>
-          <a:xfrm>
-            <a:off x="1066648" y="1481328"/>
-            <a:ext cx="10058400" cy="3483864"/>
-          </a:xfrm>
-          <a:prstGeom prst="roundRect">
-            <a:avLst>
-              <a:gd name="adj" fmla="val 2362"/>
-            </a:avLst>
-          </a:prstGeom>
-          <a:solidFill>
-            <a:srgbClr val="FFFFFF"/>
-          </a:solidFill>
-          <a:ln w="12700">
-            <a:solidFill>
-              <a:srgbClr val="DCE4EC"/>
-            </a:solidFill>
-            <a:prstDash val="solid"/>
-          </a:ln>
-          <a:effectLst>
-            <a:outerShdw sx="100000" sy="100000" kx="0" ky="0" algn="bl" rotWithShape="0" blurRad="88900" dist="25400" dir="5400000">
-              <a:srgbClr val="22303C">
-                <a:alpha val="12000"/>
-              </a:srgbClr>
-            </a:outerShdw>
-          </a:effectLst>
-        </p:spPr>
-      </p:sp>
-      <p:pic>
-        <p:nvPicPr>
-          <p:cNvPr id="5" name="Image 0" descr="/tmp/cp_work2/art/mol_ngs.png">    </p:cNvPr>
-          <p:cNvPicPr>
-            <a:picLocks noChangeAspect="1"/>
-          </p:cNvPicPr>
-          <p:nvPr/>
-        </p:nvPicPr>
-        <p:blipFill>
-          <a:blip r:embed="rId1"/>
-          <a:stretch>
-            <a:fillRect/>
-          </a:stretch>
-        </p:blipFill>
-        <p:spPr>
-          <a:xfrm>
-            <a:off x="1194664" y="1609344"/>
-            <a:ext cx="9802368" cy="3227832"/>
-          </a:xfrm>
-          <a:prstGeom prst="rect">
-            <a:avLst/>
-          </a:prstGeom>
-        </p:spPr>
-      </p:pic>
-      <p:sp>
-        <p:nvSpPr>
-          <p:cNvPr id="6" name="Text 3"/>
-          <p:cNvSpPr/>
-          <p:nvPr/>
-        </p:nvSpPr>
-        <p:spPr>
-          <a:xfrm>
-            <a:off x="566928" y="5038344"/>
-            <a:ext cx="11057839" cy="365760"/>
-          </a:xfrm>
-          <a:prstGeom prst="rect">
-            <a:avLst/>
-          </a:prstGeom>
-          <a:noFill/>
-          <a:ln/>
-        </p:spPr>
-        <p:txBody>
-          <a:bodyPr wrap="square" lIns="0" tIns="0" rIns="0" bIns="0" rtlCol="0" anchor="t"/>
-          <a:lstStyle/>
-          <a:p>
-            <a:pPr algn="ctr" indent="0" marL="0">
-              <a:buNone/>
-            </a:pPr>
-            <a:r>
-              <a:rPr lang="en-US" sz="1150" i="1" dirty="0">
-                <a:solidFill>
-                  <a:srgbClr val="6B7B8A"/>
-                </a:solidFill>
-                <a:latin typeface="Calibri" pitchFamily="34" charset="0"/>
-                <a:ea typeface="Calibri" pitchFamily="34" charset="-122"/>
-                <a:cs typeface="Calibri" pitchFamily="34" charset="-120"/>
-              </a:rPr>
-              <a:t>Original schematic. Alignment, variant calling, and annotation are validated, version-controlled components — with quality metrics that gate results.</a:t>
-            </a:r>
-            <a:endParaRPr lang="en-US" sz="1150" dirty="0"/>
-          </a:p>
-        </p:txBody>
-      </p:sp>
-      <p:sp>
-        <p:nvSpPr>
-          <p:cNvPr id="7" name="Text 4"/>
-          <p:cNvSpPr/>
-          <p:nvPr/>
-        </p:nvSpPr>
-        <p:spPr>
-          <a:xfrm>
-            <a:off x="566928" y="6473952"/>
-            <a:ext cx="7772400" cy="274320"/>
-          </a:xfrm>
-          <a:prstGeom prst="rect">
-            <a:avLst/>
-          </a:prstGeom>
-          <a:noFill/>
-          <a:ln/>
-        </p:spPr>
-        <p:txBody>
-          <a:bodyPr wrap="square" lIns="0" tIns="0" rIns="0" bIns="0" rtlCol="0" anchor="ctr"/>
-          <a:lstStyle/>
-          <a:p>
-            <a:pPr algn="l" indent="0" marL="0">
-              <a:buNone/>
-            </a:pPr>
-            <a:r>
-              <a:rPr lang="en-US" sz="850" dirty="0">
-                <a:solidFill>
-                  <a:srgbClr val="9AA8B4"/>
-                </a:solidFill>
-                <a:latin typeface="Calibri" pitchFamily="34" charset="0"/>
-                <a:ea typeface="Calibri" pitchFamily="34" charset="-122"/>
-                <a:cs typeface="Calibri" pitchFamily="34" charset="-120"/>
-              </a:rPr>
-              <a:t>Makassed General Hospital  ·  Department of Laboratory Medicine</a:t>
-            </a:r>
-            <a:endParaRPr lang="en-US" sz="850" dirty="0"/>
-          </a:p>
-        </p:txBody>
-      </p:sp>
-      <p:sp>
-        <p:nvSpPr>
-          <p:cNvPr id="8" name="Text 5"/>
-          <p:cNvSpPr/>
-          <p:nvPr/>
-        </p:nvSpPr>
-        <p:spPr>
-          <a:xfrm>
-            <a:off x="9814255" y="6473952"/>
-            <a:ext cx="1828800" cy="274320"/>
-          </a:xfrm>
-          <a:prstGeom prst="rect">
-            <a:avLst/>
-          </a:prstGeom>
-          <a:noFill/>
-          <a:ln/>
-        </p:spPr>
-        <p:txBody>
-          <a:bodyPr wrap="square" lIns="0" tIns="0" rIns="0" bIns="0" rtlCol="0" anchor="ctr"/>
-          <a:lstStyle/>
-          <a:p>
-            <a:pPr algn="r" indent="0" marL="0">
-              <a:buNone/>
-            </a:pPr>
-            <a:r>
-              <a:rPr lang="en-US" sz="850" dirty="0">
-                <a:solidFill>
-                  <a:srgbClr val="9AA8B4"/>
-                </a:solidFill>
-                <a:latin typeface="Calibri" pitchFamily="34" charset="0"/>
-                <a:ea typeface="Calibri" pitchFamily="34" charset="-122"/>
-                <a:cs typeface="Calibri" pitchFamily="34" charset="-120"/>
-              </a:rPr>
-              <a:t>CP Lecture Series</a:t>
-            </a:r>
-            <a:pPr algn="r" indent="0" marL="0">
-              <a:buNone/>
-            </a:pPr>
-            <a:r>
-              <a:rPr lang="en-US" sz="850" dirty="0">
-                <a:solidFill>
-                  <a:srgbClr val="DCE4EC"/>
-                </a:solidFill>
-                <a:latin typeface="Calibri" pitchFamily="34" charset="0"/>
-                <a:ea typeface="Calibri" pitchFamily="34" charset="-122"/>
-                <a:cs typeface="Calibri" pitchFamily="34" charset="-120"/>
-              </a:rPr>
-              <a:t>   ·   </a:t>
-            </a:r>
-            <a:pPr algn="r" indent="0" marL="0">
-              <a:buNone/>
-            </a:pPr>
-            <a:r>
-              <a:rPr lang="en-US" sz="850" b="1" dirty="0">
-                <a:solidFill>
-                  <a:srgbClr val="00838F"/>
-                </a:solidFill>
-                <a:latin typeface="Calibri" pitchFamily="34" charset="0"/>
-                <a:ea typeface="Calibri" pitchFamily="34" charset="-122"/>
-                <a:cs typeface="Calibri" pitchFamily="34" charset="-120"/>
-              </a:rPr>
-              <a:t>7</a:t>
-            </a:r>
-            <a:endParaRPr lang="en-US" sz="850" dirty="0"/>
           </a:p>
         </p:txBody>
       </p:sp>

--- a/decks/Molecular_05_Validation-QC-Bioinformatics.pptx
+++ b/decks/Molecular_05_Validation-QC-Bioinformatics.pptx
@@ -25,9 +25,13 @@
     <p:sldId id="273" r:id="rId19"/>
     <p:sldId id="274" r:id="rId20"/>
     <p:sldId id="275" r:id="rId21"/>
+    <p:sldId id="284" r:id="rId35"/>
     <p:sldId id="276" r:id="rId22"/>
+    <p:sldId id="283" r:id="rId34"/>
     <p:sldId id="277" r:id="rId23"/>
+    <p:sldId id="282" r:id="rId33"/>
     <p:sldId id="278" r:id="rId24"/>
+    <p:sldId id="281" r:id="rId32"/>
     <p:sldId id="279" r:id="rId25"/>
     <p:sldId id="280" r:id="rId26"/>
   </p:sldIdLst>
@@ -3032,6 +3036,10 @@
           </a:solidFill>
           <a:ln/>
         </p:spPr>
+        <p:txBody>
+          <a:bodyPr/>
+          <a:p/>
+        </p:txBody>
       </p:sp>
       <p:sp>
         <p:nvSpPr>
@@ -3054,6 +3062,10 @@
           </a:solidFill>
           <a:ln/>
         </p:spPr>
+        <p:txBody>
+          <a:bodyPr/>
+          <a:p/>
+        </p:txBody>
       </p:sp>
       <p:sp>
         <p:nvSpPr>
@@ -3076,6 +3088,10 @@
           </a:solidFill>
           <a:ln/>
         </p:spPr>
+        <p:txBody>
+          <a:bodyPr/>
+          <a:p/>
+        </p:txBody>
       </p:sp>
       <p:sp>
         <p:nvSpPr>
@@ -3098,6 +3114,10 @@
           </a:solidFill>
           <a:ln/>
         </p:spPr>
+        <p:txBody>
+          <a:bodyPr/>
+          <a:p/>
+        </p:txBody>
       </p:sp>
       <p:sp>
         <p:nvSpPr>
@@ -3514,6 +3534,10 @@
             </a:outerShdw>
           </a:effectLst>
         </p:spPr>
+        <p:txBody>
+          <a:bodyPr/>
+          <a:p/>
+        </p:txBody>
       </p:sp>
       <p:sp>
         <p:nvSpPr>
@@ -3688,6 +3712,10 @@
             </a:outerShdw>
           </a:effectLst>
         </p:spPr>
+        <p:txBody>
+          <a:bodyPr/>
+          <a:p/>
+        </p:txBody>
       </p:sp>
       <p:sp>
         <p:nvSpPr>
@@ -4078,6 +4106,10 @@
             </a:outerShdw>
           </a:effectLst>
         </p:spPr>
+        <p:txBody>
+          <a:bodyPr/>
+          <a:p/>
+        </p:txBody>
       </p:sp>
       <p:sp>
         <p:nvSpPr>
@@ -4252,6 +4284,10 @@
             </a:outerShdw>
           </a:effectLst>
         </p:spPr>
+        <p:txBody>
+          <a:bodyPr/>
+          <a:p/>
+        </p:txBody>
       </p:sp>
       <p:sp>
         <p:nvSpPr>
@@ -4642,6 +4678,10 @@
             </a:outerShdw>
           </a:effectLst>
         </p:spPr>
+        <p:txBody>
+          <a:bodyPr/>
+          <a:p/>
+        </p:txBody>
       </p:sp>
       <p:sp>
         <p:nvSpPr>
@@ -4816,6 +4856,10 @@
             </a:outerShdw>
           </a:effectLst>
         </p:spPr>
+        <p:txBody>
+          <a:bodyPr/>
+          <a:p/>
+        </p:txBody>
       </p:sp>
       <p:sp>
         <p:nvSpPr>
@@ -5121,6 +5165,10 @@
           </a:solidFill>
           <a:ln/>
         </p:spPr>
+        <p:txBody>
+          <a:bodyPr/>
+          <a:p/>
+        </p:txBody>
       </p:sp>
       <p:sp>
         <p:nvSpPr>
@@ -5143,6 +5191,10 @@
           </a:solidFill>
           <a:ln/>
         </p:spPr>
+        <p:txBody>
+          <a:bodyPr/>
+          <a:p/>
+        </p:txBody>
       </p:sp>
       <p:sp>
         <p:nvSpPr>
@@ -5399,6 +5451,10 @@
             </a:outerShdw>
           </a:effectLst>
         </p:spPr>
+        <p:txBody>
+          <a:bodyPr/>
+          <a:p/>
+        </p:txBody>
       </p:sp>
       <p:sp>
         <p:nvSpPr>
@@ -5509,6 +5565,10 @@
             </a:outerShdw>
           </a:effectLst>
         </p:spPr>
+        <p:txBody>
+          <a:bodyPr/>
+          <a:p/>
+        </p:txBody>
       </p:sp>
       <p:sp>
         <p:nvSpPr>
@@ -5938,6 +5998,10 @@
             </a:outerShdw>
           </a:effectLst>
         </p:spPr>
+        <p:txBody>
+          <a:bodyPr/>
+          <a:p/>
+        </p:txBody>
       </p:sp>
       <p:sp>
         <p:nvSpPr>
@@ -6264,6 +6328,10 @@
             </a:outerShdw>
           </a:effectLst>
         </p:spPr>
+        <p:txBody>
+          <a:bodyPr/>
+          <a:p/>
+        </p:txBody>
       </p:sp>
       <p:sp>
         <p:nvSpPr>
@@ -6374,6 +6442,10 @@
             </a:outerShdw>
           </a:effectLst>
         </p:spPr>
+        <p:txBody>
+          <a:bodyPr/>
+          <a:p/>
+        </p:txBody>
       </p:sp>
       <p:sp>
         <p:nvSpPr>
@@ -6803,6 +6875,10 @@
             </a:outerShdw>
           </a:effectLst>
         </p:spPr>
+        <p:txBody>
+          <a:bodyPr/>
+          <a:p/>
+        </p:txBody>
       </p:sp>
       <p:sp>
         <p:nvSpPr>
@@ -7129,6 +7205,10 @@
             </a:outerShdw>
           </a:effectLst>
         </p:spPr>
+        <p:txBody>
+          <a:bodyPr/>
+          <a:p/>
+        </p:txBody>
       </p:sp>
       <p:sp>
         <p:nvSpPr>
@@ -7239,6 +7319,10 @@
             </a:outerShdw>
           </a:effectLst>
         </p:spPr>
+        <p:txBody>
+          <a:bodyPr/>
+          <a:p/>
+        </p:txBody>
       </p:sp>
       <p:sp>
         <p:nvSpPr>
@@ -7668,6 +7752,10 @@
             </a:outerShdw>
           </a:effectLst>
         </p:spPr>
+        <p:txBody>
+          <a:bodyPr/>
+          <a:p/>
+        </p:txBody>
       </p:sp>
       <p:sp>
         <p:nvSpPr>
@@ -7994,6 +8082,10 @@
             </a:outerShdw>
           </a:effectLst>
         </p:spPr>
+        <p:txBody>
+          <a:bodyPr/>
+          <a:p/>
+        </p:txBody>
       </p:sp>
       <p:sp>
         <p:nvSpPr>
@@ -8101,6 +8193,10 @@
             </a:outerShdw>
           </a:effectLst>
         </p:spPr>
+        <p:txBody>
+          <a:bodyPr/>
+          <a:p/>
+        </p:txBody>
       </p:sp>
       <p:sp>
         <p:nvSpPr>
@@ -8208,6 +8304,10 @@
             </a:outerShdw>
           </a:effectLst>
         </p:spPr>
+        <p:txBody>
+          <a:bodyPr/>
+          <a:p/>
+        </p:txBody>
       </p:sp>
       <p:sp>
         <p:nvSpPr>
@@ -8315,6 +8415,10 @@
             </a:outerShdw>
           </a:effectLst>
         </p:spPr>
+        <p:txBody>
+          <a:bodyPr/>
+          <a:p/>
+        </p:txBody>
       </p:sp>
       <p:sp>
         <p:nvSpPr>
@@ -8707,9 +8811,9 @@
               <a:buNone/>
             </a:pPr>
             <a:r>
-              <a:rPr lang="en-US" sz="1350" b="1" dirty="0">
-                <a:solidFill>
-                  <a:srgbClr val="005A63"/>
+              <a:rPr lang="en-US" sz="1350" b="0" dirty="0">
+                <a:solidFill>
+                  <a:srgbClr val="33444F"/>
                 </a:solidFill>
                 <a:latin typeface="Calibri" pitchFamily="34" charset="0"/>
                 <a:ea typeface="Calibri" pitchFamily="34" charset="-122"/>
@@ -8778,130 +8882,6 @@
               <a:t>E. PT enrollment only</a:t>
             </a:r>
             <a:endParaRPr lang="en-US" sz="1350" dirty="0"/>
-          </a:p>
-        </p:txBody>
-      </p:sp>
-      <p:sp>
-        <p:nvSpPr>
-          <p:cNvPr id="6" name="Shape 4"/>
-          <p:cNvSpPr/>
-          <p:nvPr/>
-        </p:nvSpPr>
-        <p:spPr>
-          <a:xfrm>
-            <a:off x="7201632" y="2395728"/>
-            <a:ext cx="4423136" cy="3246120"/>
-          </a:xfrm>
-          <a:prstGeom prst="roundRect">
-            <a:avLst>
-              <a:gd name="adj" fmla="val 2535"/>
-            </a:avLst>
-          </a:prstGeom>
-          <a:solidFill>
-            <a:srgbClr val="E0F2F4"/>
-          </a:solidFill>
-          <a:ln/>
-          <a:effectLst>
-            <a:outerShdw sx="100000" sy="100000" kx="0" ky="0" algn="bl" rotWithShape="0" blurRad="88900" dist="25400" dir="5400000">
-              <a:srgbClr val="22303C">
-                <a:alpha val="12000"/>
-              </a:srgbClr>
-            </a:outerShdw>
-          </a:effectLst>
-        </p:spPr>
-      </p:sp>
-      <p:sp>
-        <p:nvSpPr>
-          <p:cNvPr id="7" name="Text 5"/>
-          <p:cNvSpPr/>
-          <p:nvPr/>
-        </p:nvSpPr>
-        <p:spPr>
-          <a:xfrm>
-            <a:off x="7439376" y="2578608"/>
-            <a:ext cx="3965936" cy="457200"/>
-          </a:xfrm>
-          <a:prstGeom prst="rect">
-            <a:avLst/>
-          </a:prstGeom>
-          <a:noFill/>
-          <a:ln/>
-        </p:spPr>
-        <p:txBody>
-          <a:bodyPr wrap="square" lIns="0" tIns="0" rIns="0" bIns="0" rtlCol="0" anchor="ctr"/>
-          <a:lstStyle/>
-          <a:p>
-            <a:pPr indent="0" marL="0">
-              <a:buNone/>
-            </a:pPr>
-            <a:r>
-              <a:rPr lang="en-US" sz="1500" b="1" dirty="0">
-                <a:solidFill>
-                  <a:srgbClr val="00838F"/>
-                </a:solidFill>
-                <a:latin typeface="Calibri" pitchFamily="34" charset="0"/>
-                <a:ea typeface="Calibri" pitchFamily="34" charset="-122"/>
-                <a:cs typeface="Calibri" pitchFamily="34" charset="-120"/>
-              </a:rPr>
-              <a:t>ANSWER  </a:t>
-            </a:r>
-            <a:pPr indent="0" marL="0">
-              <a:buNone/>
-            </a:pPr>
-            <a:r>
-              <a:rPr lang="en-US" sz="1500" b="1" dirty="0">
-                <a:solidFill>
-                  <a:srgbClr val="1B2A38"/>
-                </a:solidFill>
-                <a:latin typeface="Calibri" pitchFamily="34" charset="0"/>
-                <a:ea typeface="Calibri" pitchFamily="34" charset="-122"/>
-                <a:cs typeface="Calibri" pitchFamily="34" charset="-120"/>
-              </a:rPr>
-              <a:t>B — Full validation</a:t>
-            </a:r>
-            <a:endParaRPr lang="en-US" sz="1500" dirty="0"/>
-          </a:p>
-        </p:txBody>
-      </p:sp>
-      <p:sp>
-        <p:nvSpPr>
-          <p:cNvPr id="8" name="Text 6"/>
-          <p:cNvSpPr/>
-          <p:nvPr/>
-        </p:nvSpPr>
-        <p:spPr>
-          <a:xfrm>
-            <a:off x="7439376" y="3127248"/>
-            <a:ext cx="3947648" cy="2377440"/>
-          </a:xfrm>
-          <a:prstGeom prst="rect">
-            <a:avLst/>
-          </a:prstGeom>
-          <a:noFill/>
-          <a:ln/>
-        </p:spPr>
-        <p:txBody>
-          <a:bodyPr wrap="square" lIns="0" tIns="0" rIns="0" bIns="0" rtlCol="0" anchor="t"/>
-          <a:lstStyle/>
-          <a:p>
-            <a:pPr algn="l" indent="0" marL="0">
-              <a:lnSpc>
-                <a:spcPct val="108000"/>
-              </a:lnSpc>
-              <a:buNone/>
-            </a:pPr>
-            <a:r>
-              <a:rPr lang="en-US" sz="1250" dirty="0">
-                <a:solidFill>
-                  <a:srgbClr val="33444F"/>
-                </a:solidFill>
-                <a:latin typeface="Calibri" pitchFamily="34" charset="0"/>
-                <a:ea typeface="Calibri" pitchFamily="34" charset="-122"/>
-                <a:cs typeface="Calibri" pitchFamily="34" charset="-120"/>
-              </a:rPr>
-              <a:t>LDTs require full validation; FDA-cleared assays require verification of the manufacturer’s claims.</a:t>
-            </a:r>
-            <a:endParaRPr lang="en-US" sz="1250" dirty="0"/>
           </a:p>
         </p:txBody>
       </p:sp>
@@ -9211,9 +9191,9 @@
               <a:buNone/>
             </a:pPr>
             <a:r>
-              <a:rPr lang="en-US" sz="1350" b="1" dirty="0">
-                <a:solidFill>
-                  <a:srgbClr val="005A63"/>
+              <a:rPr lang="en-US" sz="1350" b="0" dirty="0">
+                <a:solidFill>
+                  <a:srgbClr val="33444F"/>
                 </a:solidFill>
                 <a:latin typeface="Calibri" pitchFamily="34" charset="0"/>
                 <a:ea typeface="Calibri" pitchFamily="34" charset="-122"/>
@@ -9282,130 +9262,6 @@
               <a:t>E. Outsourced without oversight</a:t>
             </a:r>
             <a:endParaRPr lang="en-US" sz="1350" dirty="0"/>
-          </a:p>
-        </p:txBody>
-      </p:sp>
-      <p:sp>
-        <p:nvSpPr>
-          <p:cNvPr id="6" name="Shape 4"/>
-          <p:cNvSpPr/>
-          <p:nvPr/>
-        </p:nvSpPr>
-        <p:spPr>
-          <a:xfrm>
-            <a:off x="7201632" y="2395728"/>
-            <a:ext cx="4423136" cy="3246120"/>
-          </a:xfrm>
-          <a:prstGeom prst="roundRect">
-            <a:avLst>
-              <a:gd name="adj" fmla="val 2535"/>
-            </a:avLst>
-          </a:prstGeom>
-          <a:solidFill>
-            <a:srgbClr val="E0F2F4"/>
-          </a:solidFill>
-          <a:ln/>
-          <a:effectLst>
-            <a:outerShdw sx="100000" sy="100000" kx="0" ky="0" algn="bl" rotWithShape="0" blurRad="88900" dist="25400" dir="5400000">
-              <a:srgbClr val="22303C">
-                <a:alpha val="12000"/>
-              </a:srgbClr>
-            </a:outerShdw>
-          </a:effectLst>
-        </p:spPr>
-      </p:sp>
-      <p:sp>
-        <p:nvSpPr>
-          <p:cNvPr id="7" name="Text 5"/>
-          <p:cNvSpPr/>
-          <p:nvPr/>
-        </p:nvSpPr>
-        <p:spPr>
-          <a:xfrm>
-            <a:off x="7439376" y="2578608"/>
-            <a:ext cx="3965936" cy="457200"/>
-          </a:xfrm>
-          <a:prstGeom prst="rect">
-            <a:avLst/>
-          </a:prstGeom>
-          <a:noFill/>
-          <a:ln/>
-        </p:spPr>
-        <p:txBody>
-          <a:bodyPr wrap="square" lIns="0" tIns="0" rIns="0" bIns="0" rtlCol="0" anchor="ctr"/>
-          <a:lstStyle/>
-          <a:p>
-            <a:pPr indent="0" marL="0">
-              <a:buNone/>
-            </a:pPr>
-            <a:r>
-              <a:rPr lang="en-US" sz="1500" b="1" dirty="0">
-                <a:solidFill>
-                  <a:srgbClr val="00838F"/>
-                </a:solidFill>
-                <a:latin typeface="Calibri" pitchFamily="34" charset="0"/>
-                <a:ea typeface="Calibri" pitchFamily="34" charset="-122"/>
-                <a:cs typeface="Calibri" pitchFamily="34" charset="-120"/>
-              </a:rPr>
-              <a:t>ANSWER  </a:t>
-            </a:r>
-            <a:pPr indent="0" marL="0">
-              <a:buNone/>
-            </a:pPr>
-            <a:r>
-              <a:rPr lang="en-US" sz="1500" b="1" dirty="0">
-                <a:solidFill>
-                  <a:srgbClr val="1B2A38"/>
-                </a:solidFill>
-                <a:latin typeface="Calibri" pitchFamily="34" charset="0"/>
-                <a:ea typeface="Calibri" pitchFamily="34" charset="-122"/>
-                <a:cs typeface="Calibri" pitchFamily="34" charset="-120"/>
-              </a:rPr>
-              <a:t>B — Validated and version-controlled</a:t>
-            </a:r>
-            <a:endParaRPr lang="en-US" sz="1500" dirty="0"/>
-          </a:p>
-        </p:txBody>
-      </p:sp>
-      <p:sp>
-        <p:nvSpPr>
-          <p:cNvPr id="8" name="Text 6"/>
-          <p:cNvSpPr/>
-          <p:nvPr/>
-        </p:nvSpPr>
-        <p:spPr>
-          <a:xfrm>
-            <a:off x="7439376" y="3127248"/>
-            <a:ext cx="3947648" cy="2377440"/>
-          </a:xfrm>
-          <a:prstGeom prst="rect">
-            <a:avLst/>
-          </a:prstGeom>
-          <a:noFill/>
-          <a:ln/>
-        </p:spPr>
-        <p:txBody>
-          <a:bodyPr wrap="square" lIns="0" tIns="0" rIns="0" bIns="0" rtlCol="0" anchor="t"/>
-          <a:lstStyle/>
-          <a:p>
-            <a:pPr algn="l" indent="0" marL="0">
-              <a:lnSpc>
-                <a:spcPct val="108000"/>
-              </a:lnSpc>
-              <a:buNone/>
-            </a:pPr>
-            <a:r>
-              <a:rPr lang="en-US" sz="1250" dirty="0">
-                <a:solidFill>
-                  <a:srgbClr val="33444F"/>
-                </a:solidFill>
-                <a:latin typeface="Calibri" pitchFamily="34" charset="0"/>
-                <a:ea typeface="Calibri" pitchFamily="34" charset="-122"/>
-                <a:cs typeface="Calibri" pitchFamily="34" charset="-120"/>
-              </a:rPr>
-              <a:t>The pipeline materially affects results and must be validated, locked, and revalidated after significant changes.</a:t>
-            </a:r>
-            <a:endParaRPr lang="en-US" sz="1250" dirty="0"/>
           </a:p>
         </p:txBody>
       </p:sp>
@@ -9715,9 +9571,9 @@
               <a:buNone/>
             </a:pPr>
             <a:r>
-              <a:rPr lang="en-US" sz="1350" b="1" dirty="0">
-                <a:solidFill>
-                  <a:srgbClr val="005A63"/>
+              <a:rPr lang="en-US" sz="1350" b="0" dirty="0">
+                <a:solidFill>
+                  <a:srgbClr val="33444F"/>
                 </a:solidFill>
                 <a:latin typeface="Calibri" pitchFamily="34" charset="0"/>
                 <a:ea typeface="Calibri" pitchFamily="34" charset="-122"/>
@@ -9786,130 +9642,6 @@
               <a:t>E. Renal function</a:t>
             </a:r>
             <a:endParaRPr lang="en-US" sz="1350" dirty="0"/>
-          </a:p>
-        </p:txBody>
-      </p:sp>
-      <p:sp>
-        <p:nvSpPr>
-          <p:cNvPr id="6" name="Shape 4"/>
-          <p:cNvSpPr/>
-          <p:nvPr/>
-        </p:nvSpPr>
-        <p:spPr>
-          <a:xfrm>
-            <a:off x="7201632" y="2395728"/>
-            <a:ext cx="4423136" cy="3246120"/>
-          </a:xfrm>
-          <a:prstGeom prst="roundRect">
-            <a:avLst>
-              <a:gd name="adj" fmla="val 2535"/>
-            </a:avLst>
-          </a:prstGeom>
-          <a:solidFill>
-            <a:srgbClr val="E0F2F4"/>
-          </a:solidFill>
-          <a:ln/>
-          <a:effectLst>
-            <a:outerShdw sx="100000" sy="100000" kx="0" ky="0" algn="bl" rotWithShape="0" blurRad="88900" dist="25400" dir="5400000">
-              <a:srgbClr val="22303C">
-                <a:alpha val="12000"/>
-              </a:srgbClr>
-            </a:outerShdw>
-          </a:effectLst>
-        </p:spPr>
-      </p:sp>
-      <p:sp>
-        <p:nvSpPr>
-          <p:cNvPr id="7" name="Text 5"/>
-          <p:cNvSpPr/>
-          <p:nvPr/>
-        </p:nvSpPr>
-        <p:spPr>
-          <a:xfrm>
-            <a:off x="7439376" y="2578608"/>
-            <a:ext cx="3965936" cy="457200"/>
-          </a:xfrm>
-          <a:prstGeom prst="rect">
-            <a:avLst/>
-          </a:prstGeom>
-          <a:noFill/>
-          <a:ln/>
-        </p:spPr>
-        <p:txBody>
-          <a:bodyPr wrap="square" lIns="0" tIns="0" rIns="0" bIns="0" rtlCol="0" anchor="ctr"/>
-          <a:lstStyle/>
-          <a:p>
-            <a:pPr indent="0" marL="0">
-              <a:buNone/>
-            </a:pPr>
-            <a:r>
-              <a:rPr lang="en-US" sz="1500" b="1" dirty="0">
-                <a:solidFill>
-                  <a:srgbClr val="00838F"/>
-                </a:solidFill>
-                <a:latin typeface="Calibri" pitchFamily="34" charset="0"/>
-                <a:ea typeface="Calibri" pitchFamily="34" charset="-122"/>
-                <a:cs typeface="Calibri" pitchFamily="34" charset="-120"/>
-              </a:rPr>
-              <a:t>ANSWER  </a:t>
-            </a:r>
-            <a:pPr indent="0" marL="0">
-              <a:buNone/>
-            </a:pPr>
-            <a:r>
-              <a:rPr lang="en-US" sz="1500" b="1" dirty="0">
-                <a:solidFill>
-                  <a:srgbClr val="1B2A38"/>
-                </a:solidFill>
-                <a:latin typeface="Calibri" pitchFamily="34" charset="0"/>
-                <a:ea typeface="Calibri" pitchFamily="34" charset="-122"/>
-                <a:cs typeface="Calibri" pitchFamily="34" charset="-120"/>
-              </a:rPr>
-              <a:t>B — Depth of coverage/design</a:t>
-            </a:r>
-            <a:endParaRPr lang="en-US" sz="1500" dirty="0"/>
-          </a:p>
-        </p:txBody>
-      </p:sp>
-      <p:sp>
-        <p:nvSpPr>
-          <p:cNvPr id="8" name="Text 6"/>
-          <p:cNvSpPr/>
-          <p:nvPr/>
-        </p:nvSpPr>
-        <p:spPr>
-          <a:xfrm>
-            <a:off x="7439376" y="3127248"/>
-            <a:ext cx="3947648" cy="2377440"/>
-          </a:xfrm>
-          <a:prstGeom prst="rect">
-            <a:avLst/>
-          </a:prstGeom>
-          <a:noFill/>
-          <a:ln/>
-        </p:spPr>
-        <p:txBody>
-          <a:bodyPr wrap="square" lIns="0" tIns="0" rIns="0" bIns="0" rtlCol="0" anchor="t"/>
-          <a:lstStyle/>
-          <a:p>
-            <a:pPr algn="l" indent="0" marL="0">
-              <a:lnSpc>
-                <a:spcPct val="108000"/>
-              </a:lnSpc>
-              <a:buNone/>
-            </a:pPr>
-            <a:r>
-              <a:rPr lang="en-US" sz="1250" dirty="0">
-                <a:solidFill>
-                  <a:srgbClr val="33444F"/>
-                </a:solidFill>
-                <a:latin typeface="Calibri" pitchFamily="34" charset="0"/>
-                <a:ea typeface="Calibri" pitchFamily="34" charset="-122"/>
-                <a:cs typeface="Calibri" pitchFamily="34" charset="-120"/>
-              </a:rPr>
-              <a:t>Adequate, uniform coverage enables detection of low-allele-fraction variants; LoD is established in validation.</a:t>
-            </a:r>
-            <a:endParaRPr lang="en-US" sz="1250" dirty="0"/>
           </a:p>
         </p:txBody>
       </p:sp>
@@ -10219,9 +9951,9 @@
               <a:buNone/>
             </a:pPr>
             <a:r>
-              <a:rPr lang="en-US" sz="1350" b="1" dirty="0">
-                <a:solidFill>
-                  <a:srgbClr val="005A63"/>
+              <a:rPr lang="en-US" sz="1350" b="0" dirty="0">
+                <a:solidFill>
+                  <a:srgbClr val="33444F"/>
                 </a:solidFill>
                 <a:latin typeface="Calibri" pitchFamily="34" charset="0"/>
                 <a:ea typeface="Calibri" pitchFamily="34" charset="-122"/>
@@ -10290,130 +10022,6 @@
               <a:t>E. Lower the coverage threshold</a:t>
             </a:r>
             <a:endParaRPr lang="en-US" sz="1350" dirty="0"/>
-          </a:p>
-        </p:txBody>
-      </p:sp>
-      <p:sp>
-        <p:nvSpPr>
-          <p:cNvPr id="6" name="Shape 4"/>
-          <p:cNvSpPr/>
-          <p:nvPr/>
-        </p:nvSpPr>
-        <p:spPr>
-          <a:xfrm>
-            <a:off x="7201632" y="2395728"/>
-            <a:ext cx="4423136" cy="3246120"/>
-          </a:xfrm>
-          <a:prstGeom prst="roundRect">
-            <a:avLst>
-              <a:gd name="adj" fmla="val 2535"/>
-            </a:avLst>
-          </a:prstGeom>
-          <a:solidFill>
-            <a:srgbClr val="E0F2F4"/>
-          </a:solidFill>
-          <a:ln/>
-          <a:effectLst>
-            <a:outerShdw sx="100000" sy="100000" kx="0" ky="0" algn="bl" rotWithShape="0" blurRad="88900" dist="25400" dir="5400000">
-              <a:srgbClr val="22303C">
-                <a:alpha val="12000"/>
-              </a:srgbClr>
-            </a:outerShdw>
-          </a:effectLst>
-        </p:spPr>
-      </p:sp>
-      <p:sp>
-        <p:nvSpPr>
-          <p:cNvPr id="7" name="Text 5"/>
-          <p:cNvSpPr/>
-          <p:nvPr/>
-        </p:nvSpPr>
-        <p:spPr>
-          <a:xfrm>
-            <a:off x="7439376" y="2578608"/>
-            <a:ext cx="3965936" cy="457200"/>
-          </a:xfrm>
-          <a:prstGeom prst="rect">
-            <a:avLst/>
-          </a:prstGeom>
-          <a:noFill/>
-          <a:ln/>
-        </p:spPr>
-        <p:txBody>
-          <a:bodyPr wrap="square" lIns="0" tIns="0" rIns="0" bIns="0" rtlCol="0" anchor="ctr"/>
-          <a:lstStyle/>
-          <a:p>
-            <a:pPr indent="0" marL="0">
-              <a:buNone/>
-            </a:pPr>
-            <a:r>
-              <a:rPr lang="en-US" sz="1500" b="1" dirty="0">
-                <a:solidFill>
-                  <a:srgbClr val="00838F"/>
-                </a:solidFill>
-                <a:latin typeface="Calibri" pitchFamily="34" charset="0"/>
-                <a:ea typeface="Calibri" pitchFamily="34" charset="-122"/>
-                <a:cs typeface="Calibri" pitchFamily="34" charset="-120"/>
-              </a:rPr>
-              <a:t>ANSWER  </a:t>
-            </a:r>
-            <a:pPr indent="0" marL="0">
-              <a:buNone/>
-            </a:pPr>
-            <a:r>
-              <a:rPr lang="en-US" sz="1500" b="1" dirty="0">
-                <a:solidFill>
-                  <a:srgbClr val="1B2A38"/>
-                </a:solidFill>
-                <a:latin typeface="Calibri" pitchFamily="34" charset="0"/>
-                <a:ea typeface="Calibri" pitchFamily="34" charset="-122"/>
-                <a:cs typeface="Calibri" pitchFamily="34" charset="-120"/>
-              </a:rPr>
-              <a:t>B — Revalidate and document</a:t>
-            </a:r>
-            <a:endParaRPr lang="en-US" sz="1500" dirty="0"/>
-          </a:p>
-        </p:txBody>
-      </p:sp>
-      <p:sp>
-        <p:nvSpPr>
-          <p:cNvPr id="8" name="Text 6"/>
-          <p:cNvSpPr/>
-          <p:nvPr/>
-        </p:nvSpPr>
-        <p:spPr>
-          <a:xfrm>
-            <a:off x="7439376" y="3127248"/>
-            <a:ext cx="3947648" cy="2377440"/>
-          </a:xfrm>
-          <a:prstGeom prst="rect">
-            <a:avLst/>
-          </a:prstGeom>
-          <a:noFill/>
-          <a:ln/>
-        </p:spPr>
-        <p:txBody>
-          <a:bodyPr wrap="square" lIns="0" tIns="0" rIns="0" bIns="0" rtlCol="0" anchor="t"/>
-          <a:lstStyle/>
-          <a:p>
-            <a:pPr algn="l" indent="0" marL="0">
-              <a:lnSpc>
-                <a:spcPct val="108000"/>
-              </a:lnSpc>
-              <a:buNone/>
-            </a:pPr>
-            <a:r>
-              <a:rPr lang="en-US" sz="1250" dirty="0">
-                <a:solidFill>
-                  <a:srgbClr val="33444F"/>
-                </a:solidFill>
-                <a:latin typeface="Calibri" pitchFamily="34" charset="0"/>
-                <a:ea typeface="Calibri" pitchFamily="34" charset="-122"/>
-                <a:cs typeface="Calibri" pitchFamily="34" charset="-120"/>
-              </a:rPr>
-              <a:t>Significant pipeline changes require revalidation against reference materials before clinical use.</a:t>
-            </a:r>
-            <a:endParaRPr lang="en-US" sz="1250" dirty="0"/>
           </a:p>
         </p:txBody>
       </p:sp>
@@ -10654,6 +10262,10 @@
           </a:solidFill>
           <a:ln/>
         </p:spPr>
+        <p:txBody>
+          <a:bodyPr/>
+          <a:p/>
+        </p:txBody>
       </p:sp>
       <p:sp>
         <p:nvSpPr>
@@ -10681,6 +10293,10 @@
             </a:outerShdw>
           </a:effectLst>
         </p:spPr>
+        <p:txBody>
+          <a:bodyPr/>
+          <a:p/>
+        </p:txBody>
       </p:sp>
       <p:sp>
         <p:nvSpPr>
@@ -10781,6 +10397,10 @@
           </a:solidFill>
           <a:ln/>
         </p:spPr>
+        <p:txBody>
+          <a:bodyPr/>
+          <a:p/>
+        </p:txBody>
       </p:sp>
       <p:sp>
         <p:nvSpPr>
@@ -10808,6 +10428,10 @@
             </a:outerShdw>
           </a:effectLst>
         </p:spPr>
+        <p:txBody>
+          <a:bodyPr/>
+          <a:p/>
+        </p:txBody>
       </p:sp>
       <p:sp>
         <p:nvSpPr>
@@ -10908,6 +10532,10 @@
           </a:solidFill>
           <a:ln/>
         </p:spPr>
+        <p:txBody>
+          <a:bodyPr/>
+          <a:p/>
+        </p:txBody>
       </p:sp>
       <p:sp>
         <p:nvSpPr>
@@ -10935,6 +10563,10 @@
             </a:outerShdw>
           </a:effectLst>
         </p:spPr>
+        <p:txBody>
+          <a:bodyPr/>
+          <a:p/>
+        </p:txBody>
       </p:sp>
       <p:sp>
         <p:nvSpPr>
@@ -11035,6 +10667,10 @@
           </a:solidFill>
           <a:ln/>
         </p:spPr>
+        <p:txBody>
+          <a:bodyPr/>
+          <a:p/>
+        </p:txBody>
       </p:sp>
       <p:sp>
         <p:nvSpPr>
@@ -11062,6 +10698,10 @@
             </a:outerShdw>
           </a:effectLst>
         </p:spPr>
+        <p:txBody>
+          <a:bodyPr/>
+          <a:p/>
+        </p:txBody>
       </p:sp>
       <p:sp>
         <p:nvSpPr>
@@ -11162,6 +10802,10 @@
           </a:solidFill>
           <a:ln/>
         </p:spPr>
+        <p:txBody>
+          <a:bodyPr/>
+          <a:p/>
+        </p:txBody>
       </p:sp>
       <p:sp>
         <p:nvSpPr>
@@ -11189,6 +10833,10 @@
             </a:outerShdw>
           </a:effectLst>
         </p:spPr>
+        <p:txBody>
+          <a:bodyPr/>
+          <a:p/>
+        </p:txBody>
       </p:sp>
       <p:sp>
         <p:nvSpPr>
@@ -11672,6 +11320,1982 @@
 </p:sld>
 </file>
 
+<file path=ppt/slides/slide26.xml><?xml version="1.0" encoding="utf-8"?>
+<p:sld xmlns:a="http://schemas.openxmlformats.org/drawingml/2006/main" xmlns:p="http://schemas.openxmlformats.org/presentationml/2006/main" xmlns:r="http://schemas.openxmlformats.org/officeDocument/2006/relationships">
+  <p:cSld>
+    <p:spTree>
+      <p:nvGrpSpPr>
+        <p:cNvPr id="1" name=""/>
+        <p:cNvGrpSpPr/>
+        <p:nvPr/>
+      </p:nvGrpSpPr>
+      <p:grpSpPr/>
+      <p:sp>
+        <p:nvSpPr>
+          <p:cNvPr id="2" name="Text 0"/>
+          <p:cNvSpPr/>
+          <p:nvPr/>
+        </p:nvSpPr>
+        <p:spPr>
+          <a:xfrm>
+            <a:off x="566928" y="329184"/>
+            <a:ext cx="10515600" cy="310896"/>
+          </a:xfrm>
+          <a:prstGeom prst="rect">
+            <a:avLst/>
+          </a:prstGeom>
+          <a:noFill/>
+          <a:ln/>
+        </p:spPr>
+        <p:txBody>
+          <a:bodyPr wrap="square" lIns="0" tIns="0" rIns="0" bIns="0" rtlCol="0" anchor="ctr"/>
+          <a:lstStyle/>
+          <a:p>
+            <a:pPr algn="l" indent="0" marL="0">
+              <a:buNone/>
+            </a:pPr>
+            <a:r>
+              <a:rPr lang="en-US" sz="1100" b="1" spc="150" kern="0" dirty="0">
+                <a:solidFill>
+                  <a:srgbClr val="00838F"/>
+                </a:solidFill>
+                <a:latin typeface="Calibri" pitchFamily="34" charset="0"/>
+                <a:ea typeface="Calibri" pitchFamily="34" charset="-122"/>
+                <a:cs typeface="Calibri" pitchFamily="34" charset="-120"/>
+              </a:rPr>
+              <a:t>MOLECULAR &amp; CYTOGENETICS   ·   BOARD REVIEW  ·  Q4</a:t>
+            </a:r>
+            <a:endParaRPr lang="en-US" sz="1100" dirty="0"/>
+          </a:p>
+        </p:txBody>
+      </p:sp>
+      <p:sp>
+        <p:nvSpPr>
+          <p:cNvPr id="3" name="Text 1"/>
+          <p:cNvSpPr/>
+          <p:nvPr/>
+        </p:nvSpPr>
+        <p:spPr>
+          <a:xfrm>
+            <a:off x="566928" y="713232"/>
+            <a:ext cx="11064240" cy="749808"/>
+          </a:xfrm>
+          <a:prstGeom prst="rect">
+            <a:avLst/>
+          </a:prstGeom>
+          <a:noFill/>
+          <a:ln/>
+        </p:spPr>
+        <p:txBody>
+          <a:bodyPr wrap="square" lIns="0" tIns="0" rIns="0" bIns="0" rtlCol="0" anchor="ctr"/>
+          <a:lstStyle/>
+          <a:p>
+            <a:pPr algn="l" indent="0" marL="0">
+              <a:buNone/>
+            </a:pPr>
+            <a:r>
+              <a:rPr lang="en-US" sz="2600" b="1" dirty="0">
+                <a:solidFill>
+                  <a:srgbClr val="0E3A5F"/>
+                </a:solidFill>
+                <a:latin typeface="Calibri" pitchFamily="34" charset="0"/>
+                <a:ea typeface="Calibri" pitchFamily="34" charset="-122"/>
+                <a:cs typeface="Calibri" pitchFamily="34" charset="-120"/>
+              </a:rPr>
+              <a:t>Board-Style Review</a:t>
+            </a:r>
+            <a:endParaRPr lang="en-US" sz="2600" dirty="0"/>
+          </a:p>
+        </p:txBody>
+      </p:sp>
+      <p:sp>
+        <p:nvSpPr>
+          <p:cNvPr id="4" name="Text 2"/>
+          <p:cNvSpPr/>
+          <p:nvPr/>
+        </p:nvSpPr>
+        <p:spPr>
+          <a:xfrm>
+            <a:off x="566928" y="1417320"/>
+            <a:ext cx="11057839" cy="914400"/>
+          </a:xfrm>
+          <a:prstGeom prst="rect">
+            <a:avLst/>
+          </a:prstGeom>
+          <a:noFill/>
+          <a:ln/>
+        </p:spPr>
+        <p:txBody>
+          <a:bodyPr wrap="square" lIns="0" tIns="0" rIns="0" bIns="0" rtlCol="0" anchor="t"/>
+          <a:lstStyle/>
+          <a:p>
+            <a:pPr algn="l" indent="0" marL="0">
+              <a:lnSpc>
+                <a:spcPct val="105000"/>
+              </a:lnSpc>
+              <a:buNone/>
+            </a:pPr>
+            <a:r>
+              <a:rPr lang="en-US" sz="1450" b="1" dirty="0">
+                <a:solidFill>
+                  <a:srgbClr val="1B2A38"/>
+                </a:solidFill>
+                <a:latin typeface="Calibri" pitchFamily="34" charset="0"/>
+                <a:ea typeface="Calibri" pitchFamily="34" charset="-122"/>
+                <a:cs typeface="Calibri" pitchFamily="34" charset="-120"/>
+              </a:rPr>
+              <a:t>After a major variant-caller software upgrade, the laboratory should:</a:t>
+            </a:r>
+            <a:endParaRPr lang="en-US" sz="1450" dirty="0"/>
+          </a:p>
+        </p:txBody>
+      </p:sp>
+      <p:sp>
+        <p:nvSpPr>
+          <p:cNvPr id="5" name="Text 3"/>
+          <p:cNvSpPr/>
+          <p:nvPr/>
+        </p:nvSpPr>
+        <p:spPr>
+          <a:xfrm>
+            <a:off x="658368" y="2395728"/>
+            <a:ext cx="6192390" cy="3017520"/>
+          </a:xfrm>
+          <a:prstGeom prst="rect">
+            <a:avLst/>
+          </a:prstGeom>
+          <a:noFill/>
+          <a:ln/>
+        </p:spPr>
+        <p:txBody>
+          <a:bodyPr wrap="square" lIns="0" tIns="0" rIns="0" bIns="0" rtlCol="0" anchor="t"/>
+          <a:lstStyle/>
+          <a:p>
+            <a:pPr algn="l" indent="0" marL="0">
+              <a:spcAft>
+                <a:spcPts val="600"/>
+              </a:spcAft>
+              <a:buNone/>
+            </a:pPr>
+            <a:r>
+              <a:rPr lang="en-US" sz="1350" dirty="0">
+                <a:solidFill>
+                  <a:srgbClr val="33444F"/>
+                </a:solidFill>
+                <a:latin typeface="Calibri" pitchFamily="34" charset="0"/>
+                <a:ea typeface="Calibri" pitchFamily="34" charset="-122"/>
+                <a:cs typeface="Calibri" pitchFamily="34" charset="-120"/>
+              </a:rPr>
+              <a:t>A. Report immediately</a:t>
+            </a:r>
+            <a:endParaRPr lang="en-US" sz="1350" dirty="0"/>
+          </a:p>
+          <a:p>
+            <a:pPr algn="l" indent="0" marL="0">
+              <a:spcAft>
+                <a:spcPts val="600"/>
+              </a:spcAft>
+              <a:buNone/>
+            </a:pPr>
+            <a:r>
+              <a:rPr lang="en-US" sz="1350" b="1" dirty="0">
+                <a:solidFill>
+                  <a:srgbClr val="005A63"/>
+                </a:solidFill>
+                <a:latin typeface="Calibri" pitchFamily="34" charset="0"/>
+                <a:ea typeface="Calibri" pitchFamily="34" charset="-122"/>
+                <a:cs typeface="Calibri" pitchFamily="34" charset="-120"/>
+              </a:rPr>
+              <a:t>B. Revalidate and document before clinical reporting</a:t>
+            </a:r>
+            <a:endParaRPr lang="en-US" sz="1350" dirty="0"/>
+          </a:p>
+          <a:p>
+            <a:pPr algn="l" indent="0" marL="0">
+              <a:spcAft>
+                <a:spcPts val="600"/>
+              </a:spcAft>
+              <a:buNone/>
+            </a:pPr>
+            <a:r>
+              <a:rPr lang="en-US" sz="1350" dirty="0">
+                <a:solidFill>
+                  <a:srgbClr val="33444F"/>
+                </a:solidFill>
+                <a:latin typeface="Calibri" pitchFamily="34" charset="0"/>
+                <a:ea typeface="Calibri" pitchFamily="34" charset="-122"/>
+                <a:cs typeface="Calibri" pitchFamily="34" charset="-120"/>
+              </a:rPr>
+              <a:t>C. Use it only for research forever</a:t>
+            </a:r>
+            <a:endParaRPr lang="en-US" sz="1350" dirty="0"/>
+          </a:p>
+          <a:p>
+            <a:pPr algn="l" indent="0" marL="0">
+              <a:spcAft>
+                <a:spcPts val="600"/>
+              </a:spcAft>
+              <a:buNone/>
+            </a:pPr>
+            <a:r>
+              <a:rPr lang="en-US" sz="1350" dirty="0">
+                <a:solidFill>
+                  <a:srgbClr val="33444F"/>
+                </a:solidFill>
+                <a:latin typeface="Calibri" pitchFamily="34" charset="0"/>
+                <a:ea typeface="Calibri" pitchFamily="34" charset="-122"/>
+                <a:cs typeface="Calibri" pitchFamily="34" charset="-120"/>
+              </a:rPr>
+              <a:t>D. Avoid documentation</a:t>
+            </a:r>
+            <a:endParaRPr lang="en-US" sz="1350" dirty="0"/>
+          </a:p>
+          <a:p>
+            <a:pPr algn="l" indent="0" marL="0">
+              <a:spcAft>
+                <a:spcPts val="600"/>
+              </a:spcAft>
+              <a:buNone/>
+            </a:pPr>
+            <a:r>
+              <a:rPr lang="en-US" sz="1350" dirty="0">
+                <a:solidFill>
+                  <a:srgbClr val="33444F"/>
+                </a:solidFill>
+                <a:latin typeface="Calibri" pitchFamily="34" charset="0"/>
+                <a:ea typeface="Calibri" pitchFamily="34" charset="-122"/>
+                <a:cs typeface="Calibri" pitchFamily="34" charset="-120"/>
+              </a:rPr>
+              <a:t>E. Lower the coverage threshold</a:t>
+            </a:r>
+            <a:endParaRPr lang="en-US" sz="1350" dirty="0"/>
+          </a:p>
+        </p:txBody>
+      </p:sp>
+      <p:sp>
+        <p:nvSpPr>
+          <p:cNvPr id="6" name="Shape 4"/>
+          <p:cNvSpPr/>
+          <p:nvPr/>
+        </p:nvSpPr>
+        <p:spPr>
+          <a:xfrm>
+            <a:off x="7201632" y="2395728"/>
+            <a:ext cx="4423136" cy="3246120"/>
+          </a:xfrm>
+          <a:prstGeom prst="roundRect">
+            <a:avLst>
+              <a:gd name="adj" fmla="val 2535"/>
+            </a:avLst>
+          </a:prstGeom>
+          <a:solidFill>
+            <a:srgbClr val="E0F2F4"/>
+          </a:solidFill>
+          <a:ln/>
+          <a:effectLst>
+            <a:outerShdw sx="100000" sy="100000" kx="0" ky="0" algn="bl" rotWithShape="0" blurRad="88900" dist="25400" dir="5400000">
+              <a:srgbClr val="22303C">
+                <a:alpha val="12000"/>
+              </a:srgbClr>
+            </a:outerShdw>
+          </a:effectLst>
+        </p:spPr>
+        <p:txBody>
+          <a:bodyPr/>
+          <a:p/>
+        </p:txBody>
+      </p:sp>
+      <p:sp>
+        <p:nvSpPr>
+          <p:cNvPr id="7" name="Text 5"/>
+          <p:cNvSpPr/>
+          <p:nvPr/>
+        </p:nvSpPr>
+        <p:spPr>
+          <a:xfrm>
+            <a:off x="7439376" y="2578608"/>
+            <a:ext cx="3965936" cy="457200"/>
+          </a:xfrm>
+          <a:prstGeom prst="rect">
+            <a:avLst/>
+          </a:prstGeom>
+          <a:noFill/>
+          <a:ln/>
+        </p:spPr>
+        <p:txBody>
+          <a:bodyPr wrap="square" lIns="0" tIns="0" rIns="0" bIns="0" rtlCol="0" anchor="ctr"/>
+          <a:lstStyle/>
+          <a:p>
+            <a:pPr indent="0" marL="0">
+              <a:buNone/>
+            </a:pPr>
+            <a:r>
+              <a:rPr lang="en-US" sz="1500" b="1" dirty="0">
+                <a:solidFill>
+                  <a:srgbClr val="00838F"/>
+                </a:solidFill>
+                <a:latin typeface="Calibri" pitchFamily="34" charset="0"/>
+                <a:ea typeface="Calibri" pitchFamily="34" charset="-122"/>
+                <a:cs typeface="Calibri" pitchFamily="34" charset="-120"/>
+              </a:rPr>
+              <a:t>ANSWER  </a:t>
+            </a:r>
+            <a:pPr indent="0" marL="0">
+              <a:buNone/>
+            </a:pPr>
+            <a:r>
+              <a:rPr lang="en-US" sz="1500" b="1" dirty="0">
+                <a:solidFill>
+                  <a:srgbClr val="1B2A38"/>
+                </a:solidFill>
+                <a:latin typeface="Calibri" pitchFamily="34" charset="0"/>
+                <a:ea typeface="Calibri" pitchFamily="34" charset="-122"/>
+                <a:cs typeface="Calibri" pitchFamily="34" charset="-120"/>
+              </a:rPr>
+              <a:t>B — Revalidate and document</a:t>
+            </a:r>
+            <a:endParaRPr lang="en-US" sz="1500" dirty="0"/>
+          </a:p>
+        </p:txBody>
+      </p:sp>
+      <p:sp>
+        <p:nvSpPr>
+          <p:cNvPr id="8" name="Text 6"/>
+          <p:cNvSpPr/>
+          <p:nvPr/>
+        </p:nvSpPr>
+        <p:spPr>
+          <a:xfrm>
+            <a:off x="7439376" y="3127248"/>
+            <a:ext cx="3947648" cy="2377440"/>
+          </a:xfrm>
+          <a:prstGeom prst="rect">
+            <a:avLst/>
+          </a:prstGeom>
+          <a:noFill/>
+          <a:ln/>
+        </p:spPr>
+        <p:txBody>
+          <a:bodyPr wrap="square" lIns="0" tIns="0" rIns="0" bIns="0" rtlCol="0" anchor="t"/>
+          <a:lstStyle/>
+          <a:p>
+            <a:pPr algn="l" indent="0" marL="0">
+              <a:lnSpc>
+                <a:spcPct val="108000"/>
+              </a:lnSpc>
+              <a:buNone/>
+            </a:pPr>
+            <a:r>
+              <a:rPr lang="en-US" sz="1250" dirty="0">
+                <a:solidFill>
+                  <a:srgbClr val="33444F"/>
+                </a:solidFill>
+                <a:latin typeface="Calibri" pitchFamily="34" charset="0"/>
+                <a:ea typeface="Calibri" pitchFamily="34" charset="-122"/>
+                <a:cs typeface="Calibri" pitchFamily="34" charset="-120"/>
+              </a:rPr>
+              <a:t>Significant pipeline changes require revalidation against reference materials before clinical use.</a:t>
+            </a:r>
+            <a:endParaRPr lang="en-US" sz="1250" dirty="0"/>
+          </a:p>
+        </p:txBody>
+      </p:sp>
+      <p:sp>
+        <p:nvSpPr>
+          <p:cNvPr id="9" name="Text 7"/>
+          <p:cNvSpPr/>
+          <p:nvPr/>
+        </p:nvSpPr>
+        <p:spPr>
+          <a:xfrm>
+            <a:off x="566928" y="6473952"/>
+            <a:ext cx="7772400" cy="274320"/>
+          </a:xfrm>
+          <a:prstGeom prst="rect">
+            <a:avLst/>
+          </a:prstGeom>
+          <a:noFill/>
+          <a:ln/>
+        </p:spPr>
+        <p:txBody>
+          <a:bodyPr wrap="square" lIns="0" tIns="0" rIns="0" bIns="0" rtlCol="0" anchor="ctr"/>
+          <a:lstStyle/>
+          <a:p>
+            <a:pPr algn="l" indent="0" marL="0">
+              <a:buNone/>
+            </a:pPr>
+            <a:r>
+              <a:rPr lang="en-US" sz="850" dirty="0">
+                <a:solidFill>
+                  <a:srgbClr val="9AA8B4"/>
+                </a:solidFill>
+                <a:latin typeface="Calibri" pitchFamily="34" charset="0"/>
+                <a:ea typeface="Calibri" pitchFamily="34" charset="-122"/>
+                <a:cs typeface="Calibri" pitchFamily="34" charset="-120"/>
+              </a:rPr>
+              <a:t>Makassed General Hospital  ·  Department of Laboratory Medicine</a:t>
+            </a:r>
+            <a:endParaRPr lang="en-US" sz="850" dirty="0"/>
+          </a:p>
+        </p:txBody>
+      </p:sp>
+      <p:sp>
+        <p:nvSpPr>
+          <p:cNvPr id="10" name="Text 8"/>
+          <p:cNvSpPr/>
+          <p:nvPr/>
+        </p:nvSpPr>
+        <p:spPr>
+          <a:xfrm>
+            <a:off x="9814255" y="6473952"/>
+            <a:ext cx="1828800" cy="274320"/>
+          </a:xfrm>
+          <a:prstGeom prst="rect">
+            <a:avLst/>
+          </a:prstGeom>
+          <a:noFill/>
+          <a:ln/>
+        </p:spPr>
+        <p:txBody>
+          <a:bodyPr wrap="square" lIns="0" tIns="0" rIns="0" bIns="0" rtlCol="0" anchor="ctr"/>
+          <a:lstStyle/>
+          <a:p>
+            <a:pPr algn="r" indent="0" marL="0">
+              <a:buNone/>
+            </a:pPr>
+            <a:r>
+              <a:rPr lang="en-US" sz="850" dirty="0">
+                <a:solidFill>
+                  <a:srgbClr val="9AA8B4"/>
+                </a:solidFill>
+                <a:latin typeface="Calibri" pitchFamily="34" charset="0"/>
+                <a:ea typeface="Calibri" pitchFamily="34" charset="-122"/>
+                <a:cs typeface="Calibri" pitchFamily="34" charset="-120"/>
+              </a:rPr>
+              <a:t>CP Lecture Series</a:t>
+            </a:r>
+            <a:pPr algn="r" indent="0" marL="0">
+              <a:buNone/>
+            </a:pPr>
+            <a:r>
+              <a:rPr lang="en-US" sz="850" dirty="0">
+                <a:solidFill>
+                  <a:srgbClr val="DCE4EC"/>
+                </a:solidFill>
+                <a:latin typeface="Calibri" pitchFamily="34" charset="0"/>
+                <a:ea typeface="Calibri" pitchFamily="34" charset="-122"/>
+                <a:cs typeface="Calibri" pitchFamily="34" charset="-120"/>
+              </a:rPr>
+              <a:t>   ·   </a:t>
+            </a:r>
+            <a:pPr algn="r" indent="0" marL="0">
+              <a:buNone/>
+            </a:pPr>
+            <a:r>
+              <a:rPr lang="en-US" sz="850" b="1" dirty="0">
+                <a:solidFill>
+                  <a:srgbClr val="00838F"/>
+                </a:solidFill>
+                <a:latin typeface="Calibri" pitchFamily="34" charset="0"/>
+                <a:ea typeface="Calibri" pitchFamily="34" charset="-122"/>
+                <a:cs typeface="Calibri" pitchFamily="34" charset="-120"/>
+              </a:rPr>
+              <a:t>20</a:t>
+            </a:r>
+            <a:endParaRPr lang="en-US" sz="850" dirty="0"/>
+          </a:p>
+        </p:txBody>
+      </p:sp>
+    </p:spTree>
+  </p:cSld>
+  <p:clrMapOvr>
+    <a:masterClrMapping/>
+  </p:clrMapOvr>
+</p:sld>
+</file>
+
+<file path=ppt/slides/slide27.xml><?xml version="1.0" encoding="utf-8"?>
+<p:sld xmlns:a="http://schemas.openxmlformats.org/drawingml/2006/main" xmlns:p="http://schemas.openxmlformats.org/presentationml/2006/main" xmlns:r="http://schemas.openxmlformats.org/officeDocument/2006/relationships">
+  <p:cSld>
+    <p:spTree>
+      <p:nvGrpSpPr>
+        <p:cNvPr id="1" name=""/>
+        <p:cNvGrpSpPr/>
+        <p:nvPr/>
+      </p:nvGrpSpPr>
+      <p:grpSpPr/>
+      <p:sp>
+        <p:nvSpPr>
+          <p:cNvPr id="2" name="Text 0"/>
+          <p:cNvSpPr/>
+          <p:nvPr/>
+        </p:nvSpPr>
+        <p:spPr>
+          <a:xfrm>
+            <a:off x="566928" y="329184"/>
+            <a:ext cx="10515600" cy="310896"/>
+          </a:xfrm>
+          <a:prstGeom prst="rect">
+            <a:avLst/>
+          </a:prstGeom>
+          <a:noFill/>
+          <a:ln/>
+        </p:spPr>
+        <p:txBody>
+          <a:bodyPr wrap="square" lIns="0" tIns="0" rIns="0" bIns="0" rtlCol="0" anchor="ctr"/>
+          <a:lstStyle/>
+          <a:p>
+            <a:pPr algn="l" indent="0" marL="0">
+              <a:buNone/>
+            </a:pPr>
+            <a:r>
+              <a:rPr lang="en-US" sz="1100" b="1" spc="150" kern="0" dirty="0">
+                <a:solidFill>
+                  <a:srgbClr val="00838F"/>
+                </a:solidFill>
+                <a:latin typeface="Calibri" pitchFamily="34" charset="0"/>
+                <a:ea typeface="Calibri" pitchFamily="34" charset="-122"/>
+                <a:cs typeface="Calibri" pitchFamily="34" charset="-120"/>
+              </a:rPr>
+              <a:t>MOLECULAR &amp; CYTOGENETICS   ·   BOARD REVIEW  ·  Q3</a:t>
+            </a:r>
+            <a:endParaRPr lang="en-US" sz="1100" dirty="0"/>
+          </a:p>
+        </p:txBody>
+      </p:sp>
+      <p:sp>
+        <p:nvSpPr>
+          <p:cNvPr id="3" name="Text 1"/>
+          <p:cNvSpPr/>
+          <p:nvPr/>
+        </p:nvSpPr>
+        <p:spPr>
+          <a:xfrm>
+            <a:off x="566928" y="713232"/>
+            <a:ext cx="11064240" cy="749808"/>
+          </a:xfrm>
+          <a:prstGeom prst="rect">
+            <a:avLst/>
+          </a:prstGeom>
+          <a:noFill/>
+          <a:ln/>
+        </p:spPr>
+        <p:txBody>
+          <a:bodyPr wrap="square" lIns="0" tIns="0" rIns="0" bIns="0" rtlCol="0" anchor="ctr"/>
+          <a:lstStyle/>
+          <a:p>
+            <a:pPr algn="l" indent="0" marL="0">
+              <a:buNone/>
+            </a:pPr>
+            <a:r>
+              <a:rPr lang="en-US" sz="2600" b="1" dirty="0">
+                <a:solidFill>
+                  <a:srgbClr val="0E3A5F"/>
+                </a:solidFill>
+                <a:latin typeface="Calibri" pitchFamily="34" charset="0"/>
+                <a:ea typeface="Calibri" pitchFamily="34" charset="-122"/>
+                <a:cs typeface="Calibri" pitchFamily="34" charset="-120"/>
+              </a:rPr>
+              <a:t>Board-Style Review</a:t>
+            </a:r>
+            <a:endParaRPr lang="en-US" sz="2600" dirty="0"/>
+          </a:p>
+        </p:txBody>
+      </p:sp>
+      <p:sp>
+        <p:nvSpPr>
+          <p:cNvPr id="4" name="Text 2"/>
+          <p:cNvSpPr/>
+          <p:nvPr/>
+        </p:nvSpPr>
+        <p:spPr>
+          <a:xfrm>
+            <a:off x="566928" y="1417320"/>
+            <a:ext cx="11057839" cy="914400"/>
+          </a:xfrm>
+          <a:prstGeom prst="rect">
+            <a:avLst/>
+          </a:prstGeom>
+          <a:noFill/>
+          <a:ln/>
+        </p:spPr>
+        <p:txBody>
+          <a:bodyPr wrap="square" lIns="0" tIns="0" rIns="0" bIns="0" rtlCol="0" anchor="t"/>
+          <a:lstStyle/>
+          <a:p>
+            <a:pPr algn="l" indent="0" marL="0">
+              <a:lnSpc>
+                <a:spcPct val="105000"/>
+              </a:lnSpc>
+              <a:buNone/>
+            </a:pPr>
+            <a:r>
+              <a:rPr lang="en-US" sz="1450" b="1" dirty="0">
+                <a:solidFill>
+                  <a:srgbClr val="1B2A38"/>
+                </a:solidFill>
+                <a:latin typeface="Calibri" pitchFamily="34" charset="0"/>
+                <a:ea typeface="Calibri" pitchFamily="34" charset="-122"/>
+                <a:cs typeface="Calibri" pitchFamily="34" charset="-120"/>
+              </a:rPr>
+              <a:t>The limit of detection for an NGS variant assay primarily depends on:</a:t>
+            </a:r>
+            <a:endParaRPr lang="en-US" sz="1450" dirty="0"/>
+          </a:p>
+        </p:txBody>
+      </p:sp>
+      <p:sp>
+        <p:nvSpPr>
+          <p:cNvPr id="5" name="Text 3"/>
+          <p:cNvSpPr/>
+          <p:nvPr/>
+        </p:nvSpPr>
+        <p:spPr>
+          <a:xfrm>
+            <a:off x="658368" y="2395728"/>
+            <a:ext cx="6192390" cy="3017520"/>
+          </a:xfrm>
+          <a:prstGeom prst="rect">
+            <a:avLst/>
+          </a:prstGeom>
+          <a:noFill/>
+          <a:ln/>
+        </p:spPr>
+        <p:txBody>
+          <a:bodyPr wrap="square" lIns="0" tIns="0" rIns="0" bIns="0" rtlCol="0" anchor="t"/>
+          <a:lstStyle/>
+          <a:p>
+            <a:pPr algn="l" indent="0" marL="0">
+              <a:spcAft>
+                <a:spcPts val="600"/>
+              </a:spcAft>
+              <a:buNone/>
+            </a:pPr>
+            <a:r>
+              <a:rPr lang="en-US" sz="1350" dirty="0">
+                <a:solidFill>
+                  <a:srgbClr val="33444F"/>
+                </a:solidFill>
+                <a:latin typeface="Calibri" pitchFamily="34" charset="0"/>
+                <a:ea typeface="Calibri" pitchFamily="34" charset="-122"/>
+                <a:cs typeface="Calibri" pitchFamily="34" charset="-120"/>
+              </a:rPr>
+              <a:t>A. Ambient temperature</a:t>
+            </a:r>
+            <a:endParaRPr lang="en-US" sz="1350" dirty="0"/>
+          </a:p>
+          <a:p>
+            <a:pPr algn="l" indent="0" marL="0">
+              <a:spcAft>
+                <a:spcPts val="600"/>
+              </a:spcAft>
+              <a:buNone/>
+            </a:pPr>
+            <a:r>
+              <a:rPr lang="en-US" sz="1350" b="1" dirty="0">
+                <a:solidFill>
+                  <a:srgbClr val="005A63"/>
+                </a:solidFill>
+                <a:latin typeface="Calibri" pitchFamily="34" charset="0"/>
+                <a:ea typeface="Calibri" pitchFamily="34" charset="-122"/>
+                <a:cs typeface="Calibri" pitchFamily="34" charset="-120"/>
+              </a:rPr>
+              <a:t>B. Depth of coverage and assay design</a:t>
+            </a:r>
+            <a:endParaRPr lang="en-US" sz="1350" dirty="0"/>
+          </a:p>
+          <a:p>
+            <a:pPr algn="l" indent="0" marL="0">
+              <a:spcAft>
+                <a:spcPts val="600"/>
+              </a:spcAft>
+              <a:buNone/>
+            </a:pPr>
+            <a:r>
+              <a:rPr lang="en-US" sz="1350" dirty="0">
+                <a:solidFill>
+                  <a:srgbClr val="33444F"/>
+                </a:solidFill>
+                <a:latin typeface="Calibri" pitchFamily="34" charset="0"/>
+                <a:ea typeface="Calibri" pitchFamily="34" charset="-122"/>
+                <a:cs typeface="Calibri" pitchFamily="34" charset="-120"/>
+              </a:rPr>
+              <a:t>C. The patient’s age</a:t>
+            </a:r>
+            <a:endParaRPr lang="en-US" sz="1350" dirty="0"/>
+          </a:p>
+          <a:p>
+            <a:pPr algn="l" indent="0" marL="0">
+              <a:spcAft>
+                <a:spcPts val="600"/>
+              </a:spcAft>
+              <a:buNone/>
+            </a:pPr>
+            <a:r>
+              <a:rPr lang="en-US" sz="1350" dirty="0">
+                <a:solidFill>
+                  <a:srgbClr val="33444F"/>
+                </a:solidFill>
+                <a:latin typeface="Calibri" pitchFamily="34" charset="0"/>
+                <a:ea typeface="Calibri" pitchFamily="34" charset="-122"/>
+                <a:cs typeface="Calibri" pitchFamily="34" charset="-120"/>
+              </a:rPr>
+              <a:t>D. Tube color</a:t>
+            </a:r>
+            <a:endParaRPr lang="en-US" sz="1350" dirty="0"/>
+          </a:p>
+          <a:p>
+            <a:pPr algn="l" indent="0" marL="0">
+              <a:spcAft>
+                <a:spcPts val="600"/>
+              </a:spcAft>
+              <a:buNone/>
+            </a:pPr>
+            <a:r>
+              <a:rPr lang="en-US" sz="1350" dirty="0">
+                <a:solidFill>
+                  <a:srgbClr val="33444F"/>
+                </a:solidFill>
+                <a:latin typeface="Calibri" pitchFamily="34" charset="0"/>
+                <a:ea typeface="Calibri" pitchFamily="34" charset="-122"/>
+                <a:cs typeface="Calibri" pitchFamily="34" charset="-120"/>
+              </a:rPr>
+              <a:t>E. Renal function</a:t>
+            </a:r>
+            <a:endParaRPr lang="en-US" sz="1350" dirty="0"/>
+          </a:p>
+        </p:txBody>
+      </p:sp>
+      <p:sp>
+        <p:nvSpPr>
+          <p:cNvPr id="6" name="Shape 4"/>
+          <p:cNvSpPr/>
+          <p:nvPr/>
+        </p:nvSpPr>
+        <p:spPr>
+          <a:xfrm>
+            <a:off x="7201632" y="2395728"/>
+            <a:ext cx="4423136" cy="3246120"/>
+          </a:xfrm>
+          <a:prstGeom prst="roundRect">
+            <a:avLst>
+              <a:gd name="adj" fmla="val 2535"/>
+            </a:avLst>
+          </a:prstGeom>
+          <a:solidFill>
+            <a:srgbClr val="E0F2F4"/>
+          </a:solidFill>
+          <a:ln/>
+          <a:effectLst>
+            <a:outerShdw sx="100000" sy="100000" kx="0" ky="0" algn="bl" rotWithShape="0" blurRad="88900" dist="25400" dir="5400000">
+              <a:srgbClr val="22303C">
+                <a:alpha val="12000"/>
+              </a:srgbClr>
+            </a:outerShdw>
+          </a:effectLst>
+        </p:spPr>
+        <p:txBody>
+          <a:bodyPr/>
+          <a:p/>
+        </p:txBody>
+      </p:sp>
+      <p:sp>
+        <p:nvSpPr>
+          <p:cNvPr id="7" name="Text 5"/>
+          <p:cNvSpPr/>
+          <p:nvPr/>
+        </p:nvSpPr>
+        <p:spPr>
+          <a:xfrm>
+            <a:off x="7439376" y="2578608"/>
+            <a:ext cx="3965936" cy="457200"/>
+          </a:xfrm>
+          <a:prstGeom prst="rect">
+            <a:avLst/>
+          </a:prstGeom>
+          <a:noFill/>
+          <a:ln/>
+        </p:spPr>
+        <p:txBody>
+          <a:bodyPr wrap="square" lIns="0" tIns="0" rIns="0" bIns="0" rtlCol="0" anchor="ctr"/>
+          <a:lstStyle/>
+          <a:p>
+            <a:pPr indent="0" marL="0">
+              <a:buNone/>
+            </a:pPr>
+            <a:r>
+              <a:rPr lang="en-US" sz="1500" b="1" dirty="0">
+                <a:solidFill>
+                  <a:srgbClr val="00838F"/>
+                </a:solidFill>
+                <a:latin typeface="Calibri" pitchFamily="34" charset="0"/>
+                <a:ea typeface="Calibri" pitchFamily="34" charset="-122"/>
+                <a:cs typeface="Calibri" pitchFamily="34" charset="-120"/>
+              </a:rPr>
+              <a:t>ANSWER  </a:t>
+            </a:r>
+            <a:pPr indent="0" marL="0">
+              <a:buNone/>
+            </a:pPr>
+            <a:r>
+              <a:rPr lang="en-US" sz="1500" b="1" dirty="0">
+                <a:solidFill>
+                  <a:srgbClr val="1B2A38"/>
+                </a:solidFill>
+                <a:latin typeface="Calibri" pitchFamily="34" charset="0"/>
+                <a:ea typeface="Calibri" pitchFamily="34" charset="-122"/>
+                <a:cs typeface="Calibri" pitchFamily="34" charset="-120"/>
+              </a:rPr>
+              <a:t>B — Depth of coverage/design</a:t>
+            </a:r>
+            <a:endParaRPr lang="en-US" sz="1500" dirty="0"/>
+          </a:p>
+        </p:txBody>
+      </p:sp>
+      <p:sp>
+        <p:nvSpPr>
+          <p:cNvPr id="8" name="Text 6"/>
+          <p:cNvSpPr/>
+          <p:nvPr/>
+        </p:nvSpPr>
+        <p:spPr>
+          <a:xfrm>
+            <a:off x="7439376" y="3127248"/>
+            <a:ext cx="3947648" cy="2377440"/>
+          </a:xfrm>
+          <a:prstGeom prst="rect">
+            <a:avLst/>
+          </a:prstGeom>
+          <a:noFill/>
+          <a:ln/>
+        </p:spPr>
+        <p:txBody>
+          <a:bodyPr wrap="square" lIns="0" tIns="0" rIns="0" bIns="0" rtlCol="0" anchor="t"/>
+          <a:lstStyle/>
+          <a:p>
+            <a:pPr algn="l" indent="0" marL="0">
+              <a:lnSpc>
+                <a:spcPct val="108000"/>
+              </a:lnSpc>
+              <a:buNone/>
+            </a:pPr>
+            <a:r>
+              <a:rPr lang="en-US" sz="1250" dirty="0">
+                <a:solidFill>
+                  <a:srgbClr val="33444F"/>
+                </a:solidFill>
+                <a:latin typeface="Calibri" pitchFamily="34" charset="0"/>
+                <a:ea typeface="Calibri" pitchFamily="34" charset="-122"/>
+                <a:cs typeface="Calibri" pitchFamily="34" charset="-120"/>
+              </a:rPr>
+              <a:t>Adequate, uniform coverage enables detection of low-allele-fraction variants; LoD is established in validation.</a:t>
+            </a:r>
+            <a:endParaRPr lang="en-US" sz="1250" dirty="0"/>
+          </a:p>
+        </p:txBody>
+      </p:sp>
+      <p:sp>
+        <p:nvSpPr>
+          <p:cNvPr id="9" name="Text 7"/>
+          <p:cNvSpPr/>
+          <p:nvPr/>
+        </p:nvSpPr>
+        <p:spPr>
+          <a:xfrm>
+            <a:off x="566928" y="6473952"/>
+            <a:ext cx="7772400" cy="274320"/>
+          </a:xfrm>
+          <a:prstGeom prst="rect">
+            <a:avLst/>
+          </a:prstGeom>
+          <a:noFill/>
+          <a:ln/>
+        </p:spPr>
+        <p:txBody>
+          <a:bodyPr wrap="square" lIns="0" tIns="0" rIns="0" bIns="0" rtlCol="0" anchor="ctr"/>
+          <a:lstStyle/>
+          <a:p>
+            <a:pPr algn="l" indent="0" marL="0">
+              <a:buNone/>
+            </a:pPr>
+            <a:r>
+              <a:rPr lang="en-US" sz="850" dirty="0">
+                <a:solidFill>
+                  <a:srgbClr val="9AA8B4"/>
+                </a:solidFill>
+                <a:latin typeface="Calibri" pitchFamily="34" charset="0"/>
+                <a:ea typeface="Calibri" pitchFamily="34" charset="-122"/>
+                <a:cs typeface="Calibri" pitchFamily="34" charset="-120"/>
+              </a:rPr>
+              <a:t>Makassed General Hospital  ·  Department of Laboratory Medicine</a:t>
+            </a:r>
+            <a:endParaRPr lang="en-US" sz="850" dirty="0"/>
+          </a:p>
+        </p:txBody>
+      </p:sp>
+      <p:sp>
+        <p:nvSpPr>
+          <p:cNvPr id="10" name="Text 8"/>
+          <p:cNvSpPr/>
+          <p:nvPr/>
+        </p:nvSpPr>
+        <p:spPr>
+          <a:xfrm>
+            <a:off x="9814255" y="6473952"/>
+            <a:ext cx="1828800" cy="274320"/>
+          </a:xfrm>
+          <a:prstGeom prst="rect">
+            <a:avLst/>
+          </a:prstGeom>
+          <a:noFill/>
+          <a:ln/>
+        </p:spPr>
+        <p:txBody>
+          <a:bodyPr wrap="square" lIns="0" tIns="0" rIns="0" bIns="0" rtlCol="0" anchor="ctr"/>
+          <a:lstStyle/>
+          <a:p>
+            <a:pPr algn="r" indent="0" marL="0">
+              <a:buNone/>
+            </a:pPr>
+            <a:r>
+              <a:rPr lang="en-US" sz="850" dirty="0">
+                <a:solidFill>
+                  <a:srgbClr val="9AA8B4"/>
+                </a:solidFill>
+                <a:latin typeface="Calibri" pitchFamily="34" charset="0"/>
+                <a:ea typeface="Calibri" pitchFamily="34" charset="-122"/>
+                <a:cs typeface="Calibri" pitchFamily="34" charset="-120"/>
+              </a:rPr>
+              <a:t>CP Lecture Series</a:t>
+            </a:r>
+            <a:pPr algn="r" indent="0" marL="0">
+              <a:buNone/>
+            </a:pPr>
+            <a:r>
+              <a:rPr lang="en-US" sz="850" dirty="0">
+                <a:solidFill>
+                  <a:srgbClr val="DCE4EC"/>
+                </a:solidFill>
+                <a:latin typeface="Calibri" pitchFamily="34" charset="0"/>
+                <a:ea typeface="Calibri" pitchFamily="34" charset="-122"/>
+                <a:cs typeface="Calibri" pitchFamily="34" charset="-120"/>
+              </a:rPr>
+              <a:t>   ·   </a:t>
+            </a:r>
+            <a:pPr algn="r" indent="0" marL="0">
+              <a:buNone/>
+            </a:pPr>
+            <a:r>
+              <a:rPr lang="en-US" sz="850" b="1" dirty="0">
+                <a:solidFill>
+                  <a:srgbClr val="00838F"/>
+                </a:solidFill>
+                <a:latin typeface="Calibri" pitchFamily="34" charset="0"/>
+                <a:ea typeface="Calibri" pitchFamily="34" charset="-122"/>
+                <a:cs typeface="Calibri" pitchFamily="34" charset="-120"/>
+              </a:rPr>
+              <a:t>19</a:t>
+            </a:r>
+            <a:endParaRPr lang="en-US" sz="850" dirty="0"/>
+          </a:p>
+        </p:txBody>
+      </p:sp>
+    </p:spTree>
+  </p:cSld>
+  <p:clrMapOvr>
+    <a:masterClrMapping/>
+  </p:clrMapOvr>
+</p:sld>
+</file>
+
+<file path=ppt/slides/slide28.xml><?xml version="1.0" encoding="utf-8"?>
+<p:sld xmlns:a="http://schemas.openxmlformats.org/drawingml/2006/main" xmlns:p="http://schemas.openxmlformats.org/presentationml/2006/main" xmlns:r="http://schemas.openxmlformats.org/officeDocument/2006/relationships">
+  <p:cSld>
+    <p:spTree>
+      <p:nvGrpSpPr>
+        <p:cNvPr id="1" name=""/>
+        <p:cNvGrpSpPr/>
+        <p:nvPr/>
+      </p:nvGrpSpPr>
+      <p:grpSpPr/>
+      <p:sp>
+        <p:nvSpPr>
+          <p:cNvPr id="2" name="Text 0"/>
+          <p:cNvSpPr/>
+          <p:nvPr/>
+        </p:nvSpPr>
+        <p:spPr>
+          <a:xfrm>
+            <a:off x="566928" y="329184"/>
+            <a:ext cx="10515600" cy="310896"/>
+          </a:xfrm>
+          <a:prstGeom prst="rect">
+            <a:avLst/>
+          </a:prstGeom>
+          <a:noFill/>
+          <a:ln/>
+        </p:spPr>
+        <p:txBody>
+          <a:bodyPr wrap="square" lIns="0" tIns="0" rIns="0" bIns="0" rtlCol="0" anchor="ctr"/>
+          <a:lstStyle/>
+          <a:p>
+            <a:pPr algn="l" indent="0" marL="0">
+              <a:buNone/>
+            </a:pPr>
+            <a:r>
+              <a:rPr lang="en-US" sz="1100" b="1" spc="150" kern="0" dirty="0">
+                <a:solidFill>
+                  <a:srgbClr val="00838F"/>
+                </a:solidFill>
+                <a:latin typeface="Calibri" pitchFamily="34" charset="0"/>
+                <a:ea typeface="Calibri" pitchFamily="34" charset="-122"/>
+                <a:cs typeface="Calibri" pitchFamily="34" charset="-120"/>
+              </a:rPr>
+              <a:t>MOLECULAR &amp; CYTOGENETICS   ·   BOARD REVIEW  ·  Q2</a:t>
+            </a:r>
+            <a:endParaRPr lang="en-US" sz="1100" dirty="0"/>
+          </a:p>
+        </p:txBody>
+      </p:sp>
+      <p:sp>
+        <p:nvSpPr>
+          <p:cNvPr id="3" name="Text 1"/>
+          <p:cNvSpPr/>
+          <p:nvPr/>
+        </p:nvSpPr>
+        <p:spPr>
+          <a:xfrm>
+            <a:off x="566928" y="713232"/>
+            <a:ext cx="11064240" cy="749808"/>
+          </a:xfrm>
+          <a:prstGeom prst="rect">
+            <a:avLst/>
+          </a:prstGeom>
+          <a:noFill/>
+          <a:ln/>
+        </p:spPr>
+        <p:txBody>
+          <a:bodyPr wrap="square" lIns="0" tIns="0" rIns="0" bIns="0" rtlCol="0" anchor="ctr"/>
+          <a:lstStyle/>
+          <a:p>
+            <a:pPr algn="l" indent="0" marL="0">
+              <a:buNone/>
+            </a:pPr>
+            <a:r>
+              <a:rPr lang="en-US" sz="2600" b="1" dirty="0">
+                <a:solidFill>
+                  <a:srgbClr val="0E3A5F"/>
+                </a:solidFill>
+                <a:latin typeface="Calibri" pitchFamily="34" charset="0"/>
+                <a:ea typeface="Calibri" pitchFamily="34" charset="-122"/>
+                <a:cs typeface="Calibri" pitchFamily="34" charset="-120"/>
+              </a:rPr>
+              <a:t>Board-Style Review</a:t>
+            </a:r>
+            <a:endParaRPr lang="en-US" sz="2600" dirty="0"/>
+          </a:p>
+        </p:txBody>
+      </p:sp>
+      <p:sp>
+        <p:nvSpPr>
+          <p:cNvPr id="4" name="Text 2"/>
+          <p:cNvSpPr/>
+          <p:nvPr/>
+        </p:nvSpPr>
+        <p:spPr>
+          <a:xfrm>
+            <a:off x="566928" y="1417320"/>
+            <a:ext cx="11057839" cy="914400"/>
+          </a:xfrm>
+          <a:prstGeom prst="rect">
+            <a:avLst/>
+          </a:prstGeom>
+          <a:noFill/>
+          <a:ln/>
+        </p:spPr>
+        <p:txBody>
+          <a:bodyPr wrap="square" lIns="0" tIns="0" rIns="0" bIns="0" rtlCol="0" anchor="t"/>
+          <a:lstStyle/>
+          <a:p>
+            <a:pPr algn="l" indent="0" marL="0">
+              <a:lnSpc>
+                <a:spcPct val="105000"/>
+              </a:lnSpc>
+              <a:buNone/>
+            </a:pPr>
+            <a:r>
+              <a:rPr lang="en-US" sz="1450" b="1" dirty="0">
+                <a:solidFill>
+                  <a:srgbClr val="1B2A38"/>
+                </a:solidFill>
+                <a:latin typeface="Calibri" pitchFamily="34" charset="0"/>
+                <a:ea typeface="Calibri" pitchFamily="34" charset="-122"/>
+                <a:cs typeface="Calibri" pitchFamily="34" charset="-120"/>
+              </a:rPr>
+              <a:t>For an NGS assay, the bioinformatics pipeline should be:</a:t>
+            </a:r>
+            <a:endParaRPr lang="en-US" sz="1450" dirty="0"/>
+          </a:p>
+        </p:txBody>
+      </p:sp>
+      <p:sp>
+        <p:nvSpPr>
+          <p:cNvPr id="5" name="Text 3"/>
+          <p:cNvSpPr/>
+          <p:nvPr/>
+        </p:nvSpPr>
+        <p:spPr>
+          <a:xfrm>
+            <a:off x="658368" y="2395728"/>
+            <a:ext cx="6192390" cy="3017520"/>
+          </a:xfrm>
+          <a:prstGeom prst="rect">
+            <a:avLst/>
+          </a:prstGeom>
+          <a:noFill/>
+          <a:ln/>
+        </p:spPr>
+        <p:txBody>
+          <a:bodyPr wrap="square" lIns="0" tIns="0" rIns="0" bIns="0" rtlCol="0" anchor="t"/>
+          <a:lstStyle/>
+          <a:p>
+            <a:pPr algn="l" indent="0" marL="0">
+              <a:spcAft>
+                <a:spcPts val="600"/>
+              </a:spcAft>
+              <a:buNone/>
+            </a:pPr>
+            <a:r>
+              <a:rPr lang="en-US" sz="1350" dirty="0">
+                <a:solidFill>
+                  <a:srgbClr val="33444F"/>
+                </a:solidFill>
+                <a:latin typeface="Calibri" pitchFamily="34" charset="0"/>
+                <a:ea typeface="Calibri" pitchFamily="34" charset="-122"/>
+                <a:cs typeface="Calibri" pitchFamily="34" charset="-120"/>
+              </a:rPr>
+              <a:t>A. Ignored in validation</a:t>
+            </a:r>
+            <a:endParaRPr lang="en-US" sz="1350" dirty="0"/>
+          </a:p>
+          <a:p>
+            <a:pPr algn="l" indent="0" marL="0">
+              <a:spcAft>
+                <a:spcPts val="600"/>
+              </a:spcAft>
+              <a:buNone/>
+            </a:pPr>
+            <a:r>
+              <a:rPr lang="en-US" sz="1350" b="1" dirty="0">
+                <a:solidFill>
+                  <a:srgbClr val="005A63"/>
+                </a:solidFill>
+                <a:latin typeface="Calibri" pitchFamily="34" charset="0"/>
+                <a:ea typeface="Calibri" pitchFamily="34" charset="-122"/>
+                <a:cs typeface="Calibri" pitchFamily="34" charset="-120"/>
+              </a:rPr>
+              <a:t>B. Validated and version-controlled as part of the test</a:t>
+            </a:r>
+            <a:endParaRPr lang="en-US" sz="1350" dirty="0"/>
+          </a:p>
+          <a:p>
+            <a:pPr algn="l" indent="0" marL="0">
+              <a:spcAft>
+                <a:spcPts val="600"/>
+              </a:spcAft>
+              <a:buNone/>
+            </a:pPr>
+            <a:r>
+              <a:rPr lang="en-US" sz="1350" dirty="0">
+                <a:solidFill>
+                  <a:srgbClr val="33444F"/>
+                </a:solidFill>
+                <a:latin typeface="Calibri" pitchFamily="34" charset="0"/>
+                <a:ea typeface="Calibri" pitchFamily="34" charset="-122"/>
+                <a:cs typeface="Calibri" pitchFamily="34" charset="-120"/>
+              </a:rPr>
+              <a:t>C. Changed freely without documentation</a:t>
+            </a:r>
+            <a:endParaRPr lang="en-US" sz="1350" dirty="0"/>
+          </a:p>
+          <a:p>
+            <a:pPr algn="l" indent="0" marL="0">
+              <a:spcAft>
+                <a:spcPts val="600"/>
+              </a:spcAft>
+              <a:buNone/>
+            </a:pPr>
+            <a:r>
+              <a:rPr lang="en-US" sz="1350" dirty="0">
+                <a:solidFill>
+                  <a:srgbClr val="33444F"/>
+                </a:solidFill>
+                <a:latin typeface="Calibri" pitchFamily="34" charset="0"/>
+                <a:ea typeface="Calibri" pitchFamily="34" charset="-122"/>
+                <a:cs typeface="Calibri" pitchFamily="34" charset="-120"/>
+              </a:rPr>
+              <a:t>D. Validated only once regardless of changes</a:t>
+            </a:r>
+            <a:endParaRPr lang="en-US" sz="1350" dirty="0"/>
+          </a:p>
+          <a:p>
+            <a:pPr algn="l" indent="0" marL="0">
+              <a:spcAft>
+                <a:spcPts val="600"/>
+              </a:spcAft>
+              <a:buNone/>
+            </a:pPr>
+            <a:r>
+              <a:rPr lang="en-US" sz="1350" dirty="0">
+                <a:solidFill>
+                  <a:srgbClr val="33444F"/>
+                </a:solidFill>
+                <a:latin typeface="Calibri" pitchFamily="34" charset="0"/>
+                <a:ea typeface="Calibri" pitchFamily="34" charset="-122"/>
+                <a:cs typeface="Calibri" pitchFamily="34" charset="-120"/>
+              </a:rPr>
+              <a:t>E. Outsourced without oversight</a:t>
+            </a:r>
+            <a:endParaRPr lang="en-US" sz="1350" dirty="0"/>
+          </a:p>
+        </p:txBody>
+      </p:sp>
+      <p:sp>
+        <p:nvSpPr>
+          <p:cNvPr id="6" name="Shape 4"/>
+          <p:cNvSpPr/>
+          <p:nvPr/>
+        </p:nvSpPr>
+        <p:spPr>
+          <a:xfrm>
+            <a:off x="7201632" y="2395728"/>
+            <a:ext cx="4423136" cy="3246120"/>
+          </a:xfrm>
+          <a:prstGeom prst="roundRect">
+            <a:avLst>
+              <a:gd name="adj" fmla="val 2535"/>
+            </a:avLst>
+          </a:prstGeom>
+          <a:solidFill>
+            <a:srgbClr val="E0F2F4"/>
+          </a:solidFill>
+          <a:ln/>
+          <a:effectLst>
+            <a:outerShdw sx="100000" sy="100000" kx="0" ky="0" algn="bl" rotWithShape="0" blurRad="88900" dist="25400" dir="5400000">
+              <a:srgbClr val="22303C">
+                <a:alpha val="12000"/>
+              </a:srgbClr>
+            </a:outerShdw>
+          </a:effectLst>
+        </p:spPr>
+        <p:txBody>
+          <a:bodyPr/>
+          <a:p/>
+        </p:txBody>
+      </p:sp>
+      <p:sp>
+        <p:nvSpPr>
+          <p:cNvPr id="7" name="Text 5"/>
+          <p:cNvSpPr/>
+          <p:nvPr/>
+        </p:nvSpPr>
+        <p:spPr>
+          <a:xfrm>
+            <a:off x="7439376" y="2578608"/>
+            <a:ext cx="3965936" cy="457200"/>
+          </a:xfrm>
+          <a:prstGeom prst="rect">
+            <a:avLst/>
+          </a:prstGeom>
+          <a:noFill/>
+          <a:ln/>
+        </p:spPr>
+        <p:txBody>
+          <a:bodyPr wrap="square" lIns="0" tIns="0" rIns="0" bIns="0" rtlCol="0" anchor="ctr"/>
+          <a:lstStyle/>
+          <a:p>
+            <a:pPr indent="0" marL="0">
+              <a:buNone/>
+            </a:pPr>
+            <a:r>
+              <a:rPr lang="en-US" sz="1500" b="1" dirty="0">
+                <a:solidFill>
+                  <a:srgbClr val="00838F"/>
+                </a:solidFill>
+                <a:latin typeface="Calibri" pitchFamily="34" charset="0"/>
+                <a:ea typeface="Calibri" pitchFamily="34" charset="-122"/>
+                <a:cs typeface="Calibri" pitchFamily="34" charset="-120"/>
+              </a:rPr>
+              <a:t>ANSWER  </a:t>
+            </a:r>
+            <a:pPr indent="0" marL="0">
+              <a:buNone/>
+            </a:pPr>
+            <a:r>
+              <a:rPr lang="en-US" sz="1500" b="1" dirty="0">
+                <a:solidFill>
+                  <a:srgbClr val="1B2A38"/>
+                </a:solidFill>
+                <a:latin typeface="Calibri" pitchFamily="34" charset="0"/>
+                <a:ea typeface="Calibri" pitchFamily="34" charset="-122"/>
+                <a:cs typeface="Calibri" pitchFamily="34" charset="-120"/>
+              </a:rPr>
+              <a:t>B — Validated and version-controlled</a:t>
+            </a:r>
+            <a:endParaRPr lang="en-US" sz="1500" dirty="0"/>
+          </a:p>
+        </p:txBody>
+      </p:sp>
+      <p:sp>
+        <p:nvSpPr>
+          <p:cNvPr id="8" name="Text 6"/>
+          <p:cNvSpPr/>
+          <p:nvPr/>
+        </p:nvSpPr>
+        <p:spPr>
+          <a:xfrm>
+            <a:off x="7439376" y="3127248"/>
+            <a:ext cx="3947648" cy="2377440"/>
+          </a:xfrm>
+          <a:prstGeom prst="rect">
+            <a:avLst/>
+          </a:prstGeom>
+          <a:noFill/>
+          <a:ln/>
+        </p:spPr>
+        <p:txBody>
+          <a:bodyPr wrap="square" lIns="0" tIns="0" rIns="0" bIns="0" rtlCol="0" anchor="t"/>
+          <a:lstStyle/>
+          <a:p>
+            <a:pPr algn="l" indent="0" marL="0">
+              <a:lnSpc>
+                <a:spcPct val="108000"/>
+              </a:lnSpc>
+              <a:buNone/>
+            </a:pPr>
+            <a:r>
+              <a:rPr lang="en-US" sz="1250" dirty="0">
+                <a:solidFill>
+                  <a:srgbClr val="33444F"/>
+                </a:solidFill>
+                <a:latin typeface="Calibri" pitchFamily="34" charset="0"/>
+                <a:ea typeface="Calibri" pitchFamily="34" charset="-122"/>
+                <a:cs typeface="Calibri" pitchFamily="34" charset="-120"/>
+              </a:rPr>
+              <a:t>The pipeline materially affects results and must be validated, locked, and revalidated after significant changes.</a:t>
+            </a:r>
+            <a:endParaRPr lang="en-US" sz="1250" dirty="0"/>
+          </a:p>
+        </p:txBody>
+      </p:sp>
+      <p:sp>
+        <p:nvSpPr>
+          <p:cNvPr id="9" name="Text 7"/>
+          <p:cNvSpPr/>
+          <p:nvPr/>
+        </p:nvSpPr>
+        <p:spPr>
+          <a:xfrm>
+            <a:off x="566928" y="6473952"/>
+            <a:ext cx="7772400" cy="274320"/>
+          </a:xfrm>
+          <a:prstGeom prst="rect">
+            <a:avLst/>
+          </a:prstGeom>
+          <a:noFill/>
+          <a:ln/>
+        </p:spPr>
+        <p:txBody>
+          <a:bodyPr wrap="square" lIns="0" tIns="0" rIns="0" bIns="0" rtlCol="0" anchor="ctr"/>
+          <a:lstStyle/>
+          <a:p>
+            <a:pPr algn="l" indent="0" marL="0">
+              <a:buNone/>
+            </a:pPr>
+            <a:r>
+              <a:rPr lang="en-US" sz="850" dirty="0">
+                <a:solidFill>
+                  <a:srgbClr val="9AA8B4"/>
+                </a:solidFill>
+                <a:latin typeface="Calibri" pitchFamily="34" charset="0"/>
+                <a:ea typeface="Calibri" pitchFamily="34" charset="-122"/>
+                <a:cs typeface="Calibri" pitchFamily="34" charset="-120"/>
+              </a:rPr>
+              <a:t>Makassed General Hospital  ·  Department of Laboratory Medicine</a:t>
+            </a:r>
+            <a:endParaRPr lang="en-US" sz="850" dirty="0"/>
+          </a:p>
+        </p:txBody>
+      </p:sp>
+      <p:sp>
+        <p:nvSpPr>
+          <p:cNvPr id="10" name="Text 8"/>
+          <p:cNvSpPr/>
+          <p:nvPr/>
+        </p:nvSpPr>
+        <p:spPr>
+          <a:xfrm>
+            <a:off x="9814255" y="6473952"/>
+            <a:ext cx="1828800" cy="274320"/>
+          </a:xfrm>
+          <a:prstGeom prst="rect">
+            <a:avLst/>
+          </a:prstGeom>
+          <a:noFill/>
+          <a:ln/>
+        </p:spPr>
+        <p:txBody>
+          <a:bodyPr wrap="square" lIns="0" tIns="0" rIns="0" bIns="0" rtlCol="0" anchor="ctr"/>
+          <a:lstStyle/>
+          <a:p>
+            <a:pPr algn="r" indent="0" marL="0">
+              <a:buNone/>
+            </a:pPr>
+            <a:r>
+              <a:rPr lang="en-US" sz="850" dirty="0">
+                <a:solidFill>
+                  <a:srgbClr val="9AA8B4"/>
+                </a:solidFill>
+                <a:latin typeface="Calibri" pitchFamily="34" charset="0"/>
+                <a:ea typeface="Calibri" pitchFamily="34" charset="-122"/>
+                <a:cs typeface="Calibri" pitchFamily="34" charset="-120"/>
+              </a:rPr>
+              <a:t>CP Lecture Series</a:t>
+            </a:r>
+            <a:pPr algn="r" indent="0" marL="0">
+              <a:buNone/>
+            </a:pPr>
+            <a:r>
+              <a:rPr lang="en-US" sz="850" dirty="0">
+                <a:solidFill>
+                  <a:srgbClr val="DCE4EC"/>
+                </a:solidFill>
+                <a:latin typeface="Calibri" pitchFamily="34" charset="0"/>
+                <a:ea typeface="Calibri" pitchFamily="34" charset="-122"/>
+                <a:cs typeface="Calibri" pitchFamily="34" charset="-120"/>
+              </a:rPr>
+              <a:t>   ·   </a:t>
+            </a:r>
+            <a:pPr algn="r" indent="0" marL="0">
+              <a:buNone/>
+            </a:pPr>
+            <a:r>
+              <a:rPr lang="en-US" sz="850" b="1" dirty="0">
+                <a:solidFill>
+                  <a:srgbClr val="00838F"/>
+                </a:solidFill>
+                <a:latin typeface="Calibri" pitchFamily="34" charset="0"/>
+                <a:ea typeface="Calibri" pitchFamily="34" charset="-122"/>
+                <a:cs typeface="Calibri" pitchFamily="34" charset="-120"/>
+              </a:rPr>
+              <a:t>18</a:t>
+            </a:r>
+            <a:endParaRPr lang="en-US" sz="850" dirty="0"/>
+          </a:p>
+        </p:txBody>
+      </p:sp>
+    </p:spTree>
+  </p:cSld>
+  <p:clrMapOvr>
+    <a:masterClrMapping/>
+  </p:clrMapOvr>
+</p:sld>
+</file>
+
+<file path=ppt/slides/slide29.xml><?xml version="1.0" encoding="utf-8"?>
+<p:sld xmlns:a="http://schemas.openxmlformats.org/drawingml/2006/main" xmlns:p="http://schemas.openxmlformats.org/presentationml/2006/main" xmlns:r="http://schemas.openxmlformats.org/officeDocument/2006/relationships">
+  <p:cSld>
+    <p:spTree>
+      <p:nvGrpSpPr>
+        <p:cNvPr id="1" name=""/>
+        <p:cNvGrpSpPr/>
+        <p:nvPr/>
+      </p:nvGrpSpPr>
+      <p:grpSpPr/>
+      <p:sp>
+        <p:nvSpPr>
+          <p:cNvPr id="2" name="Text 0"/>
+          <p:cNvSpPr/>
+          <p:nvPr/>
+        </p:nvSpPr>
+        <p:spPr>
+          <a:xfrm>
+            <a:off x="566928" y="329184"/>
+            <a:ext cx="10515600" cy="310896"/>
+          </a:xfrm>
+          <a:prstGeom prst="rect">
+            <a:avLst/>
+          </a:prstGeom>
+          <a:noFill/>
+          <a:ln/>
+        </p:spPr>
+        <p:txBody>
+          <a:bodyPr wrap="square" lIns="0" tIns="0" rIns="0" bIns="0" rtlCol="0" anchor="ctr"/>
+          <a:lstStyle/>
+          <a:p>
+            <a:pPr algn="l" indent="0" marL="0">
+              <a:buNone/>
+            </a:pPr>
+            <a:r>
+              <a:rPr lang="en-US" sz="1100" b="1" spc="150" kern="0" dirty="0">
+                <a:solidFill>
+                  <a:srgbClr val="00838F"/>
+                </a:solidFill>
+                <a:latin typeface="Calibri" pitchFamily="34" charset="0"/>
+                <a:ea typeface="Calibri" pitchFamily="34" charset="-122"/>
+                <a:cs typeface="Calibri" pitchFamily="34" charset="-120"/>
+              </a:rPr>
+              <a:t>MOLECULAR &amp; CYTOGENETICS   ·   BOARD REVIEW  ·  Q1</a:t>
+            </a:r>
+            <a:endParaRPr lang="en-US" sz="1100" dirty="0"/>
+          </a:p>
+        </p:txBody>
+      </p:sp>
+      <p:sp>
+        <p:nvSpPr>
+          <p:cNvPr id="3" name="Text 1"/>
+          <p:cNvSpPr/>
+          <p:nvPr/>
+        </p:nvSpPr>
+        <p:spPr>
+          <a:xfrm>
+            <a:off x="566928" y="713232"/>
+            <a:ext cx="11064240" cy="749808"/>
+          </a:xfrm>
+          <a:prstGeom prst="rect">
+            <a:avLst/>
+          </a:prstGeom>
+          <a:noFill/>
+          <a:ln/>
+        </p:spPr>
+        <p:txBody>
+          <a:bodyPr wrap="square" lIns="0" tIns="0" rIns="0" bIns="0" rtlCol="0" anchor="ctr"/>
+          <a:lstStyle/>
+          <a:p>
+            <a:pPr algn="l" indent="0" marL="0">
+              <a:buNone/>
+            </a:pPr>
+            <a:r>
+              <a:rPr lang="en-US" sz="2600" b="1" dirty="0">
+                <a:solidFill>
+                  <a:srgbClr val="0E3A5F"/>
+                </a:solidFill>
+                <a:latin typeface="Calibri" pitchFamily="34" charset="0"/>
+                <a:ea typeface="Calibri" pitchFamily="34" charset="-122"/>
+                <a:cs typeface="Calibri" pitchFamily="34" charset="-120"/>
+              </a:rPr>
+              <a:t>Board-Style Review</a:t>
+            </a:r>
+            <a:endParaRPr lang="en-US" sz="2600" dirty="0"/>
+          </a:p>
+        </p:txBody>
+      </p:sp>
+      <p:sp>
+        <p:nvSpPr>
+          <p:cNvPr id="4" name="Text 2"/>
+          <p:cNvSpPr/>
+          <p:nvPr/>
+        </p:nvSpPr>
+        <p:spPr>
+          <a:xfrm>
+            <a:off x="566928" y="1417320"/>
+            <a:ext cx="11057839" cy="914400"/>
+          </a:xfrm>
+          <a:prstGeom prst="rect">
+            <a:avLst/>
+          </a:prstGeom>
+          <a:noFill/>
+          <a:ln/>
+        </p:spPr>
+        <p:txBody>
+          <a:bodyPr wrap="square" lIns="0" tIns="0" rIns="0" bIns="0" rtlCol="0" anchor="t"/>
+          <a:lstStyle/>
+          <a:p>
+            <a:pPr algn="l" indent="0" marL="0">
+              <a:lnSpc>
+                <a:spcPct val="105000"/>
+              </a:lnSpc>
+              <a:buNone/>
+            </a:pPr>
+            <a:r>
+              <a:rPr lang="en-US" sz="1450" b="1" dirty="0">
+                <a:solidFill>
+                  <a:srgbClr val="1B2A38"/>
+                </a:solidFill>
+                <a:latin typeface="Calibri" pitchFamily="34" charset="0"/>
+                <a:ea typeface="Calibri" pitchFamily="34" charset="-122"/>
+                <a:cs typeface="Calibri" pitchFamily="34" charset="-120"/>
+              </a:rPr>
+              <a:t>A laboratory-developed molecular test requires which before clinical use?</a:t>
+            </a:r>
+            <a:endParaRPr lang="en-US" sz="1450" dirty="0"/>
+          </a:p>
+        </p:txBody>
+      </p:sp>
+      <p:sp>
+        <p:nvSpPr>
+          <p:cNvPr id="5" name="Text 3"/>
+          <p:cNvSpPr/>
+          <p:nvPr/>
+        </p:nvSpPr>
+        <p:spPr>
+          <a:xfrm>
+            <a:off x="658368" y="2395728"/>
+            <a:ext cx="6192390" cy="3017520"/>
+          </a:xfrm>
+          <a:prstGeom prst="rect">
+            <a:avLst/>
+          </a:prstGeom>
+          <a:noFill/>
+          <a:ln/>
+        </p:spPr>
+        <p:txBody>
+          <a:bodyPr wrap="square" lIns="0" tIns="0" rIns="0" bIns="0" rtlCol="0" anchor="t"/>
+          <a:lstStyle/>
+          <a:p>
+            <a:pPr algn="l" indent="0" marL="0">
+              <a:spcAft>
+                <a:spcPts val="600"/>
+              </a:spcAft>
+              <a:buNone/>
+            </a:pPr>
+            <a:r>
+              <a:rPr lang="en-US" sz="1350" dirty="0">
+                <a:solidFill>
+                  <a:srgbClr val="33444F"/>
+                </a:solidFill>
+                <a:latin typeface="Calibri" pitchFamily="34" charset="0"/>
+                <a:ea typeface="Calibri" pitchFamily="34" charset="-122"/>
+                <a:cs typeface="Calibri" pitchFamily="34" charset="-120"/>
+              </a:rPr>
+              <a:t>A. Verification of manufacturer claims only</a:t>
+            </a:r>
+            <a:endParaRPr lang="en-US" sz="1350" dirty="0"/>
+          </a:p>
+          <a:p>
+            <a:pPr algn="l" indent="0" marL="0">
+              <a:spcAft>
+                <a:spcPts val="600"/>
+              </a:spcAft>
+              <a:buNone/>
+            </a:pPr>
+            <a:r>
+              <a:rPr lang="en-US" sz="1350" b="1" dirty="0">
+                <a:solidFill>
+                  <a:srgbClr val="005A63"/>
+                </a:solidFill>
+                <a:latin typeface="Calibri" pitchFamily="34" charset="0"/>
+                <a:ea typeface="Calibri" pitchFamily="34" charset="-122"/>
+                <a:cs typeface="Calibri" pitchFamily="34" charset="-120"/>
+              </a:rPr>
+              <a:t>B. Full validation of performance characteristics</a:t>
+            </a:r>
+            <a:endParaRPr lang="en-US" sz="1350" dirty="0"/>
+          </a:p>
+          <a:p>
+            <a:pPr algn="l" indent="0" marL="0">
+              <a:spcAft>
+                <a:spcPts val="600"/>
+              </a:spcAft>
+              <a:buNone/>
+            </a:pPr>
+            <a:r>
+              <a:rPr lang="en-US" sz="1350" dirty="0">
+                <a:solidFill>
+                  <a:srgbClr val="33444F"/>
+                </a:solidFill>
+                <a:latin typeface="Calibri" pitchFamily="34" charset="0"/>
+                <a:ea typeface="Calibri" pitchFamily="34" charset="-122"/>
+                <a:cs typeface="Calibri" pitchFamily="34" charset="-120"/>
+              </a:rPr>
+              <a:t>C. No study</a:t>
+            </a:r>
+            <a:endParaRPr lang="en-US" sz="1350" dirty="0"/>
+          </a:p>
+          <a:p>
+            <a:pPr algn="l" indent="0" marL="0">
+              <a:spcAft>
+                <a:spcPts val="600"/>
+              </a:spcAft>
+              <a:buNone/>
+            </a:pPr>
+            <a:r>
+              <a:rPr lang="en-US" sz="1350" dirty="0">
+                <a:solidFill>
+                  <a:srgbClr val="33444F"/>
+                </a:solidFill>
+                <a:latin typeface="Calibri" pitchFamily="34" charset="0"/>
+                <a:ea typeface="Calibri" pitchFamily="34" charset="-122"/>
+                <a:cs typeface="Calibri" pitchFamily="34" charset="-120"/>
+              </a:rPr>
+              <a:t>D. Reference interval only</a:t>
+            </a:r>
+            <a:endParaRPr lang="en-US" sz="1350" dirty="0"/>
+          </a:p>
+          <a:p>
+            <a:pPr algn="l" indent="0" marL="0">
+              <a:spcAft>
+                <a:spcPts val="600"/>
+              </a:spcAft>
+              <a:buNone/>
+            </a:pPr>
+            <a:r>
+              <a:rPr lang="en-US" sz="1350" dirty="0">
+                <a:solidFill>
+                  <a:srgbClr val="33444F"/>
+                </a:solidFill>
+                <a:latin typeface="Calibri" pitchFamily="34" charset="0"/>
+                <a:ea typeface="Calibri" pitchFamily="34" charset="-122"/>
+                <a:cs typeface="Calibri" pitchFamily="34" charset="-120"/>
+              </a:rPr>
+              <a:t>E. PT enrollment only</a:t>
+            </a:r>
+            <a:endParaRPr lang="en-US" sz="1350" dirty="0"/>
+          </a:p>
+        </p:txBody>
+      </p:sp>
+      <p:sp>
+        <p:nvSpPr>
+          <p:cNvPr id="6" name="Shape 4"/>
+          <p:cNvSpPr/>
+          <p:nvPr/>
+        </p:nvSpPr>
+        <p:spPr>
+          <a:xfrm>
+            <a:off x="7201632" y="2395728"/>
+            <a:ext cx="4423136" cy="3246120"/>
+          </a:xfrm>
+          <a:prstGeom prst="roundRect">
+            <a:avLst>
+              <a:gd name="adj" fmla="val 2535"/>
+            </a:avLst>
+          </a:prstGeom>
+          <a:solidFill>
+            <a:srgbClr val="E0F2F4"/>
+          </a:solidFill>
+          <a:ln/>
+          <a:effectLst>
+            <a:outerShdw sx="100000" sy="100000" kx="0" ky="0" algn="bl" rotWithShape="0" blurRad="88900" dist="25400" dir="5400000">
+              <a:srgbClr val="22303C">
+                <a:alpha val="12000"/>
+              </a:srgbClr>
+            </a:outerShdw>
+          </a:effectLst>
+        </p:spPr>
+        <p:txBody>
+          <a:bodyPr/>
+          <a:p/>
+        </p:txBody>
+      </p:sp>
+      <p:sp>
+        <p:nvSpPr>
+          <p:cNvPr id="7" name="Text 5"/>
+          <p:cNvSpPr/>
+          <p:nvPr/>
+        </p:nvSpPr>
+        <p:spPr>
+          <a:xfrm>
+            <a:off x="7439376" y="2578608"/>
+            <a:ext cx="3965936" cy="457200"/>
+          </a:xfrm>
+          <a:prstGeom prst="rect">
+            <a:avLst/>
+          </a:prstGeom>
+          <a:noFill/>
+          <a:ln/>
+        </p:spPr>
+        <p:txBody>
+          <a:bodyPr wrap="square" lIns="0" tIns="0" rIns="0" bIns="0" rtlCol="0" anchor="ctr"/>
+          <a:lstStyle/>
+          <a:p>
+            <a:pPr indent="0" marL="0">
+              <a:buNone/>
+            </a:pPr>
+            <a:r>
+              <a:rPr lang="en-US" sz="1500" b="1" dirty="0">
+                <a:solidFill>
+                  <a:srgbClr val="00838F"/>
+                </a:solidFill>
+                <a:latin typeface="Calibri" pitchFamily="34" charset="0"/>
+                <a:ea typeface="Calibri" pitchFamily="34" charset="-122"/>
+                <a:cs typeface="Calibri" pitchFamily="34" charset="-120"/>
+              </a:rPr>
+              <a:t>ANSWER  </a:t>
+            </a:r>
+            <a:pPr indent="0" marL="0">
+              <a:buNone/>
+            </a:pPr>
+            <a:r>
+              <a:rPr lang="en-US" sz="1500" b="1" dirty="0">
+                <a:solidFill>
+                  <a:srgbClr val="1B2A38"/>
+                </a:solidFill>
+                <a:latin typeface="Calibri" pitchFamily="34" charset="0"/>
+                <a:ea typeface="Calibri" pitchFamily="34" charset="-122"/>
+                <a:cs typeface="Calibri" pitchFamily="34" charset="-120"/>
+              </a:rPr>
+              <a:t>B — Full validation</a:t>
+            </a:r>
+            <a:endParaRPr lang="en-US" sz="1500" dirty="0"/>
+          </a:p>
+        </p:txBody>
+      </p:sp>
+      <p:sp>
+        <p:nvSpPr>
+          <p:cNvPr id="8" name="Text 6"/>
+          <p:cNvSpPr/>
+          <p:nvPr/>
+        </p:nvSpPr>
+        <p:spPr>
+          <a:xfrm>
+            <a:off x="7439376" y="3127248"/>
+            <a:ext cx="3947648" cy="2377440"/>
+          </a:xfrm>
+          <a:prstGeom prst="rect">
+            <a:avLst/>
+          </a:prstGeom>
+          <a:noFill/>
+          <a:ln/>
+        </p:spPr>
+        <p:txBody>
+          <a:bodyPr wrap="square" lIns="0" tIns="0" rIns="0" bIns="0" rtlCol="0" anchor="t"/>
+          <a:lstStyle/>
+          <a:p>
+            <a:pPr algn="l" indent="0" marL="0">
+              <a:lnSpc>
+                <a:spcPct val="108000"/>
+              </a:lnSpc>
+              <a:buNone/>
+            </a:pPr>
+            <a:r>
+              <a:rPr lang="en-US" sz="1250" dirty="0">
+                <a:solidFill>
+                  <a:srgbClr val="33444F"/>
+                </a:solidFill>
+                <a:latin typeface="Calibri" pitchFamily="34" charset="0"/>
+                <a:ea typeface="Calibri" pitchFamily="34" charset="-122"/>
+                <a:cs typeface="Calibri" pitchFamily="34" charset="-120"/>
+              </a:rPr>
+              <a:t>LDTs require full validation; FDA-cleared assays require verification of the manufacturer’s claims.</a:t>
+            </a:r>
+            <a:endParaRPr lang="en-US" sz="1250" dirty="0"/>
+          </a:p>
+        </p:txBody>
+      </p:sp>
+      <p:sp>
+        <p:nvSpPr>
+          <p:cNvPr id="9" name="Text 7"/>
+          <p:cNvSpPr/>
+          <p:nvPr/>
+        </p:nvSpPr>
+        <p:spPr>
+          <a:xfrm>
+            <a:off x="566928" y="6473952"/>
+            <a:ext cx="7772400" cy="274320"/>
+          </a:xfrm>
+          <a:prstGeom prst="rect">
+            <a:avLst/>
+          </a:prstGeom>
+          <a:noFill/>
+          <a:ln/>
+        </p:spPr>
+        <p:txBody>
+          <a:bodyPr wrap="square" lIns="0" tIns="0" rIns="0" bIns="0" rtlCol="0" anchor="ctr"/>
+          <a:lstStyle/>
+          <a:p>
+            <a:pPr algn="l" indent="0" marL="0">
+              <a:buNone/>
+            </a:pPr>
+            <a:r>
+              <a:rPr lang="en-US" sz="850" dirty="0">
+                <a:solidFill>
+                  <a:srgbClr val="9AA8B4"/>
+                </a:solidFill>
+                <a:latin typeface="Calibri" pitchFamily="34" charset="0"/>
+                <a:ea typeface="Calibri" pitchFamily="34" charset="-122"/>
+                <a:cs typeface="Calibri" pitchFamily="34" charset="-120"/>
+              </a:rPr>
+              <a:t>Makassed General Hospital  ·  Department of Laboratory Medicine</a:t>
+            </a:r>
+            <a:endParaRPr lang="en-US" sz="850" dirty="0"/>
+          </a:p>
+        </p:txBody>
+      </p:sp>
+      <p:sp>
+        <p:nvSpPr>
+          <p:cNvPr id="10" name="Text 8"/>
+          <p:cNvSpPr/>
+          <p:nvPr/>
+        </p:nvSpPr>
+        <p:spPr>
+          <a:xfrm>
+            <a:off x="9814255" y="6473952"/>
+            <a:ext cx="1828800" cy="274320"/>
+          </a:xfrm>
+          <a:prstGeom prst="rect">
+            <a:avLst/>
+          </a:prstGeom>
+          <a:noFill/>
+          <a:ln/>
+        </p:spPr>
+        <p:txBody>
+          <a:bodyPr wrap="square" lIns="0" tIns="0" rIns="0" bIns="0" rtlCol="0" anchor="ctr"/>
+          <a:lstStyle/>
+          <a:p>
+            <a:pPr algn="r" indent="0" marL="0">
+              <a:buNone/>
+            </a:pPr>
+            <a:r>
+              <a:rPr lang="en-US" sz="850" dirty="0">
+                <a:solidFill>
+                  <a:srgbClr val="9AA8B4"/>
+                </a:solidFill>
+                <a:latin typeface="Calibri" pitchFamily="34" charset="0"/>
+                <a:ea typeface="Calibri" pitchFamily="34" charset="-122"/>
+                <a:cs typeface="Calibri" pitchFamily="34" charset="-120"/>
+              </a:rPr>
+              <a:t>CP Lecture Series</a:t>
+            </a:r>
+            <a:pPr algn="r" indent="0" marL="0">
+              <a:buNone/>
+            </a:pPr>
+            <a:r>
+              <a:rPr lang="en-US" sz="850" dirty="0">
+                <a:solidFill>
+                  <a:srgbClr val="DCE4EC"/>
+                </a:solidFill>
+                <a:latin typeface="Calibri" pitchFamily="34" charset="0"/>
+                <a:ea typeface="Calibri" pitchFamily="34" charset="-122"/>
+                <a:cs typeface="Calibri" pitchFamily="34" charset="-120"/>
+              </a:rPr>
+              <a:t>   ·   </a:t>
+            </a:r>
+            <a:pPr algn="r" indent="0" marL="0">
+              <a:buNone/>
+            </a:pPr>
+            <a:r>
+              <a:rPr lang="en-US" sz="850" b="1" dirty="0">
+                <a:solidFill>
+                  <a:srgbClr val="00838F"/>
+                </a:solidFill>
+                <a:latin typeface="Calibri" pitchFamily="34" charset="0"/>
+                <a:ea typeface="Calibri" pitchFamily="34" charset="-122"/>
+                <a:cs typeface="Calibri" pitchFamily="34" charset="-120"/>
+              </a:rPr>
+              <a:t>17</a:t>
+            </a:r>
+            <a:endParaRPr lang="en-US" sz="850" dirty="0"/>
+          </a:p>
+        </p:txBody>
+      </p:sp>
+    </p:spTree>
+  </p:cSld>
+  <p:clrMapOvr>
+    <a:masterClrMapping/>
+  </p:clrMapOvr>
+</p:sld>
+</file>
+
 <file path=ppt/slides/slide3.xml><?xml version="1.0" encoding="utf-8"?>
 <p:sld xmlns:a="http://schemas.openxmlformats.org/drawingml/2006/main" xmlns:r="http://schemas.openxmlformats.org/officeDocument/2006/relationships" xmlns:p="http://schemas.openxmlformats.org/presentationml/2006/main">
   <p:cSld name="Slide 3">
@@ -11802,6 +13426,10 @@
             </a:outerShdw>
           </a:effectLst>
         </p:spPr>
+        <p:txBody>
+          <a:bodyPr/>
+          <a:p/>
+        </p:txBody>
       </p:sp>
       <p:sp>
         <p:nvSpPr>
@@ -11829,6 +13457,10 @@
             </a:outerShdw>
           </a:effectLst>
         </p:spPr>
+        <p:txBody>
+          <a:bodyPr/>
+          <a:p/>
+        </p:txBody>
       </p:sp>
       <p:sp>
         <p:nvSpPr>
@@ -11936,6 +13568,10 @@
             </a:outerShdw>
           </a:effectLst>
         </p:spPr>
+        <p:txBody>
+          <a:bodyPr/>
+          <a:p/>
+        </p:txBody>
       </p:sp>
       <p:sp>
         <p:nvSpPr>
@@ -11963,6 +13599,10 @@
             </a:outerShdw>
           </a:effectLst>
         </p:spPr>
+        <p:txBody>
+          <a:bodyPr/>
+          <a:p/>
+        </p:txBody>
       </p:sp>
       <p:sp>
         <p:nvSpPr>
@@ -12070,6 +13710,10 @@
             </a:outerShdw>
           </a:effectLst>
         </p:spPr>
+        <p:txBody>
+          <a:bodyPr/>
+          <a:p/>
+        </p:txBody>
       </p:sp>
       <p:sp>
         <p:nvSpPr>
@@ -12097,6 +13741,10 @@
             </a:outerShdw>
           </a:effectLst>
         </p:spPr>
+        <p:txBody>
+          <a:bodyPr/>
+          <a:p/>
+        </p:txBody>
       </p:sp>
       <p:sp>
         <p:nvSpPr>
@@ -12204,6 +13852,10 @@
             </a:outerShdw>
           </a:effectLst>
         </p:spPr>
+        <p:txBody>
+          <a:bodyPr/>
+          <a:p/>
+        </p:txBody>
       </p:sp>
       <p:sp>
         <p:nvSpPr>
@@ -12231,6 +13883,10 @@
             </a:outerShdw>
           </a:effectLst>
         </p:spPr>
+        <p:txBody>
+          <a:bodyPr/>
+          <a:p/>
+        </p:txBody>
       </p:sp>
       <p:sp>
         <p:nvSpPr>
@@ -12338,6 +13994,10 @@
             </a:outerShdw>
           </a:effectLst>
         </p:spPr>
+        <p:txBody>
+          <a:bodyPr/>
+          <a:p/>
+        </p:txBody>
       </p:sp>
       <p:sp>
         <p:nvSpPr>
@@ -12365,6 +14025,10 @@
             </a:outerShdw>
           </a:effectLst>
         </p:spPr>
+        <p:txBody>
+          <a:bodyPr/>
+          <a:p/>
+        </p:txBody>
       </p:sp>
       <p:sp>
         <p:nvSpPr>
@@ -12472,6 +14136,10 @@
             </a:outerShdw>
           </a:effectLst>
         </p:spPr>
+        <p:txBody>
+          <a:bodyPr/>
+          <a:p/>
+        </p:txBody>
       </p:sp>
       <p:sp>
         <p:nvSpPr>
@@ -12499,6 +14167,10 @@
             </a:outerShdw>
           </a:effectLst>
         </p:spPr>
+        <p:txBody>
+          <a:bodyPr/>
+          <a:p/>
+        </p:txBody>
       </p:sp>
       <p:sp>
         <p:nvSpPr>
@@ -12822,6 +14494,10 @@
             </a:outerShdw>
           </a:effectLst>
         </p:spPr>
+        <p:txBody>
+          <a:bodyPr/>
+          <a:p/>
+        </p:txBody>
       </p:sp>
       <p:sp>
         <p:nvSpPr>
@@ -12849,6 +14525,10 @@
             </a:outerShdw>
           </a:effectLst>
         </p:spPr>
+        <p:txBody>
+          <a:bodyPr/>
+          <a:p/>
+        </p:txBody>
       </p:sp>
       <p:sp>
         <p:nvSpPr>
@@ -12963,6 +14643,10 @@
           </a:solidFill>
           <a:ln/>
         </p:spPr>
+        <p:txBody>
+          <a:bodyPr/>
+          <a:p/>
+        </p:txBody>
       </p:sp>
       <p:sp>
         <p:nvSpPr>
@@ -12990,6 +14674,10 @@
             </a:outerShdw>
           </a:effectLst>
         </p:spPr>
+        <p:txBody>
+          <a:bodyPr/>
+          <a:p/>
+        </p:txBody>
       </p:sp>
       <p:sp>
         <p:nvSpPr>
@@ -13111,6 +14799,10 @@
             </a:outerShdw>
           </a:effectLst>
         </p:spPr>
+        <p:txBody>
+          <a:bodyPr/>
+          <a:p/>
+        </p:txBody>
       </p:sp>
       <p:sp>
         <p:nvSpPr>
@@ -13138,6 +14830,10 @@
             </a:outerShdw>
           </a:effectLst>
         </p:spPr>
+        <p:txBody>
+          <a:bodyPr/>
+          <a:p/>
+        </p:txBody>
       </p:sp>
       <p:sp>
         <p:nvSpPr>
@@ -13252,6 +14948,10 @@
           </a:solidFill>
           <a:ln/>
         </p:spPr>
+        <p:txBody>
+          <a:bodyPr/>
+          <a:p/>
+        </p:txBody>
       </p:sp>
       <p:sp>
         <p:nvSpPr>
@@ -13279,6 +14979,10 @@
             </a:outerShdw>
           </a:effectLst>
         </p:spPr>
+        <p:txBody>
+          <a:bodyPr/>
+          <a:p/>
+        </p:txBody>
       </p:sp>
       <p:sp>
         <p:nvSpPr>
@@ -13400,6 +15104,10 @@
             </a:outerShdw>
           </a:effectLst>
         </p:spPr>
+        <p:txBody>
+          <a:bodyPr/>
+          <a:p/>
+        </p:txBody>
       </p:sp>
       <p:sp>
         <p:nvSpPr>
@@ -13427,6 +15135,10 @@
             </a:outerShdw>
           </a:effectLst>
         </p:spPr>
+        <p:txBody>
+          <a:bodyPr/>
+          <a:p/>
+        </p:txBody>
       </p:sp>
       <p:sp>
         <p:nvSpPr>
@@ -13665,6 +15377,10 @@
           </a:solidFill>
           <a:ln/>
         </p:spPr>
+        <p:txBody>
+          <a:bodyPr/>
+          <a:p/>
+        </p:txBody>
       </p:sp>
       <p:sp>
         <p:nvSpPr>
@@ -13687,6 +15403,10 @@
           </a:solidFill>
           <a:ln/>
         </p:spPr>
+        <p:txBody>
+          <a:bodyPr/>
+          <a:p/>
+        </p:txBody>
       </p:sp>
       <p:sp>
         <p:nvSpPr>
@@ -13948,6 +15668,10 @@
             </a:outerShdw>
           </a:effectLst>
         </p:spPr>
+        <p:txBody>
+          <a:bodyPr/>
+          <a:p/>
+        </p:txBody>
       </p:sp>
       <p:pic>
         <p:nvPicPr>
@@ -14256,6 +15980,10 @@
             </a:outerShdw>
           </a:effectLst>
         </p:spPr>
+        <p:txBody>
+          <a:bodyPr/>
+          <a:p/>
+        </p:txBody>
       </p:sp>
       <p:sp>
         <p:nvSpPr>
@@ -14430,6 +16158,10 @@
             </a:outerShdw>
           </a:effectLst>
         </p:spPr>
+        <p:txBody>
+          <a:bodyPr/>
+          <a:p/>
+        </p:txBody>
       </p:sp>
       <p:sp>
         <p:nvSpPr>
@@ -14825,6 +16557,10 @@
             </a:outerShdw>
           </a:effectLst>
         </p:spPr>
+        <p:txBody>
+          <a:bodyPr/>
+          <a:p/>
+        </p:txBody>
       </p:sp>
       <p:pic>
         <p:nvPicPr>
@@ -15048,6 +16784,10 @@
           </a:solidFill>
           <a:ln/>
         </p:spPr>
+        <p:txBody>
+          <a:bodyPr/>
+          <a:p/>
+        </p:txBody>
       </p:sp>
       <p:sp>
         <p:nvSpPr>
@@ -15070,6 +16810,10 @@
           </a:solidFill>
           <a:ln/>
         </p:spPr>
+        <p:txBody>
+          <a:bodyPr/>
+          <a:p/>
+        </p:txBody>
       </p:sp>
       <p:sp>
         <p:nvSpPr>
